--- a/presentación/Arquitectura SOA  y Patrones Observer, Mediator.pptx
+++ b/presentación/Arquitectura SOA  y Patrones Observer, Mediator.pptx
@@ -5,20 +5,21 @@
     <p:sldMasterId id="2147483648" r:id="rId1"/>
   </p:sldMasterIdLst>
   <p:notesMasterIdLst>
-    <p:notesMasterId r:id="rId13"/>
+    <p:notesMasterId r:id="rId14"/>
   </p:notesMasterIdLst>
   <p:sldIdLst>
     <p:sldId id="256" r:id="rId2"/>
     <p:sldId id="257" r:id="rId3"/>
     <p:sldId id="258" r:id="rId4"/>
     <p:sldId id="259" r:id="rId5"/>
-    <p:sldId id="264" r:id="rId6"/>
-    <p:sldId id="261" r:id="rId7"/>
-    <p:sldId id="262" r:id="rId8"/>
-    <p:sldId id="263" r:id="rId9"/>
-    <p:sldId id="266" r:id="rId10"/>
-    <p:sldId id="267" r:id="rId11"/>
-    <p:sldId id="268" r:id="rId12"/>
+    <p:sldId id="274" r:id="rId6"/>
+    <p:sldId id="264" r:id="rId7"/>
+    <p:sldId id="261" r:id="rId8"/>
+    <p:sldId id="262" r:id="rId9"/>
+    <p:sldId id="263" r:id="rId10"/>
+    <p:sldId id="269" r:id="rId11"/>
+    <p:sldId id="273" r:id="rId12"/>
+    <p:sldId id="272" r:id="rId13"/>
   </p:sldIdLst>
   <p:sldSz cx="9144000" cy="5143500" type="screen16x9"/>
   <p:notesSz cx="5143500" cy="9144000"/>
@@ -331,222 +332,6 @@
 </p:notes>
 </file>
 
-<file path=ppt/notesSlides/notesSlide10.xml><?xml version="1.0" encoding="utf-8"?>
-<p:notes xmlns:a="http://schemas.openxmlformats.org/drawingml/2006/main" xmlns:r="http://schemas.openxmlformats.org/officeDocument/2006/relationships" xmlns:p="http://schemas.openxmlformats.org/presentationml/2006/main">
-  <p:cSld>
-    <p:spTree>
-      <p:nvGrpSpPr>
-        <p:cNvPr id="1" name="">
-          <a:extLst>
-            <a:ext uri="{FF2B5EF4-FFF2-40B4-BE49-F238E27FC236}">
-              <a16:creationId xmlns:a16="http://schemas.microsoft.com/office/drawing/2014/main" id="{696AD2A2-D5EA-5213-76AE-DC4555251C88}"/>
-            </a:ext>
-          </a:extLst>
-        </p:cNvPr>
-        <p:cNvGrpSpPr/>
-        <p:nvPr/>
-      </p:nvGrpSpPr>
-      <p:grpSpPr>
-        <a:xfrm>
-          <a:off x="0" y="0"/>
-          <a:ext cx="0" cy="0"/>
-          <a:chOff x="0" y="0"/>
-          <a:chExt cx="0" cy="0"/>
-        </a:xfrm>
-      </p:grpSpPr>
-      <p:sp>
-        <p:nvSpPr>
-          <p:cNvPr id="2" name="Slide Image Placeholder 1">
-            <a:extLst>
-              <a:ext uri="{FF2B5EF4-FFF2-40B4-BE49-F238E27FC236}">
-                <a16:creationId xmlns:a16="http://schemas.microsoft.com/office/drawing/2014/main" id="{CC0CCADC-7A05-BE3A-56E1-2CFF9E922F48}"/>
-              </a:ext>
-            </a:extLst>
-          </p:cNvPr>
-          <p:cNvSpPr>
-            <a:spLocks noGrp="1" noRot="1" noChangeAspect="1"/>
-          </p:cNvSpPr>
-          <p:nvPr>
-            <p:ph type="sldImg"/>
-          </p:nvPr>
-        </p:nvSpPr>
-        <p:spPr/>
-      </p:sp>
-      <p:sp>
-        <p:nvSpPr>
-          <p:cNvPr id="3" name="Notes Placeholder 2">
-            <a:extLst>
-              <a:ext uri="{FF2B5EF4-FFF2-40B4-BE49-F238E27FC236}">
-                <a16:creationId xmlns:a16="http://schemas.microsoft.com/office/drawing/2014/main" id="{C413B1F4-F0D8-B0AB-9DB7-3CD0E31813CA}"/>
-              </a:ext>
-            </a:extLst>
-          </p:cNvPr>
-          <p:cNvSpPr>
-            <a:spLocks noGrp="1"/>
-          </p:cNvSpPr>
-          <p:nvPr>
-            <p:ph type="body" idx="1"/>
-          </p:nvPr>
-        </p:nvSpPr>
-        <p:spPr/>
-        <p:txBody>
-          <a:bodyPr/>
-          <a:lstStyle/>
-          <a:p>
-            <a:endParaRPr lang="en-US" dirty="0"/>
-          </a:p>
-        </p:txBody>
-      </p:sp>
-      <p:sp>
-        <p:nvSpPr>
-          <p:cNvPr id="4" name="Slide Number Placeholder 3">
-            <a:extLst>
-              <a:ext uri="{FF2B5EF4-FFF2-40B4-BE49-F238E27FC236}">
-                <a16:creationId xmlns:a16="http://schemas.microsoft.com/office/drawing/2014/main" id="{DF22CA4E-5301-7D51-FDB8-8D3A023C1825}"/>
-              </a:ext>
-            </a:extLst>
-          </p:cNvPr>
-          <p:cNvSpPr>
-            <a:spLocks noGrp="1"/>
-          </p:cNvSpPr>
-          <p:nvPr>
-            <p:ph type="sldNum" sz="quarter" idx="10"/>
-          </p:nvPr>
-        </p:nvSpPr>
-        <p:spPr/>
-        <p:txBody>
-          <a:bodyPr/>
-          <a:lstStyle/>
-          <a:p>
-            <a:fld id="{F7021451-1387-4CA6-816F-3879F97B5CBC}" type="slidenum">
-              <a:rPr lang="en-US"/>
-              <a:t>10</a:t>
-            </a:fld>
-            <a:endParaRPr lang="en-US"/>
-          </a:p>
-        </p:txBody>
-      </p:sp>
-    </p:spTree>
-    <p:extLst>
-      <p:ext uri="{BB962C8B-B14F-4D97-AF65-F5344CB8AC3E}">
-        <p14:creationId xmlns:p14="http://schemas.microsoft.com/office/powerpoint/2010/main" val="1971090940"/>
-      </p:ext>
-    </p:extLst>
-  </p:cSld>
-  <p:clrMapOvr>
-    <a:masterClrMapping/>
-  </p:clrMapOvr>
-</p:notes>
-</file>
-
-<file path=ppt/notesSlides/notesSlide11.xml><?xml version="1.0" encoding="utf-8"?>
-<p:notes xmlns:a="http://schemas.openxmlformats.org/drawingml/2006/main" xmlns:r="http://schemas.openxmlformats.org/officeDocument/2006/relationships" xmlns:p="http://schemas.openxmlformats.org/presentationml/2006/main">
-  <p:cSld>
-    <p:spTree>
-      <p:nvGrpSpPr>
-        <p:cNvPr id="1" name="">
-          <a:extLst>
-            <a:ext uri="{FF2B5EF4-FFF2-40B4-BE49-F238E27FC236}">
-              <a16:creationId xmlns:a16="http://schemas.microsoft.com/office/drawing/2014/main" id="{84C8E976-A7A3-DC33-43E0-6318C58CCB77}"/>
-            </a:ext>
-          </a:extLst>
-        </p:cNvPr>
-        <p:cNvGrpSpPr/>
-        <p:nvPr/>
-      </p:nvGrpSpPr>
-      <p:grpSpPr>
-        <a:xfrm>
-          <a:off x="0" y="0"/>
-          <a:ext cx="0" cy="0"/>
-          <a:chOff x="0" y="0"/>
-          <a:chExt cx="0" cy="0"/>
-        </a:xfrm>
-      </p:grpSpPr>
-      <p:sp>
-        <p:nvSpPr>
-          <p:cNvPr id="2" name="Slide Image Placeholder 1">
-            <a:extLst>
-              <a:ext uri="{FF2B5EF4-FFF2-40B4-BE49-F238E27FC236}">
-                <a16:creationId xmlns:a16="http://schemas.microsoft.com/office/drawing/2014/main" id="{C62CE593-228B-98BE-CC6C-CED2719FFF28}"/>
-              </a:ext>
-            </a:extLst>
-          </p:cNvPr>
-          <p:cNvSpPr>
-            <a:spLocks noGrp="1" noRot="1" noChangeAspect="1"/>
-          </p:cNvSpPr>
-          <p:nvPr>
-            <p:ph type="sldImg"/>
-          </p:nvPr>
-        </p:nvSpPr>
-        <p:spPr/>
-      </p:sp>
-      <p:sp>
-        <p:nvSpPr>
-          <p:cNvPr id="3" name="Notes Placeholder 2">
-            <a:extLst>
-              <a:ext uri="{FF2B5EF4-FFF2-40B4-BE49-F238E27FC236}">
-                <a16:creationId xmlns:a16="http://schemas.microsoft.com/office/drawing/2014/main" id="{9B0F50E8-917D-B9E1-7902-8F93F2F156B9}"/>
-              </a:ext>
-            </a:extLst>
-          </p:cNvPr>
-          <p:cNvSpPr>
-            <a:spLocks noGrp="1"/>
-          </p:cNvSpPr>
-          <p:nvPr>
-            <p:ph type="body" idx="1"/>
-          </p:nvPr>
-        </p:nvSpPr>
-        <p:spPr/>
-        <p:txBody>
-          <a:bodyPr/>
-          <a:lstStyle/>
-          <a:p>
-            <a:endParaRPr lang="en-US" dirty="0"/>
-          </a:p>
-        </p:txBody>
-      </p:sp>
-      <p:sp>
-        <p:nvSpPr>
-          <p:cNvPr id="4" name="Slide Number Placeholder 3">
-            <a:extLst>
-              <a:ext uri="{FF2B5EF4-FFF2-40B4-BE49-F238E27FC236}">
-                <a16:creationId xmlns:a16="http://schemas.microsoft.com/office/drawing/2014/main" id="{5C818D37-44A4-7320-D6E6-944592E3E650}"/>
-              </a:ext>
-            </a:extLst>
-          </p:cNvPr>
-          <p:cNvSpPr>
-            <a:spLocks noGrp="1"/>
-          </p:cNvSpPr>
-          <p:nvPr>
-            <p:ph type="sldNum" sz="quarter" idx="10"/>
-          </p:nvPr>
-        </p:nvSpPr>
-        <p:spPr/>
-        <p:txBody>
-          <a:bodyPr/>
-          <a:lstStyle/>
-          <a:p>
-            <a:fld id="{F7021451-1387-4CA6-816F-3879F97B5CBC}" type="slidenum">
-              <a:rPr lang="en-US"/>
-              <a:t>11</a:t>
-            </a:fld>
-            <a:endParaRPr lang="en-US"/>
-          </a:p>
-        </p:txBody>
-      </p:sp>
-    </p:spTree>
-    <p:extLst>
-      <p:ext uri="{BB962C8B-B14F-4D97-AF65-F5344CB8AC3E}">
-        <p14:creationId xmlns:p14="http://schemas.microsoft.com/office/powerpoint/2010/main" val="3587663532"/>
-      </p:ext>
-    </p:extLst>
-  </p:cSld>
-  <p:clrMapOvr>
-    <a:masterClrMapping/>
-  </p:clrMapOvr>
-</p:notes>
-</file>
-
 <file path=ppt/notesSlides/notesSlide2.xml><?xml version="1.0" encoding="utf-8"?>
 <p:notes xmlns:a="http://schemas.openxmlformats.org/drawingml/2006/main" xmlns:r="http://schemas.openxmlformats.org/officeDocument/2006/relationships" xmlns:p="http://schemas.openxmlformats.org/presentationml/2006/main">
   <p:cSld>
@@ -888,7 +673,7 @@
           <a:p>
             <a:fld id="{F7021451-1387-4CA6-816F-3879F97B5CBC}" type="slidenum">
               <a:rPr lang="en-US"/>
-              <a:t>5</a:t>
+              <a:t>6</a:t>
             </a:fld>
             <a:endParaRPr lang="en-US"/>
           </a:p>
@@ -972,7 +757,7 @@
           <a:p>
             <a:fld id="{F7021451-1387-4CA6-816F-3879F97B5CBC}" type="slidenum">
               <a:rPr lang="en-US"/>
-              <a:t>6</a:t>
+              <a:t>7</a:t>
             </a:fld>
             <a:endParaRPr lang="en-US"/>
           </a:p>
@@ -1056,7 +841,7 @@
           <a:p>
             <a:fld id="{F7021451-1387-4CA6-816F-3879F97B5CBC}" type="slidenum">
               <a:rPr lang="en-US"/>
-              <a:t>7</a:t>
+              <a:t>8</a:t>
             </a:fld>
             <a:endParaRPr lang="en-US"/>
           </a:p>
@@ -1140,7 +925,7 @@
           <a:p>
             <a:fld id="{F7021451-1387-4CA6-816F-3879F97B5CBC}" type="slidenum">
               <a:rPr lang="en-US"/>
-              <a:t>8</a:t>
+              <a:t>9</a:t>
             </a:fld>
             <a:endParaRPr lang="en-US"/>
           </a:p>
@@ -1150,114 +935,6 @@
     <p:extLst>
       <p:ext uri="{BB962C8B-B14F-4D97-AF65-F5344CB8AC3E}">
         <p14:creationId xmlns:p14="http://schemas.microsoft.com/office/powerpoint/2010/main" val="1024086991"/>
-      </p:ext>
-    </p:extLst>
-  </p:cSld>
-  <p:clrMapOvr>
-    <a:masterClrMapping/>
-  </p:clrMapOvr>
-</p:notes>
-</file>
-
-<file path=ppt/notesSlides/notesSlide9.xml><?xml version="1.0" encoding="utf-8"?>
-<p:notes xmlns:a="http://schemas.openxmlformats.org/drawingml/2006/main" xmlns:r="http://schemas.openxmlformats.org/officeDocument/2006/relationships" xmlns:p="http://schemas.openxmlformats.org/presentationml/2006/main">
-  <p:cSld>
-    <p:spTree>
-      <p:nvGrpSpPr>
-        <p:cNvPr id="1" name="">
-          <a:extLst>
-            <a:ext uri="{FF2B5EF4-FFF2-40B4-BE49-F238E27FC236}">
-              <a16:creationId xmlns:a16="http://schemas.microsoft.com/office/drawing/2014/main" id="{BA080075-447D-901C-3244-0184D75E379B}"/>
-            </a:ext>
-          </a:extLst>
-        </p:cNvPr>
-        <p:cNvGrpSpPr/>
-        <p:nvPr/>
-      </p:nvGrpSpPr>
-      <p:grpSpPr>
-        <a:xfrm>
-          <a:off x="0" y="0"/>
-          <a:ext cx="0" cy="0"/>
-          <a:chOff x="0" y="0"/>
-          <a:chExt cx="0" cy="0"/>
-        </a:xfrm>
-      </p:grpSpPr>
-      <p:sp>
-        <p:nvSpPr>
-          <p:cNvPr id="2" name="Slide Image Placeholder 1">
-            <a:extLst>
-              <a:ext uri="{FF2B5EF4-FFF2-40B4-BE49-F238E27FC236}">
-                <a16:creationId xmlns:a16="http://schemas.microsoft.com/office/drawing/2014/main" id="{0FA2AF39-7543-FABF-C5B2-CA77E7BD4A27}"/>
-              </a:ext>
-            </a:extLst>
-          </p:cNvPr>
-          <p:cNvSpPr>
-            <a:spLocks noGrp="1" noRot="1" noChangeAspect="1"/>
-          </p:cNvSpPr>
-          <p:nvPr>
-            <p:ph type="sldImg"/>
-          </p:nvPr>
-        </p:nvSpPr>
-        <p:spPr/>
-      </p:sp>
-      <p:sp>
-        <p:nvSpPr>
-          <p:cNvPr id="3" name="Notes Placeholder 2">
-            <a:extLst>
-              <a:ext uri="{FF2B5EF4-FFF2-40B4-BE49-F238E27FC236}">
-                <a16:creationId xmlns:a16="http://schemas.microsoft.com/office/drawing/2014/main" id="{5DF4CDED-CAF2-CA79-EE74-FC2224994722}"/>
-              </a:ext>
-            </a:extLst>
-          </p:cNvPr>
-          <p:cNvSpPr>
-            <a:spLocks noGrp="1"/>
-          </p:cNvSpPr>
-          <p:nvPr>
-            <p:ph type="body" idx="1"/>
-          </p:nvPr>
-        </p:nvSpPr>
-        <p:spPr/>
-        <p:txBody>
-          <a:bodyPr/>
-          <a:lstStyle/>
-          <a:p>
-            <a:endParaRPr lang="en-US" dirty="0"/>
-          </a:p>
-        </p:txBody>
-      </p:sp>
-      <p:sp>
-        <p:nvSpPr>
-          <p:cNvPr id="4" name="Slide Number Placeholder 3">
-            <a:extLst>
-              <a:ext uri="{FF2B5EF4-FFF2-40B4-BE49-F238E27FC236}">
-                <a16:creationId xmlns:a16="http://schemas.microsoft.com/office/drawing/2014/main" id="{C3BF1497-A489-EC0A-9F54-0D0AD37C8B31}"/>
-              </a:ext>
-            </a:extLst>
-          </p:cNvPr>
-          <p:cNvSpPr>
-            <a:spLocks noGrp="1"/>
-          </p:cNvSpPr>
-          <p:nvPr>
-            <p:ph type="sldNum" sz="quarter" idx="10"/>
-          </p:nvPr>
-        </p:nvSpPr>
-        <p:spPr/>
-        <p:txBody>
-          <a:bodyPr/>
-          <a:lstStyle/>
-          <a:p>
-            <a:fld id="{F7021451-1387-4CA6-816F-3879F97B5CBC}" type="slidenum">
-              <a:rPr lang="en-US"/>
-              <a:t>9</a:t>
-            </a:fld>
-            <a:endParaRPr lang="en-US"/>
-          </a:p>
-        </p:txBody>
-      </p:sp>
-    </p:spTree>
-    <p:extLst>
-      <p:ext uri="{BB962C8B-B14F-4D97-AF65-F5344CB8AC3E}">
-        <p14:creationId xmlns:p14="http://schemas.microsoft.com/office/powerpoint/2010/main" val="2464857390"/>
       </p:ext>
     </p:extLst>
   </p:cSld>
@@ -1457,7 +1134,7 @@
           </a:prstGeom>
           <a:extLst>
             <a:ext uri="{C572A759-6A51-4108-AA02-DFA0A04FC94B}">
-              <ma14:wrappingTextBoxFlag xmlns="" xmlns:ma14="http://schemas.microsoft.com/office/mac/drawingml/2011/main" val="0"/>
+              <ma14:wrappingTextBoxFlag xmlns:ma14="http://schemas.microsoft.com/office/mac/drawingml/2011/main" xmlns="" val="0"/>
             </a:ext>
           </a:extLst>
         </p:spPr>
@@ -1483,6 +1160,148 @@
         </p:txBody>
       </p:sp>
     </p:spTree>
+  </p:cSld>
+  <p:clrMapOvr>
+    <a:masterClrMapping/>
+  </p:clrMapOvr>
+</p:sldLayout>
+</file>
+
+<file path=ppt/slideLayouts/slideLayout4.xml><?xml version="1.0" encoding="utf-8"?>
+<p:sldLayout xmlns:a="http://schemas.openxmlformats.org/drawingml/2006/main" xmlns:r="http://schemas.openxmlformats.org/officeDocument/2006/relationships" xmlns:p="http://schemas.openxmlformats.org/presentationml/2006/main" type="titleOnly">
+  <p:cSld name="Solo el título">
+    <p:spTree>
+      <p:nvGrpSpPr>
+        <p:cNvPr id="1" name=""/>
+        <p:cNvGrpSpPr/>
+        <p:nvPr/>
+      </p:nvGrpSpPr>
+      <p:grpSpPr>
+        <a:xfrm>
+          <a:off x="0" y="0"/>
+          <a:ext cx="0" cy="0"/>
+          <a:chOff x="0" y="0"/>
+          <a:chExt cx="0" cy="0"/>
+        </a:xfrm>
+      </p:grpSpPr>
+      <p:sp>
+        <p:nvSpPr>
+          <p:cNvPr id="2" name="Título 1">
+            <a:extLst>
+              <a:ext uri="{FF2B5EF4-FFF2-40B4-BE49-F238E27FC236}">
+                <a16:creationId xmlns:a16="http://schemas.microsoft.com/office/drawing/2014/main" id="{F51CCAD3-7DF5-94B1-7CEF-686D535A842F}"/>
+              </a:ext>
+            </a:extLst>
+          </p:cNvPr>
+          <p:cNvSpPr>
+            <a:spLocks noGrp="1"/>
+          </p:cNvSpPr>
+          <p:nvPr>
+            <p:ph type="title"/>
+          </p:nvPr>
+        </p:nvSpPr>
+        <p:spPr/>
+        <p:txBody>
+          <a:bodyPr/>
+          <a:lstStyle/>
+          <a:p>
+            <a:r>
+              <a:rPr lang="es-ES"/>
+              <a:t>Haga clic para modificar el estilo de título del patrón</a:t>
+            </a:r>
+            <a:endParaRPr lang="es-CO"/>
+          </a:p>
+        </p:txBody>
+      </p:sp>
+      <p:sp>
+        <p:nvSpPr>
+          <p:cNvPr id="3" name="Marcador de fecha 2">
+            <a:extLst>
+              <a:ext uri="{FF2B5EF4-FFF2-40B4-BE49-F238E27FC236}">
+                <a16:creationId xmlns:a16="http://schemas.microsoft.com/office/drawing/2014/main" id="{F3827FD4-BFE5-A255-9040-7E4D962F6D3A}"/>
+              </a:ext>
+            </a:extLst>
+          </p:cNvPr>
+          <p:cNvSpPr>
+            <a:spLocks noGrp="1"/>
+          </p:cNvSpPr>
+          <p:nvPr>
+            <p:ph type="dt" sz="half" idx="10"/>
+          </p:nvPr>
+        </p:nvSpPr>
+        <p:spPr/>
+        <p:txBody>
+          <a:bodyPr/>
+          <a:lstStyle/>
+          <a:p>
+            <a:fld id="{228352A7-4D7D-4A5E-A016-C2965DC63AEC}" type="datetimeFigureOut">
+              <a:rPr lang="es-CO" smtClean="0"/>
+              <a:t>15/10/2026</a:t>
+            </a:fld>
+            <a:endParaRPr lang="es-CO"/>
+          </a:p>
+        </p:txBody>
+      </p:sp>
+      <p:sp>
+        <p:nvSpPr>
+          <p:cNvPr id="4" name="Marcador de pie de página 3">
+            <a:extLst>
+              <a:ext uri="{FF2B5EF4-FFF2-40B4-BE49-F238E27FC236}">
+                <a16:creationId xmlns:a16="http://schemas.microsoft.com/office/drawing/2014/main" id="{909CD20F-F8E8-E721-BFDE-59B5F47CC6D7}"/>
+              </a:ext>
+            </a:extLst>
+          </p:cNvPr>
+          <p:cNvSpPr>
+            <a:spLocks noGrp="1"/>
+          </p:cNvSpPr>
+          <p:nvPr>
+            <p:ph type="ftr" sz="quarter" idx="11"/>
+          </p:nvPr>
+        </p:nvSpPr>
+        <p:spPr/>
+        <p:txBody>
+          <a:bodyPr/>
+          <a:lstStyle/>
+          <a:p>
+            <a:endParaRPr lang="es-CO"/>
+          </a:p>
+        </p:txBody>
+      </p:sp>
+      <p:sp>
+        <p:nvSpPr>
+          <p:cNvPr id="5" name="Marcador de número de diapositiva 4">
+            <a:extLst>
+              <a:ext uri="{FF2B5EF4-FFF2-40B4-BE49-F238E27FC236}">
+                <a16:creationId xmlns:a16="http://schemas.microsoft.com/office/drawing/2014/main" id="{A04BAE63-37D6-D1E1-1078-02CD548153FA}"/>
+              </a:ext>
+            </a:extLst>
+          </p:cNvPr>
+          <p:cNvSpPr>
+            <a:spLocks noGrp="1"/>
+          </p:cNvSpPr>
+          <p:nvPr>
+            <p:ph type="sldNum" sz="quarter" idx="12"/>
+          </p:nvPr>
+        </p:nvSpPr>
+        <p:spPr/>
+        <p:txBody>
+          <a:bodyPr/>
+          <a:lstStyle/>
+          <a:p>
+            <a:fld id="{8BC55409-EAD8-4FD9-9741-7849243000BF}" type="slidenum">
+              <a:rPr lang="es-CO" smtClean="0"/>
+              <a:t>‹Nº›</a:t>
+            </a:fld>
+            <a:endParaRPr lang="es-CO"/>
+          </a:p>
+        </p:txBody>
+      </p:sp>
+    </p:spTree>
+    <p:extLst>
+      <p:ext uri="{BB962C8B-B14F-4D97-AF65-F5344CB8AC3E}">
+        <p14:creationId xmlns:p14="http://schemas.microsoft.com/office/powerpoint/2010/main" val="71186273"/>
+      </p:ext>
+    </p:extLst>
   </p:cSld>
   <p:clrMapOvr>
     <a:masterClrMapping/>
@@ -1532,7 +1351,7 @@
           </a:prstGeom>
           <a:extLst>
             <a:ext uri="{C572A759-6A51-4108-AA02-DFA0A04FC94B}">
-              <ma14:wrappingTextBoxFlag xmlns="" xmlns:ma14="http://schemas.microsoft.com/office/mac/drawingml/2011/main" val="0"/>
+              <ma14:wrappingTextBoxFlag xmlns:ma14="http://schemas.microsoft.com/office/mac/drawingml/2011/main" xmlns="" val="0"/>
             </a:ext>
           </a:extLst>
         </p:spPr>
@@ -1564,6 +1383,7 @@
     <p:sldLayoutId id="2147483649" r:id="rId1"/>
     <p:sldLayoutId id="2147483650" r:id="rId2"/>
     <p:sldLayoutId id="2147483651" r:id="rId3"/>
+    <p:sldLayoutId id="2147483652" r:id="rId4"/>
   </p:sldLayoutIdLst>
   <p:hf sldNum="0" hdr="0" ftr="0" dt="0"/>
   <p:txStyles>
@@ -1997,15 +1817,17 @@
 <file path=ppt/slides/slide10.xml><?xml version="1.0" encoding="utf-8"?>
 <p:sld xmlns:a="http://schemas.openxmlformats.org/drawingml/2006/main" xmlns:r="http://schemas.openxmlformats.org/officeDocument/2006/relationships" xmlns:p="http://schemas.openxmlformats.org/presentationml/2006/main">
   <p:cSld>
+    <p:bg>
+      <p:bgPr>
+        <a:solidFill>
+          <a:srgbClr val="0F122D"/>
+        </a:solidFill>
+        <a:effectLst/>
+      </p:bgPr>
+    </p:bg>
     <p:spTree>
       <p:nvGrpSpPr>
-        <p:cNvPr id="1" name="">
-          <a:extLst>
-            <a:ext uri="{FF2B5EF4-FFF2-40B4-BE49-F238E27FC236}">
-              <a16:creationId xmlns:a16="http://schemas.microsoft.com/office/drawing/2014/main" id="{A10C7E05-BE78-B842-E836-510FEEAA7AEF}"/>
-            </a:ext>
-          </a:extLst>
-        </p:cNvPr>
+        <p:cNvPr id="1" name=""/>
         <p:cNvGrpSpPr/>
         <p:nvPr/>
       </p:nvGrpSpPr>
@@ -2019,10 +1841,80 @@
       </p:grpSpPr>
       <p:sp>
         <p:nvSpPr>
-          <p:cNvPr id="2" name="Text 0">
+          <p:cNvPr id="3" name="Elipse 2">
             <a:extLst>
               <a:ext uri="{FF2B5EF4-FFF2-40B4-BE49-F238E27FC236}">
-                <a16:creationId xmlns:a16="http://schemas.microsoft.com/office/drawing/2014/main" id="{0AECEB0B-F9DC-14B5-6015-7D9A3ABD2120}"/>
+                <a16:creationId xmlns:a16="http://schemas.microsoft.com/office/drawing/2014/main" id="{5FA4C54D-F8F7-667D-27BC-8658065CB91A}"/>
+              </a:ext>
+            </a:extLst>
+          </p:cNvPr>
+          <p:cNvSpPr/>
+          <p:nvPr/>
+        </p:nvSpPr>
+        <p:spPr>
+          <a:xfrm>
+            <a:off x="7620000" y="-762000"/>
+            <a:ext cx="2476500" cy="2476500"/>
+          </a:xfrm>
+          <a:prstGeom prst="ellipse">
+            <a:avLst/>
+          </a:prstGeom>
+          <a:solidFill>
+            <a:srgbClr val="6473F5">
+              <a:alpha val="20000"/>
+            </a:srgbClr>
+          </a:solidFill>
+          <a:ln w="19050" cap="flat" cmpd="sng" algn="ctr">
+            <a:noFill/>
+            <a:prstDash val="solid"/>
+            <a:miter lim="800000"/>
+          </a:ln>
+          <a:effectLst/>
+          <a:extLst>
+            <a:ext uri="{91240B29-F687-4F45-9708-019B960494DF}">
+              <a14:hiddenLine xmlns:a14="http://schemas.microsoft.com/office/drawing/2010/main" w="19050" cap="flat" cmpd="sng" algn="ctr">
+                <a:solidFill>
+                  <a:schemeClr val="accent1">
+                    <a:shade val="15000"/>
+                  </a:schemeClr>
+                </a:solidFill>
+                <a:prstDash val="solid"/>
+                <a:miter lim="800000"/>
+              </a14:hiddenLine>
+            </a:ext>
+          </a:extLst>
+        </p:spPr>
+        <p:style>
+          <a:lnRef idx="2">
+            <a:schemeClr val="accent1">
+              <a:shade val="15000"/>
+            </a:schemeClr>
+          </a:lnRef>
+          <a:fillRef idx="1">
+            <a:schemeClr val="accent1"/>
+          </a:fillRef>
+          <a:effectRef idx="0">
+            <a:schemeClr val="accent1"/>
+          </a:effectRef>
+          <a:fontRef idx="minor">
+            <a:schemeClr val="lt1"/>
+          </a:fontRef>
+        </p:style>
+        <p:txBody>
+          <a:bodyPr rtlCol="0" anchor="ctr"/>
+          <a:lstStyle/>
+          <a:p>
+            <a:pPr algn="ctr"/>
+            <a:endParaRPr lang="es-CO" sz="1350"/>
+          </a:p>
+        </p:txBody>
+      </p:sp>
+      <p:sp>
+        <p:nvSpPr>
+          <p:cNvPr id="2" name="Título 1">
+            <a:extLst>
+              <a:ext uri="{FF2B5EF4-FFF2-40B4-BE49-F238E27FC236}">
+                <a16:creationId xmlns:a16="http://schemas.microsoft.com/office/drawing/2014/main" id="{E7116F78-536A-8DEB-2C90-7E0E23F1D148}"/>
               </a:ext>
             </a:extLst>
           </p:cNvPr>
@@ -2030,572 +1922,181 @@
             <a:spLocks noGrp="1"/>
           </p:cNvSpPr>
           <p:nvPr>
-            <p:ph type="title" idx="100" hasCustomPrompt="1"/>
+            <p:ph type="title"/>
           </p:nvPr>
         </p:nvSpPr>
         <p:spPr>
           <a:xfrm>
-            <a:off x="548640" y="274320"/>
-            <a:ext cx="8046720" cy="640080"/>
-          </a:xfrm>
-          <a:prstGeom prst="rect">
-            <a:avLst/>
-          </a:prstGeom>
-          <a:noFill/>
-          <a:ln/>
-        </p:spPr>
-        <p:txBody>
-          <a:bodyPr wrap="square" lIns="0" tIns="0" rIns="0" bIns="0" rtlCol="0" anchor="ctr"/>
-          <a:lstStyle/>
-          <a:p>
-            <a:pPr marL="0" indent="0" algn="l">
-              <a:buNone/>
-            </a:pPr>
-            <a:r>
-              <a:rPr lang="en-US" dirty="0"/>
-              <a:t>7. </a:t>
-            </a:r>
-            <a:r>
-              <a:rPr lang="en-US" dirty="0" err="1"/>
-              <a:t>Conclusión</a:t>
-            </a:r>
-            <a:r>
-              <a:rPr lang="en-US" dirty="0"/>
-              <a:t>: </a:t>
-            </a:r>
-            <a:r>
-              <a:rPr lang="en-US" dirty="0" err="1"/>
-              <a:t>criterios</a:t>
-            </a:r>
-            <a:r>
-              <a:rPr lang="en-US" dirty="0"/>
-              <a:t> de </a:t>
-            </a:r>
-            <a:r>
-              <a:rPr lang="en-US" dirty="0" err="1"/>
-              <a:t>decisión</a:t>
-            </a:r>
-            <a:endParaRPr lang="en-US" sz="3400" dirty="0"/>
-          </a:p>
-        </p:txBody>
-      </p:sp>
-      <p:sp>
-        <p:nvSpPr>
-          <p:cNvPr id="25" name="Slide Number Placeholder 0">
+            <a:off x="476250" y="238125"/>
+            <a:ext cx="7620000" cy="666750"/>
+          </a:xfrm>
+        </p:spPr>
+        <p:txBody>
+          <a:bodyPr anchor="ctr">
+            <a:normAutofit/>
+          </a:bodyPr>
+          <a:lstStyle/>
+          <a:p>
+            <a:pPr algn="l"/>
+            <a:r>
+              <a:rPr lang="es-MX" sz="2700" b="1" dirty="0">
+                <a:solidFill>
+                  <a:srgbClr val="FFFFFF"/>
+                </a:solidFill>
+                <a:latin typeface="Calibri" panose="020F0502020204030204" pitchFamily="34" charset="0"/>
+              </a:rPr>
+              <a:t>6</a:t>
+            </a:r>
+            <a:r>
+              <a:rPr lang="es-CO" sz="2700" b="1" dirty="0">
+                <a:solidFill>
+                  <a:srgbClr val="FFFFFF"/>
+                </a:solidFill>
+                <a:latin typeface="Calibri" panose="020F0502020204030204" pitchFamily="34" charset="0"/>
+              </a:rPr>
+              <a:t>. Demostración </a:t>
+            </a:r>
+            <a:r>
+              <a:rPr lang="es-CO" sz="2700" b="1" dirty="0" err="1">
+                <a:solidFill>
+                  <a:srgbClr val="FFFFFF"/>
+                </a:solidFill>
+                <a:latin typeface="Calibri" panose="020F0502020204030204" pitchFamily="34" charset="0"/>
+              </a:rPr>
+              <a:t>Observer</a:t>
+            </a:r>
+            <a:endParaRPr lang="es-CO" sz="2700" b="1" dirty="0">
+              <a:solidFill>
+                <a:srgbClr val="FFFFFF"/>
+              </a:solidFill>
+              <a:latin typeface="Calibri" panose="020F0502020204030204" pitchFamily="34" charset="0"/>
+            </a:endParaRPr>
+          </a:p>
+        </p:txBody>
+      </p:sp>
+      <p:sp>
+        <p:nvSpPr>
+          <p:cNvPr id="24" name="Rounded Rectangle 2">
             <a:extLst>
               <a:ext uri="{FF2B5EF4-FFF2-40B4-BE49-F238E27FC236}">
-                <a16:creationId xmlns:a16="http://schemas.microsoft.com/office/drawing/2014/main" id="{0370077A-DFE5-09B5-E395-1B38556EC4CA}"/>
+                <a16:creationId xmlns:a16="http://schemas.microsoft.com/office/drawing/2014/main" id="{251F3E1A-00CD-40F5-8C3B-ED106DFDCE14}"/>
               </a:ext>
             </a:extLst>
           </p:cNvPr>
-          <p:cNvSpPr>
-            <a:spLocks noGrp="1"/>
-          </p:cNvSpPr>
-          <p:nvPr>
-            <p:ph type="sldNum" sz="quarter" idx="4294967295"/>
-          </p:nvPr>
-        </p:nvSpPr>
-        <p:spPr>
-          <a:xfrm>
-            <a:off x="8321040" y="4754880"/>
-            <a:ext cx="457200" cy="274320"/>
-          </a:xfrm>
-          <a:prstGeom prst="rect">
-            <a:avLst/>
-          </a:prstGeom>
-          <a:extLst>
-            <a:ext uri="{C572A759-6A51-4108-AA02-DFA0A04FC94B}">
-              <ma14:wrappingTextBoxFlag xmlns:ma14="http://schemas.microsoft.com/office/mac/drawingml/2011/main" xmlns="" val="0"/>
-            </a:ext>
-          </a:extLst>
-        </p:spPr>
-        <p:txBody>
-          <a:bodyPr/>
-          <a:lstStyle>
-            <a:lvl1pPr>
-              <a:defRPr sz="1000">
-                <a:solidFill>
-                  <a:schemeClr val="tx1"/>
-                </a:solidFill>
-              </a:defRPr>
-            </a:lvl1pPr>
-          </a:lstStyle>
-          <a:p>
-            <a:pPr algn="l"/>
-            <a:fld id="{F7021451-1387-4CA6-816F-3879F97B5CBC}" type="slidenum">
-              <a:rPr lang="en-US" b="0"/>
-              <a:t>10</a:t>
-            </a:fld>
-            <a:endParaRPr lang="en-US"/>
-          </a:p>
-        </p:txBody>
-      </p:sp>
-      <p:graphicFrame>
-        <p:nvGraphicFramePr>
-          <p:cNvPr id="24" name="Tabla 23">
+          <p:cNvSpPr/>
+          <p:nvPr/>
+        </p:nvSpPr>
+        <p:spPr>
+          <a:xfrm>
+            <a:off x="389114" y="904875"/>
+            <a:ext cx="6901148" cy="4069080"/>
+          </a:xfrm>
+          <a:prstGeom prst="roundRect">
+            <a:avLst>
+              <a:gd name="adj" fmla="val 4067"/>
+            </a:avLst>
+          </a:prstGeom>
+          <a:solidFill>
+            <a:srgbClr val="1A1B26"/>
+          </a:solidFill>
+          <a:ln>
+            <a:noFill/>
+          </a:ln>
+          <a:effectLst/>
+        </p:spPr>
+        <p:style>
+          <a:lnRef idx="1">
+            <a:schemeClr val="accent1"/>
+          </a:lnRef>
+          <a:fillRef idx="3">
+            <a:schemeClr val="accent1"/>
+          </a:fillRef>
+          <a:effectRef idx="2">
+            <a:schemeClr val="accent1"/>
+          </a:effectRef>
+          <a:fontRef idx="minor">
+            <a:schemeClr val="lt1"/>
+          </a:fontRef>
+        </p:style>
+        <p:txBody>
+          <a:bodyPr rtlCol="0" anchor="ctr"/>
+          <a:lstStyle/>
+          <a:p>
+            <a:pPr algn="ctr"/>
+            <a:endParaRPr dirty="0"/>
+          </a:p>
+        </p:txBody>
+      </p:sp>
+      <p:pic>
+        <p:nvPicPr>
+          <p:cNvPr id="21" name="Imagen 20">
             <a:extLst>
               <a:ext uri="{FF2B5EF4-FFF2-40B4-BE49-F238E27FC236}">
-                <a16:creationId xmlns:a16="http://schemas.microsoft.com/office/drawing/2014/main" id="{47799EC9-0DE0-BC6F-2937-92681DD88066}"/>
+                <a16:creationId xmlns:a16="http://schemas.microsoft.com/office/drawing/2014/main" id="{D0D8BA4A-1C0B-F821-C7A1-AF3C9FED97DB}"/>
               </a:ext>
             </a:extLst>
           </p:cNvPr>
-          <p:cNvGraphicFramePr>
-            <a:graphicFrameLocks noGrp="1"/>
-          </p:cNvGraphicFramePr>
-          <p:nvPr>
-            <p:extLst>
-              <p:ext uri="{D42A27DB-BD31-4B8C-83A1-F6EECF244321}">
-                <p14:modId xmlns:p14="http://schemas.microsoft.com/office/powerpoint/2010/main" val="1201330749"/>
-              </p:ext>
-            </p:extLst>
-          </p:nvPr>
-        </p:nvGraphicFramePr>
-        <p:xfrm>
-          <a:off x="548640" y="1134110"/>
-          <a:ext cx="8046721" cy="2966720"/>
-        </p:xfrm>
-        <a:graphic>
-          <a:graphicData uri="http://schemas.openxmlformats.org/drawingml/2006/table">
-            <a:tbl>
-              <a:tblPr firstRow="1" bandRow="1">
-                <a:tableStyleId>{5C22544A-7EE6-4342-B048-85BDC9FD1C3A}</a:tableStyleId>
-              </a:tblPr>
-              <a:tblGrid>
-                <a:gridCol w="1195251">
-                  <a:extLst>
-                    <a:ext uri="{9D8B030D-6E8A-4147-A177-3AD203B41FA5}">
-                      <a16:colId xmlns:a16="http://schemas.microsoft.com/office/drawing/2014/main" val="2693359899"/>
-                    </a:ext>
-                  </a:extLst>
-                </a:gridCol>
-                <a:gridCol w="2751230">
-                  <a:extLst>
-                    <a:ext uri="{9D8B030D-6E8A-4147-A177-3AD203B41FA5}">
-                      <a16:colId xmlns:a16="http://schemas.microsoft.com/office/drawing/2014/main" val="112609293"/>
-                    </a:ext>
-                  </a:extLst>
-                </a:gridCol>
-                <a:gridCol w="1883548">
-                  <a:extLst>
-                    <a:ext uri="{9D8B030D-6E8A-4147-A177-3AD203B41FA5}">
-                      <a16:colId xmlns:a16="http://schemas.microsoft.com/office/drawing/2014/main" val="2578955092"/>
-                    </a:ext>
-                  </a:extLst>
-                </a:gridCol>
-                <a:gridCol w="2216692">
-                  <a:extLst>
-                    <a:ext uri="{9D8B030D-6E8A-4147-A177-3AD203B41FA5}">
-                      <a16:colId xmlns:a16="http://schemas.microsoft.com/office/drawing/2014/main" val="1099321022"/>
-                    </a:ext>
-                  </a:extLst>
-                </a:gridCol>
-              </a:tblGrid>
-              <a:tr h="370840">
-                <a:tc>
-                  <a:txBody>
-                    <a:bodyPr/>
-                    <a:lstStyle/>
-                    <a:p>
-                      <a:r>
-                        <a:rPr lang="es-CO" dirty="0"/>
-                        <a:t>Criterio</a:t>
-                      </a:r>
-                    </a:p>
-                  </a:txBody>
-                  <a:tcPr/>
-                </a:tc>
-                <a:tc>
-                  <a:txBody>
-                    <a:bodyPr/>
-                    <a:lstStyle/>
-                    <a:p>
-                      <a:r>
-                        <a:rPr lang="es-CO" dirty="0"/>
-                        <a:t>SOA</a:t>
-                      </a:r>
-                    </a:p>
-                  </a:txBody>
-                  <a:tcPr/>
-                </a:tc>
-                <a:tc>
-                  <a:txBody>
-                    <a:bodyPr/>
-                    <a:lstStyle/>
-                    <a:p>
-                      <a:r>
-                        <a:rPr lang="es-CO" dirty="0" err="1"/>
-                        <a:t>Observer</a:t>
-                      </a:r>
-                      <a:endParaRPr lang="es-CO" dirty="0"/>
-                    </a:p>
-                  </a:txBody>
-                  <a:tcPr/>
-                </a:tc>
-                <a:tc>
-                  <a:txBody>
-                    <a:bodyPr/>
-                    <a:lstStyle/>
-                    <a:p>
-                      <a:r>
-                        <a:rPr lang="es-CO" dirty="0"/>
-                        <a:t>Mediator</a:t>
-                      </a:r>
-                    </a:p>
-                  </a:txBody>
-                  <a:tcPr/>
-                </a:tc>
-                <a:extLst>
-                  <a:ext uri="{0D108BD9-81ED-4DB2-BD59-A6C34878D82A}">
-                    <a16:rowId xmlns:a16="http://schemas.microsoft.com/office/drawing/2014/main" val="3152399151"/>
-                  </a:ext>
-                </a:extLst>
-              </a:tr>
-              <a:tr h="370840">
-                <a:tc>
-                  <a:txBody>
-                    <a:bodyPr/>
-                    <a:lstStyle/>
-                    <a:p>
-                      <a:r>
-                        <a:rPr lang="es-CO" sz="1600" dirty="0"/>
-                        <a:t>Nivel</a:t>
-                      </a:r>
-                    </a:p>
-                  </a:txBody>
-                  <a:tcPr/>
-                </a:tc>
-                <a:tc>
-                  <a:txBody>
-                    <a:bodyPr/>
-                    <a:lstStyle/>
-                    <a:p>
-                      <a:r>
-                        <a:rPr lang="es-CO" sz="1600" dirty="0"/>
-                        <a:t>Arquitectura del Sistema</a:t>
-                      </a:r>
-                    </a:p>
-                  </a:txBody>
-                  <a:tcPr/>
-                </a:tc>
-                <a:tc>
-                  <a:txBody>
-                    <a:bodyPr/>
-                    <a:lstStyle/>
-                    <a:p>
-                      <a:r>
-                        <a:rPr lang="es-CO" sz="1600" dirty="0"/>
-                        <a:t>Diseño del código</a:t>
-                      </a:r>
-                    </a:p>
-                  </a:txBody>
-                  <a:tcPr/>
-                </a:tc>
-                <a:tc>
-                  <a:txBody>
-                    <a:bodyPr/>
-                    <a:lstStyle/>
-                    <a:p>
-                      <a:r>
-                        <a:rPr lang="es-CO" sz="1600" dirty="0"/>
-                        <a:t>Diseño del código</a:t>
-                      </a:r>
-                    </a:p>
-                  </a:txBody>
-                  <a:tcPr/>
-                </a:tc>
-                <a:extLst>
-                  <a:ext uri="{0D108BD9-81ED-4DB2-BD59-A6C34878D82A}">
-                    <a16:rowId xmlns:a16="http://schemas.microsoft.com/office/drawing/2014/main" val="2681534231"/>
-                  </a:ext>
-                </a:extLst>
-              </a:tr>
-              <a:tr h="370840">
-                <a:tc>
-                  <a:txBody>
-                    <a:bodyPr/>
-                    <a:lstStyle/>
-                    <a:p>
-                      <a:r>
-                        <a:rPr lang="es-CO" sz="1600" dirty="0"/>
-                        <a:t>Conviene cuando</a:t>
-                      </a:r>
-                    </a:p>
-                  </a:txBody>
-                  <a:tcPr/>
-                </a:tc>
-                <a:tc>
-                  <a:txBody>
-                    <a:bodyPr/>
-                    <a:lstStyle/>
-                    <a:p>
-                      <a:r>
-                        <a:rPr lang="es-CO" sz="1600" dirty="0"/>
-                        <a:t>Varios sistemas o equipos, integración, escalado por servicio</a:t>
-                      </a:r>
-                    </a:p>
-                  </a:txBody>
-                  <a:tcPr/>
-                </a:tc>
-                <a:tc>
-                  <a:txBody>
-                    <a:bodyPr/>
-                    <a:lstStyle/>
-                    <a:p>
-                      <a:r>
-                        <a:rPr lang="es-CO" sz="1600" b="0" i="0" kern="1200" dirty="0">
-                          <a:solidFill>
-                            <a:schemeClr val="dk1"/>
-                          </a:solidFill>
-                          <a:effectLst/>
-                          <a:latin typeface="+mn-lt"/>
-                          <a:ea typeface="+mn-ea"/>
-                          <a:cs typeface="+mn-cs"/>
-                        </a:rPr>
-                        <a:t>Un cambio debe disparar varias reacciones</a:t>
-                      </a:r>
-                      <a:endParaRPr lang="es-CO" sz="1600" dirty="0"/>
-                    </a:p>
-                  </a:txBody>
-                  <a:tcPr/>
-                </a:tc>
-                <a:tc>
-                  <a:txBody>
-                    <a:bodyPr/>
-                    <a:lstStyle/>
-                    <a:p>
-                      <a:r>
-                        <a:rPr lang="es-CO" sz="1600" b="0" i="0" kern="1200" dirty="0">
-                          <a:solidFill>
-                            <a:schemeClr val="dk1"/>
-                          </a:solidFill>
-                          <a:effectLst/>
-                          <a:latin typeface="+mn-lt"/>
-                          <a:ea typeface="+mn-ea"/>
-                          <a:cs typeface="+mn-cs"/>
-                        </a:rPr>
-                        <a:t>Muchos componentes dependen unos de otros</a:t>
-                      </a:r>
-                      <a:endParaRPr lang="es-CO" sz="1600" dirty="0"/>
-                    </a:p>
-                  </a:txBody>
-                  <a:tcPr/>
-                </a:tc>
-                <a:extLst>
-                  <a:ext uri="{0D108BD9-81ED-4DB2-BD59-A6C34878D82A}">
-                    <a16:rowId xmlns:a16="http://schemas.microsoft.com/office/drawing/2014/main" val="1645957312"/>
-                  </a:ext>
-                </a:extLst>
-              </a:tr>
-              <a:tr h="370840">
-                <a:tc>
-                  <a:txBody>
-                    <a:bodyPr/>
-                    <a:lstStyle/>
-                    <a:p>
-                      <a:r>
-                        <a:rPr lang="es-CO" sz="1600" dirty="0"/>
-                        <a:t>Evitar cuando</a:t>
-                      </a:r>
-                    </a:p>
-                  </a:txBody>
-                  <a:tcPr/>
-                </a:tc>
-                <a:tc>
-                  <a:txBody>
-                    <a:bodyPr/>
-                    <a:lstStyle/>
-                    <a:p>
-                      <a:r>
-                        <a:rPr lang="es-CO" sz="1600" b="0" i="0" kern="1200" dirty="0">
-                          <a:solidFill>
-                            <a:schemeClr val="dk1"/>
-                          </a:solidFill>
-                          <a:effectLst/>
-                          <a:latin typeface="+mn-lt"/>
-                          <a:ea typeface="+mn-ea"/>
-                          <a:cs typeface="+mn-cs"/>
-                        </a:rPr>
-                        <a:t>App pequeña o un solo equipo</a:t>
-                      </a:r>
-                      <a:endParaRPr lang="es-CO" sz="1600" dirty="0"/>
-                    </a:p>
-                  </a:txBody>
-                  <a:tcPr/>
-                </a:tc>
-                <a:tc>
-                  <a:txBody>
-                    <a:bodyPr/>
-                    <a:lstStyle/>
-                    <a:p>
-                      <a:r>
-                        <a:rPr lang="es-CO" sz="1600" b="0" i="0" kern="1200" dirty="0">
-                          <a:solidFill>
-                            <a:schemeClr val="dk1"/>
-                          </a:solidFill>
-                          <a:effectLst/>
-                          <a:latin typeface="+mn-lt"/>
-                          <a:ea typeface="+mn-ea"/>
-                          <a:cs typeface="+mn-cs"/>
-                        </a:rPr>
-                        <a:t>Se exige orden estricto de ejecución</a:t>
-                      </a:r>
-                      <a:endParaRPr lang="es-CO" sz="1600" dirty="0"/>
-                    </a:p>
-                  </a:txBody>
-                  <a:tcPr/>
-                </a:tc>
-                <a:tc>
-                  <a:txBody>
-                    <a:bodyPr/>
-                    <a:lstStyle/>
-                    <a:p>
-                      <a:r>
-                        <a:rPr lang="es-CO" sz="1600" b="0" i="0" kern="1200" dirty="0">
-                          <a:solidFill>
-                            <a:schemeClr val="dk1"/>
-                          </a:solidFill>
-                          <a:effectLst/>
-                          <a:latin typeface="+mn-lt"/>
-                          <a:ea typeface="+mn-ea"/>
-                          <a:cs typeface="+mn-cs"/>
-                        </a:rPr>
-                        <a:t>Solo hay dos componentes</a:t>
-                      </a:r>
-                      <a:endParaRPr lang="es-CO" sz="1600" dirty="0"/>
-                    </a:p>
-                  </a:txBody>
-                  <a:tcPr/>
-                </a:tc>
-                <a:extLst>
-                  <a:ext uri="{0D108BD9-81ED-4DB2-BD59-A6C34878D82A}">
-                    <a16:rowId xmlns:a16="http://schemas.microsoft.com/office/drawing/2014/main" val="2328104132"/>
-                  </a:ext>
-                </a:extLst>
-              </a:tr>
-              <a:tr h="370840">
-                <a:tc>
-                  <a:txBody>
-                    <a:bodyPr/>
-                    <a:lstStyle/>
-                    <a:p>
-                      <a:r>
-                        <a:rPr lang="es-CO" sz="1600" b="0" i="0" kern="1200" dirty="0">
-                          <a:solidFill>
-                            <a:schemeClr val="dk1"/>
-                          </a:solidFill>
-                          <a:effectLst/>
-                          <a:latin typeface="+mn-lt"/>
-                          <a:ea typeface="+mn-ea"/>
-                          <a:cs typeface="+mn-cs"/>
-                        </a:rPr>
-                        <a:t>Riesgo principal</a:t>
-                      </a:r>
-                      <a:endParaRPr lang="es-CO" sz="1600" dirty="0"/>
-                    </a:p>
-                  </a:txBody>
-                  <a:tcPr/>
-                </a:tc>
-                <a:tc>
-                  <a:txBody>
-                    <a:bodyPr/>
-                    <a:lstStyle/>
-                    <a:p>
-                      <a:r>
-                        <a:rPr lang="es-CO" sz="1600" b="0" i="0" kern="1200" dirty="0">
-                          <a:solidFill>
-                            <a:schemeClr val="dk1"/>
-                          </a:solidFill>
-                          <a:effectLst/>
-                          <a:latin typeface="+mn-lt"/>
-                          <a:ea typeface="+mn-ea"/>
-                          <a:cs typeface="+mn-cs"/>
-                        </a:rPr>
-                        <a:t>Complejidad y latencia</a:t>
-                      </a:r>
-                      <a:endParaRPr lang="es-CO" sz="1600" dirty="0"/>
-                    </a:p>
-                  </a:txBody>
-                  <a:tcPr/>
-                </a:tc>
-                <a:tc>
-                  <a:txBody>
-                    <a:bodyPr/>
-                    <a:lstStyle/>
-                    <a:p>
-                      <a:r>
-                        <a:rPr lang="es-CO" sz="1600" b="0" i="0" kern="1200" dirty="0">
-                          <a:solidFill>
-                            <a:schemeClr val="dk1"/>
-                          </a:solidFill>
-                          <a:effectLst/>
-                          <a:latin typeface="+mn-lt"/>
-                          <a:ea typeface="+mn-ea"/>
-                          <a:cs typeface="+mn-cs"/>
-                        </a:rPr>
-                        <a:t>Cascadas difíciles de depurar</a:t>
-                      </a:r>
-                      <a:endParaRPr lang="es-CO" sz="1600" dirty="0"/>
-                    </a:p>
-                  </a:txBody>
-                  <a:tcPr/>
-                </a:tc>
-                <a:tc>
-                  <a:txBody>
-                    <a:bodyPr/>
-                    <a:lstStyle/>
-                    <a:p>
-                      <a:r>
-                        <a:rPr lang="es-CO" sz="1600" b="0" i="0" kern="1200" dirty="0">
-                          <a:solidFill>
-                            <a:schemeClr val="dk1"/>
-                          </a:solidFill>
-                          <a:effectLst/>
-                          <a:latin typeface="+mn-lt"/>
-                          <a:ea typeface="+mn-ea"/>
-                          <a:cs typeface="+mn-cs"/>
-                        </a:rPr>
-                        <a:t>Mediador sobrecargado</a:t>
-                      </a:r>
-                      <a:endParaRPr lang="es-CO" sz="1600" dirty="0"/>
-                    </a:p>
-                  </a:txBody>
-                  <a:tcPr/>
-                </a:tc>
-                <a:extLst>
-                  <a:ext uri="{0D108BD9-81ED-4DB2-BD59-A6C34878D82A}">
-                    <a16:rowId xmlns:a16="http://schemas.microsoft.com/office/drawing/2014/main" val="2464746392"/>
-                  </a:ext>
-                </a:extLst>
-              </a:tr>
-            </a:tbl>
-          </a:graphicData>
-        </a:graphic>
-      </p:graphicFrame>
+          <p:cNvPicPr>
+            <a:picLocks noChangeAspect="1"/>
+          </p:cNvPicPr>
+          <p:nvPr/>
+        </p:nvPicPr>
+        <p:blipFill>
+          <a:blip r:embed="rId2"/>
+          <a:srcRect l="7087" t="10007" r="7068" b="9250"/>
+          <a:stretch>
+            <a:fillRect/>
+          </a:stretch>
+        </p:blipFill>
+        <p:spPr>
+          <a:xfrm>
+            <a:off x="554454" y="999456"/>
+            <a:ext cx="6561241" cy="3974499"/>
+          </a:xfrm>
+          <a:prstGeom prst="rect">
+            <a:avLst/>
+          </a:prstGeom>
+        </p:spPr>
+      </p:pic>
     </p:spTree>
     <p:extLst>
       <p:ext uri="{BB962C8B-B14F-4D97-AF65-F5344CB8AC3E}">
-        <p14:creationId xmlns:p14="http://schemas.microsoft.com/office/powerpoint/2010/main" val="2051931542"/>
+        <p14:creationId xmlns:p14="http://schemas.microsoft.com/office/powerpoint/2010/main" val="582202036"/>
       </p:ext>
     </p:extLst>
   </p:cSld>
   <p:clrMapOvr>
     <a:masterClrMapping/>
   </p:clrMapOvr>
+  <mc:AlternateContent xmlns:mc="http://schemas.openxmlformats.org/markup-compatibility/2006">
+    <mc:Choice xmlns:p14="http://schemas.microsoft.com/office/powerpoint/2010/main" Requires="p14">
+      <p:transition spd="slow" p14:dur="2000">
+        <p:fade/>
+      </p:transition>
+    </mc:Choice>
+    <mc:Fallback>
+      <p:transition spd="slow">
+        <p:fade/>
+      </p:transition>
+    </mc:Fallback>
+  </mc:AlternateContent>
 </p:sld>
 </file>
 
 <file path=ppt/slides/slide11.xml><?xml version="1.0" encoding="utf-8"?>
 <p:sld xmlns:a="http://schemas.openxmlformats.org/drawingml/2006/main" xmlns:r="http://schemas.openxmlformats.org/officeDocument/2006/relationships" xmlns:p="http://schemas.openxmlformats.org/presentationml/2006/main">
   <p:cSld>
+    <p:bg>
+      <p:bgPr>
+        <a:solidFill>
+          <a:srgbClr val="0F122D"/>
+        </a:solidFill>
+        <a:effectLst/>
+      </p:bgPr>
+    </p:bg>
     <p:spTree>
       <p:nvGrpSpPr>
-        <p:cNvPr id="1" name="">
-          <a:extLst>
-            <a:ext uri="{FF2B5EF4-FFF2-40B4-BE49-F238E27FC236}">
-              <a16:creationId xmlns:a16="http://schemas.microsoft.com/office/drawing/2014/main" id="{23D0FF86-0624-57C6-5343-BA0D3A3984B6}"/>
-            </a:ext>
-          </a:extLst>
-        </p:cNvPr>
+        <p:cNvPr id="1" name=""/>
         <p:cNvGrpSpPr/>
         <p:nvPr/>
       </p:nvGrpSpPr>
@@ -2609,10 +2110,80 @@
       </p:grpSpPr>
       <p:sp>
         <p:nvSpPr>
-          <p:cNvPr id="2" name="Text 0">
+          <p:cNvPr id="3" name="Elipse 2">
             <a:extLst>
               <a:ext uri="{FF2B5EF4-FFF2-40B4-BE49-F238E27FC236}">
-                <a16:creationId xmlns:a16="http://schemas.microsoft.com/office/drawing/2014/main" id="{29F754E8-F711-BC98-F5FC-E895E92F6134}"/>
+                <a16:creationId xmlns:a16="http://schemas.microsoft.com/office/drawing/2014/main" id="{5FA4C54D-F8F7-667D-27BC-8658065CB91A}"/>
+              </a:ext>
+            </a:extLst>
+          </p:cNvPr>
+          <p:cNvSpPr/>
+          <p:nvPr/>
+        </p:nvSpPr>
+        <p:spPr>
+          <a:xfrm>
+            <a:off x="7620000" y="-762000"/>
+            <a:ext cx="2476500" cy="2476500"/>
+          </a:xfrm>
+          <a:prstGeom prst="ellipse">
+            <a:avLst/>
+          </a:prstGeom>
+          <a:solidFill>
+            <a:srgbClr val="6473F5">
+              <a:alpha val="20000"/>
+            </a:srgbClr>
+          </a:solidFill>
+          <a:ln w="19050" cap="flat" cmpd="sng" algn="ctr">
+            <a:noFill/>
+            <a:prstDash val="solid"/>
+            <a:miter lim="800000"/>
+          </a:ln>
+          <a:effectLst/>
+          <a:extLst>
+            <a:ext uri="{91240B29-F687-4F45-9708-019B960494DF}">
+              <a14:hiddenLine xmlns:a14="http://schemas.microsoft.com/office/drawing/2010/main" w="19050" cap="flat" cmpd="sng" algn="ctr">
+                <a:solidFill>
+                  <a:schemeClr val="accent1">
+                    <a:shade val="15000"/>
+                  </a:schemeClr>
+                </a:solidFill>
+                <a:prstDash val="solid"/>
+                <a:miter lim="800000"/>
+              </a14:hiddenLine>
+            </a:ext>
+          </a:extLst>
+        </p:spPr>
+        <p:style>
+          <a:lnRef idx="2">
+            <a:schemeClr val="accent1">
+              <a:shade val="15000"/>
+            </a:schemeClr>
+          </a:lnRef>
+          <a:fillRef idx="1">
+            <a:schemeClr val="accent1"/>
+          </a:fillRef>
+          <a:effectRef idx="0">
+            <a:schemeClr val="accent1"/>
+          </a:effectRef>
+          <a:fontRef idx="minor">
+            <a:schemeClr val="lt1"/>
+          </a:fontRef>
+        </p:style>
+        <p:txBody>
+          <a:bodyPr rtlCol="0" anchor="ctr"/>
+          <a:lstStyle/>
+          <a:p>
+            <a:pPr algn="ctr"/>
+            <a:endParaRPr lang="es-CO" sz="1350"/>
+          </a:p>
+        </p:txBody>
+      </p:sp>
+      <p:sp>
+        <p:nvSpPr>
+          <p:cNvPr id="2" name="Título 1">
+            <a:extLst>
+              <a:ext uri="{FF2B5EF4-FFF2-40B4-BE49-F238E27FC236}">
+                <a16:creationId xmlns:a16="http://schemas.microsoft.com/office/drawing/2014/main" id="{E7116F78-536A-8DEB-2C90-7E0E23F1D148}"/>
               </a:ext>
             </a:extLst>
           </p:cNvPr>
@@ -2620,45 +2191,251 @@
             <a:spLocks noGrp="1"/>
           </p:cNvSpPr>
           <p:nvPr>
-            <p:ph type="title" idx="100" hasCustomPrompt="1"/>
+            <p:ph type="title"/>
           </p:nvPr>
         </p:nvSpPr>
         <p:spPr>
           <a:xfrm>
-            <a:off x="548640" y="274320"/>
-            <a:ext cx="8046720" cy="640080"/>
-          </a:xfrm>
-          <a:prstGeom prst="rect">
-            <a:avLst/>
-          </a:prstGeom>
-          <a:noFill/>
-          <a:ln/>
-        </p:spPr>
-        <p:txBody>
-          <a:bodyPr wrap="square" lIns="0" tIns="0" rIns="0" bIns="0" rtlCol="0" anchor="ctr"/>
-          <a:lstStyle/>
-          <a:p>
-            <a:pPr marL="0" indent="0" algn="l">
-              <a:buNone/>
-            </a:pPr>
-            <a:r>
-              <a:rPr lang="en-US" dirty="0"/>
-              <a:t>7.1 </a:t>
-            </a:r>
-            <a:r>
-              <a:rPr lang="en-US" dirty="0" err="1"/>
-              <a:t>Conclusión</a:t>
-            </a:r>
-            <a:endParaRPr lang="en-US" sz="3400" dirty="0"/>
-          </a:p>
-        </p:txBody>
-      </p:sp>
-      <p:sp>
-        <p:nvSpPr>
-          <p:cNvPr id="25" name="Slide Number Placeholder 0">
+            <a:off x="476250" y="238125"/>
+            <a:ext cx="7620000" cy="666750"/>
+          </a:xfrm>
+        </p:spPr>
+        <p:txBody>
+          <a:bodyPr anchor="ctr">
+            <a:normAutofit/>
+          </a:bodyPr>
+          <a:lstStyle/>
+          <a:p>
+            <a:pPr algn="l"/>
+            <a:r>
+              <a:rPr lang="es-MX" sz="2700" b="1" dirty="0">
+                <a:solidFill>
+                  <a:srgbClr val="FFFFFF"/>
+                </a:solidFill>
+                <a:latin typeface="Calibri" panose="020F0502020204030204" pitchFamily="34" charset="0"/>
+              </a:rPr>
+              <a:t>6</a:t>
+            </a:r>
+            <a:r>
+              <a:rPr lang="es-CO" sz="2700" b="1" dirty="0">
+                <a:solidFill>
+                  <a:srgbClr val="FFFFFF"/>
+                </a:solidFill>
+                <a:latin typeface="Calibri" panose="020F0502020204030204" pitchFamily="34" charset="0"/>
+              </a:rPr>
+              <a:t>. Demostración Mediator</a:t>
+            </a:r>
+          </a:p>
+        </p:txBody>
+      </p:sp>
+      <p:sp>
+        <p:nvSpPr>
+          <p:cNvPr id="24" name="Rounded Rectangle 2">
             <a:extLst>
               <a:ext uri="{FF2B5EF4-FFF2-40B4-BE49-F238E27FC236}">
-                <a16:creationId xmlns:a16="http://schemas.microsoft.com/office/drawing/2014/main" id="{1D467414-34F1-38CB-3B36-74E762D5ABCE}"/>
+                <a16:creationId xmlns:a16="http://schemas.microsoft.com/office/drawing/2014/main" id="{251F3E1A-00CD-40F5-8C3B-ED106DFDCE14}"/>
+              </a:ext>
+            </a:extLst>
+          </p:cNvPr>
+          <p:cNvSpPr/>
+          <p:nvPr/>
+        </p:nvSpPr>
+        <p:spPr>
+          <a:xfrm>
+            <a:off x="389113" y="904875"/>
+            <a:ext cx="7392811" cy="4069080"/>
+          </a:xfrm>
+          <a:prstGeom prst="roundRect">
+            <a:avLst>
+              <a:gd name="adj" fmla="val 4067"/>
+            </a:avLst>
+          </a:prstGeom>
+          <a:solidFill>
+            <a:srgbClr val="1A1B26"/>
+          </a:solidFill>
+          <a:ln>
+            <a:noFill/>
+          </a:ln>
+          <a:effectLst/>
+        </p:spPr>
+        <p:style>
+          <a:lnRef idx="1">
+            <a:schemeClr val="accent1"/>
+          </a:lnRef>
+          <a:fillRef idx="3">
+            <a:schemeClr val="accent1"/>
+          </a:fillRef>
+          <a:effectRef idx="2">
+            <a:schemeClr val="accent1"/>
+          </a:effectRef>
+          <a:fontRef idx="minor">
+            <a:schemeClr val="lt1"/>
+          </a:fontRef>
+        </p:style>
+        <p:txBody>
+          <a:bodyPr rtlCol="0" anchor="ctr"/>
+          <a:lstStyle/>
+          <a:p>
+            <a:pPr algn="ctr"/>
+            <a:endParaRPr dirty="0"/>
+          </a:p>
+        </p:txBody>
+      </p:sp>
+      <p:pic>
+        <p:nvPicPr>
+          <p:cNvPr id="21" name="Imagen 20">
+            <a:extLst>
+              <a:ext uri="{FF2B5EF4-FFF2-40B4-BE49-F238E27FC236}">
+                <a16:creationId xmlns:a16="http://schemas.microsoft.com/office/drawing/2014/main" id="{D0D8BA4A-1C0B-F821-C7A1-AF3C9FED97DB}"/>
+              </a:ext>
+            </a:extLst>
+          </p:cNvPr>
+          <p:cNvPicPr>
+            <a:picLocks noChangeAspect="1"/>
+          </p:cNvPicPr>
+          <p:nvPr/>
+        </p:nvPicPr>
+        <p:blipFill>
+          <a:blip r:embed="rId2"/>
+          <a:srcRect l="1732" r="2717"/>
+          <a:stretch/>
+        </p:blipFill>
+        <p:spPr>
+          <a:xfrm>
+            <a:off x="634944" y="982980"/>
+            <a:ext cx="6901148" cy="3826895"/>
+          </a:xfrm>
+          <a:prstGeom prst="rect">
+            <a:avLst/>
+          </a:prstGeom>
+        </p:spPr>
+      </p:pic>
+    </p:spTree>
+    <p:extLst>
+      <p:ext uri="{BB962C8B-B14F-4D97-AF65-F5344CB8AC3E}">
+        <p14:creationId xmlns:p14="http://schemas.microsoft.com/office/powerpoint/2010/main" val="73935032"/>
+      </p:ext>
+    </p:extLst>
+  </p:cSld>
+  <p:clrMapOvr>
+    <a:masterClrMapping/>
+  </p:clrMapOvr>
+  <mc:AlternateContent xmlns:mc="http://schemas.openxmlformats.org/markup-compatibility/2006">
+    <mc:Choice xmlns:p14="http://schemas.microsoft.com/office/powerpoint/2010/main" Requires="p14">
+      <p:transition spd="slow" p14:dur="2000">
+        <p:fade/>
+      </p:transition>
+    </mc:Choice>
+    <mc:Fallback>
+      <p:transition spd="slow">
+        <p:fade/>
+      </p:transition>
+    </mc:Fallback>
+  </mc:AlternateContent>
+</p:sld>
+</file>
+
+<file path=ppt/slides/slide12.xml><?xml version="1.0" encoding="utf-8"?>
+<p:sld xmlns:a="http://schemas.openxmlformats.org/drawingml/2006/main" xmlns:r="http://schemas.openxmlformats.org/officeDocument/2006/relationships" xmlns:p="http://schemas.openxmlformats.org/presentationml/2006/main">
+  <p:cSld>
+    <p:bg>
+      <p:bgPr>
+        <a:solidFill>
+          <a:srgbClr val="0F122D"/>
+        </a:solidFill>
+        <a:effectLst/>
+      </p:bgPr>
+    </p:bg>
+    <p:spTree>
+      <p:nvGrpSpPr>
+        <p:cNvPr id="1" name=""/>
+        <p:cNvGrpSpPr/>
+        <p:nvPr/>
+      </p:nvGrpSpPr>
+      <p:grpSpPr>
+        <a:xfrm>
+          <a:off x="0" y="0"/>
+          <a:ext cx="0" cy="0"/>
+          <a:chOff x="0" y="0"/>
+          <a:chExt cx="0" cy="0"/>
+        </a:xfrm>
+      </p:grpSpPr>
+      <p:sp>
+        <p:nvSpPr>
+          <p:cNvPr id="3" name="Elipse 2">
+            <a:extLst>
+              <a:ext uri="{FF2B5EF4-FFF2-40B4-BE49-F238E27FC236}">
+                <a16:creationId xmlns:a16="http://schemas.microsoft.com/office/drawing/2014/main" id="{6C99EE61-333B-7783-D814-D31484674B47}"/>
+              </a:ext>
+            </a:extLst>
+          </p:cNvPr>
+          <p:cNvSpPr/>
+          <p:nvPr/>
+        </p:nvSpPr>
+        <p:spPr>
+          <a:xfrm>
+            <a:off x="7620000" y="-762000"/>
+            <a:ext cx="2476500" cy="2476500"/>
+          </a:xfrm>
+          <a:prstGeom prst="ellipse">
+            <a:avLst/>
+          </a:prstGeom>
+          <a:solidFill>
+            <a:srgbClr val="6473F5">
+              <a:alpha val="20000"/>
+            </a:srgbClr>
+          </a:solidFill>
+          <a:ln w="19050" cap="flat" cmpd="sng" algn="ctr">
+            <a:noFill/>
+            <a:prstDash val="solid"/>
+            <a:miter lim="800000"/>
+          </a:ln>
+          <a:effectLst/>
+          <a:extLst>
+            <a:ext uri="{91240B29-F687-4F45-9708-019B960494DF}">
+              <a14:hiddenLine xmlns:a14="http://schemas.microsoft.com/office/drawing/2010/main" w="19050" cap="flat" cmpd="sng" algn="ctr">
+                <a:solidFill>
+                  <a:schemeClr val="accent1">
+                    <a:shade val="15000"/>
+                  </a:schemeClr>
+                </a:solidFill>
+                <a:prstDash val="solid"/>
+                <a:miter lim="800000"/>
+              </a14:hiddenLine>
+            </a:ext>
+          </a:extLst>
+        </p:spPr>
+        <p:style>
+          <a:lnRef idx="2">
+            <a:schemeClr val="accent1">
+              <a:shade val="15000"/>
+            </a:schemeClr>
+          </a:lnRef>
+          <a:fillRef idx="1">
+            <a:schemeClr val="accent1"/>
+          </a:fillRef>
+          <a:effectRef idx="0">
+            <a:schemeClr val="accent1"/>
+          </a:effectRef>
+          <a:fontRef idx="minor">
+            <a:schemeClr val="lt1"/>
+          </a:fontRef>
+        </p:style>
+        <p:txBody>
+          <a:bodyPr rtlCol="0" anchor="ctr"/>
+          <a:lstStyle/>
+          <a:p>
+            <a:pPr algn="ctr"/>
+            <a:endParaRPr lang="es-CO" sz="1350"/>
+          </a:p>
+        </p:txBody>
+      </p:sp>
+      <p:sp>
+        <p:nvSpPr>
+          <p:cNvPr id="2" name="Título 1">
+            <a:extLst>
+              <a:ext uri="{FF2B5EF4-FFF2-40B4-BE49-F238E27FC236}">
+                <a16:creationId xmlns:a16="http://schemas.microsoft.com/office/drawing/2014/main" id="{061CF72A-16DB-3521-6B3A-546C13096D3E}"/>
               </a:ext>
             </a:extLst>
           </p:cNvPr>
@@ -2666,50 +2443,46 @@
             <a:spLocks noGrp="1"/>
           </p:cNvSpPr>
           <p:nvPr>
-            <p:ph type="sldNum" sz="quarter" idx="4294967295"/>
+            <p:ph type="title"/>
           </p:nvPr>
         </p:nvSpPr>
         <p:spPr>
           <a:xfrm>
-            <a:off x="8321040" y="4754880"/>
-            <a:ext cx="457200" cy="274320"/>
-          </a:xfrm>
-          <a:prstGeom prst="rect">
-            <a:avLst/>
-          </a:prstGeom>
-          <a:extLst>
-            <a:ext uri="{C572A759-6A51-4108-AA02-DFA0A04FC94B}">
-              <ma14:wrappingTextBoxFlag xmlns="" xmlns:ma14="http://schemas.microsoft.com/office/mac/drawingml/2011/main" val="0"/>
-            </a:ext>
-          </a:extLst>
-        </p:spPr>
-        <p:txBody>
-          <a:bodyPr/>
-          <a:lstStyle>
-            <a:lvl1pPr>
-              <a:defRPr sz="1000">
-                <a:solidFill>
-                  <a:schemeClr val="tx1"/>
-                </a:solidFill>
-              </a:defRPr>
-            </a:lvl1pPr>
-          </a:lstStyle>
+            <a:off x="476253" y="238125"/>
+            <a:ext cx="2225383" cy="666750"/>
+          </a:xfrm>
+        </p:spPr>
+        <p:txBody>
+          <a:bodyPr anchor="ctr">
+            <a:normAutofit/>
+          </a:bodyPr>
+          <a:lstStyle/>
           <a:p>
             <a:pPr algn="l"/>
-            <a:fld id="{F7021451-1387-4CA6-816F-3879F97B5CBC}" type="slidenum">
-              <a:rPr lang="en-US" b="0"/>
-              <a:t>11</a:t>
-            </a:fld>
-            <a:endParaRPr lang="en-US"/>
+            <a:r>
+              <a:rPr lang="es-MX" sz="2700" b="1" dirty="0">
+                <a:solidFill>
+                  <a:srgbClr val="FFFFFF"/>
+                </a:solidFill>
+                <a:latin typeface="Calibri" panose="020F0502020204030204" pitchFamily="34" charset="0"/>
+              </a:rPr>
+              <a:t>7. Conclusión</a:t>
+            </a:r>
+            <a:endParaRPr lang="es-CO" sz="2700" b="1" dirty="0">
+              <a:solidFill>
+                <a:srgbClr val="FFFFFF"/>
+              </a:solidFill>
+              <a:latin typeface="Calibri" panose="020F0502020204030204" pitchFamily="34" charset="0"/>
+            </a:endParaRPr>
           </a:p>
         </p:txBody>
       </p:sp>
       <p:graphicFrame>
         <p:nvGraphicFramePr>
-          <p:cNvPr id="24" name="Tabla 23">
+          <p:cNvPr id="4" name="Tabla 3">
             <a:extLst>
               <a:ext uri="{FF2B5EF4-FFF2-40B4-BE49-F238E27FC236}">
-                <a16:creationId xmlns:a16="http://schemas.microsoft.com/office/drawing/2014/main" id="{AD78D5E1-78F2-3259-69A2-4B93809D3F3A}"/>
+                <a16:creationId xmlns:a16="http://schemas.microsoft.com/office/drawing/2014/main" id="{207870B7-4AD4-9A72-12C7-138960EE114F}"/>
               </a:ext>
             </a:extLst>
           </p:cNvPr>
@@ -2719,14 +2492,14 @@
           <p:nvPr>
             <p:extLst>
               <p:ext uri="{D42A27DB-BD31-4B8C-83A1-F6EECF244321}">
-                <p14:modId xmlns:p14="http://schemas.microsoft.com/office/powerpoint/2010/main" val="749578686"/>
+                <p14:modId xmlns:p14="http://schemas.microsoft.com/office/powerpoint/2010/main" val="1237402226"/>
               </p:ext>
             </p:extLst>
           </p:nvPr>
         </p:nvGraphicFramePr>
         <p:xfrm>
-          <a:off x="548640" y="1134110"/>
-          <a:ext cx="7825740" cy="1483360"/>
+          <a:off x="476252" y="1190625"/>
+          <a:ext cx="8069232" cy="2514600"/>
         </p:xfrm>
         <a:graphic>
           <a:graphicData uri="http://schemas.openxmlformats.org/drawingml/2006/table">
@@ -2735,34 +2508,43 @@
                 <a:tableStyleId>{5C22544A-7EE6-4342-B048-85BDC9FD1C3A}</a:tableStyleId>
               </a:tblPr>
               <a:tblGrid>
-                <a:gridCol w="6713220">
+                <a:gridCol w="6523064">
                   <a:extLst>
                     <a:ext uri="{9D8B030D-6E8A-4147-A177-3AD203B41FA5}">
-                      <a16:colId xmlns:a16="http://schemas.microsoft.com/office/drawing/2014/main" val="2693359899"/>
+                      <a16:colId xmlns:a16="http://schemas.microsoft.com/office/drawing/2014/main" val="544620253"/>
                     </a:ext>
                   </a:extLst>
                 </a:gridCol>
-                <a:gridCol w="1112520">
+                <a:gridCol w="1546168">
                   <a:extLst>
                     <a:ext uri="{9D8B030D-6E8A-4147-A177-3AD203B41FA5}">
-                      <a16:colId xmlns:a16="http://schemas.microsoft.com/office/drawing/2014/main" val="112609293"/>
+                      <a16:colId xmlns:a16="http://schemas.microsoft.com/office/drawing/2014/main" val="1056622285"/>
                     </a:ext>
                   </a:extLst>
                 </a:gridCol>
               </a:tblGrid>
-              <a:tr h="370840">
+              <a:tr h="628650">
                 <a:tc>
                   <a:txBody>
                     <a:bodyPr/>
                     <a:lstStyle/>
                     <a:p>
                       <a:r>
-                        <a:rPr lang="es-CO" dirty="0"/>
+                        <a:rPr lang="es-CO" sz="1600" b="1" dirty="0">
+                          <a:solidFill>
+                            <a:srgbClr val="FFFFFF"/>
+                          </a:solidFill>
+                          <a:latin typeface="Calibri" panose="020F0502020204030204" pitchFamily="34" charset="0"/>
+                        </a:rPr>
                         <a:t>Si necesitas</a:t>
                       </a:r>
                     </a:p>
                   </a:txBody>
-                  <a:tcPr/>
+                  <a:tcPr marL="68580" marR="68580" marT="34290" marB="34290" anchor="ctr">
+                    <a:solidFill>
+                      <a:srgbClr val="6473F5"/>
+                    </a:solidFill>
+                  </a:tcPr>
                 </a:tc>
                 <a:tc>
                   <a:txBody>
@@ -2770,41 +2552,50 @@
                     <a:lstStyle/>
                     <a:p>
                       <a:r>
-                        <a:rPr lang="es-CO" dirty="0"/>
+                        <a:rPr lang="es-CO" sz="1600" b="1" dirty="0">
+                          <a:solidFill>
+                            <a:srgbClr val="FFFFFF"/>
+                          </a:solidFill>
+                          <a:latin typeface="Calibri" panose="020F0502020204030204" pitchFamily="34" charset="0"/>
+                        </a:rPr>
                         <a:t>Usa</a:t>
                       </a:r>
                     </a:p>
                   </a:txBody>
-                  <a:tcPr/>
+                  <a:tcPr marL="68580" marR="68580" marT="34290" marB="34290" anchor="ctr">
+                    <a:solidFill>
+                      <a:srgbClr val="6473F5"/>
+                    </a:solidFill>
+                  </a:tcPr>
                 </a:tc>
                 <a:extLst>
                   <a:ext uri="{0D108BD9-81ED-4DB2-BD59-A6C34878D82A}">
-                    <a16:rowId xmlns:a16="http://schemas.microsoft.com/office/drawing/2014/main" val="3152399151"/>
+                    <a16:rowId xmlns:a16="http://schemas.microsoft.com/office/drawing/2014/main" val="11585898"/>
                   </a:ext>
                 </a:extLst>
               </a:tr>
-              <a:tr h="370840">
+              <a:tr h="628650">
                 <a:tc>
                   <a:txBody>
                     <a:bodyPr/>
                     <a:lstStyle/>
                     <a:p>
                       <a:r>
-                        <a:rPr lang="es-CO" sz="1800" b="0" i="0" kern="1200" dirty="0">
+                        <a:rPr lang="es-CO" sz="1600" b="1" dirty="0">
                           <a:solidFill>
-                            <a:schemeClr val="dk1"/>
+                            <a:srgbClr val="FFFFFF"/>
                           </a:solidFill>
-                          <a:effectLst/>
-                          <a:latin typeface="+mn-lt"/>
-                          <a:ea typeface="+mn-ea"/>
-                          <a:cs typeface="+mn-cs"/>
+                          <a:latin typeface="Calibri" panose="020F0502020204030204" pitchFamily="34" charset="0"/>
                         </a:rPr>
                         <a:t>Integrar sistemas o equipos independientes que escalan por separado</a:t>
                       </a:r>
-                      <a:endParaRPr lang="es-CO" sz="1600" dirty="0"/>
                     </a:p>
                   </a:txBody>
-                  <a:tcPr/>
+                  <a:tcPr marL="68580" marR="68580" marT="34290" marB="34290" anchor="ctr">
+                    <a:solidFill>
+                      <a:srgbClr val="303878"/>
+                    </a:solidFill>
+                  </a:tcPr>
                 </a:tc>
                 <a:tc>
                   <a:txBody>
@@ -2812,41 +2603,56 @@
                     <a:lstStyle/>
                     <a:p>
                       <a:r>
-                        <a:rPr lang="es-CO" sz="1600" dirty="0"/>
-                        <a:t>Soa</a:t>
+                        <a:rPr lang="es-CO" sz="1600" b="0" dirty="0">
+                          <a:solidFill>
+                            <a:srgbClr val="FFFFFF"/>
+                          </a:solidFill>
+                          <a:latin typeface="Calibri" panose="020F0502020204030204" pitchFamily="34" charset="0"/>
+                        </a:rPr>
+                        <a:t>SOA</a:t>
                       </a:r>
                     </a:p>
                   </a:txBody>
-                  <a:tcPr/>
+                  <a:tcPr marL="68580" marR="68580" marT="34290" marB="34290" anchor="ctr">
+                    <a:solidFill>
+                      <a:srgbClr val="202658"/>
+                    </a:solidFill>
+                  </a:tcPr>
                 </a:tc>
                 <a:extLst>
                   <a:ext uri="{0D108BD9-81ED-4DB2-BD59-A6C34878D82A}">
-                    <a16:rowId xmlns:a16="http://schemas.microsoft.com/office/drawing/2014/main" val="2681534231"/>
+                    <a16:rowId xmlns:a16="http://schemas.microsoft.com/office/drawing/2014/main" val="716793442"/>
                   </a:ext>
                 </a:extLst>
               </a:tr>
-              <a:tr h="370840">
+              <a:tr h="628650">
                 <a:tc>
                   <a:txBody>
                     <a:bodyPr/>
                     <a:lstStyle/>
                     <a:p>
                       <a:r>
-                        <a:rPr lang="es-CO" sz="1800" b="0" i="0" kern="1200" dirty="0">
+                        <a:rPr lang="es-MX" sz="1600" b="1" dirty="0">
                           <a:solidFill>
-                            <a:schemeClr val="dk1"/>
+                            <a:srgbClr val="FFFFFF"/>
                           </a:solidFill>
-                          <a:effectLst/>
-                          <a:latin typeface="+mn-lt"/>
-                          <a:ea typeface="+mn-ea"/>
-                          <a:cs typeface="+mn-cs"/>
+                          <a:latin typeface="Calibri" panose="020F0502020204030204" pitchFamily="34" charset="0"/>
                         </a:rPr>
                         <a:t>Que varios objetos reaccionen a un cambio de estado</a:t>
                       </a:r>
-                      <a:endParaRPr lang="es-CO" sz="1600" dirty="0"/>
+                      <a:endParaRPr lang="es-CO" sz="1600" b="1" dirty="0">
+                        <a:solidFill>
+                          <a:srgbClr val="FFFFFF"/>
+                        </a:solidFill>
+                        <a:latin typeface="Calibri" panose="020F0502020204030204" pitchFamily="34" charset="0"/>
+                      </a:endParaRPr>
                     </a:p>
                   </a:txBody>
-                  <a:tcPr/>
+                  <a:tcPr marL="68580" marR="68580" marT="34290" marB="34290" anchor="ctr">
+                    <a:solidFill>
+                      <a:srgbClr val="303878"/>
+                    </a:solidFill>
+                  </a:tcPr>
                 </a:tc>
                 <a:tc>
                   <a:txBody>
@@ -2854,42 +2660,62 @@
                     <a:lstStyle/>
                     <a:p>
                       <a:r>
-                        <a:rPr lang="es-CO" sz="1600" dirty="0" err="1"/>
+                        <a:rPr lang="es-MX" sz="1600" b="0" dirty="0" err="1">
+                          <a:solidFill>
+                            <a:srgbClr val="FFFFFF"/>
+                          </a:solidFill>
+                          <a:latin typeface="Calibri" panose="020F0502020204030204" pitchFamily="34" charset="0"/>
+                        </a:rPr>
                         <a:t>Observer</a:t>
                       </a:r>
-                      <a:endParaRPr lang="es-CO" sz="1600" dirty="0"/>
+                      <a:endParaRPr lang="es-CO" sz="1600" b="0" dirty="0">
+                        <a:solidFill>
+                          <a:srgbClr val="FFFFFF"/>
+                        </a:solidFill>
+                        <a:latin typeface="Calibri" panose="020F0502020204030204" pitchFamily="34" charset="0"/>
+                      </a:endParaRPr>
                     </a:p>
                   </a:txBody>
-                  <a:tcPr/>
+                  <a:tcPr marL="68580" marR="68580" marT="34290" marB="34290" anchor="ctr">
+                    <a:solidFill>
+                      <a:srgbClr val="1A1F48"/>
+                    </a:solidFill>
+                  </a:tcPr>
                 </a:tc>
                 <a:extLst>
                   <a:ext uri="{0D108BD9-81ED-4DB2-BD59-A6C34878D82A}">
-                    <a16:rowId xmlns:a16="http://schemas.microsoft.com/office/drawing/2014/main" val="1645957312"/>
+                    <a16:rowId xmlns:a16="http://schemas.microsoft.com/office/drawing/2014/main" val="1394721793"/>
                   </a:ext>
                 </a:extLst>
               </a:tr>
-              <a:tr h="370840">
+              <a:tr h="628650">
                 <a:tc>
                   <a:txBody>
                     <a:bodyPr/>
                     <a:lstStyle/>
                     <a:p>
                       <a:r>
-                        <a:rPr lang="es-CO" sz="1800" b="0" i="0" kern="1200" dirty="0">
+                        <a:rPr lang="es-MX" sz="1600" b="1" dirty="0">
                           <a:solidFill>
-                            <a:schemeClr val="dk1"/>
+                            <a:srgbClr val="FFFFFF"/>
                           </a:solidFill>
-                          <a:effectLst/>
-                          <a:latin typeface="+mn-lt"/>
-                          <a:ea typeface="+mn-ea"/>
-                          <a:cs typeface="+mn-cs"/>
+                          <a:latin typeface="Calibri" panose="020F0502020204030204" pitchFamily="34" charset="0"/>
                         </a:rPr>
                         <a:t>Coordinar muchos componentes que hoy se llaman entre sí</a:t>
                       </a:r>
-                      <a:endParaRPr lang="es-CO" sz="1600" dirty="0"/>
+                      <a:endParaRPr lang="es-CO" sz="1600" b="1" dirty="0">
+                        <a:solidFill>
+                          <a:srgbClr val="FFFFFF"/>
+                        </a:solidFill>
+                        <a:latin typeface="Calibri" panose="020F0502020204030204" pitchFamily="34" charset="0"/>
+                      </a:endParaRPr>
                     </a:p>
                   </a:txBody>
-                  <a:tcPr/>
+                  <a:tcPr marL="68580" marR="68580" marT="34290" marB="34290" anchor="ctr">
+                    <a:solidFill>
+                      <a:srgbClr val="303878"/>
+                    </a:solidFill>
+                  </a:tcPr>
                 </a:tc>
                 <a:tc>
                   <a:txBody>
@@ -2897,25 +2723,31 @@
                     <a:lstStyle/>
                     <a:p>
                       <a:r>
-                        <a:rPr lang="es-CO" sz="1600" b="0" i="0" kern="1200" dirty="0">
+                        <a:rPr lang="es-MX" sz="1600" b="0" dirty="0">
                           <a:solidFill>
-                            <a:schemeClr val="dk1"/>
+                            <a:srgbClr val="FFFFFF"/>
                           </a:solidFill>
-                          <a:effectLst/>
-                          <a:latin typeface="+mn-lt"/>
-                          <a:ea typeface="+mn-ea"/>
-                          <a:cs typeface="+mn-cs"/>
+                          <a:latin typeface="Calibri" panose="020F0502020204030204" pitchFamily="34" charset="0"/>
                         </a:rPr>
                         <a:t>Mediator</a:t>
                       </a:r>
-                      <a:endParaRPr lang="es-CO" sz="1600" dirty="0"/>
+                      <a:endParaRPr lang="es-CO" sz="1600" b="0" dirty="0">
+                        <a:solidFill>
+                          <a:srgbClr val="FFFFFF"/>
+                        </a:solidFill>
+                        <a:latin typeface="Calibri" panose="020F0502020204030204" pitchFamily="34" charset="0"/>
+                      </a:endParaRPr>
                     </a:p>
                   </a:txBody>
-                  <a:tcPr/>
+                  <a:tcPr marL="68580" marR="68580" marT="34290" marB="34290" anchor="ctr">
+                    <a:solidFill>
+                      <a:srgbClr val="202658"/>
+                    </a:solidFill>
+                  </a:tcPr>
                 </a:tc>
                 <a:extLst>
                   <a:ext uri="{0D108BD9-81ED-4DB2-BD59-A6C34878D82A}">
-                    <a16:rowId xmlns:a16="http://schemas.microsoft.com/office/drawing/2014/main" val="2328104132"/>
+                    <a16:rowId xmlns:a16="http://schemas.microsoft.com/office/drawing/2014/main" val="4167621331"/>
                   </a:ext>
                 </a:extLst>
               </a:tr>
@@ -2925,70 +2757,261 @@
       </p:graphicFrame>
       <p:sp>
         <p:nvSpPr>
-          <p:cNvPr id="4" name="Text 4">
+          <p:cNvPr id="5" name="Rectángulo: esquinas redondeadas 4">
             <a:extLst>
               <a:ext uri="{FF2B5EF4-FFF2-40B4-BE49-F238E27FC236}">
-                <a16:creationId xmlns:a16="http://schemas.microsoft.com/office/drawing/2014/main" id="{5F80D3CE-653D-9CD9-D860-8D67725B51D6}"/>
+                <a16:creationId xmlns:a16="http://schemas.microsoft.com/office/drawing/2014/main" id="{5F5454D4-CD26-3A8C-F9B5-CA359EC50FC5}"/>
               </a:ext>
             </a:extLst>
           </p:cNvPr>
-          <p:cNvSpPr txBox="1"/>
+          <p:cNvSpPr/>
           <p:nvPr/>
         </p:nvSpPr>
         <p:spPr>
           <a:xfrm>
-            <a:off x="601980" y="2837181"/>
-            <a:ext cx="8176260" cy="332740"/>
-          </a:xfrm>
-          <a:prstGeom prst="rect">
-            <a:avLst/>
-          </a:prstGeom>
-          <a:noFill/>
-          <a:ln/>
-        </p:spPr>
-        <p:txBody>
-          <a:bodyPr wrap="square" lIns="0" tIns="0" rIns="0" bIns="0" rtlCol="0" anchor="t"/>
-          <a:lstStyle/>
-          <a:p>
-            <a:pPr>
-              <a:spcAft>
-                <a:spcPts val="500"/>
-              </a:spcAft>
-            </a:pPr>
-            <a:r>
-              <a:rPr lang="es-CO" sz="1600" b="1" dirty="0">
-                <a:solidFill>
-                  <a:schemeClr val="tx2"/>
-                </a:solidFill>
-              </a:rPr>
-              <a:t>No compiten:</a:t>
-            </a:r>
-            <a:r>
-              <a:rPr lang="es-CO" sz="1600" dirty="0"/>
-              <a:t> se combinan. SOA organiza el sistema; </a:t>
-            </a:r>
-            <a:r>
-              <a:rPr lang="es-CO" sz="1600" dirty="0" err="1"/>
+            <a:off x="476252" y="3924300"/>
+            <a:ext cx="8069232" cy="781050"/>
+          </a:xfrm>
+          <a:prstGeom prst="roundRect">
+            <a:avLst>
+              <a:gd name="adj" fmla="val 15000"/>
+            </a:avLst>
+          </a:prstGeom>
+          <a:solidFill>
+            <a:srgbClr val="202658"/>
+          </a:solidFill>
+          <a:ln w="19050" cap="flat" cmpd="sng" algn="ctr">
+            <a:noFill/>
+            <a:prstDash val="solid"/>
+            <a:miter lim="800000"/>
+          </a:ln>
+          <a:effectLst/>
+          <a:extLst>
+            <a:ext uri="{91240B29-F687-4F45-9708-019B960494DF}">
+              <a14:hiddenLine xmlns:a14="http://schemas.microsoft.com/office/drawing/2010/main" w="19050" cap="flat" cmpd="sng" algn="ctr">
+                <a:solidFill>
+                  <a:schemeClr val="accent1">
+                    <a:shade val="15000"/>
+                  </a:schemeClr>
+                </a:solidFill>
+                <a:prstDash val="solid"/>
+                <a:miter lim="800000"/>
+              </a14:hiddenLine>
+            </a:ext>
+          </a:extLst>
+        </p:spPr>
+        <p:style>
+          <a:lnRef idx="2">
+            <a:schemeClr val="accent1">
+              <a:shade val="15000"/>
+            </a:schemeClr>
+          </a:lnRef>
+          <a:fillRef idx="1">
+            <a:schemeClr val="accent1"/>
+          </a:fillRef>
+          <a:effectRef idx="0">
+            <a:schemeClr val="accent1"/>
+          </a:effectRef>
+          <a:fontRef idx="minor">
+            <a:schemeClr val="lt1"/>
+          </a:fontRef>
+        </p:style>
+        <p:txBody>
+          <a:bodyPr rtlCol="0" anchor="ctr"/>
+          <a:lstStyle/>
+          <a:p>
+            <a:pPr algn="ctr"/>
+            <a:r>
+              <a:rPr lang="es-MX" sz="1600" dirty="0">
+                <a:solidFill>
+                  <a:srgbClr val="FFC000"/>
+                </a:solidFill>
+                <a:latin typeface="Calibri" panose="020F0502020204030204" pitchFamily="34" charset="0"/>
+              </a:rPr>
+              <a:t>No compiten: se combinan. SOA organiza el sistema; </a:t>
+            </a:r>
+            <a:r>
+              <a:rPr lang="es-MX" sz="1600" dirty="0" err="1">
+                <a:solidFill>
+                  <a:srgbClr val="FFC000"/>
+                </a:solidFill>
+                <a:latin typeface="Calibri" panose="020F0502020204030204" pitchFamily="34" charset="0"/>
+              </a:rPr>
               <a:t>Observer</a:t>
             </a:r>
             <a:r>
-              <a:rPr lang="es-CO" sz="1600" dirty="0"/>
+              <a:rPr lang="es-MX" sz="1600" dirty="0">
+                <a:solidFill>
+                  <a:srgbClr val="FFC000"/>
+                </a:solidFill>
+                <a:latin typeface="Calibri" panose="020F0502020204030204" pitchFamily="34" charset="0"/>
+              </a:rPr>
               <a:t> y Mediator organizan su código.</a:t>
             </a:r>
-            <a:endParaRPr lang="en-US" sz="1600" dirty="0"/>
+            <a:endParaRPr lang="es-CO" sz="1600" dirty="0">
+              <a:solidFill>
+                <a:srgbClr val="FFC000"/>
+              </a:solidFill>
+              <a:latin typeface="Calibri" panose="020F0502020204030204" pitchFamily="34" charset="0"/>
+            </a:endParaRPr>
           </a:p>
         </p:txBody>
       </p:sp>
     </p:spTree>
     <p:extLst>
       <p:ext uri="{BB962C8B-B14F-4D97-AF65-F5344CB8AC3E}">
-        <p14:creationId xmlns:p14="http://schemas.microsoft.com/office/powerpoint/2010/main" val="2195922143"/>
+        <p14:creationId xmlns:p14="http://schemas.microsoft.com/office/powerpoint/2010/main" val="1017533656"/>
       </p:ext>
     </p:extLst>
   </p:cSld>
   <p:clrMapOvr>
     <a:masterClrMapping/>
   </p:clrMapOvr>
+  <mc:AlternateContent xmlns:mc="http://schemas.openxmlformats.org/markup-compatibility/2006" xmlns:p14="http://schemas.microsoft.com/office/powerpoint/2010/main">
+    <mc:Choice Requires="p14">
+      <p:transition spd="slow" p14:dur="2000">
+        <p:fade/>
+      </p:transition>
+    </mc:Choice>
+    <mc:Fallback xmlns="">
+      <p:transition spd="slow">
+        <p:fade/>
+      </p:transition>
+    </mc:Fallback>
+  </mc:AlternateContent>
+  <p:timing>
+    <p:tnLst>
+      <p:par>
+        <p:cTn id="1" dur="indefinite" restart="never" nodeType="tmRoot">
+          <p:childTnLst>
+            <p:seq concurrent="1" nextAc="seek">
+              <p:cTn id="2" dur="indefinite" nodeType="mainSeq">
+                <p:childTnLst>
+                  <p:par>
+                    <p:cTn id="3" fill="hold">
+                      <p:stCondLst>
+                        <p:cond delay="indefinite"/>
+                        <p:cond evt="onBegin" delay="0">
+                          <p:tn val="2"/>
+                        </p:cond>
+                      </p:stCondLst>
+                      <p:childTnLst>
+                        <p:par>
+                          <p:cTn id="4" fill="hold">
+                            <p:stCondLst>
+                              <p:cond delay="0"/>
+                            </p:stCondLst>
+                            <p:childTnLst>
+                              <p:par>
+                                <p:cTn id="5" presetID="10" presetClass="entr" presetSubtype="0" fill="hold" nodeType="afterEffect">
+                                  <p:stCondLst>
+                                    <p:cond delay="0"/>
+                                  </p:stCondLst>
+                                  <p:childTnLst>
+                                    <p:set>
+                                      <p:cBhvr>
+                                        <p:cTn id="6" dur="1" fill="hold">
+                                          <p:stCondLst>
+                                            <p:cond delay="0"/>
+                                          </p:stCondLst>
+                                        </p:cTn>
+                                        <p:tgtEl>
+                                          <p:spTgt spid="4"/>
+                                        </p:tgtEl>
+                                        <p:attrNameLst>
+                                          <p:attrName>style.visibility</p:attrName>
+                                        </p:attrNameLst>
+                                      </p:cBhvr>
+                                      <p:to>
+                                        <p:strVal val="visible"/>
+                                      </p:to>
+                                    </p:set>
+                                    <p:animEffect transition="in" filter="fade">
+                                      <p:cBhvr>
+                                        <p:cTn id="7" dur="500"/>
+                                        <p:tgtEl>
+                                          <p:spTgt spid="4"/>
+                                        </p:tgtEl>
+                                      </p:cBhvr>
+                                    </p:animEffect>
+                                  </p:childTnLst>
+                                </p:cTn>
+                              </p:par>
+                            </p:childTnLst>
+                          </p:cTn>
+                        </p:par>
+                        <p:par>
+                          <p:cTn id="8" fill="hold">
+                            <p:stCondLst>
+                              <p:cond delay="500"/>
+                            </p:stCondLst>
+                            <p:childTnLst>
+                              <p:par>
+                                <p:cTn id="9" presetID="10" presetClass="entr" presetSubtype="0" fill="hold" grpId="0" nodeType="afterEffect">
+                                  <p:stCondLst>
+                                    <p:cond delay="0"/>
+                                  </p:stCondLst>
+                                  <p:childTnLst>
+                                    <p:set>
+                                      <p:cBhvr>
+                                        <p:cTn id="10" dur="1" fill="hold">
+                                          <p:stCondLst>
+                                            <p:cond delay="0"/>
+                                          </p:stCondLst>
+                                        </p:cTn>
+                                        <p:tgtEl>
+                                          <p:spTgt spid="5"/>
+                                        </p:tgtEl>
+                                        <p:attrNameLst>
+                                          <p:attrName>style.visibility</p:attrName>
+                                        </p:attrNameLst>
+                                      </p:cBhvr>
+                                      <p:to>
+                                        <p:strVal val="visible"/>
+                                      </p:to>
+                                    </p:set>
+                                    <p:animEffect transition="in" filter="fade">
+                                      <p:cBhvr>
+                                        <p:cTn id="11" dur="500"/>
+                                        <p:tgtEl>
+                                          <p:spTgt spid="5"/>
+                                        </p:tgtEl>
+                                      </p:cBhvr>
+                                    </p:animEffect>
+                                  </p:childTnLst>
+                                </p:cTn>
+                              </p:par>
+                            </p:childTnLst>
+                          </p:cTn>
+                        </p:par>
+                      </p:childTnLst>
+                    </p:cTn>
+                  </p:par>
+                </p:childTnLst>
+              </p:cTn>
+              <p:prevCondLst>
+                <p:cond evt="onPrev" delay="0">
+                  <p:tgtEl>
+                    <p:sldTgt/>
+                  </p:tgtEl>
+                </p:cond>
+              </p:prevCondLst>
+              <p:nextCondLst>
+                <p:cond evt="onNext" delay="0">
+                  <p:tgtEl>
+                    <p:sldTgt/>
+                  </p:tgtEl>
+                </p:cond>
+              </p:nextCondLst>
+            </p:seq>
+          </p:childTnLst>
+        </p:cTn>
+      </p:par>
+    </p:tnLst>
+    <p:bldLst>
+      <p:bldP spid="5" grpId="0" animBg="1"/>
+    </p:bldLst>
+  </p:timing>
 </p:sld>
 </file>
 
@@ -3420,7 +3443,7 @@
           </a:prstGeom>
           <a:extLst>
             <a:ext uri="{C572A759-6A51-4108-AA02-DFA0A04FC94B}">
-              <ma14:wrappingTextBoxFlag xmlns="" xmlns:ma14="http://schemas.microsoft.com/office/mac/drawingml/2011/main" val="0"/>
+              <ma14:wrappingTextBoxFlag xmlns:ma14="http://schemas.microsoft.com/office/mac/drawingml/2011/main" xmlns="" val="0"/>
             </a:ext>
           </a:extLst>
         </p:spPr>
@@ -3896,7 +3919,7 @@
           </a:prstGeom>
           <a:extLst>
             <a:ext uri="{C572A759-6A51-4108-AA02-DFA0A04FC94B}">
-              <ma14:wrappingTextBoxFlag xmlns="" xmlns:ma14="http://schemas.microsoft.com/office/mac/drawingml/2011/main" val="0"/>
+              <ma14:wrappingTextBoxFlag xmlns:ma14="http://schemas.microsoft.com/office/mac/drawingml/2011/main" xmlns="" val="0"/>
             </a:ext>
           </a:extLst>
         </p:spPr>
@@ -4632,7 +4655,7 @@
           </a:prstGeom>
           <a:extLst>
             <a:ext uri="{C572A759-6A51-4108-AA02-DFA0A04FC94B}">
-              <ma14:wrappingTextBoxFlag xmlns="" xmlns:ma14="http://schemas.microsoft.com/office/mac/drawingml/2011/main" val="0"/>
+              <ma14:wrappingTextBoxFlag xmlns:ma14="http://schemas.microsoft.com/office/mac/drawingml/2011/main" xmlns="" val="0"/>
             </a:ext>
           </a:extLst>
         </p:spPr>
@@ -4666,6 +4689,258 @@
 </file>
 
 <file path=ppt/slides/slide5.xml><?xml version="1.0" encoding="utf-8"?>
+<p:sld xmlns:a="http://schemas.openxmlformats.org/drawingml/2006/main" xmlns:r="http://schemas.openxmlformats.org/officeDocument/2006/relationships" xmlns:p="http://schemas.openxmlformats.org/presentationml/2006/main">
+  <p:cSld>
+    <p:bg>
+      <p:bgPr>
+        <a:solidFill>
+          <a:srgbClr val="0F122D"/>
+        </a:solidFill>
+        <a:effectLst/>
+      </p:bgPr>
+    </p:bg>
+    <p:spTree>
+      <p:nvGrpSpPr>
+        <p:cNvPr id="1" name=""/>
+        <p:cNvGrpSpPr/>
+        <p:nvPr/>
+      </p:nvGrpSpPr>
+      <p:grpSpPr>
+        <a:xfrm>
+          <a:off x="0" y="0"/>
+          <a:ext cx="0" cy="0"/>
+          <a:chOff x="0" y="0"/>
+          <a:chExt cx="0" cy="0"/>
+        </a:xfrm>
+      </p:grpSpPr>
+      <p:sp>
+        <p:nvSpPr>
+          <p:cNvPr id="3" name="Elipse 2">
+            <a:extLst>
+              <a:ext uri="{FF2B5EF4-FFF2-40B4-BE49-F238E27FC236}">
+                <a16:creationId xmlns:a16="http://schemas.microsoft.com/office/drawing/2014/main" id="{5FA4C54D-F8F7-667D-27BC-8658065CB91A}"/>
+              </a:ext>
+            </a:extLst>
+          </p:cNvPr>
+          <p:cNvSpPr/>
+          <p:nvPr/>
+        </p:nvSpPr>
+        <p:spPr>
+          <a:xfrm>
+            <a:off x="7620000" y="-762000"/>
+            <a:ext cx="2476500" cy="2476500"/>
+          </a:xfrm>
+          <a:prstGeom prst="ellipse">
+            <a:avLst/>
+          </a:prstGeom>
+          <a:solidFill>
+            <a:srgbClr val="6473F5">
+              <a:alpha val="20000"/>
+            </a:srgbClr>
+          </a:solidFill>
+          <a:ln w="19050" cap="flat" cmpd="sng" algn="ctr">
+            <a:noFill/>
+            <a:prstDash val="solid"/>
+            <a:miter lim="800000"/>
+          </a:ln>
+          <a:effectLst/>
+          <a:extLst>
+            <a:ext uri="{91240B29-F687-4F45-9708-019B960494DF}">
+              <a14:hiddenLine xmlns:a14="http://schemas.microsoft.com/office/drawing/2010/main" w="19050" cap="flat" cmpd="sng" algn="ctr">
+                <a:solidFill>
+                  <a:schemeClr val="accent1">
+                    <a:shade val="15000"/>
+                  </a:schemeClr>
+                </a:solidFill>
+                <a:prstDash val="solid"/>
+                <a:miter lim="800000"/>
+              </a14:hiddenLine>
+            </a:ext>
+          </a:extLst>
+        </p:spPr>
+        <p:style>
+          <a:lnRef idx="2">
+            <a:schemeClr val="accent1">
+              <a:shade val="15000"/>
+            </a:schemeClr>
+          </a:lnRef>
+          <a:fillRef idx="1">
+            <a:schemeClr val="accent1"/>
+          </a:fillRef>
+          <a:effectRef idx="0">
+            <a:schemeClr val="accent1"/>
+          </a:effectRef>
+          <a:fontRef idx="minor">
+            <a:schemeClr val="lt1"/>
+          </a:fontRef>
+        </p:style>
+        <p:txBody>
+          <a:bodyPr rtlCol="0" anchor="ctr"/>
+          <a:lstStyle/>
+          <a:p>
+            <a:pPr algn="ctr"/>
+            <a:endParaRPr lang="es-CO" sz="1350"/>
+          </a:p>
+        </p:txBody>
+      </p:sp>
+      <p:sp>
+        <p:nvSpPr>
+          <p:cNvPr id="2" name="Título 1">
+            <a:extLst>
+              <a:ext uri="{FF2B5EF4-FFF2-40B4-BE49-F238E27FC236}">
+                <a16:creationId xmlns:a16="http://schemas.microsoft.com/office/drawing/2014/main" id="{E7116F78-536A-8DEB-2C90-7E0E23F1D148}"/>
+              </a:ext>
+            </a:extLst>
+          </p:cNvPr>
+          <p:cNvSpPr>
+            <a:spLocks noGrp="1"/>
+          </p:cNvSpPr>
+          <p:nvPr>
+            <p:ph type="title"/>
+          </p:nvPr>
+        </p:nvSpPr>
+        <p:spPr>
+          <a:xfrm>
+            <a:off x="476250" y="238125"/>
+            <a:ext cx="7620000" cy="666750"/>
+          </a:xfrm>
+        </p:spPr>
+        <p:txBody>
+          <a:bodyPr anchor="ctr">
+            <a:normAutofit/>
+          </a:bodyPr>
+          <a:lstStyle/>
+          <a:p>
+            <a:pPr algn="l"/>
+            <a:r>
+              <a:rPr lang="es-MX" sz="2700" b="1" dirty="0">
+                <a:solidFill>
+                  <a:srgbClr val="FFFFFF"/>
+                </a:solidFill>
+                <a:latin typeface="Calibri" panose="020F0502020204030204" pitchFamily="34" charset="0"/>
+              </a:rPr>
+              <a:t>6</a:t>
+            </a:r>
+            <a:r>
+              <a:rPr lang="es-CO" sz="2700" b="1" dirty="0">
+                <a:solidFill>
+                  <a:srgbClr val="FFFFFF"/>
+                </a:solidFill>
+                <a:latin typeface="Calibri" panose="020F0502020204030204" pitchFamily="34" charset="0"/>
+              </a:rPr>
+              <a:t>. Demostración SOA</a:t>
+            </a:r>
+          </a:p>
+        </p:txBody>
+      </p:sp>
+      <p:sp>
+        <p:nvSpPr>
+          <p:cNvPr id="24" name="Rounded Rectangle 2">
+            <a:extLst>
+              <a:ext uri="{FF2B5EF4-FFF2-40B4-BE49-F238E27FC236}">
+                <a16:creationId xmlns:a16="http://schemas.microsoft.com/office/drawing/2014/main" id="{251F3E1A-00CD-40F5-8C3B-ED106DFDCE14}"/>
+              </a:ext>
+            </a:extLst>
+          </p:cNvPr>
+          <p:cNvSpPr/>
+          <p:nvPr/>
+        </p:nvSpPr>
+        <p:spPr>
+          <a:xfrm>
+            <a:off x="389113" y="904875"/>
+            <a:ext cx="8278637" cy="3143250"/>
+          </a:xfrm>
+          <a:prstGeom prst="roundRect">
+            <a:avLst>
+              <a:gd name="adj" fmla="val 4067"/>
+            </a:avLst>
+          </a:prstGeom>
+          <a:solidFill>
+            <a:srgbClr val="1A1B26"/>
+          </a:solidFill>
+          <a:ln>
+            <a:noFill/>
+          </a:ln>
+          <a:effectLst/>
+        </p:spPr>
+        <p:style>
+          <a:lnRef idx="1">
+            <a:schemeClr val="accent1"/>
+          </a:lnRef>
+          <a:fillRef idx="3">
+            <a:schemeClr val="accent1"/>
+          </a:fillRef>
+          <a:effectRef idx="2">
+            <a:schemeClr val="accent1"/>
+          </a:effectRef>
+          <a:fontRef idx="minor">
+            <a:schemeClr val="lt1"/>
+          </a:fontRef>
+        </p:style>
+        <p:txBody>
+          <a:bodyPr rtlCol="0" anchor="ctr"/>
+          <a:lstStyle/>
+          <a:p>
+            <a:pPr algn="ctr"/>
+            <a:endParaRPr dirty="0"/>
+          </a:p>
+        </p:txBody>
+      </p:sp>
+      <p:pic>
+        <p:nvPicPr>
+          <p:cNvPr id="5" name="Imagen 4">
+            <a:extLst>
+              <a:ext uri="{FF2B5EF4-FFF2-40B4-BE49-F238E27FC236}">
+                <a16:creationId xmlns:a16="http://schemas.microsoft.com/office/drawing/2014/main" id="{445EDA06-79F8-310E-8954-BFAD8F5E2927}"/>
+              </a:ext>
+            </a:extLst>
+          </p:cNvPr>
+          <p:cNvPicPr>
+            <a:picLocks noChangeAspect="1"/>
+          </p:cNvPicPr>
+          <p:nvPr/>
+        </p:nvPicPr>
+        <p:blipFill>
+          <a:blip r:embed="rId2"/>
+          <a:srcRect l="6094" t="14697" r="6094" b="16050"/>
+          <a:stretch/>
+        </p:blipFill>
+        <p:spPr>
+          <a:xfrm>
+            <a:off x="476250" y="1095375"/>
+            <a:ext cx="8029575" cy="2571750"/>
+          </a:xfrm>
+          <a:prstGeom prst="rect">
+            <a:avLst/>
+          </a:prstGeom>
+        </p:spPr>
+      </p:pic>
+    </p:spTree>
+    <p:extLst>
+      <p:ext uri="{BB962C8B-B14F-4D97-AF65-F5344CB8AC3E}">
+        <p14:creationId xmlns:p14="http://schemas.microsoft.com/office/powerpoint/2010/main" val="3891155880"/>
+      </p:ext>
+    </p:extLst>
+  </p:cSld>
+  <p:clrMapOvr>
+    <a:masterClrMapping/>
+  </p:clrMapOvr>
+  <mc:AlternateContent xmlns:mc="http://schemas.openxmlformats.org/markup-compatibility/2006">
+    <mc:Choice xmlns:p14="http://schemas.microsoft.com/office/powerpoint/2010/main" Requires="p14">
+      <p:transition spd="slow" p14:dur="2000">
+        <p:fade/>
+      </p:transition>
+    </mc:Choice>
+    <mc:Fallback>
+      <p:transition spd="slow">
+        <p:fade/>
+      </p:transition>
+    </mc:Fallback>
+  </mc:AlternateContent>
+</p:sld>
+</file>
+
+<file path=ppt/slides/slide6.xml><?xml version="1.0" encoding="utf-8"?>
 <p:sld xmlns:a="http://schemas.openxmlformats.org/drawingml/2006/main" xmlns:r="http://schemas.openxmlformats.org/officeDocument/2006/relationships" xmlns:p="http://schemas.openxmlformats.org/presentationml/2006/main">
   <p:cSld>
     <p:spTree>
@@ -4747,7 +5022,7 @@
 </p:sld>
 </file>
 
-<file path=ppt/slides/slide6.xml><?xml version="1.0" encoding="utf-8"?>
+<file path=ppt/slides/slide7.xml><?xml version="1.0" encoding="utf-8"?>
 <p:sld xmlns:a="http://schemas.openxmlformats.org/drawingml/2006/main" xmlns:r="http://schemas.openxmlformats.org/officeDocument/2006/relationships" xmlns:p="http://schemas.openxmlformats.org/presentationml/2006/main">
   <p:cSld name="Slide 6">
     <p:spTree>
@@ -5186,7 +5461,7 @@
           </a:prstGeom>
           <a:extLst>
             <a:ext uri="{C572A759-6A51-4108-AA02-DFA0A04FC94B}">
-              <ma14:wrappingTextBoxFlag xmlns="" xmlns:ma14="http://schemas.microsoft.com/office/mac/drawingml/2011/main" val="0"/>
+              <ma14:wrappingTextBoxFlag xmlns:ma14="http://schemas.microsoft.com/office/mac/drawingml/2011/main" xmlns="" val="0"/>
             </a:ext>
           </a:extLst>
         </p:spPr>
@@ -5205,7 +5480,7 @@
             <a:pPr algn="l"/>
             <a:fld id="{F7021451-1387-4CA6-816F-3879F97B5CBC}" type="slidenum">
               <a:rPr lang="en-US" b="0"/>
-              <a:t>6</a:t>
+              <a:t>7</a:t>
             </a:fld>
             <a:endParaRPr lang="en-US"/>
           </a:p>
@@ -5219,7 +5494,7 @@
 </p:sld>
 </file>
 
-<file path=ppt/slides/slide7.xml><?xml version="1.0" encoding="utf-8"?>
+<file path=ppt/slides/slide8.xml><?xml version="1.0" encoding="utf-8"?>
 <p:sld xmlns:a="http://schemas.openxmlformats.org/drawingml/2006/main" xmlns:r="http://schemas.openxmlformats.org/officeDocument/2006/relationships" xmlns:p="http://schemas.openxmlformats.org/presentationml/2006/main">
   <p:cSld name="Slide 7">
     <p:spTree>
@@ -5740,7 +6015,7 @@
           </a:prstGeom>
           <a:extLst>
             <a:ext uri="{C572A759-6A51-4108-AA02-DFA0A04FC94B}">
-              <ma14:wrappingTextBoxFlag xmlns="" xmlns:ma14="http://schemas.microsoft.com/office/mac/drawingml/2011/main" val="0"/>
+              <ma14:wrappingTextBoxFlag xmlns:ma14="http://schemas.microsoft.com/office/mac/drawingml/2011/main" xmlns="" val="0"/>
             </a:ext>
           </a:extLst>
         </p:spPr>
@@ -5759,7 +6034,7 @@
             <a:pPr algn="l"/>
             <a:fld id="{F7021451-1387-4CA6-816F-3879F97B5CBC}" type="slidenum">
               <a:rPr lang="en-US" b="0"/>
-              <a:t>7</a:t>
+              <a:t>8</a:t>
             </a:fld>
             <a:endParaRPr lang="en-US"/>
           </a:p>
@@ -5773,7 +6048,7 @@
 </p:sld>
 </file>
 
-<file path=ppt/slides/slide8.xml><?xml version="1.0" encoding="utf-8"?>
+<file path=ppt/slides/slide9.xml><?xml version="1.0" encoding="utf-8"?>
 <p:sld xmlns:a="http://schemas.openxmlformats.org/drawingml/2006/main" xmlns:r="http://schemas.openxmlformats.org/officeDocument/2006/relationships" xmlns:p="http://schemas.openxmlformats.org/presentationml/2006/main">
   <p:cSld name="Slide 8">
     <p:spTree>
@@ -6787,138 +7062,7 @@
           </a:prstGeom>
           <a:extLst>
             <a:ext uri="{C572A759-6A51-4108-AA02-DFA0A04FC94B}">
-              <ma14:wrappingTextBoxFlag xmlns="" xmlns:ma14="http://schemas.microsoft.com/office/mac/drawingml/2011/main" val="0"/>
-            </a:ext>
-          </a:extLst>
-        </p:spPr>
-        <p:txBody>
-          <a:bodyPr/>
-          <a:lstStyle>
-            <a:lvl1pPr>
-              <a:defRPr sz="1000">
-                <a:solidFill>
-                  <a:schemeClr val="tx1"/>
-                </a:solidFill>
-              </a:defRPr>
-            </a:lvl1pPr>
-          </a:lstStyle>
-          <a:p>
-            <a:pPr algn="l"/>
-            <a:fld id="{F7021451-1387-4CA6-816F-3879F97B5CBC}" type="slidenum">
-              <a:rPr lang="en-US" b="0"/>
-              <a:t>8</a:t>
-            </a:fld>
-            <a:endParaRPr lang="en-US"/>
-          </a:p>
-        </p:txBody>
-      </p:sp>
-    </p:spTree>
-  </p:cSld>
-  <p:clrMapOvr>
-    <a:masterClrMapping/>
-  </p:clrMapOvr>
-</p:sld>
-</file>
-
-<file path=ppt/slides/slide9.xml><?xml version="1.0" encoding="utf-8"?>
-<p:sld xmlns:a="http://schemas.openxmlformats.org/drawingml/2006/main" xmlns:r="http://schemas.openxmlformats.org/officeDocument/2006/relationships" xmlns:p="http://schemas.openxmlformats.org/presentationml/2006/main">
-  <p:cSld>
-    <p:spTree>
-      <p:nvGrpSpPr>
-        <p:cNvPr id="1" name="">
-          <a:extLst>
-            <a:ext uri="{FF2B5EF4-FFF2-40B4-BE49-F238E27FC236}">
-              <a16:creationId xmlns:a16="http://schemas.microsoft.com/office/drawing/2014/main" id="{F561C7DD-AE16-3396-A768-25871454625D}"/>
-            </a:ext>
-          </a:extLst>
-        </p:cNvPr>
-        <p:cNvGrpSpPr/>
-        <p:nvPr/>
-      </p:nvGrpSpPr>
-      <p:grpSpPr>
-        <a:xfrm>
-          <a:off x="0" y="0"/>
-          <a:ext cx="0" cy="0"/>
-          <a:chOff x="0" y="0"/>
-          <a:chExt cx="0" cy="0"/>
-        </a:xfrm>
-      </p:grpSpPr>
-      <p:sp>
-        <p:nvSpPr>
-          <p:cNvPr id="2" name="Text 0">
-            <a:extLst>
-              <a:ext uri="{FF2B5EF4-FFF2-40B4-BE49-F238E27FC236}">
-                <a16:creationId xmlns:a16="http://schemas.microsoft.com/office/drawing/2014/main" id="{91EBC240-CDC5-6022-2777-9FC32B90C690}"/>
-              </a:ext>
-            </a:extLst>
-          </p:cNvPr>
-          <p:cNvSpPr>
-            <a:spLocks noGrp="1"/>
-          </p:cNvSpPr>
-          <p:nvPr>
-            <p:ph type="title" idx="100" hasCustomPrompt="1"/>
-          </p:nvPr>
-        </p:nvSpPr>
-        <p:spPr>
-          <a:xfrm>
-            <a:off x="548640" y="274320"/>
-            <a:ext cx="8046720" cy="640080"/>
-          </a:xfrm>
-          <a:prstGeom prst="rect">
-            <a:avLst/>
-          </a:prstGeom>
-          <a:noFill/>
-          <a:ln/>
-        </p:spPr>
-        <p:txBody>
-          <a:bodyPr wrap="square" lIns="0" tIns="0" rIns="0" bIns="0" rtlCol="0" anchor="ctr"/>
-          <a:lstStyle/>
-          <a:p>
-            <a:pPr marL="0" indent="0" algn="l">
-              <a:buNone/>
-            </a:pPr>
-            <a:r>
-              <a:rPr lang="en-US" sz="3400" dirty="0"/>
-              <a:t>6. </a:t>
-            </a:r>
-            <a:r>
-              <a:rPr lang="en-US" sz="3400" dirty="0" err="1"/>
-              <a:t>Demostración</a:t>
-            </a:r>
-            <a:r>
-              <a:rPr lang="en-US" sz="3400" dirty="0"/>
-              <a:t> Observer</a:t>
-            </a:r>
-          </a:p>
-        </p:txBody>
-      </p:sp>
-      <p:sp>
-        <p:nvSpPr>
-          <p:cNvPr id="25" name="Slide Number Placeholder 0">
-            <a:extLst>
-              <a:ext uri="{FF2B5EF4-FFF2-40B4-BE49-F238E27FC236}">
-                <a16:creationId xmlns:a16="http://schemas.microsoft.com/office/drawing/2014/main" id="{B9A839D4-8AA5-259D-CBA6-6C4F86AE7ADB}"/>
-              </a:ext>
-            </a:extLst>
-          </p:cNvPr>
-          <p:cNvSpPr>
-            <a:spLocks noGrp="1"/>
-          </p:cNvSpPr>
-          <p:nvPr>
-            <p:ph type="sldNum" sz="quarter" idx="4294967295"/>
-          </p:nvPr>
-        </p:nvSpPr>
-        <p:spPr>
-          <a:xfrm>
-            <a:off x="8321040" y="4754880"/>
-            <a:ext cx="457200" cy="274320"/>
-          </a:xfrm>
-          <a:prstGeom prst="rect">
-            <a:avLst/>
-          </a:prstGeom>
-          <a:extLst>
-            <a:ext uri="{C572A759-6A51-4108-AA02-DFA0A04FC94B}">
-              <ma14:wrappingTextBoxFlag xmlns="" xmlns:ma14="http://schemas.microsoft.com/office/mac/drawingml/2011/main" val="0"/>
+              <ma14:wrappingTextBoxFlag xmlns:ma14="http://schemas.microsoft.com/office/mac/drawingml/2011/main" xmlns="" val="0"/>
             </a:ext>
           </a:extLst>
         </p:spPr>
@@ -6943,96 +7087,7 @@
           </a:p>
         </p:txBody>
       </p:sp>
-      <p:sp>
-        <p:nvSpPr>
-          <p:cNvPr id="4" name="Rounded Rectangle 2">
-            <a:extLst>
-              <a:ext uri="{FF2B5EF4-FFF2-40B4-BE49-F238E27FC236}">
-                <a16:creationId xmlns:a16="http://schemas.microsoft.com/office/drawing/2014/main" id="{9A0D3864-16E3-1F3C-FAA5-52B37E4B911E}"/>
-              </a:ext>
-            </a:extLst>
-          </p:cNvPr>
-          <p:cNvSpPr/>
-          <p:nvPr/>
-        </p:nvSpPr>
-        <p:spPr>
-          <a:xfrm>
-            <a:off x="548640" y="914400"/>
-            <a:ext cx="6374674" cy="4069080"/>
-          </a:xfrm>
-          <a:prstGeom prst="roundRect">
-            <a:avLst>
-              <a:gd name="adj" fmla="val 4067"/>
-            </a:avLst>
-          </a:prstGeom>
-          <a:solidFill>
-            <a:srgbClr val="1A1B26"/>
-          </a:solidFill>
-          <a:ln>
-            <a:noFill/>
-          </a:ln>
-          <a:effectLst/>
-        </p:spPr>
-        <p:style>
-          <a:lnRef idx="1">
-            <a:schemeClr val="accent1"/>
-          </a:lnRef>
-          <a:fillRef idx="3">
-            <a:schemeClr val="accent1"/>
-          </a:fillRef>
-          <a:effectRef idx="2">
-            <a:schemeClr val="accent1"/>
-          </a:effectRef>
-          <a:fontRef idx="minor">
-            <a:schemeClr val="lt1"/>
-          </a:fontRef>
-        </p:style>
-        <p:txBody>
-          <a:bodyPr rtlCol="0" anchor="ctr"/>
-          <a:lstStyle/>
-          <a:p>
-            <a:pPr algn="ctr"/>
-            <a:endParaRPr dirty="0"/>
-          </a:p>
-        </p:txBody>
-      </p:sp>
-      <p:pic>
-        <p:nvPicPr>
-          <p:cNvPr id="7" name="Imagen 6">
-            <a:extLst>
-              <a:ext uri="{FF2B5EF4-FFF2-40B4-BE49-F238E27FC236}">
-                <a16:creationId xmlns:a16="http://schemas.microsoft.com/office/drawing/2014/main" id="{9660477F-36C8-BC06-0385-E8E72D529B3C}"/>
-              </a:ext>
-            </a:extLst>
-          </p:cNvPr>
-          <p:cNvPicPr>
-            <a:picLocks noChangeAspect="1"/>
-          </p:cNvPicPr>
-          <p:nvPr/>
-        </p:nvPicPr>
-        <p:blipFill>
-          <a:blip r:embed="rId3"/>
-          <a:srcRect l="7087" t="10007" r="7068" b="9250"/>
-          <a:stretch>
-            <a:fillRect/>
-          </a:stretch>
-        </p:blipFill>
-        <p:spPr>
-          <a:xfrm>
-            <a:off x="685800" y="1059848"/>
-            <a:ext cx="6080760" cy="3771727"/>
-          </a:xfrm>
-          <a:prstGeom prst="rect">
-            <a:avLst/>
-          </a:prstGeom>
-        </p:spPr>
-      </p:pic>
     </p:spTree>
-    <p:extLst>
-      <p:ext uri="{BB962C8B-B14F-4D97-AF65-F5344CB8AC3E}">
-        <p14:creationId xmlns:p14="http://schemas.microsoft.com/office/powerpoint/2010/main" val="3122564168"/>
-      </p:ext>
-    </p:extLst>
   </p:cSld>
   <p:clrMapOvr>
     <a:masterClrMapping/>

--- a/presentación/Arquitectura SOA  y Patrones Observer, Mediator.pptx
+++ b/presentación/Arquitectura SOA  y Patrones Observer, Mediator.pptx
@@ -227,7 +227,7 @@
           <a:p>
             <a:fld id="{F6AE3B52-FEC4-42BC-B06A-8CABB6F8B49F}" type="datetimeFigureOut">
               <a:rPr lang="es-CO" smtClean="0"/>
-              <a:t>15/10/26</a:t>
+              <a:t>15/10/2026</a:t>
             </a:fld>
             <a:endParaRPr lang="es-CO"/>
           </a:p>
@@ -1340,7 +1340,7 @@
           <a:p>
             <a:fld id="{228352A7-4D7D-4A5E-A016-C2965DC63AEC}" type="datetimeFigureOut">
               <a:rPr lang="es-CO" smtClean="0"/>
-              <a:t>15/10/26</a:t>
+              <a:t>15/10/2026</a:t>
             </a:fld>
             <a:endParaRPr lang="es-CO"/>
           </a:p>
@@ -1540,7 +1540,7 @@
           <a:p>
             <a:fld id="{228352A7-4D7D-4A5E-A016-C2965DC63AEC}" type="datetimeFigureOut">
               <a:rPr lang="es-CO" smtClean="0"/>
-              <a:t>15/10/26</a:t>
+              <a:t>15/10/2026</a:t>
             </a:fld>
             <a:endParaRPr lang="es-CO"/>
           </a:p>
@@ -1750,7 +1750,7 @@
           <a:p>
             <a:fld id="{228352A7-4D7D-4A5E-A016-C2965DC63AEC}" type="datetimeFigureOut">
               <a:rPr lang="es-CO" smtClean="0"/>
-              <a:t>15/10/26</a:t>
+              <a:t>15/10/2026</a:t>
             </a:fld>
             <a:endParaRPr lang="es-CO"/>
           </a:p>
@@ -1988,7 +1988,7 @@
           </a:prstGeom>
           <a:extLst>
             <a:ext uri="{C572A759-6A51-4108-AA02-DFA0A04FC94B}">
-              <ma14:wrappingTextBoxFlag xmlns="" xmlns:ma14="http://schemas.microsoft.com/office/mac/drawingml/2011/main" val="0"/>
+              <ma14:wrappingTextBoxFlag xmlns:ma14="http://schemas.microsoft.com/office/mac/drawingml/2011/main" xmlns="" val="0"/>
             </a:ext>
           </a:extLst>
         </p:spPr>
@@ -2153,7 +2153,7 @@
           <a:p>
             <a:fld id="{228352A7-4D7D-4A5E-A016-C2965DC63AEC}" type="datetimeFigureOut">
               <a:rPr lang="es-CO" smtClean="0"/>
-              <a:t>15/10/26</a:t>
+              <a:t>15/10/2026</a:t>
             </a:fld>
             <a:endParaRPr lang="es-CO"/>
           </a:p>
@@ -2429,7 +2429,7 @@
           <a:p>
             <a:fld id="{228352A7-4D7D-4A5E-A016-C2965DC63AEC}" type="datetimeFigureOut">
               <a:rPr lang="es-CO" smtClean="0"/>
-              <a:t>15/10/26</a:t>
+              <a:t>15/10/2026</a:t>
             </a:fld>
             <a:endParaRPr lang="es-CO"/>
           </a:p>
@@ -2697,7 +2697,7 @@
           <a:p>
             <a:fld id="{228352A7-4D7D-4A5E-A016-C2965DC63AEC}" type="datetimeFigureOut">
               <a:rPr lang="es-CO" smtClean="0"/>
-              <a:t>15/10/26</a:t>
+              <a:t>15/10/2026</a:t>
             </a:fld>
             <a:endParaRPr lang="es-CO"/>
           </a:p>
@@ -3112,7 +3112,7 @@
           <a:p>
             <a:fld id="{228352A7-4D7D-4A5E-A016-C2965DC63AEC}" type="datetimeFigureOut">
               <a:rPr lang="es-CO" smtClean="0"/>
-              <a:t>15/10/26</a:t>
+              <a:t>15/10/2026</a:t>
             </a:fld>
             <a:endParaRPr lang="es-CO"/>
           </a:p>
@@ -3254,7 +3254,7 @@
           <a:p>
             <a:fld id="{228352A7-4D7D-4A5E-A016-C2965DC63AEC}" type="datetimeFigureOut">
               <a:rPr lang="es-CO" smtClean="0"/>
-              <a:t>15/10/26</a:t>
+              <a:t>15/10/2026</a:t>
             </a:fld>
             <a:endParaRPr lang="es-CO"/>
           </a:p>
@@ -3367,7 +3367,7 @@
           <a:p>
             <a:fld id="{228352A7-4D7D-4A5E-A016-C2965DC63AEC}" type="datetimeFigureOut">
               <a:rPr lang="es-CO" smtClean="0"/>
-              <a:t>15/10/26</a:t>
+              <a:t>15/10/2026</a:t>
             </a:fld>
             <a:endParaRPr lang="es-CO"/>
           </a:p>
@@ -3680,7 +3680,7 @@
           <a:p>
             <a:fld id="{228352A7-4D7D-4A5E-A016-C2965DC63AEC}" type="datetimeFigureOut">
               <a:rPr lang="es-CO" smtClean="0"/>
-              <a:t>15/10/26</a:t>
+              <a:t>15/10/2026</a:t>
             </a:fld>
             <a:endParaRPr lang="es-CO"/>
           </a:p>
@@ -3969,7 +3969,7 @@
           <a:p>
             <a:fld id="{228352A7-4D7D-4A5E-A016-C2965DC63AEC}" type="datetimeFigureOut">
               <a:rPr lang="es-CO" smtClean="0"/>
-              <a:t>15/10/26</a:t>
+              <a:t>15/10/2026</a:t>
             </a:fld>
             <a:endParaRPr lang="es-CO"/>
           </a:p>
@@ -4212,7 +4212,7 @@
           <a:p>
             <a:fld id="{228352A7-4D7D-4A5E-A016-C2965DC63AEC}" type="datetimeFigureOut">
               <a:rPr lang="es-CO" smtClean="0"/>
-              <a:t>15/10/26</a:t>
+              <a:t>15/10/2026</a:t>
             </a:fld>
             <a:endParaRPr lang="es-CO"/>
           </a:p>
@@ -5192,7 +5192,7 @@
           </a:prstGeom>
           <a:extLst>
             <a:ext uri="{C572A759-6A51-4108-AA02-DFA0A04FC94B}">
-              <ma14:wrappingTextBoxFlag xmlns="" xmlns:ma14="http://schemas.microsoft.com/office/mac/drawingml/2011/main" val="0"/>
+              <ma14:wrappingTextBoxFlag xmlns:ma14="http://schemas.microsoft.com/office/mac/drawingml/2011/main" xmlns="" val="0"/>
             </a:ext>
           </a:extLst>
         </p:spPr>
@@ -5411,9 +5411,49 @@
                 </a:solidFill>
                 <a:latin typeface="Calibri"/>
               </a:rPr>
-              <a:t>reaccionar a cambios sin que el emisor conozca a quién avisa.</a:t>
-            </a:r>
-          </a:p>
+              <a:t>reaccionar a cambios sin que el emisor conozca a quién </a:t>
+            </a:r>
+            <a:r>
+              <a:rPr lang="en-US" sz="1867" dirty="0" err="1">
+                <a:solidFill>
+                  <a:srgbClr val="BEC5E6"/>
+                </a:solidFill>
+                <a:latin typeface="Calibri"/>
+              </a:rPr>
+              <a:t>avisa</a:t>
+            </a:r>
+            <a:r>
+              <a:rPr lang="en-US" sz="1867" dirty="0">
+                <a:solidFill>
+                  <a:srgbClr val="BEC5E6"/>
+                </a:solidFill>
+                <a:latin typeface="Calibri"/>
+              </a:rPr>
+              <a:t>.</a:t>
+            </a:r>
+          </a:p>
+        </p:txBody>
+      </p:sp>
+      <p:sp>
+        <p:nvSpPr>
+          <p:cNvPr id="7" name="Text 5"/>
+          <p:cNvSpPr txBox="1"/>
+          <p:nvPr/>
+        </p:nvSpPr>
+        <p:spPr>
+          <a:xfrm>
+            <a:off x="6461760" y="2011680"/>
+            <a:ext cx="4998720" cy="4145280"/>
+          </a:xfrm>
+          <a:prstGeom prst="rect">
+            <a:avLst/>
+          </a:prstGeom>
+          <a:noFill/>
+          <a:ln/>
+        </p:spPr>
+        <p:txBody>
+          <a:bodyPr wrap="square" lIns="0" tIns="0" rIns="0" bIns="0" rtlCol="0" anchor="t"/>
+          <a:lstStyle/>
           <a:p>
             <a:pPr>
               <a:spcAft>
@@ -5427,7 +5467,7 @@
                 </a:solidFill>
                 <a:latin typeface="Calibri"/>
               </a:rPr>
-              <a:t>En SOA: </a:t>
+              <a:t>Qué es: </a:t>
             </a:r>
             <a:r>
               <a:rPr lang="en-US" sz="1867" dirty="0">
@@ -5436,31 +5476,9 @@
                 </a:solidFill>
                 <a:latin typeface="Calibri"/>
               </a:rPr>
-              <a:t>publish/subscribe con un broker (RabbitMQ, Kafka).</a:t>
-            </a:r>
-          </a:p>
-        </p:txBody>
-      </p:sp>
-      <p:sp>
-        <p:nvSpPr>
-          <p:cNvPr id="7" name="Text 5"/>
-          <p:cNvSpPr txBox="1"/>
-          <p:nvPr/>
-        </p:nvSpPr>
-        <p:spPr>
-          <a:xfrm>
-            <a:off x="6461760" y="2011680"/>
-            <a:ext cx="4998720" cy="4145280"/>
-          </a:xfrm>
-          <a:prstGeom prst="rect">
-            <a:avLst/>
-          </a:prstGeom>
-          <a:noFill/>
-          <a:ln/>
-        </p:spPr>
-        <p:txBody>
-          <a:bodyPr wrap="square" lIns="0" tIns="0" rIns="0" bIns="0" rtlCol="0" anchor="t"/>
-          <a:lstStyle/>
+              <a:t>un intermediario que centraliza la comunicación entre componentes.</a:t>
+            </a:r>
+          </a:p>
           <a:p>
             <a:pPr>
               <a:spcAft>
@@ -5474,7 +5492,7 @@
                 </a:solidFill>
                 <a:latin typeface="Calibri"/>
               </a:rPr>
-              <a:t>Qué es: </a:t>
+              <a:t>Metáfora: </a:t>
             </a:r>
             <a:r>
               <a:rPr lang="en-US" sz="1867" dirty="0">
@@ -5483,7 +5501,7 @@
                 </a:solidFill>
                 <a:latin typeface="Calibri"/>
               </a:rPr>
-              <a:t>un intermediario que centraliza la comunicación entre componentes.</a:t>
+              <a:t>la torre de control de un aeropuerto.</a:t>
             </a:r>
           </a:p>
           <a:p>
@@ -5499,7 +5517,7 @@
                 </a:solidFill>
                 <a:latin typeface="Calibri"/>
               </a:rPr>
-              <a:t>Metáfora: </a:t>
+              <a:t>Sirve para: </a:t>
             </a:r>
             <a:r>
               <a:rPr lang="en-US" sz="1867" dirty="0">
@@ -5508,23 +5526,16 @@
                 </a:solidFill>
                 <a:latin typeface="Calibri"/>
               </a:rPr>
-              <a:t>la torre de control de un aeropuerto.</a:t>
-            </a:r>
-          </a:p>
-          <a:p>
-            <a:pPr>
-              <a:spcAft>
-                <a:spcPts val="1067"/>
-              </a:spcAft>
-            </a:pPr>
-            <a:r>
-              <a:rPr lang="en-US" sz="1867" b="1" dirty="0">
-                <a:solidFill>
-                  <a:srgbClr val="FFFFFF"/>
+              <a:t>evitar una maraña de dependencias y coordinar en un solo </a:t>
+            </a:r>
+            <a:r>
+              <a:rPr lang="en-US" sz="1867" dirty="0" err="1">
+                <a:solidFill>
+                  <a:srgbClr val="BEC5E6"/>
                 </a:solidFill>
                 <a:latin typeface="Calibri"/>
               </a:rPr>
-              <a:t>Sirve para: </a:t>
+              <a:t>lugar</a:t>
             </a:r>
             <a:r>
               <a:rPr lang="en-US" sz="1867" dirty="0">
@@ -5533,32 +5544,7 @@
                 </a:solidFill>
                 <a:latin typeface="Calibri"/>
               </a:rPr>
-              <a:t>evitar una maraña de dependencias y coordinar en un solo lugar.</a:t>
-            </a:r>
-          </a:p>
-          <a:p>
-            <a:pPr>
-              <a:spcAft>
-                <a:spcPts val="1067"/>
-              </a:spcAft>
-            </a:pPr>
-            <a:r>
-              <a:rPr lang="en-US" sz="1867" b="1" dirty="0">
-                <a:solidFill>
-                  <a:srgbClr val="FFFFFF"/>
-                </a:solidFill>
-                <a:latin typeface="Calibri"/>
-              </a:rPr>
-              <a:t>En SOA: </a:t>
-            </a:r>
-            <a:r>
-              <a:rPr lang="en-US" sz="1867" dirty="0">
-                <a:solidFill>
-                  <a:srgbClr val="BEC5E6"/>
-                </a:solidFill>
-                <a:latin typeface="Calibri"/>
-              </a:rPr>
-              <a:t>orquestador, ESB o API Gateway.</a:t>
+              <a:t>.</a:t>
             </a:r>
           </a:p>
         </p:txBody>
@@ -5743,7 +5729,7 @@
           </a:prstGeom>
           <a:extLst>
             <a:ext uri="{C572A759-6A51-4108-AA02-DFA0A04FC94B}">
-              <ma14:wrappingTextBoxFlag xmlns="" xmlns:ma14="http://schemas.microsoft.com/office/mac/drawingml/2011/main" val="0"/>
+              <ma14:wrappingTextBoxFlag xmlns:ma14="http://schemas.microsoft.com/office/mac/drawingml/2011/main" xmlns="" val="0"/>
             </a:ext>
           </a:extLst>
         </p:spPr>
@@ -5997,39 +5983,6 @@
               <a:t>cada uno recibe update()</a:t>
             </a:r>
           </a:p>
-          <a:p>
-            <a:pPr>
-              <a:spcAft>
-                <a:spcPts val="667"/>
-              </a:spcAft>
-            </a:pPr>
-            <a:endParaRPr lang="en-US" sz="1733" dirty="0"/>
-          </a:p>
-          <a:p>
-            <a:pPr>
-              <a:spcAft>
-                <a:spcPts val="667"/>
-              </a:spcAft>
-            </a:pPr>
-            <a:r>
-              <a:rPr lang="en-US" sz="1733" b="1" dirty="0">
-                <a:solidFill>
-                  <a:srgbClr val="FFFFFF"/>
-                </a:solidFill>
-                <a:latin typeface="Calibri"/>
-              </a:rPr>
-              <a:t>En SOA: </a:t>
-            </a:r>
-            <a:r>
-              <a:rPr lang="en-US" sz="1733" dirty="0">
-                <a:solidFill>
-                  <a:srgbClr val="BEC5E6"/>
-                </a:solidFill>
-                <a:latin typeface="Calibri"/>
-              </a:rPr>
-              <a:t>el broker hace de lista y entrega el evento a cada suscriptor.</a:t>
-            </a:r>
-          </a:p>
         </p:txBody>
       </p:sp>
       <p:sp>
@@ -6156,41 +6109,23 @@
                 </a:solidFill>
                 <a:latin typeface="Calibri"/>
               </a:rPr>
-              <a:t>los demás responden al mediador</a:t>
-            </a:r>
-          </a:p>
-          <a:p>
-            <a:pPr>
-              <a:spcAft>
-                <a:spcPts val="667"/>
-              </a:spcAft>
-            </a:pPr>
-            <a:endParaRPr lang="en-US" sz="1733" dirty="0"/>
-          </a:p>
-          <a:p>
-            <a:pPr>
-              <a:spcAft>
-                <a:spcPts val="667"/>
-              </a:spcAft>
-            </a:pPr>
-            <a:r>
-              <a:rPr lang="en-US" sz="1733" b="1" dirty="0">
-                <a:solidFill>
-                  <a:srgbClr val="FFFFFF"/>
+              <a:t>los demás responden al </a:t>
+            </a:r>
+            <a:r>
+              <a:rPr lang="en-US" sz="1733" dirty="0" err="1">
+                <a:solidFill>
+                  <a:srgbClr val="BEC5E6"/>
                 </a:solidFill>
                 <a:latin typeface="Calibri"/>
               </a:rPr>
-              <a:t>En SOA: </a:t>
-            </a:r>
-            <a:r>
-              <a:rPr lang="en-US" sz="1733" dirty="0">
-                <a:solidFill>
-                  <a:srgbClr val="BEC5E6"/>
-                </a:solidFill>
-                <a:latin typeface="Calibri"/>
-              </a:rPr>
-              <a:t>el ESB o gateway enruta, transforma y coordina.</a:t>
-            </a:r>
+              <a:t>mediador</a:t>
+            </a:r>
+            <a:endParaRPr lang="en-US" sz="1733" dirty="0">
+              <a:solidFill>
+                <a:srgbClr val="BEC5E6"/>
+              </a:solidFill>
+              <a:latin typeface="Calibri"/>
+            </a:endParaRPr>
           </a:p>
         </p:txBody>
       </p:sp>
@@ -6374,7 +6309,7 @@
           </a:prstGeom>
           <a:extLst>
             <a:ext uri="{C572A759-6A51-4108-AA02-DFA0A04FC94B}">
-              <ma14:wrappingTextBoxFlag xmlns="" xmlns:ma14="http://schemas.microsoft.com/office/mac/drawingml/2011/main" val="0"/>
+              <ma14:wrappingTextBoxFlag xmlns:ma14="http://schemas.microsoft.com/office/mac/drawingml/2011/main" xmlns="" val="0"/>
             </a:ext>
           </a:extLst>
         </p:spPr>
@@ -13470,7 +13405,7 @@
           </a:prstGeom>
           <a:extLst>
             <a:ext uri="{C572A759-6A51-4108-AA02-DFA0A04FC94B}">
-              <ma14:wrappingTextBoxFlag xmlns="" xmlns:ma14="http://schemas.microsoft.com/office/mac/drawingml/2011/main" val="0"/>
+              <ma14:wrappingTextBoxFlag xmlns:ma14="http://schemas.microsoft.com/office/mac/drawingml/2011/main" xmlns="" val="0"/>
             </a:ext>
           </a:extLst>
         </p:spPr>
@@ -14686,7 +14621,7 @@
           </a:prstGeom>
           <a:extLst>
             <a:ext uri="{C572A759-6A51-4108-AA02-DFA0A04FC94B}">
-              <ma14:wrappingTextBoxFlag xmlns="" xmlns:ma14="http://schemas.microsoft.com/office/mac/drawingml/2011/main" val="0"/>
+              <ma14:wrappingTextBoxFlag xmlns:ma14="http://schemas.microsoft.com/office/mac/drawingml/2011/main" xmlns="" val="0"/>
             </a:ext>
           </a:extLst>
         </p:spPr>
@@ -14723,7 +14658,7 @@
         </p:nvSpPr>
         <p:spPr>
           <a:xfrm>
-            <a:off x="731520" y="1402080"/>
+            <a:off x="670561" y="2425309"/>
             <a:ext cx="5242560" cy="487680"/>
           </a:xfrm>
           <a:prstGeom prst="rect">
@@ -14757,7 +14692,7 @@
         </p:nvSpPr>
         <p:spPr>
           <a:xfrm>
-            <a:off x="731520" y="2011680"/>
+            <a:off x="670561" y="3048000"/>
             <a:ext cx="5242560" cy="4145280"/>
           </a:xfrm>
           <a:prstGeom prst="rect">
@@ -14841,23 +14776,16 @@
                 </a:solidFill>
                 <a:latin typeface="Calibri"/>
               </a:rPr>
-              <a:t>catálogo donde se publican los contratos.</a:t>
-            </a:r>
-          </a:p>
-          <a:p>
-            <a:pPr>
-              <a:spcAft>
-                <a:spcPts val="1067"/>
-              </a:spcAft>
-            </a:pPr>
-            <a:r>
-              <a:rPr lang="en-US" sz="1867" b="1" dirty="0">
-                <a:solidFill>
-                  <a:srgbClr val="FFFFFF"/>
+              <a:t>catálogo donde se publican los </a:t>
+            </a:r>
+            <a:r>
+              <a:rPr lang="en-US" sz="1867" dirty="0" err="1">
+                <a:solidFill>
+                  <a:srgbClr val="BEC5E6"/>
                 </a:solidFill>
                 <a:latin typeface="Calibri"/>
               </a:rPr>
-              <a:t>Capas: </a:t>
+              <a:t>contratos</a:t>
             </a:r>
             <a:r>
               <a:rPr lang="en-US" sz="1867" dirty="0">
@@ -14866,7 +14794,7 @@
                 </a:solidFill>
                 <a:latin typeface="Calibri"/>
               </a:rPr>
-              <a:t>consumidores, procesos, servicios de negocio, datos e integración (ESB, gateway, broker).</a:t>
+              <a:t>.</a:t>
             </a:r>
           </a:p>
         </p:txBody>
@@ -14909,7 +14837,7 @@
         </p:nvSpPr>
         <p:spPr>
           <a:xfrm>
-            <a:off x="6583680" y="1402080"/>
+            <a:off x="6583680" y="2316480"/>
             <a:ext cx="4876800" cy="487680"/>
           </a:xfrm>
           <a:prstGeom prst="rect">
@@ -14943,7 +14871,7 @@
         </p:nvSpPr>
         <p:spPr>
           <a:xfrm>
-            <a:off x="6583680" y="2072640"/>
+            <a:off x="6583680" y="2844800"/>
             <a:ext cx="4876800" cy="2926080"/>
           </a:xfrm>
           <a:prstGeom prst="rect">
@@ -15009,7 +14937,43 @@
                 </a:solidFill>
                 <a:latin typeface="Calibri"/>
               </a:rPr>
-              <a:t>Envía un mensaje (SOAP/XML o REST/JSON) por HTTP o colas.</a:t>
+              <a:t>Envía un </a:t>
+            </a:r>
+            <a:r>
+              <a:rPr lang="en-US" sz="1867" dirty="0" err="1">
+                <a:solidFill>
+                  <a:srgbClr val="BEC5E6"/>
+                </a:solidFill>
+                <a:latin typeface="Calibri"/>
+              </a:rPr>
+              <a:t>mensaje</a:t>
+            </a:r>
+            <a:r>
+              <a:rPr lang="en-US" sz="1867" dirty="0">
+                <a:solidFill>
+                  <a:srgbClr val="BEC5E6"/>
+                </a:solidFill>
+                <a:latin typeface="Calibri"/>
+              </a:rPr>
+              <a:t> </a:t>
+            </a:r>
+            <a:r>
+              <a:rPr lang="en-US" sz="1867" dirty="0" err="1">
+                <a:solidFill>
+                  <a:srgbClr val="BEC5E6"/>
+                </a:solidFill>
+                <a:latin typeface="Calibri"/>
+              </a:rPr>
+              <a:t>por</a:t>
+            </a:r>
+            <a:r>
+              <a:rPr lang="en-US" sz="1867" dirty="0">
+                <a:solidFill>
+                  <a:srgbClr val="BEC5E6"/>
+                </a:solidFill>
+                <a:latin typeface="Calibri"/>
+              </a:rPr>
+              <a:t> HTTP.</a:t>
             </a:r>
           </a:p>
           <a:p>
@@ -15029,48 +14993,6 @@
                 <a:latin typeface="Calibri"/>
               </a:rPr>
               <a:t>El proveedor responde; su código interno no se ve.</a:t>
-            </a:r>
-          </a:p>
-        </p:txBody>
-      </p:sp>
-      <p:sp>
-        <p:nvSpPr>
-          <p:cNvPr id="8" name="Text 6"/>
-          <p:cNvSpPr txBox="1"/>
-          <p:nvPr/>
-        </p:nvSpPr>
-        <p:spPr>
-          <a:xfrm>
-            <a:off x="6583680" y="5120640"/>
-            <a:ext cx="4876800" cy="975360"/>
-          </a:xfrm>
-          <a:prstGeom prst="rect">
-            <a:avLst/>
-          </a:prstGeom>
-          <a:noFill/>
-          <a:ln/>
-        </p:spPr>
-        <p:txBody>
-          <a:bodyPr wrap="square" lIns="0" tIns="0" rIns="0" bIns="0" rtlCol="0" anchor="t"/>
-          <a:lstStyle/>
-          <a:p>
-            <a:r>
-              <a:rPr lang="en-US" sz="1867" b="1" dirty="0">
-                <a:solidFill>
-                  <a:srgbClr val="FFFFFF"/>
-                </a:solidFill>
-                <a:latin typeface="Calibri"/>
-              </a:rPr>
-              <a:t>Además: </a:t>
-            </a:r>
-            <a:r>
-              <a:rPr lang="en-US" sz="1867" dirty="0">
-                <a:solidFill>
-                  <a:srgbClr val="BEC5E6"/>
-                </a:solidFill>
-                <a:latin typeface="Calibri"/>
-              </a:rPr>
-              <a:t>los servicios no guardan estado y funcionan en distintas plataformas.</a:t>
             </a:r>
           </a:p>
         </p:txBody>
@@ -15237,7 +15159,7 @@
           </a:prstGeom>
           <a:extLst>
             <a:ext uri="{C572A759-6A51-4108-AA02-DFA0A04FC94B}">
-              <ma14:wrappingTextBoxFlag xmlns="" xmlns:ma14="http://schemas.microsoft.com/office/mac/drawingml/2011/main" val="0"/>
+              <ma14:wrappingTextBoxFlag xmlns:ma14="http://schemas.microsoft.com/office/mac/drawingml/2011/main" xmlns="" val="0"/>
             </a:ext>
           </a:extLst>
         </p:spPr>

--- a/presentación/Arquitectura SOA  y Patrones Observer, Mediator.pptx
+++ b/presentación/Arquitectura SOA  y Patrones Observer, Mediator.pptx
@@ -5,7 +5,7 @@
     <p:sldMasterId id="2147483648" r:id="rId1"/>
   </p:sldMasterIdLst>
   <p:notesMasterIdLst>
-    <p:notesMasterId r:id="rId22"/>
+    <p:notesMasterId r:id="rId19"/>
   </p:notesMasterIdLst>
   <p:sldIdLst>
     <p:sldId id="256" r:id="rId2"/>
@@ -15,19 +15,16 @@
     <p:sldId id="279" r:id="rId6"/>
     <p:sldId id="260" r:id="rId7"/>
     <p:sldId id="264" r:id="rId8"/>
-    <p:sldId id="265" r:id="rId9"/>
-    <p:sldId id="274" r:id="rId10"/>
-    <p:sldId id="278" r:id="rId11"/>
-    <p:sldId id="275" r:id="rId12"/>
-    <p:sldId id="276" r:id="rId13"/>
-    <p:sldId id="277" r:id="rId14"/>
-    <p:sldId id="261" r:id="rId15"/>
-    <p:sldId id="262" r:id="rId16"/>
-    <p:sldId id="266" r:id="rId17"/>
-    <p:sldId id="263" r:id="rId18"/>
-    <p:sldId id="269" r:id="rId19"/>
-    <p:sldId id="273" r:id="rId20"/>
-    <p:sldId id="272" r:id="rId21"/>
+    <p:sldId id="274" r:id="rId9"/>
+    <p:sldId id="278" r:id="rId10"/>
+    <p:sldId id="275" r:id="rId11"/>
+    <p:sldId id="276" r:id="rId12"/>
+    <p:sldId id="277" r:id="rId13"/>
+    <p:sldId id="261" r:id="rId14"/>
+    <p:sldId id="262" r:id="rId15"/>
+    <p:sldId id="269" r:id="rId16"/>
+    <p:sldId id="273" r:id="rId17"/>
+    <p:sldId id="272" r:id="rId18"/>
   </p:sldIdLst>
   <p:sldSz cx="12192000" cy="6858000"/>
   <p:notesSz cx="6858000" cy="9144000"/>
@@ -227,7 +224,7 @@
           <a:p>
             <a:fld id="{F6AE3B52-FEC4-42BC-B06A-8CABB6F8B49F}" type="datetimeFigureOut">
               <a:rPr lang="es-CO" smtClean="0"/>
-              <a:t>15/10/2026</a:t>
+              <a:t>16/10/2026</a:t>
             </a:fld>
             <a:endParaRPr lang="es-CO"/>
           </a:p>
@@ -920,7 +917,7 @@
           <a:p>
             <a:fld id="{F7021451-1387-4CA6-816F-3879F97B5CBC}" type="slidenum">
               <a:rPr lang="en-US"/>
-              <a:t>10</a:t>
+              <a:t>9</a:t>
             </a:fld>
             <a:endParaRPr lang="en-US"/>
           </a:p>
@@ -1004,7 +1001,7 @@
           <a:p>
             <a:fld id="{F7021451-1387-4CA6-816F-3879F97B5CBC}" type="slidenum">
               <a:rPr lang="en-US"/>
-              <a:t>11</a:t>
+              <a:t>10</a:t>
             </a:fld>
             <a:endParaRPr lang="en-US"/>
           </a:p>
@@ -1088,7 +1085,7 @@
           <a:p>
             <a:fld id="{F7021451-1387-4CA6-816F-3879F97B5CBC}" type="slidenum">
               <a:rPr lang="en-US"/>
-              <a:t>12</a:t>
+              <a:t>11</a:t>
             </a:fld>
             <a:endParaRPr lang="en-US"/>
           </a:p>
@@ -1172,7 +1169,7 @@
           <a:p>
             <a:fld id="{F7021451-1387-4CA6-816F-3879F97B5CBC}" type="slidenum">
               <a:rPr lang="en-US"/>
-              <a:t>13</a:t>
+              <a:t>12</a:t>
             </a:fld>
             <a:endParaRPr lang="en-US"/>
           </a:p>
@@ -1340,7 +1337,7 @@
           <a:p>
             <a:fld id="{228352A7-4D7D-4A5E-A016-C2965DC63AEC}" type="datetimeFigureOut">
               <a:rPr lang="es-CO" smtClean="0"/>
-              <a:t>15/10/2026</a:t>
+              <a:t>16/10/2026</a:t>
             </a:fld>
             <a:endParaRPr lang="es-CO"/>
           </a:p>
@@ -1540,7 +1537,7 @@
           <a:p>
             <a:fld id="{228352A7-4D7D-4A5E-A016-C2965DC63AEC}" type="datetimeFigureOut">
               <a:rPr lang="es-CO" smtClean="0"/>
-              <a:t>15/10/2026</a:t>
+              <a:t>16/10/2026</a:t>
             </a:fld>
             <a:endParaRPr lang="es-CO"/>
           </a:p>
@@ -1750,7 +1747,7 @@
           <a:p>
             <a:fld id="{228352A7-4D7D-4A5E-A016-C2965DC63AEC}" type="datetimeFigureOut">
               <a:rPr lang="es-CO" smtClean="0"/>
-              <a:t>15/10/2026</a:t>
+              <a:t>16/10/2026</a:t>
             </a:fld>
             <a:endParaRPr lang="es-CO"/>
           </a:p>
@@ -1988,7 +1985,7 @@
           </a:prstGeom>
           <a:extLst>
             <a:ext uri="{C572A759-6A51-4108-AA02-DFA0A04FC94B}">
-              <ma14:wrappingTextBoxFlag xmlns:ma14="http://schemas.microsoft.com/office/mac/drawingml/2011/main" xmlns="" val="0"/>
+              <ma14:wrappingTextBoxFlag xmlns="" xmlns:ma14="http://schemas.microsoft.com/office/mac/drawingml/2011/main" val="0"/>
             </a:ext>
           </a:extLst>
         </p:spPr>
@@ -2153,7 +2150,7 @@
           <a:p>
             <a:fld id="{228352A7-4D7D-4A5E-A016-C2965DC63AEC}" type="datetimeFigureOut">
               <a:rPr lang="es-CO" smtClean="0"/>
-              <a:t>15/10/2026</a:t>
+              <a:t>16/10/2026</a:t>
             </a:fld>
             <a:endParaRPr lang="es-CO"/>
           </a:p>
@@ -2429,7 +2426,7 @@
           <a:p>
             <a:fld id="{228352A7-4D7D-4A5E-A016-C2965DC63AEC}" type="datetimeFigureOut">
               <a:rPr lang="es-CO" smtClean="0"/>
-              <a:t>15/10/2026</a:t>
+              <a:t>16/10/2026</a:t>
             </a:fld>
             <a:endParaRPr lang="es-CO"/>
           </a:p>
@@ -2697,7 +2694,7 @@
           <a:p>
             <a:fld id="{228352A7-4D7D-4A5E-A016-C2965DC63AEC}" type="datetimeFigureOut">
               <a:rPr lang="es-CO" smtClean="0"/>
-              <a:t>15/10/2026</a:t>
+              <a:t>16/10/2026</a:t>
             </a:fld>
             <a:endParaRPr lang="es-CO"/>
           </a:p>
@@ -3112,7 +3109,7 @@
           <a:p>
             <a:fld id="{228352A7-4D7D-4A5E-A016-C2965DC63AEC}" type="datetimeFigureOut">
               <a:rPr lang="es-CO" smtClean="0"/>
-              <a:t>15/10/2026</a:t>
+              <a:t>16/10/2026</a:t>
             </a:fld>
             <a:endParaRPr lang="es-CO"/>
           </a:p>
@@ -3254,7 +3251,7 @@
           <a:p>
             <a:fld id="{228352A7-4D7D-4A5E-A016-C2965DC63AEC}" type="datetimeFigureOut">
               <a:rPr lang="es-CO" smtClean="0"/>
-              <a:t>15/10/2026</a:t>
+              <a:t>16/10/2026</a:t>
             </a:fld>
             <a:endParaRPr lang="es-CO"/>
           </a:p>
@@ -3367,7 +3364,7 @@
           <a:p>
             <a:fld id="{228352A7-4D7D-4A5E-A016-C2965DC63AEC}" type="datetimeFigureOut">
               <a:rPr lang="es-CO" smtClean="0"/>
-              <a:t>15/10/2026</a:t>
+              <a:t>16/10/2026</a:t>
             </a:fld>
             <a:endParaRPr lang="es-CO"/>
           </a:p>
@@ -3680,7 +3677,7 @@
           <a:p>
             <a:fld id="{228352A7-4D7D-4A5E-A016-C2965DC63AEC}" type="datetimeFigureOut">
               <a:rPr lang="es-CO" smtClean="0"/>
-              <a:t>15/10/2026</a:t>
+              <a:t>16/10/2026</a:t>
             </a:fld>
             <a:endParaRPr lang="es-CO"/>
           </a:p>
@@ -3969,7 +3966,7 @@
           <a:p>
             <a:fld id="{228352A7-4D7D-4A5E-A016-C2965DC63AEC}" type="datetimeFigureOut">
               <a:rPr lang="es-CO" smtClean="0"/>
-              <a:t>15/10/2026</a:t>
+              <a:t>16/10/2026</a:t>
             </a:fld>
             <a:endParaRPr lang="es-CO"/>
           </a:p>
@@ -4212,7 +4209,7 @@
           <a:p>
             <a:fld id="{228352A7-4D7D-4A5E-A016-C2965DC63AEC}" type="datetimeFigureOut">
               <a:rPr lang="es-CO" smtClean="0"/>
-              <a:t>15/10/2026</a:t>
+              <a:t>16/10/2026</a:t>
             </a:fld>
             <a:endParaRPr lang="es-CO"/>
           </a:p>
@@ -4878,13 +4875,7 @@
     </p:bg>
     <p:spTree>
       <p:nvGrpSpPr>
-        <p:cNvPr id="1" name="">
-          <a:extLst>
-            <a:ext uri="{FF2B5EF4-FFF2-40B4-BE49-F238E27FC236}">
-              <a16:creationId xmlns:a16="http://schemas.microsoft.com/office/drawing/2014/main" id="{7B0DC3A5-6E25-0CE9-42A0-C50E0565D03C}"/>
-            </a:ext>
-          </a:extLst>
-        </p:cNvPr>
+        <p:cNvPr id="1" name=""/>
         <p:cNvGrpSpPr/>
         <p:nvPr/>
       </p:nvGrpSpPr>
@@ -4968,13 +4959,7 @@
       </p:sp>
       <p:sp>
         <p:nvSpPr>
-          <p:cNvPr id="2" name="Text 0">
-            <a:extLst>
-              <a:ext uri="{FF2B5EF4-FFF2-40B4-BE49-F238E27FC236}">
-                <a16:creationId xmlns:a16="http://schemas.microsoft.com/office/drawing/2014/main" id="{762A2209-5066-A9B5-3E35-5ED7D290F26D}"/>
-              </a:ext>
-            </a:extLst>
-          </p:cNvPr>
+          <p:cNvPr id="2" name="Text 0"/>
           <p:cNvSpPr>
             <a:spLocks noGrp="1"/>
           </p:cNvSpPr>
@@ -4983,6 +4968,10 @@
           </p:nvPr>
         </p:nvSpPr>
         <p:spPr>
+          <a:xfrm>
+            <a:off x="630936" y="320040"/>
+            <a:ext cx="10158984" cy="886968"/>
+          </a:xfrm>
           <a:prstGeom prst="rect">
             <a:avLst/>
           </a:prstGeom>
@@ -4996,23 +4985,413 @@
           <a:lstStyle/>
           <a:p>
             <a:r>
-              <a:rPr lang="en-US" b="1" dirty="0">
+              <a:rPr lang="en-US" sz="3600" b="1" dirty="0">
                 <a:solidFill>
                   <a:srgbClr val="FFFFFF"/>
                 </a:solidFill>
                 <a:latin typeface="Calibri"/>
               </a:rPr>
-              <a:t>Patrones Observer y Mediator</a:t>
+              <a:t>1. </a:t>
+            </a:r>
+            <a:r>
+              <a:rPr lang="en-US" sz="3600" b="1" dirty="0" err="1">
+                <a:solidFill>
+                  <a:srgbClr val="FFFFFF"/>
+                </a:solidFill>
+                <a:latin typeface="Calibri"/>
+              </a:rPr>
+              <a:t>Patrones</a:t>
+            </a:r>
+            <a:r>
+              <a:rPr lang="en-US" sz="3600" b="1" dirty="0">
+                <a:solidFill>
+                  <a:srgbClr val="FFFFFF"/>
+                </a:solidFill>
+                <a:latin typeface="Calibri"/>
+              </a:rPr>
+              <a:t>: Definición</a:t>
+            </a:r>
+          </a:p>
+        </p:txBody>
+      </p:sp>
+      <p:sp>
+        <p:nvSpPr>
+          <p:cNvPr id="25" name="Slide Number Placeholder 0"/>
+          <p:cNvSpPr>
+            <a:spLocks noGrp="1"/>
+          </p:cNvSpPr>
+          <p:nvPr>
+            <p:ph type="sldNum" sz="quarter" idx="4294967295"/>
+          </p:nvPr>
+        </p:nvSpPr>
+        <p:spPr>
+          <a:xfrm>
+            <a:off x="11094720" y="6339840"/>
+            <a:ext cx="609600" cy="365760"/>
+          </a:xfrm>
+          <a:prstGeom prst="rect">
+            <a:avLst/>
+          </a:prstGeom>
+          <a:extLst>
+            <a:ext uri="{C572A759-6A51-4108-AA02-DFA0A04FC94B}">
+              <ma14:wrappingTextBoxFlag xmlns="" xmlns:ma14="http://schemas.microsoft.com/office/mac/drawingml/2011/main" val="0"/>
+            </a:ext>
+          </a:extLst>
+        </p:spPr>
+        <p:txBody>
+          <a:bodyPr/>
+          <a:lstStyle>
+            <a:lvl1pPr>
+              <a:defRPr sz="1333">
+                <a:solidFill>
+                  <a:schemeClr val="tx1"/>
+                </a:solidFill>
+              </a:defRPr>
+            </a:lvl1pPr>
+          </a:lstStyle>
+          <a:p>
+            <a:pPr algn="l"/>
+            <a:fld id="{F7021451-1387-4CA6-816F-3879F97B5CBC}" type="slidenum">
+              <a:rPr lang="en-US" b="0">
+                <a:solidFill>
+                  <a:srgbClr val="BEC5E6"/>
+                </a:solidFill>
+              </a:rPr>
+              <a:t>10</a:t>
+            </a:fld>
+            <a:endParaRPr lang="en-US"/>
+          </a:p>
+        </p:txBody>
+      </p:sp>
+      <p:sp>
+        <p:nvSpPr>
+          <p:cNvPr id="3" name="Text 1"/>
+          <p:cNvSpPr txBox="1"/>
+          <p:nvPr/>
+        </p:nvSpPr>
+        <p:spPr>
+          <a:xfrm>
+            <a:off x="731520" y="1402080"/>
+            <a:ext cx="4998720" cy="487680"/>
+          </a:xfrm>
+          <a:prstGeom prst="rect">
+            <a:avLst/>
+          </a:prstGeom>
+          <a:noFill/>
+          <a:ln/>
+        </p:spPr>
+        <p:txBody>
+          <a:bodyPr wrap="square" lIns="0" tIns="0" rIns="0" bIns="0" rtlCol="0" anchor="t"/>
+          <a:lstStyle/>
+          <a:p>
+            <a:r>
+              <a:rPr lang="en-US" sz="2667" b="1" dirty="0">
+                <a:solidFill>
+                  <a:srgbClr val="F4B942"/>
+                </a:solidFill>
+                <a:latin typeface="Calibri"/>
+              </a:rPr>
+              <a:t>Observer</a:t>
+            </a:r>
+            <a:endParaRPr lang="en-US" sz="2667" dirty="0"/>
+          </a:p>
+        </p:txBody>
+      </p:sp>
+      <p:sp>
+        <p:nvSpPr>
+          <p:cNvPr id="4" name="Text 2"/>
+          <p:cNvSpPr txBox="1"/>
+          <p:nvPr/>
+        </p:nvSpPr>
+        <p:spPr>
+          <a:xfrm>
+            <a:off x="6461760" y="1402080"/>
+            <a:ext cx="4998720" cy="487680"/>
+          </a:xfrm>
+          <a:prstGeom prst="rect">
+            <a:avLst/>
+          </a:prstGeom>
+          <a:noFill/>
+          <a:ln/>
+        </p:spPr>
+        <p:txBody>
+          <a:bodyPr wrap="square" lIns="0" tIns="0" rIns="0" bIns="0" rtlCol="0" anchor="t"/>
+          <a:lstStyle/>
+          <a:p>
+            <a:r>
+              <a:rPr lang="en-US" sz="2667" b="1" dirty="0">
+                <a:solidFill>
+                  <a:srgbClr val="F4B942"/>
+                </a:solidFill>
+                <a:latin typeface="Calibri"/>
+              </a:rPr>
+              <a:t>Mediator</a:t>
+            </a:r>
+            <a:endParaRPr lang="en-US" sz="2667" dirty="0"/>
+          </a:p>
+        </p:txBody>
+      </p:sp>
+      <p:sp>
+        <p:nvSpPr>
+          <p:cNvPr id="5" name="Separador"/>
+          <p:cNvSpPr/>
+          <p:nvPr/>
+        </p:nvSpPr>
+        <p:spPr>
+          <a:xfrm>
+            <a:off x="6035040" y="1463040"/>
+            <a:ext cx="0" cy="4632960"/>
+          </a:xfrm>
+          <a:prstGeom prst="line">
+            <a:avLst/>
+          </a:prstGeom>
+          <a:noFill/>
+          <a:ln w="12700">
+            <a:solidFill>
+              <a:srgbClr val="2B3270"/>
+            </a:solidFill>
+            <a:prstDash val="solid"/>
+          </a:ln>
+        </p:spPr>
+        <p:txBody>
+          <a:bodyPr/>
+          <a:lstStyle/>
+          <a:p>
+            <a:endParaRPr lang="es-419" sz="2400"/>
+          </a:p>
+        </p:txBody>
+      </p:sp>
+      <p:sp>
+        <p:nvSpPr>
+          <p:cNvPr id="6" name="Text 4"/>
+          <p:cNvSpPr txBox="1"/>
+          <p:nvPr/>
+        </p:nvSpPr>
+        <p:spPr>
+          <a:xfrm>
+            <a:off x="731520" y="2011680"/>
+            <a:ext cx="4998720" cy="4145280"/>
+          </a:xfrm>
+          <a:prstGeom prst="rect">
+            <a:avLst/>
+          </a:prstGeom>
+          <a:noFill/>
+          <a:ln/>
+        </p:spPr>
+        <p:txBody>
+          <a:bodyPr wrap="square" lIns="0" tIns="0" rIns="0" bIns="0" rtlCol="0" anchor="t"/>
+          <a:lstStyle/>
+          <a:p>
+            <a:pPr>
+              <a:spcAft>
+                <a:spcPts val="1067"/>
+              </a:spcAft>
+            </a:pPr>
+            <a:r>
+              <a:rPr lang="en-US" sz="1867" b="1" dirty="0">
+                <a:solidFill>
+                  <a:srgbClr val="FFFFFF"/>
+                </a:solidFill>
+                <a:latin typeface="Calibri"/>
+              </a:rPr>
+              <a:t>Qué es: </a:t>
+            </a:r>
+            <a:r>
+              <a:rPr lang="en-US" sz="1867" dirty="0">
+                <a:solidFill>
+                  <a:srgbClr val="BEC5E6"/>
+                </a:solidFill>
+                <a:latin typeface="Calibri"/>
+              </a:rPr>
+              <a:t>relación uno a muchos; si el Subject cambia, avisa a todos sus Observers.</a:t>
+            </a:r>
+          </a:p>
+          <a:p>
+            <a:pPr>
+              <a:spcAft>
+                <a:spcPts val="1067"/>
+              </a:spcAft>
+            </a:pPr>
+            <a:r>
+              <a:rPr lang="en-US" sz="1867" b="1" dirty="0">
+                <a:solidFill>
+                  <a:srgbClr val="FFFFFF"/>
+                </a:solidFill>
+                <a:latin typeface="Calibri"/>
+              </a:rPr>
+              <a:t>Metáfora: </a:t>
+            </a:r>
+            <a:r>
+              <a:rPr lang="en-US" sz="1867" dirty="0">
+                <a:solidFill>
+                  <a:srgbClr val="BEC5E6"/>
+                </a:solidFill>
+                <a:latin typeface="Calibri"/>
+              </a:rPr>
+              <a:t>un canal de YouTube y sus suscriptores.</a:t>
+            </a:r>
+          </a:p>
+          <a:p>
+            <a:pPr>
+              <a:spcAft>
+                <a:spcPts val="1067"/>
+              </a:spcAft>
+            </a:pPr>
+            <a:r>
+              <a:rPr lang="en-US" sz="1867" b="1" dirty="0">
+                <a:solidFill>
+                  <a:srgbClr val="FFFFFF"/>
+                </a:solidFill>
+                <a:latin typeface="Calibri"/>
+              </a:rPr>
+              <a:t>Sirve para: </a:t>
+            </a:r>
+            <a:r>
+              <a:rPr lang="en-US" sz="1867" dirty="0">
+                <a:solidFill>
+                  <a:srgbClr val="BEC5E6"/>
+                </a:solidFill>
+                <a:latin typeface="Calibri"/>
+              </a:rPr>
+              <a:t>reaccionar a cambios sin que el emisor conozca a quién </a:t>
+            </a:r>
+            <a:r>
+              <a:rPr lang="en-US" sz="1867" dirty="0" err="1">
+                <a:solidFill>
+                  <a:srgbClr val="BEC5E6"/>
+                </a:solidFill>
+                <a:latin typeface="Calibri"/>
+              </a:rPr>
+              <a:t>avisa</a:t>
+            </a:r>
+            <a:r>
+              <a:rPr lang="en-US" sz="1867" dirty="0">
+                <a:solidFill>
+                  <a:srgbClr val="BEC5E6"/>
+                </a:solidFill>
+                <a:latin typeface="Calibri"/>
+              </a:rPr>
+              <a:t>.</a:t>
+            </a:r>
+          </a:p>
+        </p:txBody>
+      </p:sp>
+      <p:sp>
+        <p:nvSpPr>
+          <p:cNvPr id="7" name="Text 5"/>
+          <p:cNvSpPr txBox="1"/>
+          <p:nvPr/>
+        </p:nvSpPr>
+        <p:spPr>
+          <a:xfrm>
+            <a:off x="6461760" y="2011680"/>
+            <a:ext cx="4998720" cy="4145280"/>
+          </a:xfrm>
+          <a:prstGeom prst="rect">
+            <a:avLst/>
+          </a:prstGeom>
+          <a:noFill/>
+          <a:ln/>
+        </p:spPr>
+        <p:txBody>
+          <a:bodyPr wrap="square" lIns="0" tIns="0" rIns="0" bIns="0" rtlCol="0" anchor="t"/>
+          <a:lstStyle/>
+          <a:p>
+            <a:pPr>
+              <a:spcAft>
+                <a:spcPts val="1067"/>
+              </a:spcAft>
+            </a:pPr>
+            <a:r>
+              <a:rPr lang="en-US" sz="1867" b="1" dirty="0">
+                <a:solidFill>
+                  <a:srgbClr val="FFFFFF"/>
+                </a:solidFill>
+                <a:latin typeface="Calibri"/>
+              </a:rPr>
+              <a:t>Qué es: </a:t>
+            </a:r>
+            <a:r>
+              <a:rPr lang="en-US" sz="1867" dirty="0">
+                <a:solidFill>
+                  <a:srgbClr val="BEC5E6"/>
+                </a:solidFill>
+                <a:latin typeface="Calibri"/>
+              </a:rPr>
+              <a:t>un intermediario que centraliza la comunicación entre componentes.</a:t>
+            </a:r>
+          </a:p>
+          <a:p>
+            <a:pPr>
+              <a:spcAft>
+                <a:spcPts val="1067"/>
+              </a:spcAft>
+            </a:pPr>
+            <a:r>
+              <a:rPr lang="en-US" sz="1867" b="1" dirty="0">
+                <a:solidFill>
+                  <a:srgbClr val="FFFFFF"/>
+                </a:solidFill>
+                <a:latin typeface="Calibri"/>
+              </a:rPr>
+              <a:t>Metáfora: </a:t>
+            </a:r>
+            <a:r>
+              <a:rPr lang="en-US" sz="1867" dirty="0">
+                <a:solidFill>
+                  <a:srgbClr val="BEC5E6"/>
+                </a:solidFill>
+                <a:latin typeface="Calibri"/>
+              </a:rPr>
+              <a:t>la torre de control de un aeropuerto.</a:t>
+            </a:r>
+          </a:p>
+          <a:p>
+            <a:pPr>
+              <a:spcAft>
+                <a:spcPts val="1067"/>
+              </a:spcAft>
+            </a:pPr>
+            <a:r>
+              <a:rPr lang="en-US" sz="1867" b="1" dirty="0">
+                <a:solidFill>
+                  <a:srgbClr val="FFFFFF"/>
+                </a:solidFill>
+                <a:latin typeface="Calibri"/>
+              </a:rPr>
+              <a:t>Sirve para: </a:t>
+            </a:r>
+            <a:r>
+              <a:rPr lang="en-US" sz="1867" dirty="0">
+                <a:solidFill>
+                  <a:srgbClr val="BEC5E6"/>
+                </a:solidFill>
+                <a:latin typeface="Calibri"/>
+              </a:rPr>
+              <a:t>evitar una maraña de dependencias y coordinar en un solo </a:t>
+            </a:r>
+            <a:r>
+              <a:rPr lang="en-US" sz="1867" dirty="0" err="1">
+                <a:solidFill>
+                  <a:srgbClr val="BEC5E6"/>
+                </a:solidFill>
+                <a:latin typeface="Calibri"/>
+              </a:rPr>
+              <a:t>lugar</a:t>
+            </a:r>
+            <a:r>
+              <a:rPr lang="en-US" sz="1867" dirty="0">
+                <a:solidFill>
+                  <a:srgbClr val="BEC5E6"/>
+                </a:solidFill>
+                <a:latin typeface="Calibri"/>
+              </a:rPr>
+              <a:t>.</a:t>
             </a:r>
           </a:p>
         </p:txBody>
       </p:sp>
     </p:spTree>
-    <p:extLst>
-      <p:ext uri="{BB962C8B-B14F-4D97-AF65-F5344CB8AC3E}">
-        <p14:creationId xmlns:p14="http://schemas.microsoft.com/office/powerpoint/2010/main" val="1518798913"/>
-      </p:ext>
-    </p:extLst>
   </p:cSld>
   <p:clrMapOvr>
     <a:masterClrMapping/>
@@ -5149,7 +5528,7 @@
                 </a:solidFill>
                 <a:latin typeface="Calibri"/>
               </a:rPr>
-              <a:t>1. </a:t>
+              <a:t>2. </a:t>
             </a:r>
             <a:r>
               <a:rPr lang="en-US" sz="3600" b="1" dirty="0" err="1">
@@ -5167,7 +5546,7 @@
                 </a:solidFill>
                 <a:latin typeface="Calibri"/>
               </a:rPr>
-              <a:t>: Definición</a:t>
+              <a:t>: Características</a:t>
             </a:r>
           </a:p>
         </p:txBody>
@@ -5192,7 +5571,7 @@
           </a:prstGeom>
           <a:extLst>
             <a:ext uri="{C572A759-6A51-4108-AA02-DFA0A04FC94B}">
-              <ma14:wrappingTextBoxFlag xmlns:ma14="http://schemas.microsoft.com/office/mac/drawingml/2011/main" xmlns="" val="0"/>
+              <ma14:wrappingTextBoxFlag xmlns="" xmlns:ma14="http://schemas.microsoft.com/office/mac/drawingml/2011/main" val="0"/>
             </a:ext>
           </a:extLst>
         </p:spPr>
@@ -5342,94 +5721,108 @@
           <a:p>
             <a:pPr>
               <a:spcAft>
-                <a:spcPts val="1067"/>
+                <a:spcPts val="667"/>
               </a:spcAft>
             </a:pPr>
             <a:r>
-              <a:rPr lang="en-US" sz="1867" b="1" dirty="0">
+              <a:rPr lang="en-US" sz="1733" b="1" dirty="0">
                 <a:solidFill>
                   <a:srgbClr val="FFFFFF"/>
                 </a:solidFill>
                 <a:latin typeface="Calibri"/>
               </a:rPr>
-              <a:t>Qué es: </a:t>
-            </a:r>
-            <a:r>
-              <a:rPr lang="en-US" sz="1867" dirty="0">
+              <a:t>Componentes: </a:t>
+            </a:r>
+            <a:r>
+              <a:rPr lang="en-US" sz="1733" dirty="0">
                 <a:solidFill>
                   <a:srgbClr val="BEC5E6"/>
                 </a:solidFill>
                 <a:latin typeface="Calibri"/>
               </a:rPr>
-              <a:t>relación uno a muchos; si el Subject cambia, avisa a todos sus Observers.</a:t>
+              <a:t>Subject, Observer, subscribe(), unsubscribe(), notify() y update().</a:t>
             </a:r>
           </a:p>
           <a:p>
             <a:pPr>
               <a:spcAft>
-                <a:spcPts val="1067"/>
+                <a:spcPts val="667"/>
               </a:spcAft>
             </a:pPr>
             <a:r>
-              <a:rPr lang="en-US" sz="1867" b="1" dirty="0">
+              <a:rPr lang="en-US" sz="1733" b="1" dirty="0">
                 <a:solidFill>
                   <a:srgbClr val="FFFFFF"/>
                 </a:solidFill>
                 <a:latin typeface="Calibri"/>
               </a:rPr>
-              <a:t>Metáfora: </a:t>
-            </a:r>
-            <a:r>
-              <a:rPr lang="en-US" sz="1867" dirty="0">
+              <a:t>Por dentro: </a:t>
+            </a:r>
+            <a:r>
+              <a:rPr lang="en-US" sz="1733" dirty="0">
                 <a:solidFill>
                   <a:srgbClr val="BEC5E6"/>
                 </a:solidFill>
                 <a:latin typeface="Calibri"/>
               </a:rPr>
-              <a:t>un canal de YouTube y sus suscriptores.</a:t>
-            </a:r>
-          </a:p>
-          <a:p>
-            <a:pPr>
+              <a:t>el Subject guarda una lista de observadores y la recorre al notificar:</a:t>
+            </a:r>
+          </a:p>
+          <a:p>
+            <a:pPr marL="457189" indent="-457189">
               <a:spcAft>
-                <a:spcPts val="1067"/>
+                <a:spcPts val="667"/>
               </a:spcAft>
+              <a:buSzPct val="100000"/>
+              <a:buFont typeface="+mj-lt"/>
+              <a:buAutoNum type="arabicPeriod"/>
             </a:pPr>
             <a:r>
-              <a:rPr lang="en-US" sz="1867" b="1" dirty="0">
-                <a:solidFill>
-                  <a:srgbClr val="FFFFFF"/>
+              <a:rPr lang="en-US" sz="1733" dirty="0">
+                <a:solidFill>
+                  <a:srgbClr val="BEC5E6"/>
                 </a:solidFill>
                 <a:latin typeface="Calibri"/>
               </a:rPr>
-              <a:t>Sirve para: </a:t>
-            </a:r>
-            <a:r>
-              <a:rPr lang="en-US" sz="1867" dirty="0">
+              <a:t>se registran con subscribe()</a:t>
+            </a:r>
+          </a:p>
+          <a:p>
+            <a:pPr marL="457189" indent="-457189">
+              <a:spcAft>
+                <a:spcPts val="667"/>
+              </a:spcAft>
+              <a:buSzPct val="100000"/>
+              <a:buFont typeface="+mj-lt"/>
+              <a:buAutoNum type="arabicPeriod"/>
+            </a:pPr>
+            <a:r>
+              <a:rPr lang="en-US" sz="1733" dirty="0">
                 <a:solidFill>
                   <a:srgbClr val="BEC5E6"/>
                 </a:solidFill>
                 <a:latin typeface="Calibri"/>
               </a:rPr>
-              <a:t>reaccionar a cambios sin que el emisor conozca a quién </a:t>
-            </a:r>
-            <a:r>
-              <a:rPr lang="en-US" sz="1867" dirty="0" err="1">
+              <a:t>cambia el estado y llama notify()</a:t>
+            </a:r>
+          </a:p>
+          <a:p>
+            <a:pPr marL="457189" indent="-457189">
+              <a:spcAft>
+                <a:spcPts val="667"/>
+              </a:spcAft>
+              <a:buSzPct val="100000"/>
+              <a:buFont typeface="+mj-lt"/>
+              <a:buAutoNum type="arabicPeriod"/>
+            </a:pPr>
+            <a:r>
+              <a:rPr lang="en-US" sz="1733" dirty="0">
                 <a:solidFill>
                   <a:srgbClr val="BEC5E6"/>
                 </a:solidFill>
                 <a:latin typeface="Calibri"/>
               </a:rPr>
-              <a:t>avisa</a:t>
-            </a:r>
-            <a:r>
-              <a:rPr lang="en-US" sz="1867" dirty="0">
-                <a:solidFill>
-                  <a:srgbClr val="BEC5E6"/>
-                </a:solidFill>
-                <a:latin typeface="Calibri"/>
-              </a:rPr>
-              <a:t>.</a:t>
+              <a:t>cada uno recibe update()</a:t>
             </a:r>
           </a:p>
         </p:txBody>
@@ -5457,95 +5850,124 @@
           <a:p>
             <a:pPr>
               <a:spcAft>
-                <a:spcPts val="1067"/>
+                <a:spcPts val="667"/>
               </a:spcAft>
             </a:pPr>
             <a:r>
-              <a:rPr lang="en-US" sz="1867" b="1" dirty="0">
+              <a:rPr lang="en-US" sz="1733" b="1" dirty="0">
                 <a:solidFill>
                   <a:srgbClr val="FFFFFF"/>
                 </a:solidFill>
                 <a:latin typeface="Calibri"/>
               </a:rPr>
-              <a:t>Qué es: </a:t>
-            </a:r>
-            <a:r>
-              <a:rPr lang="en-US" sz="1867" dirty="0">
+              <a:t>Componentes: </a:t>
+            </a:r>
+            <a:r>
+              <a:rPr lang="en-US" sz="1733" dirty="0">
                 <a:solidFill>
                   <a:srgbClr val="BEC5E6"/>
                 </a:solidFill>
                 <a:latin typeface="Calibri"/>
               </a:rPr>
-              <a:t>un intermediario que centraliza la comunicación entre componentes.</a:t>
+              <a:t>interfaz Mediator, mediador concreto y Colleagues.</a:t>
             </a:r>
           </a:p>
           <a:p>
             <a:pPr>
               <a:spcAft>
-                <a:spcPts val="1067"/>
+                <a:spcPts val="667"/>
               </a:spcAft>
             </a:pPr>
             <a:r>
-              <a:rPr lang="en-US" sz="1867" b="1" dirty="0">
+              <a:rPr lang="en-US" sz="1733" b="1" dirty="0">
                 <a:solidFill>
                   <a:srgbClr val="FFFFFF"/>
                 </a:solidFill>
                 <a:latin typeface="Calibri"/>
               </a:rPr>
-              <a:t>Metáfora: </a:t>
-            </a:r>
-            <a:r>
-              <a:rPr lang="en-US" sz="1867" dirty="0">
+              <a:t>Por dentro: </a:t>
+            </a:r>
+            <a:r>
+              <a:rPr lang="en-US" sz="1733" dirty="0">
                 <a:solidFill>
                   <a:srgbClr val="BEC5E6"/>
                 </a:solidFill>
                 <a:latin typeface="Calibri"/>
               </a:rPr>
-              <a:t>la torre de control de un aeropuerto.</a:t>
-            </a:r>
-          </a:p>
-          <a:p>
-            <a:pPr>
+              <a:t>los Colleagues solo conocen al mediador:</a:t>
+            </a:r>
+          </a:p>
+          <a:p>
+            <a:pPr marL="457189" indent="-457189">
               <a:spcAft>
-                <a:spcPts val="1067"/>
+                <a:spcPts val="667"/>
               </a:spcAft>
+              <a:buSzPct val="100000"/>
+              <a:buFont typeface="+mj-lt"/>
+              <a:buAutoNum type="arabicPeriod"/>
             </a:pPr>
             <a:r>
-              <a:rPr lang="en-US" sz="1867" b="1" dirty="0">
-                <a:solidFill>
-                  <a:srgbClr val="FFFFFF"/>
+              <a:rPr lang="en-US" sz="1733" dirty="0">
+                <a:solidFill>
+                  <a:srgbClr val="BEC5E6"/>
                 </a:solidFill>
                 <a:latin typeface="Calibri"/>
               </a:rPr>
-              <a:t>Sirve para: </a:t>
-            </a:r>
-            <a:r>
-              <a:rPr lang="en-US" sz="1867" dirty="0">
+              <a:t>un Colleague le avisa lo que necesita</a:t>
+            </a:r>
+          </a:p>
+          <a:p>
+            <a:pPr marL="457189" indent="-457189">
+              <a:spcAft>
+                <a:spcPts val="667"/>
+              </a:spcAft>
+              <a:buSzPct val="100000"/>
+              <a:buFont typeface="+mj-lt"/>
+              <a:buAutoNum type="arabicPeriod"/>
+            </a:pPr>
+            <a:r>
+              <a:rPr lang="en-US" sz="1733" dirty="0">
                 <a:solidFill>
                   <a:srgbClr val="BEC5E6"/>
                 </a:solidFill>
                 <a:latin typeface="Calibri"/>
               </a:rPr>
-              <a:t>evitar una maraña de dependencias y coordinar en un solo </a:t>
-            </a:r>
-            <a:r>
-              <a:rPr lang="en-US" sz="1867" dirty="0" err="1">
+              <a:t>el mediador decide a quién, en qué orden y con qué reglas</a:t>
+            </a:r>
+          </a:p>
+          <a:p>
+            <a:pPr marL="457189" indent="-457189">
+              <a:spcAft>
+                <a:spcPts val="667"/>
+              </a:spcAft>
+              <a:buSzPct val="100000"/>
+              <a:buFont typeface="+mj-lt"/>
+              <a:buAutoNum type="arabicPeriod"/>
+            </a:pPr>
+            <a:r>
+              <a:rPr lang="en-US" sz="1733" dirty="0">
                 <a:solidFill>
                   <a:srgbClr val="BEC5E6"/>
                 </a:solidFill>
                 <a:latin typeface="Calibri"/>
               </a:rPr>
-              <a:t>lugar</a:t>
-            </a:r>
-            <a:r>
-              <a:rPr lang="en-US" sz="1867" dirty="0">
+              <a:t>los demás responden al </a:t>
+            </a:r>
+            <a:r>
+              <a:rPr lang="en-US" sz="1733" dirty="0" err="1">
                 <a:solidFill>
                   <a:srgbClr val="BEC5E6"/>
                 </a:solidFill>
                 <a:latin typeface="Calibri"/>
               </a:rPr>
-              <a:t>.</a:t>
-            </a:r>
+              <a:t>mediador</a:t>
+            </a:r>
+            <a:endParaRPr lang="en-US" sz="1733" dirty="0">
+              <a:solidFill>
+                <a:srgbClr val="BEC5E6"/>
+              </a:solidFill>
+              <a:latin typeface="Calibri"/>
+            </a:endParaRPr>
           </a:p>
         </p:txBody>
       </p:sp>
@@ -5686,586 +6108,6 @@
                 </a:solidFill>
                 <a:latin typeface="Calibri"/>
               </a:rPr>
-              <a:t>2. </a:t>
-            </a:r>
-            <a:r>
-              <a:rPr lang="en-US" sz="3600" b="1" dirty="0" err="1">
-                <a:solidFill>
-                  <a:srgbClr val="FFFFFF"/>
-                </a:solidFill>
-                <a:latin typeface="Calibri"/>
-              </a:rPr>
-              <a:t>Patrones</a:t>
-            </a:r>
-            <a:r>
-              <a:rPr lang="en-US" sz="3600" b="1" dirty="0">
-                <a:solidFill>
-                  <a:srgbClr val="FFFFFF"/>
-                </a:solidFill>
-                <a:latin typeface="Calibri"/>
-              </a:rPr>
-              <a:t>: Características</a:t>
-            </a:r>
-          </a:p>
-        </p:txBody>
-      </p:sp>
-      <p:sp>
-        <p:nvSpPr>
-          <p:cNvPr id="25" name="Slide Number Placeholder 0"/>
-          <p:cNvSpPr>
-            <a:spLocks noGrp="1"/>
-          </p:cNvSpPr>
-          <p:nvPr>
-            <p:ph type="sldNum" sz="quarter" idx="4294967295"/>
-          </p:nvPr>
-        </p:nvSpPr>
-        <p:spPr>
-          <a:xfrm>
-            <a:off x="11094720" y="6339840"/>
-            <a:ext cx="609600" cy="365760"/>
-          </a:xfrm>
-          <a:prstGeom prst="rect">
-            <a:avLst/>
-          </a:prstGeom>
-          <a:extLst>
-            <a:ext uri="{C572A759-6A51-4108-AA02-DFA0A04FC94B}">
-              <ma14:wrappingTextBoxFlag xmlns:ma14="http://schemas.microsoft.com/office/mac/drawingml/2011/main" xmlns="" val="0"/>
-            </a:ext>
-          </a:extLst>
-        </p:spPr>
-        <p:txBody>
-          <a:bodyPr/>
-          <a:lstStyle>
-            <a:lvl1pPr>
-              <a:defRPr sz="1333">
-                <a:solidFill>
-                  <a:schemeClr val="tx1"/>
-                </a:solidFill>
-              </a:defRPr>
-            </a:lvl1pPr>
-          </a:lstStyle>
-          <a:p>
-            <a:pPr algn="l"/>
-            <a:fld id="{F7021451-1387-4CA6-816F-3879F97B5CBC}" type="slidenum">
-              <a:rPr lang="en-US" b="0">
-                <a:solidFill>
-                  <a:srgbClr val="BEC5E6"/>
-                </a:solidFill>
-              </a:rPr>
-              <a:t>12</a:t>
-            </a:fld>
-            <a:endParaRPr lang="en-US"/>
-          </a:p>
-        </p:txBody>
-      </p:sp>
-      <p:sp>
-        <p:nvSpPr>
-          <p:cNvPr id="3" name="Text 1"/>
-          <p:cNvSpPr txBox="1"/>
-          <p:nvPr/>
-        </p:nvSpPr>
-        <p:spPr>
-          <a:xfrm>
-            <a:off x="731520" y="1402080"/>
-            <a:ext cx="4998720" cy="487680"/>
-          </a:xfrm>
-          <a:prstGeom prst="rect">
-            <a:avLst/>
-          </a:prstGeom>
-          <a:noFill/>
-          <a:ln/>
-        </p:spPr>
-        <p:txBody>
-          <a:bodyPr wrap="square" lIns="0" tIns="0" rIns="0" bIns="0" rtlCol="0" anchor="t"/>
-          <a:lstStyle/>
-          <a:p>
-            <a:r>
-              <a:rPr lang="en-US" sz="2667" b="1" dirty="0">
-                <a:solidFill>
-                  <a:srgbClr val="F4B942"/>
-                </a:solidFill>
-                <a:latin typeface="Calibri"/>
-              </a:rPr>
-              <a:t>Observer</a:t>
-            </a:r>
-            <a:endParaRPr lang="en-US" sz="2667" dirty="0"/>
-          </a:p>
-        </p:txBody>
-      </p:sp>
-      <p:sp>
-        <p:nvSpPr>
-          <p:cNvPr id="4" name="Text 2"/>
-          <p:cNvSpPr txBox="1"/>
-          <p:nvPr/>
-        </p:nvSpPr>
-        <p:spPr>
-          <a:xfrm>
-            <a:off x="6461760" y="1402080"/>
-            <a:ext cx="4998720" cy="487680"/>
-          </a:xfrm>
-          <a:prstGeom prst="rect">
-            <a:avLst/>
-          </a:prstGeom>
-          <a:noFill/>
-          <a:ln/>
-        </p:spPr>
-        <p:txBody>
-          <a:bodyPr wrap="square" lIns="0" tIns="0" rIns="0" bIns="0" rtlCol="0" anchor="t"/>
-          <a:lstStyle/>
-          <a:p>
-            <a:r>
-              <a:rPr lang="en-US" sz="2667" b="1" dirty="0">
-                <a:solidFill>
-                  <a:srgbClr val="F4B942"/>
-                </a:solidFill>
-                <a:latin typeface="Calibri"/>
-              </a:rPr>
-              <a:t>Mediator</a:t>
-            </a:r>
-            <a:endParaRPr lang="en-US" sz="2667" dirty="0"/>
-          </a:p>
-        </p:txBody>
-      </p:sp>
-      <p:sp>
-        <p:nvSpPr>
-          <p:cNvPr id="5" name="Separador"/>
-          <p:cNvSpPr/>
-          <p:nvPr/>
-        </p:nvSpPr>
-        <p:spPr>
-          <a:xfrm>
-            <a:off x="6035040" y="1463040"/>
-            <a:ext cx="0" cy="4632960"/>
-          </a:xfrm>
-          <a:prstGeom prst="line">
-            <a:avLst/>
-          </a:prstGeom>
-          <a:noFill/>
-          <a:ln w="12700">
-            <a:solidFill>
-              <a:srgbClr val="2B3270"/>
-            </a:solidFill>
-            <a:prstDash val="solid"/>
-          </a:ln>
-        </p:spPr>
-        <p:txBody>
-          <a:bodyPr/>
-          <a:lstStyle/>
-          <a:p>
-            <a:endParaRPr lang="es-419" sz="2400"/>
-          </a:p>
-        </p:txBody>
-      </p:sp>
-      <p:sp>
-        <p:nvSpPr>
-          <p:cNvPr id="6" name="Text 4"/>
-          <p:cNvSpPr txBox="1"/>
-          <p:nvPr/>
-        </p:nvSpPr>
-        <p:spPr>
-          <a:xfrm>
-            <a:off x="731520" y="2011680"/>
-            <a:ext cx="4998720" cy="4145280"/>
-          </a:xfrm>
-          <a:prstGeom prst="rect">
-            <a:avLst/>
-          </a:prstGeom>
-          <a:noFill/>
-          <a:ln/>
-        </p:spPr>
-        <p:txBody>
-          <a:bodyPr wrap="square" lIns="0" tIns="0" rIns="0" bIns="0" rtlCol="0" anchor="t"/>
-          <a:lstStyle/>
-          <a:p>
-            <a:pPr>
-              <a:spcAft>
-                <a:spcPts val="667"/>
-              </a:spcAft>
-            </a:pPr>
-            <a:r>
-              <a:rPr lang="en-US" sz="1733" b="1" dirty="0">
-                <a:solidFill>
-                  <a:srgbClr val="FFFFFF"/>
-                </a:solidFill>
-                <a:latin typeface="Calibri"/>
-              </a:rPr>
-              <a:t>Componentes: </a:t>
-            </a:r>
-            <a:r>
-              <a:rPr lang="en-US" sz="1733" dirty="0">
-                <a:solidFill>
-                  <a:srgbClr val="BEC5E6"/>
-                </a:solidFill>
-                <a:latin typeface="Calibri"/>
-              </a:rPr>
-              <a:t>Subject, Observer, subscribe(), unsubscribe(), notify() y update().</a:t>
-            </a:r>
-          </a:p>
-          <a:p>
-            <a:pPr>
-              <a:spcAft>
-                <a:spcPts val="667"/>
-              </a:spcAft>
-            </a:pPr>
-            <a:r>
-              <a:rPr lang="en-US" sz="1733" b="1" dirty="0">
-                <a:solidFill>
-                  <a:srgbClr val="FFFFFF"/>
-                </a:solidFill>
-                <a:latin typeface="Calibri"/>
-              </a:rPr>
-              <a:t>Por dentro: </a:t>
-            </a:r>
-            <a:r>
-              <a:rPr lang="en-US" sz="1733" dirty="0">
-                <a:solidFill>
-                  <a:srgbClr val="BEC5E6"/>
-                </a:solidFill>
-                <a:latin typeface="Calibri"/>
-              </a:rPr>
-              <a:t>el Subject guarda una lista de observadores y la recorre al notificar:</a:t>
-            </a:r>
-          </a:p>
-          <a:p>
-            <a:pPr marL="457189" indent="-457189">
-              <a:spcAft>
-                <a:spcPts val="667"/>
-              </a:spcAft>
-              <a:buSzPct val="100000"/>
-              <a:buFont typeface="+mj-lt"/>
-              <a:buAutoNum type="arabicPeriod"/>
-            </a:pPr>
-            <a:r>
-              <a:rPr lang="en-US" sz="1733" dirty="0">
-                <a:solidFill>
-                  <a:srgbClr val="BEC5E6"/>
-                </a:solidFill>
-                <a:latin typeface="Calibri"/>
-              </a:rPr>
-              <a:t>se registran con subscribe()</a:t>
-            </a:r>
-          </a:p>
-          <a:p>
-            <a:pPr marL="457189" indent="-457189">
-              <a:spcAft>
-                <a:spcPts val="667"/>
-              </a:spcAft>
-              <a:buSzPct val="100000"/>
-              <a:buFont typeface="+mj-lt"/>
-              <a:buAutoNum type="arabicPeriod"/>
-            </a:pPr>
-            <a:r>
-              <a:rPr lang="en-US" sz="1733" dirty="0">
-                <a:solidFill>
-                  <a:srgbClr val="BEC5E6"/>
-                </a:solidFill>
-                <a:latin typeface="Calibri"/>
-              </a:rPr>
-              <a:t>cambia el estado y llama notify()</a:t>
-            </a:r>
-          </a:p>
-          <a:p>
-            <a:pPr marL="457189" indent="-457189">
-              <a:spcAft>
-                <a:spcPts val="667"/>
-              </a:spcAft>
-              <a:buSzPct val="100000"/>
-              <a:buFont typeface="+mj-lt"/>
-              <a:buAutoNum type="arabicPeriod"/>
-            </a:pPr>
-            <a:r>
-              <a:rPr lang="en-US" sz="1733" dirty="0">
-                <a:solidFill>
-                  <a:srgbClr val="BEC5E6"/>
-                </a:solidFill>
-                <a:latin typeface="Calibri"/>
-              </a:rPr>
-              <a:t>cada uno recibe update()</a:t>
-            </a:r>
-          </a:p>
-        </p:txBody>
-      </p:sp>
-      <p:sp>
-        <p:nvSpPr>
-          <p:cNvPr id="7" name="Text 5"/>
-          <p:cNvSpPr txBox="1"/>
-          <p:nvPr/>
-        </p:nvSpPr>
-        <p:spPr>
-          <a:xfrm>
-            <a:off x="6461760" y="2011680"/>
-            <a:ext cx="4998720" cy="4145280"/>
-          </a:xfrm>
-          <a:prstGeom prst="rect">
-            <a:avLst/>
-          </a:prstGeom>
-          <a:noFill/>
-          <a:ln/>
-        </p:spPr>
-        <p:txBody>
-          <a:bodyPr wrap="square" lIns="0" tIns="0" rIns="0" bIns="0" rtlCol="0" anchor="t"/>
-          <a:lstStyle/>
-          <a:p>
-            <a:pPr>
-              <a:spcAft>
-                <a:spcPts val="667"/>
-              </a:spcAft>
-            </a:pPr>
-            <a:r>
-              <a:rPr lang="en-US" sz="1733" b="1" dirty="0">
-                <a:solidFill>
-                  <a:srgbClr val="FFFFFF"/>
-                </a:solidFill>
-                <a:latin typeface="Calibri"/>
-              </a:rPr>
-              <a:t>Componentes: </a:t>
-            </a:r>
-            <a:r>
-              <a:rPr lang="en-US" sz="1733" dirty="0">
-                <a:solidFill>
-                  <a:srgbClr val="BEC5E6"/>
-                </a:solidFill>
-                <a:latin typeface="Calibri"/>
-              </a:rPr>
-              <a:t>interfaz Mediator, mediador concreto y Colleagues.</a:t>
-            </a:r>
-          </a:p>
-          <a:p>
-            <a:pPr>
-              <a:spcAft>
-                <a:spcPts val="667"/>
-              </a:spcAft>
-            </a:pPr>
-            <a:r>
-              <a:rPr lang="en-US" sz="1733" b="1" dirty="0">
-                <a:solidFill>
-                  <a:srgbClr val="FFFFFF"/>
-                </a:solidFill>
-                <a:latin typeface="Calibri"/>
-              </a:rPr>
-              <a:t>Por dentro: </a:t>
-            </a:r>
-            <a:r>
-              <a:rPr lang="en-US" sz="1733" dirty="0">
-                <a:solidFill>
-                  <a:srgbClr val="BEC5E6"/>
-                </a:solidFill>
-                <a:latin typeface="Calibri"/>
-              </a:rPr>
-              <a:t>los Colleagues solo conocen al mediador:</a:t>
-            </a:r>
-          </a:p>
-          <a:p>
-            <a:pPr marL="457189" indent="-457189">
-              <a:spcAft>
-                <a:spcPts val="667"/>
-              </a:spcAft>
-              <a:buSzPct val="100000"/>
-              <a:buFont typeface="+mj-lt"/>
-              <a:buAutoNum type="arabicPeriod"/>
-            </a:pPr>
-            <a:r>
-              <a:rPr lang="en-US" sz="1733" dirty="0">
-                <a:solidFill>
-                  <a:srgbClr val="BEC5E6"/>
-                </a:solidFill>
-                <a:latin typeface="Calibri"/>
-              </a:rPr>
-              <a:t>un Colleague le avisa lo que necesita</a:t>
-            </a:r>
-          </a:p>
-          <a:p>
-            <a:pPr marL="457189" indent="-457189">
-              <a:spcAft>
-                <a:spcPts val="667"/>
-              </a:spcAft>
-              <a:buSzPct val="100000"/>
-              <a:buFont typeface="+mj-lt"/>
-              <a:buAutoNum type="arabicPeriod"/>
-            </a:pPr>
-            <a:r>
-              <a:rPr lang="en-US" sz="1733" dirty="0">
-                <a:solidFill>
-                  <a:srgbClr val="BEC5E6"/>
-                </a:solidFill>
-                <a:latin typeface="Calibri"/>
-              </a:rPr>
-              <a:t>el mediador decide a quién, en qué orden y con qué reglas</a:t>
-            </a:r>
-          </a:p>
-          <a:p>
-            <a:pPr marL="457189" indent="-457189">
-              <a:spcAft>
-                <a:spcPts val="667"/>
-              </a:spcAft>
-              <a:buSzPct val="100000"/>
-              <a:buFont typeface="+mj-lt"/>
-              <a:buAutoNum type="arabicPeriod"/>
-            </a:pPr>
-            <a:r>
-              <a:rPr lang="en-US" sz="1733" dirty="0">
-                <a:solidFill>
-                  <a:srgbClr val="BEC5E6"/>
-                </a:solidFill>
-                <a:latin typeface="Calibri"/>
-              </a:rPr>
-              <a:t>los demás responden al </a:t>
-            </a:r>
-            <a:r>
-              <a:rPr lang="en-US" sz="1733" dirty="0" err="1">
-                <a:solidFill>
-                  <a:srgbClr val="BEC5E6"/>
-                </a:solidFill>
-                <a:latin typeface="Calibri"/>
-              </a:rPr>
-              <a:t>mediador</a:t>
-            </a:r>
-            <a:endParaRPr lang="en-US" sz="1733" dirty="0">
-              <a:solidFill>
-                <a:srgbClr val="BEC5E6"/>
-              </a:solidFill>
-              <a:latin typeface="Calibri"/>
-            </a:endParaRPr>
-          </a:p>
-        </p:txBody>
-      </p:sp>
-    </p:spTree>
-  </p:cSld>
-  <p:clrMapOvr>
-    <a:masterClrMapping/>
-  </p:clrMapOvr>
-</p:sld>
-</file>
-
-<file path=ppt/slides/slide13.xml><?xml version="1.0" encoding="utf-8"?>
-<p:sld xmlns:a="http://schemas.openxmlformats.org/drawingml/2006/main" xmlns:r="http://schemas.openxmlformats.org/officeDocument/2006/relationships" xmlns:p="http://schemas.openxmlformats.org/presentationml/2006/main">
-  <p:cSld>
-    <p:bg>
-      <p:bgPr>
-        <a:solidFill>
-          <a:srgbClr val="0F122D"/>
-        </a:solidFill>
-        <a:effectLst/>
-      </p:bgPr>
-    </p:bg>
-    <p:spTree>
-      <p:nvGrpSpPr>
-        <p:cNvPr id="1" name=""/>
-        <p:cNvGrpSpPr/>
-        <p:nvPr/>
-      </p:nvGrpSpPr>
-      <p:grpSpPr>
-        <a:xfrm>
-          <a:off x="0" y="0"/>
-          <a:ext cx="0" cy="0"/>
-          <a:chOff x="0" y="0"/>
-          <a:chExt cx="0" cy="0"/>
-        </a:xfrm>
-      </p:grpSpPr>
-      <p:sp>
-        <p:nvSpPr>
-          <p:cNvPr id="9999" name="Elipse 2">
-            <a:extLst>
-              <a:ext uri="{FF2B5EF4-FFF2-40B4-BE49-F238E27FC236}">
-                <a16:creationId xmlns:a16="http://schemas.microsoft.com/office/drawing/2014/main" id="{73E27086-79B5-6F79-3728-22245EE1FBD1}"/>
-              </a:ext>
-            </a:extLst>
-          </p:cNvPr>
-          <p:cNvSpPr/>
-          <p:nvPr/>
-        </p:nvSpPr>
-        <p:spPr>
-          <a:xfrm>
-            <a:off x="10160000" y="-1016000"/>
-            <a:ext cx="3302000" cy="3302000"/>
-          </a:xfrm>
-          <a:prstGeom prst="ellipse">
-            <a:avLst/>
-          </a:prstGeom>
-          <a:solidFill>
-            <a:srgbClr val="6473F5">
-              <a:alpha val="20000"/>
-            </a:srgbClr>
-          </a:solidFill>
-          <a:ln w="19050" cap="flat" cmpd="sng" algn="ctr">
-            <a:noFill/>
-            <a:prstDash val="solid"/>
-            <a:miter lim="800000"/>
-          </a:ln>
-          <a:effectLst/>
-          <a:extLst>
-            <a:ext uri="{91240B29-F687-4F45-9708-019B960494DF}">
-              <a14:hiddenLine xmlns:a14="http://schemas.microsoft.com/office/drawing/2010/main" w="19050" cap="flat" cmpd="sng" algn="ctr">
-                <a:solidFill>
-                  <a:schemeClr val="accent1">
-                    <a:shade val="15000"/>
-                  </a:schemeClr>
-                </a:solidFill>
-                <a:prstDash val="solid"/>
-                <a:miter lim="800000"/>
-              </a14:hiddenLine>
-            </a:ext>
-          </a:extLst>
-        </p:spPr>
-        <p:style>
-          <a:lnRef idx="2">
-            <a:schemeClr val="accent1">
-              <a:shade val="15000"/>
-            </a:schemeClr>
-          </a:lnRef>
-          <a:fillRef idx="1">
-            <a:schemeClr val="accent1"/>
-          </a:fillRef>
-          <a:effectRef idx="0">
-            <a:schemeClr val="accent1"/>
-          </a:effectRef>
-          <a:fontRef idx="minor">
-            <a:schemeClr val="lt1"/>
-          </a:fontRef>
-        </p:style>
-        <p:txBody>
-          <a:bodyPr rtlCol="0" anchor="ctr"/>
-          <a:lstStyle/>
-          <a:p>
-            <a:pPr algn="ctr"/>
-            <a:endParaRPr lang="es-CO"/>
-          </a:p>
-        </p:txBody>
-      </p:sp>
-      <p:sp>
-        <p:nvSpPr>
-          <p:cNvPr id="2" name="Text 0"/>
-          <p:cNvSpPr>
-            <a:spLocks noGrp="1"/>
-          </p:cNvSpPr>
-          <p:nvPr>
-            <p:ph type="title" idx="100"/>
-          </p:nvPr>
-        </p:nvSpPr>
-        <p:spPr>
-          <a:xfrm>
-            <a:off x="630936" y="320040"/>
-            <a:ext cx="10158984" cy="886968"/>
-          </a:xfrm>
-          <a:prstGeom prst="rect">
-            <a:avLst/>
-          </a:prstGeom>
-          <a:noFill/>
-          <a:ln/>
-        </p:spPr>
-        <p:txBody>
-          <a:bodyPr vert="horz" wrap="square" lIns="0" tIns="0" rIns="0" bIns="0" rtlCol="0" anchor="ctr">
-            <a:normAutofit/>
-          </a:bodyPr>
-          <a:lstStyle/>
-          <a:p>
-            <a:r>
-              <a:rPr lang="en-US" sz="3600" b="1" dirty="0">
-                <a:solidFill>
-                  <a:srgbClr val="FFFFFF"/>
-                </a:solidFill>
-                <a:latin typeface="Calibri"/>
-              </a:rPr>
               <a:t>3. </a:t>
             </a:r>
             <a:r>
@@ -6309,7 +6151,7 @@
           </a:prstGeom>
           <a:extLst>
             <a:ext uri="{C572A759-6A51-4108-AA02-DFA0A04FC94B}">
-              <ma14:wrappingTextBoxFlag xmlns:ma14="http://schemas.microsoft.com/office/mac/drawingml/2011/main" xmlns="" val="0"/>
+              <ma14:wrappingTextBoxFlag xmlns="" xmlns:ma14="http://schemas.microsoft.com/office/mac/drawingml/2011/main" val="0"/>
             </a:ext>
           </a:extLst>
         </p:spPr>
@@ -6332,7 +6174,7 @@
                   <a:srgbClr val="BEC5E6"/>
                 </a:solidFill>
               </a:rPr>
-              <a:t>13</a:t>
+              <a:t>12</a:t>
             </a:fld>
             <a:endParaRPr lang="en-US"/>
           </a:p>
@@ -7232,7 +7074,7 @@
 </p:sld>
 </file>
 
-<file path=ppt/slides/slide14.xml><?xml version="1.0" encoding="utf-8"?>
+<file path=ppt/slides/slide13.xml><?xml version="1.0" encoding="utf-8"?>
 <p:sld xmlns:a="http://schemas.openxmlformats.org/drawingml/2006/main" xmlns:r="http://schemas.openxmlformats.org/officeDocument/2006/relationships" xmlns:p="http://schemas.openxmlformats.org/presentationml/2006/main">
   <p:cSld>
     <p:bg>
@@ -8793,7 +8635,7 @@
 </p:sld>
 </file>
 
-<file path=ppt/slides/slide15.xml><?xml version="1.0" encoding="utf-8"?>
+<file path=ppt/slides/slide14.xml><?xml version="1.0" encoding="utf-8"?>
 <p:sld xmlns:a="http://schemas.openxmlformats.org/drawingml/2006/main" xmlns:r="http://schemas.openxmlformats.org/officeDocument/2006/relationships" xmlns:p="http://schemas.openxmlformats.org/presentationml/2006/main">
   <p:cSld>
     <p:bg>
@@ -10532,2205 +10374,7 @@
 </p:sld>
 </file>
 
-<file path=ppt/slides/slide16.xml><?xml version="1.0" encoding="utf-8"?>
-<p:sld xmlns:a="http://schemas.openxmlformats.org/drawingml/2006/main" xmlns:r="http://schemas.openxmlformats.org/officeDocument/2006/relationships" xmlns:p="http://schemas.openxmlformats.org/presentationml/2006/main">
-  <p:cSld>
-    <p:bg>
-      <p:bgPr>
-        <a:solidFill>
-          <a:srgbClr val="0F122D"/>
-        </a:solidFill>
-        <a:effectLst/>
-      </p:bgPr>
-    </p:bg>
-    <p:spTree>
-      <p:nvGrpSpPr>
-        <p:cNvPr id="1" name=""/>
-        <p:cNvGrpSpPr/>
-        <p:nvPr/>
-      </p:nvGrpSpPr>
-      <p:grpSpPr>
-        <a:xfrm>
-          <a:off x="0" y="0"/>
-          <a:ext cx="0" cy="0"/>
-          <a:chOff x="0" y="0"/>
-          <a:chExt cx="0" cy="0"/>
-        </a:xfrm>
-      </p:grpSpPr>
-      <p:sp>
-        <p:nvSpPr>
-          <p:cNvPr id="3" name="Elipse 2">
-            <a:extLst>
-              <a:ext uri="{FF2B5EF4-FFF2-40B4-BE49-F238E27FC236}">
-                <a16:creationId xmlns:a16="http://schemas.microsoft.com/office/drawing/2014/main" id="{DC6E74A2-15A2-7A09-D535-1AEE4D0C23F0}"/>
-              </a:ext>
-            </a:extLst>
-          </p:cNvPr>
-          <p:cNvSpPr/>
-          <p:nvPr/>
-        </p:nvSpPr>
-        <p:spPr>
-          <a:xfrm>
-            <a:off x="10160000" y="-1016000"/>
-            <a:ext cx="3302000" cy="3302000"/>
-          </a:xfrm>
-          <a:prstGeom prst="ellipse">
-            <a:avLst/>
-          </a:prstGeom>
-          <a:solidFill>
-            <a:srgbClr val="6473F5">
-              <a:alpha val="20000"/>
-            </a:srgbClr>
-          </a:solidFill>
-          <a:ln w="19050" cap="flat" cmpd="sng" algn="ctr">
-            <a:noFill/>
-            <a:prstDash val="solid"/>
-            <a:miter lim="800000"/>
-          </a:ln>
-          <a:effectLst/>
-          <a:extLst>
-            <a:ext uri="{91240B29-F687-4F45-9708-019B960494DF}">
-              <a14:hiddenLine xmlns:a14="http://schemas.microsoft.com/office/drawing/2010/main" w="19050" cap="flat" cmpd="sng" algn="ctr">
-                <a:solidFill>
-                  <a:schemeClr val="accent1">
-                    <a:shade val="15000"/>
-                  </a:schemeClr>
-                </a:solidFill>
-                <a:prstDash val="solid"/>
-                <a:miter lim="800000"/>
-              </a14:hiddenLine>
-            </a:ext>
-          </a:extLst>
-        </p:spPr>
-        <p:style>
-          <a:lnRef idx="2">
-            <a:schemeClr val="accent1">
-              <a:shade val="15000"/>
-            </a:schemeClr>
-          </a:lnRef>
-          <a:fillRef idx="1">
-            <a:schemeClr val="accent1"/>
-          </a:fillRef>
-          <a:effectRef idx="0">
-            <a:schemeClr val="accent1"/>
-          </a:effectRef>
-          <a:fontRef idx="minor">
-            <a:schemeClr val="lt1"/>
-          </a:fontRef>
-        </p:style>
-        <p:txBody>
-          <a:bodyPr rtlCol="0" anchor="ctr"/>
-          <a:lstStyle/>
-          <a:p>
-            <a:pPr algn="ctr"/>
-            <a:endParaRPr lang="es-CO"/>
-          </a:p>
-        </p:txBody>
-      </p:sp>
-      <p:sp>
-        <p:nvSpPr>
-          <p:cNvPr id="2" name="Título 1">
-            <a:extLst>
-              <a:ext uri="{FF2B5EF4-FFF2-40B4-BE49-F238E27FC236}">
-                <a16:creationId xmlns:a16="http://schemas.microsoft.com/office/drawing/2014/main" id="{5C8B15EA-5FC4-E87E-3FC9-72F1208C3E8B}"/>
-              </a:ext>
-            </a:extLst>
-          </p:cNvPr>
-          <p:cNvSpPr>
-            <a:spLocks noGrp="1"/>
-          </p:cNvSpPr>
-          <p:nvPr>
-            <p:ph type="title"/>
-          </p:nvPr>
-        </p:nvSpPr>
-        <p:spPr>
-          <a:xfrm>
-            <a:off x="635000" y="317500"/>
-            <a:ext cx="10160000" cy="889000"/>
-          </a:xfrm>
-        </p:spPr>
-        <p:txBody>
-          <a:bodyPr anchor="ctr">
-            <a:normAutofit/>
-          </a:bodyPr>
-          <a:lstStyle/>
-          <a:p>
-            <a:r>
-              <a:rPr lang="es-CO" sz="3600" b="1" dirty="0">
-                <a:solidFill>
-                  <a:srgbClr val="FFFFFF"/>
-                </a:solidFill>
-                <a:latin typeface="Calibri" panose="020F0502020204030204" pitchFamily="34" charset="0"/>
-              </a:rPr>
-              <a:t>4. Ideas para llevarse</a:t>
-            </a:r>
-          </a:p>
-        </p:txBody>
-      </p:sp>
-      <p:sp>
-        <p:nvSpPr>
-          <p:cNvPr id="4" name="Rectángulo: esquinas redondeadas 3">
-            <a:extLst>
-              <a:ext uri="{FF2B5EF4-FFF2-40B4-BE49-F238E27FC236}">
-                <a16:creationId xmlns:a16="http://schemas.microsoft.com/office/drawing/2014/main" id="{7379093D-A92A-233B-EC9F-563C0D8AFE41}"/>
-              </a:ext>
-            </a:extLst>
-          </p:cNvPr>
-          <p:cNvSpPr/>
-          <p:nvPr/>
-        </p:nvSpPr>
-        <p:spPr>
-          <a:xfrm>
-            <a:off x="635000" y="1587500"/>
-            <a:ext cx="10922000" cy="1397000"/>
-          </a:xfrm>
-          <a:prstGeom prst="roundRect">
-            <a:avLst>
-              <a:gd name="adj" fmla="val 8000"/>
-            </a:avLst>
-          </a:prstGeom>
-          <a:solidFill>
-            <a:srgbClr val="202658"/>
-          </a:solidFill>
-          <a:ln w="19050" cap="flat" cmpd="sng" algn="ctr">
-            <a:noFill/>
-            <a:prstDash val="solid"/>
-            <a:miter lim="800000"/>
-          </a:ln>
-          <a:effectLst/>
-          <a:extLst>
-            <a:ext uri="{91240B29-F687-4F45-9708-019B960494DF}">
-              <a14:hiddenLine xmlns:a14="http://schemas.microsoft.com/office/drawing/2010/main" w="19050" cap="flat" cmpd="sng" algn="ctr">
-                <a:solidFill>
-                  <a:schemeClr val="accent1">
-                    <a:shade val="15000"/>
-                  </a:schemeClr>
-                </a:solidFill>
-                <a:prstDash val="solid"/>
-                <a:miter lim="800000"/>
-              </a14:hiddenLine>
-            </a:ext>
-          </a:extLst>
-        </p:spPr>
-        <p:style>
-          <a:lnRef idx="2">
-            <a:schemeClr val="accent1">
-              <a:shade val="15000"/>
-            </a:schemeClr>
-          </a:lnRef>
-          <a:fillRef idx="1">
-            <a:schemeClr val="accent1"/>
-          </a:fillRef>
-          <a:effectRef idx="0">
-            <a:schemeClr val="accent1"/>
-          </a:effectRef>
-          <a:fontRef idx="minor">
-            <a:schemeClr val="lt1"/>
-          </a:fontRef>
-        </p:style>
-        <p:txBody>
-          <a:bodyPr rtlCol="0" anchor="ctr"/>
-          <a:lstStyle/>
-          <a:p>
-            <a:pPr algn="ctr"/>
-            <a:endParaRPr lang="es-CO"/>
-          </a:p>
-        </p:txBody>
-      </p:sp>
-      <p:sp>
-        <p:nvSpPr>
-          <p:cNvPr id="5" name="Elipse 4">
-            <a:extLst>
-              <a:ext uri="{FF2B5EF4-FFF2-40B4-BE49-F238E27FC236}">
-                <a16:creationId xmlns:a16="http://schemas.microsoft.com/office/drawing/2014/main" id="{5B7E2722-1169-4AC8-3AA5-D00F918595F4}"/>
-              </a:ext>
-            </a:extLst>
-          </p:cNvPr>
-          <p:cNvSpPr/>
-          <p:nvPr/>
-        </p:nvSpPr>
-        <p:spPr>
-          <a:xfrm>
-            <a:off x="939800" y="1879600"/>
-            <a:ext cx="812800" cy="812800"/>
-          </a:xfrm>
-          <a:prstGeom prst="ellipse">
-            <a:avLst/>
-          </a:prstGeom>
-          <a:solidFill>
-            <a:srgbClr val="6473F5"/>
-          </a:solidFill>
-          <a:ln w="19050" cap="flat" cmpd="sng" algn="ctr">
-            <a:noFill/>
-            <a:prstDash val="solid"/>
-            <a:miter lim="800000"/>
-          </a:ln>
-          <a:effectLst/>
-          <a:extLst>
-            <a:ext uri="{91240B29-F687-4F45-9708-019B960494DF}">
-              <a14:hiddenLine xmlns:a14="http://schemas.microsoft.com/office/drawing/2010/main" w="19050" cap="flat" cmpd="sng" algn="ctr">
-                <a:solidFill>
-                  <a:schemeClr val="accent1">
-                    <a:shade val="15000"/>
-                  </a:schemeClr>
-                </a:solidFill>
-                <a:prstDash val="solid"/>
-                <a:miter lim="800000"/>
-              </a14:hiddenLine>
-            </a:ext>
-          </a:extLst>
-        </p:spPr>
-        <p:style>
-          <a:lnRef idx="2">
-            <a:schemeClr val="accent1">
-              <a:shade val="15000"/>
-            </a:schemeClr>
-          </a:lnRef>
-          <a:fillRef idx="1">
-            <a:schemeClr val="accent1"/>
-          </a:fillRef>
-          <a:effectRef idx="0">
-            <a:schemeClr val="accent1"/>
-          </a:effectRef>
-          <a:fontRef idx="minor">
-            <a:schemeClr val="lt1"/>
-          </a:fontRef>
-        </p:style>
-        <p:txBody>
-          <a:bodyPr wrap="none" lIns="0" tIns="0" rIns="0" bIns="0" rtlCol="0" anchor="ctr"/>
-          <a:lstStyle/>
-          <a:p>
-            <a:pPr algn="ctr"/>
-            <a:r>
-              <a:rPr lang="es-CO" sz="3200" b="1">
-                <a:solidFill>
-                  <a:srgbClr val="0F122D"/>
-                </a:solidFill>
-                <a:latin typeface="Calibri" panose="020F0502020204030204" pitchFamily="34" charset="0"/>
-              </a:rPr>
-              <a:t>1</a:t>
-            </a:r>
-          </a:p>
-        </p:txBody>
-      </p:sp>
-      <p:sp>
-        <p:nvSpPr>
-          <p:cNvPr id="6" name="CuadroTexto 5">
-            <a:extLst>
-              <a:ext uri="{FF2B5EF4-FFF2-40B4-BE49-F238E27FC236}">
-                <a16:creationId xmlns:a16="http://schemas.microsoft.com/office/drawing/2014/main" id="{9E1E8651-9D4A-FA26-4675-C8536845F09D}"/>
-              </a:ext>
-            </a:extLst>
-          </p:cNvPr>
-          <p:cNvSpPr txBox="1"/>
-          <p:nvPr/>
-        </p:nvSpPr>
-        <p:spPr>
-          <a:xfrm>
-            <a:off x="2159000" y="1765300"/>
-            <a:ext cx="9017000" cy="431800"/>
-          </a:xfrm>
-          <a:prstGeom prst="rect">
-            <a:avLst/>
-          </a:prstGeom>
-          <a:noFill/>
-        </p:spPr>
-        <p:txBody>
-          <a:bodyPr vert="horz" wrap="square" lIns="0" tIns="0" rIns="0" bIns="0" rtlCol="0">
-            <a:noAutofit/>
-          </a:bodyPr>
-          <a:lstStyle/>
-          <a:p>
-            <a:pPr>
-              <a:spcAft>
-                <a:spcPts val="800"/>
-              </a:spcAft>
-            </a:pPr>
-            <a:r>
-              <a:rPr lang="es-CO" sz="2400" b="1">
-                <a:solidFill>
-                  <a:srgbClr val="6473F5"/>
-                </a:solidFill>
-                <a:latin typeface="Calibri" panose="020F0502020204030204" pitchFamily="34" charset="0"/>
-              </a:rPr>
-              <a:t>SOA</a:t>
-            </a:r>
-          </a:p>
-        </p:txBody>
-      </p:sp>
-      <p:sp>
-        <p:nvSpPr>
-          <p:cNvPr id="7" name="CuadroTexto 6">
-            <a:extLst>
-              <a:ext uri="{FF2B5EF4-FFF2-40B4-BE49-F238E27FC236}">
-                <a16:creationId xmlns:a16="http://schemas.microsoft.com/office/drawing/2014/main" id="{28DF59AA-2BC4-061E-8741-DD1C2E9CC32D}"/>
-              </a:ext>
-            </a:extLst>
-          </p:cNvPr>
-          <p:cNvSpPr txBox="1"/>
-          <p:nvPr/>
-        </p:nvSpPr>
-        <p:spPr>
-          <a:xfrm>
-            <a:off x="2159000" y="2247900"/>
-            <a:ext cx="9017000" cy="660400"/>
-          </a:xfrm>
-          <a:prstGeom prst="rect">
-            <a:avLst/>
-          </a:prstGeom>
-          <a:noFill/>
-        </p:spPr>
-        <p:txBody>
-          <a:bodyPr vert="horz" wrap="square" lIns="0" tIns="0" rIns="0" bIns="0" rtlCol="0">
-            <a:noAutofit/>
-          </a:bodyPr>
-          <a:lstStyle/>
-          <a:p>
-            <a:pPr>
-              <a:spcAft>
-                <a:spcPts val="800"/>
-              </a:spcAft>
-            </a:pPr>
-            <a:r>
-              <a:rPr lang="es-ES" sz="1700">
-                <a:solidFill>
-                  <a:srgbClr val="FFFFFF"/>
-                </a:solidFill>
-                <a:latin typeface="Calibri" panose="020F0502020204030204" pitchFamily="34" charset="0"/>
-              </a:rPr>
-              <a:t>Gana escalabilidad y reutilización, a cambio de más complejidad. Ideal para sistemas grandes y distribuidos.</a:t>
-            </a:r>
-            <a:endParaRPr lang="es-CO" sz="1700">
-              <a:solidFill>
-                <a:srgbClr val="FFFFFF"/>
-              </a:solidFill>
-              <a:latin typeface="Calibri" panose="020F0502020204030204" pitchFamily="34" charset="0"/>
-            </a:endParaRPr>
-          </a:p>
-        </p:txBody>
-      </p:sp>
-      <p:sp>
-        <p:nvSpPr>
-          <p:cNvPr id="8" name="Rectángulo: esquinas redondeadas 7">
-            <a:extLst>
-              <a:ext uri="{FF2B5EF4-FFF2-40B4-BE49-F238E27FC236}">
-                <a16:creationId xmlns:a16="http://schemas.microsoft.com/office/drawing/2014/main" id="{0315C65E-C7DB-07FB-DC85-7206FC5174FF}"/>
-              </a:ext>
-            </a:extLst>
-          </p:cNvPr>
-          <p:cNvSpPr/>
-          <p:nvPr/>
-        </p:nvSpPr>
-        <p:spPr>
-          <a:xfrm>
-            <a:off x="635000" y="3175000"/>
-            <a:ext cx="10922000" cy="1397000"/>
-          </a:xfrm>
-          <a:prstGeom prst="roundRect">
-            <a:avLst>
-              <a:gd name="adj" fmla="val 8000"/>
-            </a:avLst>
-          </a:prstGeom>
-          <a:solidFill>
-            <a:srgbClr val="202658"/>
-          </a:solidFill>
-          <a:ln w="19050" cap="flat" cmpd="sng" algn="ctr">
-            <a:noFill/>
-            <a:prstDash val="solid"/>
-            <a:miter lim="800000"/>
-          </a:ln>
-          <a:effectLst/>
-          <a:extLst>
-            <a:ext uri="{91240B29-F687-4F45-9708-019B960494DF}">
-              <a14:hiddenLine xmlns:a14="http://schemas.microsoft.com/office/drawing/2010/main" w="19050" cap="flat" cmpd="sng" algn="ctr">
-                <a:solidFill>
-                  <a:schemeClr val="accent1">
-                    <a:shade val="15000"/>
-                  </a:schemeClr>
-                </a:solidFill>
-                <a:prstDash val="solid"/>
-                <a:miter lim="800000"/>
-              </a14:hiddenLine>
-            </a:ext>
-          </a:extLst>
-        </p:spPr>
-        <p:style>
-          <a:lnRef idx="2">
-            <a:schemeClr val="accent1">
-              <a:shade val="15000"/>
-            </a:schemeClr>
-          </a:lnRef>
-          <a:fillRef idx="1">
-            <a:schemeClr val="accent1"/>
-          </a:fillRef>
-          <a:effectRef idx="0">
-            <a:schemeClr val="accent1"/>
-          </a:effectRef>
-          <a:fontRef idx="minor">
-            <a:schemeClr val="lt1"/>
-          </a:fontRef>
-        </p:style>
-        <p:txBody>
-          <a:bodyPr rtlCol="0" anchor="ctr"/>
-          <a:lstStyle/>
-          <a:p>
-            <a:pPr algn="ctr"/>
-            <a:endParaRPr lang="es-CO"/>
-          </a:p>
-        </p:txBody>
-      </p:sp>
-      <p:sp>
-        <p:nvSpPr>
-          <p:cNvPr id="9" name="Elipse 8">
-            <a:extLst>
-              <a:ext uri="{FF2B5EF4-FFF2-40B4-BE49-F238E27FC236}">
-                <a16:creationId xmlns:a16="http://schemas.microsoft.com/office/drawing/2014/main" id="{1B178F55-7EE2-998B-6AA5-B7153C64079C}"/>
-              </a:ext>
-            </a:extLst>
-          </p:cNvPr>
-          <p:cNvSpPr/>
-          <p:nvPr/>
-        </p:nvSpPr>
-        <p:spPr>
-          <a:xfrm>
-            <a:off x="939800" y="3467100"/>
-            <a:ext cx="812800" cy="812800"/>
-          </a:xfrm>
-          <a:prstGeom prst="ellipse">
-            <a:avLst/>
-          </a:prstGeom>
-          <a:solidFill>
-            <a:srgbClr val="2EC4B6"/>
-          </a:solidFill>
-          <a:ln w="19050" cap="flat" cmpd="sng" algn="ctr">
-            <a:noFill/>
-            <a:prstDash val="solid"/>
-            <a:miter lim="800000"/>
-          </a:ln>
-          <a:effectLst/>
-          <a:extLst>
-            <a:ext uri="{91240B29-F687-4F45-9708-019B960494DF}">
-              <a14:hiddenLine xmlns:a14="http://schemas.microsoft.com/office/drawing/2010/main" w="19050" cap="flat" cmpd="sng" algn="ctr">
-                <a:solidFill>
-                  <a:schemeClr val="accent1">
-                    <a:shade val="15000"/>
-                  </a:schemeClr>
-                </a:solidFill>
-                <a:prstDash val="solid"/>
-                <a:miter lim="800000"/>
-              </a14:hiddenLine>
-            </a:ext>
-          </a:extLst>
-        </p:spPr>
-        <p:style>
-          <a:lnRef idx="2">
-            <a:schemeClr val="accent1">
-              <a:shade val="15000"/>
-            </a:schemeClr>
-          </a:lnRef>
-          <a:fillRef idx="1">
-            <a:schemeClr val="accent1"/>
-          </a:fillRef>
-          <a:effectRef idx="0">
-            <a:schemeClr val="accent1"/>
-          </a:effectRef>
-          <a:fontRef idx="minor">
-            <a:schemeClr val="lt1"/>
-          </a:fontRef>
-        </p:style>
-        <p:txBody>
-          <a:bodyPr wrap="none" lIns="0" tIns="0" rIns="0" bIns="0" rtlCol="0" anchor="ctr"/>
-          <a:lstStyle/>
-          <a:p>
-            <a:pPr algn="ctr"/>
-            <a:r>
-              <a:rPr lang="es-CO" sz="3200" b="1">
-                <a:solidFill>
-                  <a:srgbClr val="0F122D"/>
-                </a:solidFill>
-                <a:latin typeface="Calibri" panose="020F0502020204030204" pitchFamily="34" charset="0"/>
-              </a:rPr>
-              <a:t>2</a:t>
-            </a:r>
-          </a:p>
-        </p:txBody>
-      </p:sp>
-      <p:sp>
-        <p:nvSpPr>
-          <p:cNvPr id="10" name="CuadroTexto 9">
-            <a:extLst>
-              <a:ext uri="{FF2B5EF4-FFF2-40B4-BE49-F238E27FC236}">
-                <a16:creationId xmlns:a16="http://schemas.microsoft.com/office/drawing/2014/main" id="{C165BA00-118E-2DE5-6408-59E49BC1C938}"/>
-              </a:ext>
-            </a:extLst>
-          </p:cNvPr>
-          <p:cNvSpPr txBox="1"/>
-          <p:nvPr/>
-        </p:nvSpPr>
-        <p:spPr>
-          <a:xfrm>
-            <a:off x="2159000" y="3352800"/>
-            <a:ext cx="9017000" cy="431800"/>
-          </a:xfrm>
-          <a:prstGeom prst="rect">
-            <a:avLst/>
-          </a:prstGeom>
-          <a:noFill/>
-        </p:spPr>
-        <p:txBody>
-          <a:bodyPr vert="horz" wrap="square" lIns="0" tIns="0" rIns="0" bIns="0" rtlCol="0">
-            <a:noAutofit/>
-          </a:bodyPr>
-          <a:lstStyle/>
-          <a:p>
-            <a:pPr>
-              <a:spcAft>
-                <a:spcPts val="800"/>
-              </a:spcAft>
-            </a:pPr>
-            <a:r>
-              <a:rPr lang="es-CO" sz="2400" b="1">
-                <a:solidFill>
-                  <a:srgbClr val="2EC4B6"/>
-                </a:solidFill>
-                <a:latin typeface="Calibri" panose="020F0502020204030204" pitchFamily="34" charset="0"/>
-              </a:rPr>
-              <a:t>Observer y Mediator</a:t>
-            </a:r>
-          </a:p>
-        </p:txBody>
-      </p:sp>
-      <p:sp>
-        <p:nvSpPr>
-          <p:cNvPr id="11" name="CuadroTexto 10">
-            <a:extLst>
-              <a:ext uri="{FF2B5EF4-FFF2-40B4-BE49-F238E27FC236}">
-                <a16:creationId xmlns:a16="http://schemas.microsoft.com/office/drawing/2014/main" id="{7049EC52-B406-7EDF-50CE-F9CC184176F0}"/>
-              </a:ext>
-            </a:extLst>
-          </p:cNvPr>
-          <p:cNvSpPr txBox="1"/>
-          <p:nvPr/>
-        </p:nvSpPr>
-        <p:spPr>
-          <a:xfrm>
-            <a:off x="2159000" y="3835400"/>
-            <a:ext cx="9017000" cy="660400"/>
-          </a:xfrm>
-          <a:prstGeom prst="rect">
-            <a:avLst/>
-          </a:prstGeom>
-          <a:noFill/>
-        </p:spPr>
-        <p:txBody>
-          <a:bodyPr vert="horz" wrap="square" lIns="0" tIns="0" rIns="0" bIns="0" rtlCol="0">
-            <a:noAutofit/>
-          </a:bodyPr>
-          <a:lstStyle/>
-          <a:p>
-            <a:pPr>
-              <a:spcAft>
-                <a:spcPts val="800"/>
-              </a:spcAft>
-            </a:pPr>
-            <a:r>
-              <a:rPr lang="es-ES" sz="1700">
-                <a:solidFill>
-                  <a:srgbClr val="FFFFFF"/>
-                </a:solidFill>
-                <a:latin typeface="Calibri" panose="020F0502020204030204" pitchFamily="34" charset="0"/>
-              </a:rPr>
-              <a:t>Resuelven problemas distintos: Observer reparte los cambios a muchos; Mediator centraliza la comunicación entre muchos.</a:t>
-            </a:r>
-            <a:endParaRPr lang="es-CO" sz="1700">
-              <a:solidFill>
-                <a:srgbClr val="FFFFFF"/>
-              </a:solidFill>
-              <a:latin typeface="Calibri" panose="020F0502020204030204" pitchFamily="34" charset="0"/>
-            </a:endParaRPr>
-          </a:p>
-        </p:txBody>
-      </p:sp>
-      <p:sp>
-        <p:nvSpPr>
-          <p:cNvPr id="12" name="Rectángulo: esquinas redondeadas 11">
-            <a:extLst>
-              <a:ext uri="{FF2B5EF4-FFF2-40B4-BE49-F238E27FC236}">
-                <a16:creationId xmlns:a16="http://schemas.microsoft.com/office/drawing/2014/main" id="{E5C0A7CF-0BDF-3E04-9ACF-2279A5738D00}"/>
-              </a:ext>
-            </a:extLst>
-          </p:cNvPr>
-          <p:cNvSpPr/>
-          <p:nvPr/>
-        </p:nvSpPr>
-        <p:spPr>
-          <a:xfrm>
-            <a:off x="635000" y="4762500"/>
-            <a:ext cx="10922000" cy="1397000"/>
-          </a:xfrm>
-          <a:prstGeom prst="roundRect">
-            <a:avLst>
-              <a:gd name="adj" fmla="val 8000"/>
-            </a:avLst>
-          </a:prstGeom>
-          <a:solidFill>
-            <a:srgbClr val="202658"/>
-          </a:solidFill>
-          <a:ln w="19050" cap="flat" cmpd="sng" algn="ctr">
-            <a:noFill/>
-            <a:prstDash val="solid"/>
-            <a:miter lim="800000"/>
-          </a:ln>
-          <a:effectLst/>
-          <a:extLst>
-            <a:ext uri="{91240B29-F687-4F45-9708-019B960494DF}">
-              <a14:hiddenLine xmlns:a14="http://schemas.microsoft.com/office/drawing/2010/main" w="19050" cap="flat" cmpd="sng" algn="ctr">
-                <a:solidFill>
-                  <a:schemeClr val="accent1">
-                    <a:shade val="15000"/>
-                  </a:schemeClr>
-                </a:solidFill>
-                <a:prstDash val="solid"/>
-                <a:miter lim="800000"/>
-              </a14:hiddenLine>
-            </a:ext>
-          </a:extLst>
-        </p:spPr>
-        <p:style>
-          <a:lnRef idx="2">
-            <a:schemeClr val="accent1">
-              <a:shade val="15000"/>
-            </a:schemeClr>
-          </a:lnRef>
-          <a:fillRef idx="1">
-            <a:schemeClr val="accent1"/>
-          </a:fillRef>
-          <a:effectRef idx="0">
-            <a:schemeClr val="accent1"/>
-          </a:effectRef>
-          <a:fontRef idx="minor">
-            <a:schemeClr val="lt1"/>
-          </a:fontRef>
-        </p:style>
-        <p:txBody>
-          <a:bodyPr rtlCol="0" anchor="ctr"/>
-          <a:lstStyle/>
-          <a:p>
-            <a:pPr algn="ctr"/>
-            <a:endParaRPr lang="es-CO"/>
-          </a:p>
-        </p:txBody>
-      </p:sp>
-      <p:sp>
-        <p:nvSpPr>
-          <p:cNvPr id="13" name="Elipse 12">
-            <a:extLst>
-              <a:ext uri="{FF2B5EF4-FFF2-40B4-BE49-F238E27FC236}">
-                <a16:creationId xmlns:a16="http://schemas.microsoft.com/office/drawing/2014/main" id="{09260B3C-6A65-7775-5C1E-ADD3394EE6C7}"/>
-              </a:ext>
-            </a:extLst>
-          </p:cNvPr>
-          <p:cNvSpPr/>
-          <p:nvPr/>
-        </p:nvSpPr>
-        <p:spPr>
-          <a:xfrm>
-            <a:off x="939800" y="5054600"/>
-            <a:ext cx="812800" cy="812800"/>
-          </a:xfrm>
-          <a:prstGeom prst="ellipse">
-            <a:avLst/>
-          </a:prstGeom>
-          <a:solidFill>
-            <a:srgbClr val="F4B942"/>
-          </a:solidFill>
-          <a:ln w="19050" cap="flat" cmpd="sng" algn="ctr">
-            <a:noFill/>
-            <a:prstDash val="solid"/>
-            <a:miter lim="800000"/>
-          </a:ln>
-          <a:effectLst/>
-          <a:extLst>
-            <a:ext uri="{91240B29-F687-4F45-9708-019B960494DF}">
-              <a14:hiddenLine xmlns:a14="http://schemas.microsoft.com/office/drawing/2010/main" w="19050" cap="flat" cmpd="sng" algn="ctr">
-                <a:solidFill>
-                  <a:schemeClr val="accent1">
-                    <a:shade val="15000"/>
-                  </a:schemeClr>
-                </a:solidFill>
-                <a:prstDash val="solid"/>
-                <a:miter lim="800000"/>
-              </a14:hiddenLine>
-            </a:ext>
-          </a:extLst>
-        </p:spPr>
-        <p:style>
-          <a:lnRef idx="2">
-            <a:schemeClr val="accent1">
-              <a:shade val="15000"/>
-            </a:schemeClr>
-          </a:lnRef>
-          <a:fillRef idx="1">
-            <a:schemeClr val="accent1"/>
-          </a:fillRef>
-          <a:effectRef idx="0">
-            <a:schemeClr val="accent1"/>
-          </a:effectRef>
-          <a:fontRef idx="minor">
-            <a:schemeClr val="lt1"/>
-          </a:fontRef>
-        </p:style>
-        <p:txBody>
-          <a:bodyPr wrap="none" lIns="0" tIns="0" rIns="0" bIns="0" rtlCol="0" anchor="ctr"/>
-          <a:lstStyle/>
-          <a:p>
-            <a:pPr algn="ctr"/>
-            <a:r>
-              <a:rPr lang="es-CO" sz="3200" b="1">
-                <a:solidFill>
-                  <a:srgbClr val="0F122D"/>
-                </a:solidFill>
-                <a:latin typeface="Calibri" panose="020F0502020204030204" pitchFamily="34" charset="0"/>
-              </a:rPr>
-              <a:t>3</a:t>
-            </a:r>
-          </a:p>
-        </p:txBody>
-      </p:sp>
-      <p:sp>
-        <p:nvSpPr>
-          <p:cNvPr id="14" name="CuadroTexto 13">
-            <a:extLst>
-              <a:ext uri="{FF2B5EF4-FFF2-40B4-BE49-F238E27FC236}">
-                <a16:creationId xmlns:a16="http://schemas.microsoft.com/office/drawing/2014/main" id="{BA2EFF35-D13A-3D84-51FA-8EE7B28102D9}"/>
-              </a:ext>
-            </a:extLst>
-          </p:cNvPr>
-          <p:cNvSpPr txBox="1"/>
-          <p:nvPr/>
-        </p:nvSpPr>
-        <p:spPr>
-          <a:xfrm>
-            <a:off x="2159000" y="4940300"/>
-            <a:ext cx="9017000" cy="431800"/>
-          </a:xfrm>
-          <a:prstGeom prst="rect">
-            <a:avLst/>
-          </a:prstGeom>
-          <a:noFill/>
-        </p:spPr>
-        <p:txBody>
-          <a:bodyPr vert="horz" wrap="square" lIns="0" tIns="0" rIns="0" bIns="0" rtlCol="0">
-            <a:noAutofit/>
-          </a:bodyPr>
-          <a:lstStyle/>
-          <a:p>
-            <a:pPr>
-              <a:spcAft>
-                <a:spcPts val="800"/>
-              </a:spcAft>
-            </a:pPr>
-            <a:r>
-              <a:rPr lang="es-ES" sz="2400" b="1">
-                <a:solidFill>
-                  <a:srgbClr val="F4B942"/>
-                </a:solidFill>
-                <a:latin typeface="Calibri" panose="020F0502020204030204" pitchFamily="34" charset="0"/>
-              </a:rPr>
-              <a:t>React, MySQL y la nube</a:t>
-            </a:r>
-            <a:endParaRPr lang="es-CO" sz="2400" b="1">
-              <a:solidFill>
-                <a:srgbClr val="F4B942"/>
-              </a:solidFill>
-              <a:latin typeface="Calibri" panose="020F0502020204030204" pitchFamily="34" charset="0"/>
-            </a:endParaRPr>
-          </a:p>
-        </p:txBody>
-      </p:sp>
-      <p:sp>
-        <p:nvSpPr>
-          <p:cNvPr id="15" name="CuadroTexto 14">
-            <a:extLst>
-              <a:ext uri="{FF2B5EF4-FFF2-40B4-BE49-F238E27FC236}">
-                <a16:creationId xmlns:a16="http://schemas.microsoft.com/office/drawing/2014/main" id="{134464E2-2191-FC33-E98A-EFFB2C42E8F8}"/>
-              </a:ext>
-            </a:extLst>
-          </p:cNvPr>
-          <p:cNvSpPr txBox="1"/>
-          <p:nvPr/>
-        </p:nvSpPr>
-        <p:spPr>
-          <a:xfrm>
-            <a:off x="2159000" y="5422900"/>
-            <a:ext cx="9017000" cy="660400"/>
-          </a:xfrm>
-          <a:prstGeom prst="rect">
-            <a:avLst/>
-          </a:prstGeom>
-          <a:noFill/>
-        </p:spPr>
-        <p:txBody>
-          <a:bodyPr vert="horz" wrap="square" lIns="0" tIns="0" rIns="0" bIns="0" rtlCol="0">
-            <a:noAutofit/>
-          </a:bodyPr>
-          <a:lstStyle/>
-          <a:p>
-            <a:pPr>
-              <a:spcAft>
-                <a:spcPts val="800"/>
-              </a:spcAft>
-            </a:pPr>
-            <a:r>
-              <a:rPr lang="es-ES" sz="1700">
-                <a:solidFill>
-                  <a:srgbClr val="FFFFFF"/>
-                </a:solidFill>
-                <a:latin typeface="Calibri" panose="020F0502020204030204" pitchFamily="34" charset="0"/>
-              </a:rPr>
-              <a:t>Se combinan bien: interfaz reactiva, servicios por contrato y datos persistentes, todo desplegado y escalable en la nube.</a:t>
-            </a:r>
-            <a:endParaRPr lang="es-CO" sz="1700">
-              <a:solidFill>
-                <a:srgbClr val="FFFFFF"/>
-              </a:solidFill>
-              <a:latin typeface="Calibri" panose="020F0502020204030204" pitchFamily="34" charset="0"/>
-            </a:endParaRPr>
-          </a:p>
-        </p:txBody>
-      </p:sp>
-    </p:spTree>
-    <p:extLst>
-      <p:ext uri="{BB962C8B-B14F-4D97-AF65-F5344CB8AC3E}">
-        <p14:creationId xmlns:p14="http://schemas.microsoft.com/office/powerpoint/2010/main" val="379057708"/>
-      </p:ext>
-    </p:extLst>
-  </p:cSld>
-  <p:clrMapOvr>
-    <a:masterClrMapping/>
-  </p:clrMapOvr>
-  <mc:AlternateContent xmlns:mc="http://schemas.openxmlformats.org/markup-compatibility/2006" xmlns:p14="http://schemas.microsoft.com/office/powerpoint/2010/main">
-    <mc:Choice Requires="p14">
-      <p:transition spd="slow" p14:dur="2000">
-        <p:fade/>
-      </p:transition>
-    </mc:Choice>
-    <mc:Fallback xmlns="">
-      <p:transition spd="slow">
-        <p:fade/>
-      </p:transition>
-    </mc:Fallback>
-  </mc:AlternateContent>
-  <p:timing>
-    <p:tnLst>
-      <p:par>
-        <p:cTn id="1" dur="indefinite" restart="never" nodeType="tmRoot">
-          <p:childTnLst>
-            <p:seq concurrent="1" nextAc="seek">
-              <p:cTn id="2" dur="indefinite" nodeType="mainSeq">
-                <p:childTnLst>
-                  <p:par>
-                    <p:cTn id="3" fill="hold">
-                      <p:stCondLst>
-                        <p:cond delay="indefinite"/>
-                        <p:cond evt="onBegin" delay="0">
-                          <p:tn val="2"/>
-                        </p:cond>
-                      </p:stCondLst>
-                      <p:childTnLst>
-                        <p:par>
-                          <p:cTn id="4" fill="hold">
-                            <p:stCondLst>
-                              <p:cond delay="0"/>
-                            </p:stCondLst>
-                            <p:childTnLst>
-                              <p:par>
-                                <p:cTn id="5" presetID="10" presetClass="entr" presetSubtype="0" fill="hold" grpId="0" nodeType="afterEffect">
-                                  <p:stCondLst>
-                                    <p:cond delay="0"/>
-                                  </p:stCondLst>
-                                  <p:childTnLst>
-                                    <p:set>
-                                      <p:cBhvr>
-                                        <p:cTn id="6" dur="1" fill="hold">
-                                          <p:stCondLst>
-                                            <p:cond delay="0"/>
-                                          </p:stCondLst>
-                                        </p:cTn>
-                                        <p:tgtEl>
-                                          <p:spTgt spid="4"/>
-                                        </p:tgtEl>
-                                        <p:attrNameLst>
-                                          <p:attrName>style.visibility</p:attrName>
-                                        </p:attrNameLst>
-                                      </p:cBhvr>
-                                      <p:to>
-                                        <p:strVal val="visible"/>
-                                      </p:to>
-                                    </p:set>
-                                    <p:animEffect transition="in" filter="fade">
-                                      <p:cBhvr>
-                                        <p:cTn id="7" dur="500"/>
-                                        <p:tgtEl>
-                                          <p:spTgt spid="4"/>
-                                        </p:tgtEl>
-                                      </p:cBhvr>
-                                    </p:animEffect>
-                                  </p:childTnLst>
-                                </p:cTn>
-                              </p:par>
-                              <p:par>
-                                <p:cTn id="8" presetID="10" presetClass="entr" presetSubtype="0" fill="hold" grpId="0" nodeType="withEffect">
-                                  <p:stCondLst>
-                                    <p:cond delay="0"/>
-                                  </p:stCondLst>
-                                  <p:childTnLst>
-                                    <p:set>
-                                      <p:cBhvr>
-                                        <p:cTn id="9" dur="1" fill="hold">
-                                          <p:stCondLst>
-                                            <p:cond delay="0"/>
-                                          </p:stCondLst>
-                                        </p:cTn>
-                                        <p:tgtEl>
-                                          <p:spTgt spid="5"/>
-                                        </p:tgtEl>
-                                        <p:attrNameLst>
-                                          <p:attrName>style.visibility</p:attrName>
-                                        </p:attrNameLst>
-                                      </p:cBhvr>
-                                      <p:to>
-                                        <p:strVal val="visible"/>
-                                      </p:to>
-                                    </p:set>
-                                    <p:animEffect transition="in" filter="fade">
-                                      <p:cBhvr>
-                                        <p:cTn id="10" dur="500"/>
-                                        <p:tgtEl>
-                                          <p:spTgt spid="5"/>
-                                        </p:tgtEl>
-                                      </p:cBhvr>
-                                    </p:animEffect>
-                                  </p:childTnLst>
-                                </p:cTn>
-                              </p:par>
-                              <p:par>
-                                <p:cTn id="11" presetID="10" presetClass="entr" presetSubtype="0" fill="hold" grpId="0" nodeType="withEffect">
-                                  <p:stCondLst>
-                                    <p:cond delay="0"/>
-                                  </p:stCondLst>
-                                  <p:childTnLst>
-                                    <p:set>
-                                      <p:cBhvr>
-                                        <p:cTn id="12" dur="1" fill="hold">
-                                          <p:stCondLst>
-                                            <p:cond delay="0"/>
-                                          </p:stCondLst>
-                                        </p:cTn>
-                                        <p:tgtEl>
-                                          <p:spTgt spid="6"/>
-                                        </p:tgtEl>
-                                        <p:attrNameLst>
-                                          <p:attrName>style.visibility</p:attrName>
-                                        </p:attrNameLst>
-                                      </p:cBhvr>
-                                      <p:to>
-                                        <p:strVal val="visible"/>
-                                      </p:to>
-                                    </p:set>
-                                    <p:animEffect transition="in" filter="fade">
-                                      <p:cBhvr>
-                                        <p:cTn id="13" dur="500"/>
-                                        <p:tgtEl>
-                                          <p:spTgt spid="6"/>
-                                        </p:tgtEl>
-                                      </p:cBhvr>
-                                    </p:animEffect>
-                                  </p:childTnLst>
-                                </p:cTn>
-                              </p:par>
-                              <p:par>
-                                <p:cTn id="14" presetID="10" presetClass="entr" presetSubtype="0" fill="hold" grpId="0" nodeType="withEffect">
-                                  <p:stCondLst>
-                                    <p:cond delay="0"/>
-                                  </p:stCondLst>
-                                  <p:childTnLst>
-                                    <p:set>
-                                      <p:cBhvr>
-                                        <p:cTn id="15" dur="1" fill="hold">
-                                          <p:stCondLst>
-                                            <p:cond delay="0"/>
-                                          </p:stCondLst>
-                                        </p:cTn>
-                                        <p:tgtEl>
-                                          <p:spTgt spid="7"/>
-                                        </p:tgtEl>
-                                        <p:attrNameLst>
-                                          <p:attrName>style.visibility</p:attrName>
-                                        </p:attrNameLst>
-                                      </p:cBhvr>
-                                      <p:to>
-                                        <p:strVal val="visible"/>
-                                      </p:to>
-                                    </p:set>
-                                    <p:animEffect transition="in" filter="fade">
-                                      <p:cBhvr>
-                                        <p:cTn id="16" dur="500"/>
-                                        <p:tgtEl>
-                                          <p:spTgt spid="7"/>
-                                        </p:tgtEl>
-                                      </p:cBhvr>
-                                    </p:animEffect>
-                                  </p:childTnLst>
-                                </p:cTn>
-                              </p:par>
-                            </p:childTnLst>
-                          </p:cTn>
-                        </p:par>
-                        <p:par>
-                          <p:cTn id="17" fill="hold">
-                            <p:stCondLst>
-                              <p:cond delay="500"/>
-                            </p:stCondLst>
-                            <p:childTnLst>
-                              <p:par>
-                                <p:cTn id="18" presetID="10" presetClass="entr" presetSubtype="0" fill="hold" grpId="0" nodeType="afterEffect">
-                                  <p:stCondLst>
-                                    <p:cond delay="0"/>
-                                  </p:stCondLst>
-                                  <p:childTnLst>
-                                    <p:set>
-                                      <p:cBhvr>
-                                        <p:cTn id="19" dur="1" fill="hold">
-                                          <p:stCondLst>
-                                            <p:cond delay="0"/>
-                                          </p:stCondLst>
-                                        </p:cTn>
-                                        <p:tgtEl>
-                                          <p:spTgt spid="8"/>
-                                        </p:tgtEl>
-                                        <p:attrNameLst>
-                                          <p:attrName>style.visibility</p:attrName>
-                                        </p:attrNameLst>
-                                      </p:cBhvr>
-                                      <p:to>
-                                        <p:strVal val="visible"/>
-                                      </p:to>
-                                    </p:set>
-                                    <p:animEffect transition="in" filter="fade">
-                                      <p:cBhvr>
-                                        <p:cTn id="20" dur="500"/>
-                                        <p:tgtEl>
-                                          <p:spTgt spid="8"/>
-                                        </p:tgtEl>
-                                      </p:cBhvr>
-                                    </p:animEffect>
-                                  </p:childTnLst>
-                                </p:cTn>
-                              </p:par>
-                              <p:par>
-                                <p:cTn id="21" presetID="10" presetClass="entr" presetSubtype="0" fill="hold" grpId="0" nodeType="withEffect">
-                                  <p:stCondLst>
-                                    <p:cond delay="0"/>
-                                  </p:stCondLst>
-                                  <p:childTnLst>
-                                    <p:set>
-                                      <p:cBhvr>
-                                        <p:cTn id="22" dur="1" fill="hold">
-                                          <p:stCondLst>
-                                            <p:cond delay="0"/>
-                                          </p:stCondLst>
-                                        </p:cTn>
-                                        <p:tgtEl>
-                                          <p:spTgt spid="9"/>
-                                        </p:tgtEl>
-                                        <p:attrNameLst>
-                                          <p:attrName>style.visibility</p:attrName>
-                                        </p:attrNameLst>
-                                      </p:cBhvr>
-                                      <p:to>
-                                        <p:strVal val="visible"/>
-                                      </p:to>
-                                    </p:set>
-                                    <p:animEffect transition="in" filter="fade">
-                                      <p:cBhvr>
-                                        <p:cTn id="23" dur="500"/>
-                                        <p:tgtEl>
-                                          <p:spTgt spid="9"/>
-                                        </p:tgtEl>
-                                      </p:cBhvr>
-                                    </p:animEffect>
-                                  </p:childTnLst>
-                                </p:cTn>
-                              </p:par>
-                              <p:par>
-                                <p:cTn id="24" presetID="10" presetClass="entr" presetSubtype="0" fill="hold" grpId="0" nodeType="withEffect">
-                                  <p:stCondLst>
-                                    <p:cond delay="0"/>
-                                  </p:stCondLst>
-                                  <p:childTnLst>
-                                    <p:set>
-                                      <p:cBhvr>
-                                        <p:cTn id="25" dur="1" fill="hold">
-                                          <p:stCondLst>
-                                            <p:cond delay="0"/>
-                                          </p:stCondLst>
-                                        </p:cTn>
-                                        <p:tgtEl>
-                                          <p:spTgt spid="10"/>
-                                        </p:tgtEl>
-                                        <p:attrNameLst>
-                                          <p:attrName>style.visibility</p:attrName>
-                                        </p:attrNameLst>
-                                      </p:cBhvr>
-                                      <p:to>
-                                        <p:strVal val="visible"/>
-                                      </p:to>
-                                    </p:set>
-                                    <p:animEffect transition="in" filter="fade">
-                                      <p:cBhvr>
-                                        <p:cTn id="26" dur="500"/>
-                                        <p:tgtEl>
-                                          <p:spTgt spid="10"/>
-                                        </p:tgtEl>
-                                      </p:cBhvr>
-                                    </p:animEffect>
-                                  </p:childTnLst>
-                                </p:cTn>
-                              </p:par>
-                              <p:par>
-                                <p:cTn id="27" presetID="10" presetClass="entr" presetSubtype="0" fill="hold" grpId="0" nodeType="withEffect">
-                                  <p:stCondLst>
-                                    <p:cond delay="0"/>
-                                  </p:stCondLst>
-                                  <p:childTnLst>
-                                    <p:set>
-                                      <p:cBhvr>
-                                        <p:cTn id="28" dur="1" fill="hold">
-                                          <p:stCondLst>
-                                            <p:cond delay="0"/>
-                                          </p:stCondLst>
-                                        </p:cTn>
-                                        <p:tgtEl>
-                                          <p:spTgt spid="11"/>
-                                        </p:tgtEl>
-                                        <p:attrNameLst>
-                                          <p:attrName>style.visibility</p:attrName>
-                                        </p:attrNameLst>
-                                      </p:cBhvr>
-                                      <p:to>
-                                        <p:strVal val="visible"/>
-                                      </p:to>
-                                    </p:set>
-                                    <p:animEffect transition="in" filter="fade">
-                                      <p:cBhvr>
-                                        <p:cTn id="29" dur="500"/>
-                                        <p:tgtEl>
-                                          <p:spTgt spid="11"/>
-                                        </p:tgtEl>
-                                      </p:cBhvr>
-                                    </p:animEffect>
-                                  </p:childTnLst>
-                                </p:cTn>
-                              </p:par>
-                            </p:childTnLst>
-                          </p:cTn>
-                        </p:par>
-                        <p:par>
-                          <p:cTn id="30" fill="hold">
-                            <p:stCondLst>
-                              <p:cond delay="1000"/>
-                            </p:stCondLst>
-                            <p:childTnLst>
-                              <p:par>
-                                <p:cTn id="31" presetID="10" presetClass="entr" presetSubtype="0" fill="hold" grpId="0" nodeType="afterEffect">
-                                  <p:stCondLst>
-                                    <p:cond delay="0"/>
-                                  </p:stCondLst>
-                                  <p:childTnLst>
-                                    <p:set>
-                                      <p:cBhvr>
-                                        <p:cTn id="32" dur="1" fill="hold">
-                                          <p:stCondLst>
-                                            <p:cond delay="0"/>
-                                          </p:stCondLst>
-                                        </p:cTn>
-                                        <p:tgtEl>
-                                          <p:spTgt spid="12"/>
-                                        </p:tgtEl>
-                                        <p:attrNameLst>
-                                          <p:attrName>style.visibility</p:attrName>
-                                        </p:attrNameLst>
-                                      </p:cBhvr>
-                                      <p:to>
-                                        <p:strVal val="visible"/>
-                                      </p:to>
-                                    </p:set>
-                                    <p:animEffect transition="in" filter="fade">
-                                      <p:cBhvr>
-                                        <p:cTn id="33" dur="500"/>
-                                        <p:tgtEl>
-                                          <p:spTgt spid="12"/>
-                                        </p:tgtEl>
-                                      </p:cBhvr>
-                                    </p:animEffect>
-                                  </p:childTnLst>
-                                </p:cTn>
-                              </p:par>
-                              <p:par>
-                                <p:cTn id="34" presetID="10" presetClass="entr" presetSubtype="0" fill="hold" grpId="0" nodeType="withEffect">
-                                  <p:stCondLst>
-                                    <p:cond delay="0"/>
-                                  </p:stCondLst>
-                                  <p:childTnLst>
-                                    <p:set>
-                                      <p:cBhvr>
-                                        <p:cTn id="35" dur="1" fill="hold">
-                                          <p:stCondLst>
-                                            <p:cond delay="0"/>
-                                          </p:stCondLst>
-                                        </p:cTn>
-                                        <p:tgtEl>
-                                          <p:spTgt spid="13"/>
-                                        </p:tgtEl>
-                                        <p:attrNameLst>
-                                          <p:attrName>style.visibility</p:attrName>
-                                        </p:attrNameLst>
-                                      </p:cBhvr>
-                                      <p:to>
-                                        <p:strVal val="visible"/>
-                                      </p:to>
-                                    </p:set>
-                                    <p:animEffect transition="in" filter="fade">
-                                      <p:cBhvr>
-                                        <p:cTn id="36" dur="500"/>
-                                        <p:tgtEl>
-                                          <p:spTgt spid="13"/>
-                                        </p:tgtEl>
-                                      </p:cBhvr>
-                                    </p:animEffect>
-                                  </p:childTnLst>
-                                </p:cTn>
-                              </p:par>
-                              <p:par>
-                                <p:cTn id="37" presetID="10" presetClass="entr" presetSubtype="0" fill="hold" grpId="0" nodeType="withEffect">
-                                  <p:stCondLst>
-                                    <p:cond delay="0"/>
-                                  </p:stCondLst>
-                                  <p:childTnLst>
-                                    <p:set>
-                                      <p:cBhvr>
-                                        <p:cTn id="38" dur="1" fill="hold">
-                                          <p:stCondLst>
-                                            <p:cond delay="0"/>
-                                          </p:stCondLst>
-                                        </p:cTn>
-                                        <p:tgtEl>
-                                          <p:spTgt spid="14"/>
-                                        </p:tgtEl>
-                                        <p:attrNameLst>
-                                          <p:attrName>style.visibility</p:attrName>
-                                        </p:attrNameLst>
-                                      </p:cBhvr>
-                                      <p:to>
-                                        <p:strVal val="visible"/>
-                                      </p:to>
-                                    </p:set>
-                                    <p:animEffect transition="in" filter="fade">
-                                      <p:cBhvr>
-                                        <p:cTn id="39" dur="500"/>
-                                        <p:tgtEl>
-                                          <p:spTgt spid="14"/>
-                                        </p:tgtEl>
-                                      </p:cBhvr>
-                                    </p:animEffect>
-                                  </p:childTnLst>
-                                </p:cTn>
-                              </p:par>
-                              <p:par>
-                                <p:cTn id="40" presetID="10" presetClass="entr" presetSubtype="0" fill="hold" grpId="0" nodeType="withEffect">
-                                  <p:stCondLst>
-                                    <p:cond delay="0"/>
-                                  </p:stCondLst>
-                                  <p:childTnLst>
-                                    <p:set>
-                                      <p:cBhvr>
-                                        <p:cTn id="41" dur="1" fill="hold">
-                                          <p:stCondLst>
-                                            <p:cond delay="0"/>
-                                          </p:stCondLst>
-                                        </p:cTn>
-                                        <p:tgtEl>
-                                          <p:spTgt spid="15"/>
-                                        </p:tgtEl>
-                                        <p:attrNameLst>
-                                          <p:attrName>style.visibility</p:attrName>
-                                        </p:attrNameLst>
-                                      </p:cBhvr>
-                                      <p:to>
-                                        <p:strVal val="visible"/>
-                                      </p:to>
-                                    </p:set>
-                                    <p:animEffect transition="in" filter="fade">
-                                      <p:cBhvr>
-                                        <p:cTn id="42" dur="500"/>
-                                        <p:tgtEl>
-                                          <p:spTgt spid="15"/>
-                                        </p:tgtEl>
-                                      </p:cBhvr>
-                                    </p:animEffect>
-                                  </p:childTnLst>
-                                </p:cTn>
-                              </p:par>
-                            </p:childTnLst>
-                          </p:cTn>
-                        </p:par>
-                      </p:childTnLst>
-                    </p:cTn>
-                  </p:par>
-                </p:childTnLst>
-              </p:cTn>
-              <p:prevCondLst>
-                <p:cond evt="onPrev" delay="0">
-                  <p:tgtEl>
-                    <p:sldTgt/>
-                  </p:tgtEl>
-                </p:cond>
-              </p:prevCondLst>
-              <p:nextCondLst>
-                <p:cond evt="onNext" delay="0">
-                  <p:tgtEl>
-                    <p:sldTgt/>
-                  </p:tgtEl>
-                </p:cond>
-              </p:nextCondLst>
-            </p:seq>
-          </p:childTnLst>
-        </p:cTn>
-      </p:par>
-    </p:tnLst>
-    <p:bldLst>
-      <p:bldP spid="4" grpId="0" animBg="1"/>
-      <p:bldP spid="5" grpId="0" animBg="1"/>
-      <p:bldP spid="6" grpId="0"/>
-      <p:bldP spid="7" grpId="0"/>
-      <p:bldP spid="8" grpId="0" animBg="1"/>
-      <p:bldP spid="9" grpId="0" animBg="1"/>
-      <p:bldP spid="10" grpId="0"/>
-      <p:bldP spid="11" grpId="0"/>
-      <p:bldP spid="12" grpId="0" animBg="1"/>
-      <p:bldP spid="13" grpId="0" animBg="1"/>
-      <p:bldP spid="14" grpId="0"/>
-      <p:bldP spid="15" grpId="0"/>
-    </p:bldLst>
-  </p:timing>
-</p:sld>
-</file>
-
-<file path=ppt/slides/slide17.xml><?xml version="1.0" encoding="utf-8"?>
-<p:sld xmlns:a="http://schemas.openxmlformats.org/drawingml/2006/main" xmlns:r="http://schemas.openxmlformats.org/officeDocument/2006/relationships" xmlns:p="http://schemas.openxmlformats.org/presentationml/2006/main">
-  <p:cSld>
-    <p:bg>
-      <p:bgPr>
-        <a:solidFill>
-          <a:srgbClr val="0F122D"/>
-        </a:solidFill>
-        <a:effectLst/>
-      </p:bgPr>
-    </p:bg>
-    <p:spTree>
-      <p:nvGrpSpPr>
-        <p:cNvPr id="1" name=""/>
-        <p:cNvGrpSpPr/>
-        <p:nvPr/>
-      </p:nvGrpSpPr>
-      <p:grpSpPr>
-        <a:xfrm>
-          <a:off x="0" y="0"/>
-          <a:ext cx="0" cy="0"/>
-          <a:chOff x="0" y="0"/>
-          <a:chExt cx="0" cy="0"/>
-        </a:xfrm>
-      </p:grpSpPr>
-      <p:sp>
-        <p:nvSpPr>
-          <p:cNvPr id="3" name="Elipse 2">
-            <a:extLst>
-              <a:ext uri="{FF2B5EF4-FFF2-40B4-BE49-F238E27FC236}">
-                <a16:creationId xmlns:a16="http://schemas.microsoft.com/office/drawing/2014/main" id="{6C99EE61-333B-7783-D814-D31484674B47}"/>
-              </a:ext>
-            </a:extLst>
-          </p:cNvPr>
-          <p:cNvSpPr/>
-          <p:nvPr/>
-        </p:nvSpPr>
-        <p:spPr>
-          <a:xfrm>
-            <a:off x="10160000" y="-1016000"/>
-            <a:ext cx="3302000" cy="3302000"/>
-          </a:xfrm>
-          <a:prstGeom prst="ellipse">
-            <a:avLst/>
-          </a:prstGeom>
-          <a:solidFill>
-            <a:srgbClr val="6473F5">
-              <a:alpha val="20000"/>
-            </a:srgbClr>
-          </a:solidFill>
-          <a:ln w="19050" cap="flat" cmpd="sng" algn="ctr">
-            <a:noFill/>
-            <a:prstDash val="solid"/>
-            <a:miter lim="800000"/>
-          </a:ln>
-          <a:effectLst/>
-          <a:extLst>
-            <a:ext uri="{91240B29-F687-4F45-9708-019B960494DF}">
-              <a14:hiddenLine xmlns:a14="http://schemas.microsoft.com/office/drawing/2010/main" w="19050" cap="flat" cmpd="sng" algn="ctr">
-                <a:solidFill>
-                  <a:schemeClr val="accent1">
-                    <a:shade val="15000"/>
-                  </a:schemeClr>
-                </a:solidFill>
-                <a:prstDash val="solid"/>
-                <a:miter lim="800000"/>
-              </a14:hiddenLine>
-            </a:ext>
-          </a:extLst>
-        </p:spPr>
-        <p:style>
-          <a:lnRef idx="2">
-            <a:schemeClr val="accent1">
-              <a:shade val="15000"/>
-            </a:schemeClr>
-          </a:lnRef>
-          <a:fillRef idx="1">
-            <a:schemeClr val="accent1"/>
-          </a:fillRef>
-          <a:effectRef idx="0">
-            <a:schemeClr val="accent1"/>
-          </a:effectRef>
-          <a:fontRef idx="minor">
-            <a:schemeClr val="lt1"/>
-          </a:fontRef>
-        </p:style>
-        <p:txBody>
-          <a:bodyPr rtlCol="0" anchor="ctr"/>
-          <a:lstStyle/>
-          <a:p>
-            <a:pPr algn="ctr"/>
-            <a:endParaRPr lang="es-CO"/>
-          </a:p>
-        </p:txBody>
-      </p:sp>
-      <p:sp>
-        <p:nvSpPr>
-          <p:cNvPr id="2" name="Título 1">
-            <a:extLst>
-              <a:ext uri="{FF2B5EF4-FFF2-40B4-BE49-F238E27FC236}">
-                <a16:creationId xmlns:a16="http://schemas.microsoft.com/office/drawing/2014/main" id="{061CF72A-16DB-3521-6B3A-546C13096D3E}"/>
-              </a:ext>
-            </a:extLst>
-          </p:cNvPr>
-          <p:cNvSpPr>
-            <a:spLocks noGrp="1"/>
-          </p:cNvSpPr>
-          <p:nvPr>
-            <p:ph type="title"/>
-          </p:nvPr>
-        </p:nvSpPr>
-        <p:spPr>
-          <a:xfrm>
-            <a:off x="635000" y="317500"/>
-            <a:ext cx="10160000" cy="889000"/>
-          </a:xfrm>
-        </p:spPr>
-        <p:txBody>
-          <a:bodyPr anchor="ctr">
-            <a:normAutofit/>
-          </a:bodyPr>
-          <a:lstStyle/>
-          <a:p>
-            <a:r>
-              <a:rPr lang="es-CO" sz="3600" b="1" dirty="0">
-                <a:solidFill>
-                  <a:srgbClr val="FFFFFF"/>
-                </a:solidFill>
-                <a:latin typeface="Calibri" panose="020F0502020204030204" pitchFamily="34" charset="0"/>
-              </a:rPr>
-              <a:t>4. Comparativa rápida</a:t>
-            </a:r>
-          </a:p>
-        </p:txBody>
-      </p:sp>
-      <p:graphicFrame>
-        <p:nvGraphicFramePr>
-          <p:cNvPr id="4" name="Tabla 3">
-            <a:extLst>
-              <a:ext uri="{FF2B5EF4-FFF2-40B4-BE49-F238E27FC236}">
-                <a16:creationId xmlns:a16="http://schemas.microsoft.com/office/drawing/2014/main" id="{207870B7-4AD4-9A72-12C7-138960EE114F}"/>
-              </a:ext>
-            </a:extLst>
-          </p:cNvPr>
-          <p:cNvGraphicFramePr>
-            <a:graphicFrameLocks noGrp="1"/>
-          </p:cNvGraphicFramePr>
-          <p:nvPr>
-            <p:extLst>
-              <p:ext uri="{D42A27DB-BD31-4B8C-83A1-F6EECF244321}">
-                <p14:modId xmlns:p14="http://schemas.microsoft.com/office/powerpoint/2010/main" val="2170011983"/>
-              </p:ext>
-            </p:extLst>
-          </p:nvPr>
-        </p:nvGraphicFramePr>
-        <p:xfrm>
-          <a:off x="635000" y="1587500"/>
-          <a:ext cx="10922000" cy="4191000"/>
-        </p:xfrm>
-        <a:graphic>
-          <a:graphicData uri="http://schemas.openxmlformats.org/drawingml/2006/table">
-            <a:tbl>
-              <a:tblPr firstRow="1" bandRow="1">
-                <a:tableStyleId>{5C22544A-7EE6-4342-B048-85BDC9FD1C3A}</a:tableStyleId>
-              </a:tblPr>
-              <a:tblGrid>
-                <a:gridCol w="1905000">
-                  <a:extLst>
-                    <a:ext uri="{9D8B030D-6E8A-4147-A177-3AD203B41FA5}">
-                      <a16:colId xmlns:a16="http://schemas.microsoft.com/office/drawing/2014/main" val="544620253"/>
-                    </a:ext>
-                  </a:extLst>
-                </a:gridCol>
-                <a:gridCol w="3302000">
-                  <a:extLst>
-                    <a:ext uri="{9D8B030D-6E8A-4147-A177-3AD203B41FA5}">
-                      <a16:colId xmlns:a16="http://schemas.microsoft.com/office/drawing/2014/main" val="1056622285"/>
-                    </a:ext>
-                  </a:extLst>
-                </a:gridCol>
-                <a:gridCol w="2794000">
-                  <a:extLst>
-                    <a:ext uri="{9D8B030D-6E8A-4147-A177-3AD203B41FA5}">
-                      <a16:colId xmlns:a16="http://schemas.microsoft.com/office/drawing/2014/main" val="2805990068"/>
-                    </a:ext>
-                  </a:extLst>
-                </a:gridCol>
-                <a:gridCol w="2921000">
-                  <a:extLst>
-                    <a:ext uri="{9D8B030D-6E8A-4147-A177-3AD203B41FA5}">
-                      <a16:colId xmlns:a16="http://schemas.microsoft.com/office/drawing/2014/main" val="2724004222"/>
-                    </a:ext>
-                  </a:extLst>
-                </a:gridCol>
-              </a:tblGrid>
-              <a:tr h="838200">
-                <a:tc>
-                  <a:txBody>
-                    <a:bodyPr/>
-                    <a:lstStyle/>
-                    <a:p>
-                      <a:r>
-                        <a:rPr lang="es-CO" sz="1600" b="1">
-                          <a:solidFill>
-                            <a:srgbClr val="FFFFFF"/>
-                          </a:solidFill>
-                          <a:latin typeface="Calibri" panose="020F0502020204030204" pitchFamily="34" charset="0"/>
-                        </a:rPr>
-                        <a:t>Criterio</a:t>
-                      </a:r>
-                    </a:p>
-                  </a:txBody>
-                  <a:tcPr anchor="ctr">
-                    <a:solidFill>
-                      <a:srgbClr val="6473F5"/>
-                    </a:solidFill>
-                  </a:tcPr>
-                </a:tc>
-                <a:tc>
-                  <a:txBody>
-                    <a:bodyPr/>
-                    <a:lstStyle/>
-                    <a:p>
-                      <a:r>
-                        <a:rPr lang="es-CO" sz="1600" b="1">
-                          <a:solidFill>
-                            <a:srgbClr val="FFFFFF"/>
-                          </a:solidFill>
-                          <a:latin typeface="Calibri" panose="020F0502020204030204" pitchFamily="34" charset="0"/>
-                        </a:rPr>
-                        <a:t>SOA</a:t>
-                      </a:r>
-                    </a:p>
-                  </a:txBody>
-                  <a:tcPr anchor="ctr">
-                    <a:solidFill>
-                      <a:srgbClr val="6473F5"/>
-                    </a:solidFill>
-                  </a:tcPr>
-                </a:tc>
-                <a:tc>
-                  <a:txBody>
-                    <a:bodyPr/>
-                    <a:lstStyle/>
-                    <a:p>
-                      <a:r>
-                        <a:rPr lang="es-CO" sz="1600" b="1">
-                          <a:solidFill>
-                            <a:srgbClr val="FFFFFF"/>
-                          </a:solidFill>
-                          <a:latin typeface="Calibri" panose="020F0502020204030204" pitchFamily="34" charset="0"/>
-                        </a:rPr>
-                        <a:t>Observer</a:t>
-                      </a:r>
-                    </a:p>
-                  </a:txBody>
-                  <a:tcPr anchor="ctr">
-                    <a:solidFill>
-                      <a:srgbClr val="6473F5"/>
-                    </a:solidFill>
-                  </a:tcPr>
-                </a:tc>
-                <a:tc>
-                  <a:txBody>
-                    <a:bodyPr/>
-                    <a:lstStyle/>
-                    <a:p>
-                      <a:r>
-                        <a:rPr lang="es-CO" sz="1600" b="1">
-                          <a:solidFill>
-                            <a:srgbClr val="FFFFFF"/>
-                          </a:solidFill>
-                          <a:latin typeface="Calibri" panose="020F0502020204030204" pitchFamily="34" charset="0"/>
-                        </a:rPr>
-                        <a:t>Mediator</a:t>
-                      </a:r>
-                    </a:p>
-                  </a:txBody>
-                  <a:tcPr anchor="ctr">
-                    <a:solidFill>
-                      <a:srgbClr val="6473F5"/>
-                    </a:solidFill>
-                  </a:tcPr>
-                </a:tc>
-                <a:extLst>
-                  <a:ext uri="{0D108BD9-81ED-4DB2-BD59-A6C34878D82A}">
-                    <a16:rowId xmlns:a16="http://schemas.microsoft.com/office/drawing/2014/main" val="11585898"/>
-                  </a:ext>
-                </a:extLst>
-              </a:tr>
-              <a:tr h="838200">
-                <a:tc>
-                  <a:txBody>
-                    <a:bodyPr/>
-                    <a:lstStyle/>
-                    <a:p>
-                      <a:r>
-                        <a:rPr lang="es-CO" sz="1600" b="1">
-                          <a:solidFill>
-                            <a:srgbClr val="FFFFFF"/>
-                          </a:solidFill>
-                          <a:latin typeface="Calibri" panose="020F0502020204030204" pitchFamily="34" charset="0"/>
-                        </a:rPr>
-                        <a:t>Tipo</a:t>
-                      </a:r>
-                    </a:p>
-                  </a:txBody>
-                  <a:tcPr anchor="ctr">
-                    <a:solidFill>
-                      <a:srgbClr val="303878"/>
-                    </a:solidFill>
-                  </a:tcPr>
-                </a:tc>
-                <a:tc>
-                  <a:txBody>
-                    <a:bodyPr/>
-                    <a:lstStyle/>
-                    <a:p>
-                      <a:r>
-                        <a:rPr lang="es-CO" sz="1600" b="0">
-                          <a:solidFill>
-                            <a:srgbClr val="FFFFFF"/>
-                          </a:solidFill>
-                          <a:latin typeface="Calibri" panose="020F0502020204030204" pitchFamily="34" charset="0"/>
-                        </a:rPr>
-                        <a:t>Arquitectura</a:t>
-                      </a:r>
-                    </a:p>
-                  </a:txBody>
-                  <a:tcPr anchor="ctr">
-                    <a:solidFill>
-                      <a:srgbClr val="202658"/>
-                    </a:solidFill>
-                  </a:tcPr>
-                </a:tc>
-                <a:tc>
-                  <a:txBody>
-                    <a:bodyPr/>
-                    <a:lstStyle/>
-                    <a:p>
-                      <a:r>
-                        <a:rPr lang="es-CO" sz="1600" b="0">
-                          <a:solidFill>
-                            <a:srgbClr val="FFFFFF"/>
-                          </a:solidFill>
-                          <a:latin typeface="Calibri" panose="020F0502020204030204" pitchFamily="34" charset="0"/>
-                        </a:rPr>
-                        <a:t>Patrón de diseño</a:t>
-                      </a:r>
-                    </a:p>
-                  </a:txBody>
-                  <a:tcPr anchor="ctr">
-                    <a:solidFill>
-                      <a:srgbClr val="202658"/>
-                    </a:solidFill>
-                  </a:tcPr>
-                </a:tc>
-                <a:tc>
-                  <a:txBody>
-                    <a:bodyPr/>
-                    <a:lstStyle/>
-                    <a:p>
-                      <a:r>
-                        <a:rPr lang="es-CO" sz="1600" b="0">
-                          <a:solidFill>
-                            <a:srgbClr val="FFFFFF"/>
-                          </a:solidFill>
-                          <a:latin typeface="Calibri" panose="020F0502020204030204" pitchFamily="34" charset="0"/>
-                        </a:rPr>
-                        <a:t>Patrón de diseño</a:t>
-                      </a:r>
-                    </a:p>
-                  </a:txBody>
-                  <a:tcPr anchor="ctr">
-                    <a:solidFill>
-                      <a:srgbClr val="202658"/>
-                    </a:solidFill>
-                  </a:tcPr>
-                </a:tc>
-                <a:extLst>
-                  <a:ext uri="{0D108BD9-81ED-4DB2-BD59-A6C34878D82A}">
-                    <a16:rowId xmlns:a16="http://schemas.microsoft.com/office/drawing/2014/main" val="716793442"/>
-                  </a:ext>
-                </a:extLst>
-              </a:tr>
-              <a:tr h="838200">
-                <a:tc>
-                  <a:txBody>
-                    <a:bodyPr/>
-                    <a:lstStyle/>
-                    <a:p>
-                      <a:r>
-                        <a:rPr lang="es-CO" sz="1600" b="1">
-                          <a:solidFill>
-                            <a:srgbClr val="FFFFFF"/>
-                          </a:solidFill>
-                          <a:latin typeface="Calibri" panose="020F0502020204030204" pitchFamily="34" charset="0"/>
-                        </a:rPr>
-                        <a:t>Comunicación</a:t>
-                      </a:r>
-                    </a:p>
-                  </a:txBody>
-                  <a:tcPr anchor="ctr">
-                    <a:solidFill>
-                      <a:srgbClr val="303878"/>
-                    </a:solidFill>
-                  </a:tcPr>
-                </a:tc>
-                <a:tc>
-                  <a:txBody>
-                    <a:bodyPr/>
-                    <a:lstStyle/>
-                    <a:p>
-                      <a:r>
-                        <a:rPr lang="es-ES" sz="1600" b="0">
-                          <a:solidFill>
-                            <a:srgbClr val="FFFFFF"/>
-                          </a:solidFill>
-                          <a:latin typeface="Calibri" panose="020F0502020204030204" pitchFamily="34" charset="0"/>
-                        </a:rPr>
-                        <a:t>Servicios por red (HTTP, mensajes)</a:t>
-                      </a:r>
-                      <a:endParaRPr lang="es-CO" sz="1600" b="0">
-                        <a:solidFill>
-                          <a:srgbClr val="FFFFFF"/>
-                        </a:solidFill>
-                        <a:latin typeface="Calibri" panose="020F0502020204030204" pitchFamily="34" charset="0"/>
-                      </a:endParaRPr>
-                    </a:p>
-                  </a:txBody>
-                  <a:tcPr anchor="ctr">
-                    <a:solidFill>
-                      <a:srgbClr val="1A1F48"/>
-                    </a:solidFill>
-                  </a:tcPr>
-                </a:tc>
-                <a:tc>
-                  <a:txBody>
-                    <a:bodyPr/>
-                    <a:lstStyle/>
-                    <a:p>
-                      <a:r>
-                        <a:rPr lang="es-CO" sz="1600" b="0">
-                          <a:solidFill>
-                            <a:srgbClr val="FFFFFF"/>
-                          </a:solidFill>
-                          <a:latin typeface="Calibri" panose="020F0502020204030204" pitchFamily="34" charset="0"/>
-                        </a:rPr>
-                        <a:t>Uno a muchos</a:t>
-                      </a:r>
-                    </a:p>
-                  </a:txBody>
-                  <a:tcPr anchor="ctr">
-                    <a:solidFill>
-                      <a:srgbClr val="1A1F48"/>
-                    </a:solidFill>
-                  </a:tcPr>
-                </a:tc>
-                <a:tc>
-                  <a:txBody>
-                    <a:bodyPr/>
-                    <a:lstStyle/>
-                    <a:p>
-                      <a:r>
-                        <a:rPr lang="es-ES" sz="1600" b="0">
-                          <a:solidFill>
-                            <a:srgbClr val="FFFFFF"/>
-                          </a:solidFill>
-                          <a:latin typeface="Calibri" panose="020F0502020204030204" pitchFamily="34" charset="0"/>
-                        </a:rPr>
-                        <a:t>Muchos a muchos, a través de un centro</a:t>
-                      </a:r>
-                      <a:endParaRPr lang="es-CO" sz="1600" b="0">
-                        <a:solidFill>
-                          <a:srgbClr val="FFFFFF"/>
-                        </a:solidFill>
-                        <a:latin typeface="Calibri" panose="020F0502020204030204" pitchFamily="34" charset="0"/>
-                      </a:endParaRPr>
-                    </a:p>
-                  </a:txBody>
-                  <a:tcPr anchor="ctr">
-                    <a:solidFill>
-                      <a:srgbClr val="1A1F48"/>
-                    </a:solidFill>
-                  </a:tcPr>
-                </a:tc>
-                <a:extLst>
-                  <a:ext uri="{0D108BD9-81ED-4DB2-BD59-A6C34878D82A}">
-                    <a16:rowId xmlns:a16="http://schemas.microsoft.com/office/drawing/2014/main" val="1394721793"/>
-                  </a:ext>
-                </a:extLst>
-              </a:tr>
-              <a:tr h="838200">
-                <a:tc>
-                  <a:txBody>
-                    <a:bodyPr/>
-                    <a:lstStyle/>
-                    <a:p>
-                      <a:r>
-                        <a:rPr lang="es-CO" sz="1600" b="1">
-                          <a:solidFill>
-                            <a:srgbClr val="FFFFFF"/>
-                          </a:solidFill>
-                          <a:latin typeface="Calibri" panose="020F0502020204030204" pitchFamily="34" charset="0"/>
-                        </a:rPr>
-                        <a:t>Acoplamiento</a:t>
-                      </a:r>
-                    </a:p>
-                  </a:txBody>
-                  <a:tcPr anchor="ctr">
-                    <a:solidFill>
-                      <a:srgbClr val="303878"/>
-                    </a:solidFill>
-                  </a:tcPr>
-                </a:tc>
-                <a:tc>
-                  <a:txBody>
-                    <a:bodyPr/>
-                    <a:lstStyle/>
-                    <a:p>
-                      <a:r>
-                        <a:rPr lang="es-CO" sz="1600" b="0">
-                          <a:solidFill>
-                            <a:srgbClr val="FFFFFF"/>
-                          </a:solidFill>
-                          <a:latin typeface="Calibri" panose="020F0502020204030204" pitchFamily="34" charset="0"/>
-                        </a:rPr>
-                        <a:t>Bajo, por contratos</a:t>
-                      </a:r>
-                    </a:p>
-                  </a:txBody>
-                  <a:tcPr anchor="ctr">
-                    <a:solidFill>
-                      <a:srgbClr val="202658"/>
-                    </a:solidFill>
-                  </a:tcPr>
-                </a:tc>
-                <a:tc>
-                  <a:txBody>
-                    <a:bodyPr/>
-                    <a:lstStyle/>
-                    <a:p>
-                      <a:r>
-                        <a:rPr lang="es-CO" sz="1600" b="0">
-                          <a:solidFill>
-                            <a:srgbClr val="FFFFFF"/>
-                          </a:solidFill>
-                          <a:latin typeface="Calibri" panose="020F0502020204030204" pitchFamily="34" charset="0"/>
-                        </a:rPr>
-                        <a:t>Bajo, por suscripción</a:t>
-                      </a:r>
-                    </a:p>
-                  </a:txBody>
-                  <a:tcPr anchor="ctr">
-                    <a:solidFill>
-                      <a:srgbClr val="202658"/>
-                    </a:solidFill>
-                  </a:tcPr>
-                </a:tc>
-                <a:tc>
-                  <a:txBody>
-                    <a:bodyPr/>
-                    <a:lstStyle/>
-                    <a:p>
-                      <a:r>
-                        <a:rPr lang="es-CO" sz="1600" b="0">
-                          <a:solidFill>
-                            <a:srgbClr val="FFFFFF"/>
-                          </a:solidFill>
-                          <a:latin typeface="Calibri" panose="020F0502020204030204" pitchFamily="34" charset="0"/>
-                        </a:rPr>
-                        <a:t>Bajo entre componentes</a:t>
-                      </a:r>
-                    </a:p>
-                  </a:txBody>
-                  <a:tcPr anchor="ctr">
-                    <a:solidFill>
-                      <a:srgbClr val="202658"/>
-                    </a:solidFill>
-                  </a:tcPr>
-                </a:tc>
-                <a:extLst>
-                  <a:ext uri="{0D108BD9-81ED-4DB2-BD59-A6C34878D82A}">
-                    <a16:rowId xmlns:a16="http://schemas.microsoft.com/office/drawing/2014/main" val="4167621331"/>
-                  </a:ext>
-                </a:extLst>
-              </a:tr>
-              <a:tr h="838200">
-                <a:tc>
-                  <a:txBody>
-                    <a:bodyPr/>
-                    <a:lstStyle/>
-                    <a:p>
-                      <a:r>
-                        <a:rPr lang="es-CO" sz="1600" b="1">
-                          <a:solidFill>
-                            <a:srgbClr val="FFFFFF"/>
-                          </a:solidFill>
-                          <a:latin typeface="Calibri" panose="020F0502020204030204" pitchFamily="34" charset="0"/>
-                        </a:rPr>
-                        <a:t>Riesgo principal</a:t>
-                      </a:r>
-                    </a:p>
-                  </a:txBody>
-                  <a:tcPr anchor="ctr">
-                    <a:solidFill>
-                      <a:srgbClr val="303878"/>
-                    </a:solidFill>
-                  </a:tcPr>
-                </a:tc>
-                <a:tc>
-                  <a:txBody>
-                    <a:bodyPr/>
-                    <a:lstStyle/>
-                    <a:p>
-                      <a:r>
-                        <a:rPr lang="es-CO" sz="1600" b="0">
-                          <a:solidFill>
-                            <a:srgbClr val="FFFFFF"/>
-                          </a:solidFill>
-                          <a:latin typeface="Calibri" panose="020F0502020204030204" pitchFamily="34" charset="0"/>
-                        </a:rPr>
-                        <a:t>Complejidad y latencia</a:t>
-                      </a:r>
-                    </a:p>
-                  </a:txBody>
-                  <a:tcPr anchor="ctr">
-                    <a:solidFill>
-                      <a:srgbClr val="1A1F48"/>
-                    </a:solidFill>
-                  </a:tcPr>
-                </a:tc>
-                <a:tc>
-                  <a:txBody>
-                    <a:bodyPr/>
-                    <a:lstStyle/>
-                    <a:p>
-                      <a:r>
-                        <a:rPr lang="es-ES" sz="1600" b="0">
-                          <a:solidFill>
-                            <a:srgbClr val="FFFFFF"/>
-                          </a:solidFill>
-                          <a:latin typeface="Calibri" panose="020F0502020204030204" pitchFamily="34" charset="0"/>
-                        </a:rPr>
-                        <a:t>Cascadas y fugas de memoria</a:t>
-                      </a:r>
-                      <a:endParaRPr lang="es-CO" sz="1600" b="0">
-                        <a:solidFill>
-                          <a:srgbClr val="FFFFFF"/>
-                        </a:solidFill>
-                        <a:latin typeface="Calibri" panose="020F0502020204030204" pitchFamily="34" charset="0"/>
-                      </a:endParaRPr>
-                    </a:p>
-                  </a:txBody>
-                  <a:tcPr anchor="ctr">
-                    <a:solidFill>
-                      <a:srgbClr val="1A1F48"/>
-                    </a:solidFill>
-                  </a:tcPr>
-                </a:tc>
-                <a:tc>
-                  <a:txBody>
-                    <a:bodyPr/>
-                    <a:lstStyle/>
-                    <a:p>
-                      <a:r>
-                        <a:rPr lang="es-CO" sz="1600" b="0">
-                          <a:solidFill>
-                            <a:srgbClr val="FFFFFF"/>
-                          </a:solidFill>
-                          <a:latin typeface="Calibri" panose="020F0502020204030204" pitchFamily="34" charset="0"/>
-                        </a:rPr>
-                        <a:t>Mediador sobrecargado</a:t>
-                      </a:r>
-                    </a:p>
-                  </a:txBody>
-                  <a:tcPr anchor="ctr">
-                    <a:solidFill>
-                      <a:srgbClr val="1A1F48"/>
-                    </a:solidFill>
-                  </a:tcPr>
-                </a:tc>
-                <a:extLst>
-                  <a:ext uri="{0D108BD9-81ED-4DB2-BD59-A6C34878D82A}">
-                    <a16:rowId xmlns:a16="http://schemas.microsoft.com/office/drawing/2014/main" val="4271005089"/>
-                  </a:ext>
-                </a:extLst>
-              </a:tr>
-            </a:tbl>
-          </a:graphicData>
-        </a:graphic>
-      </p:graphicFrame>
-    </p:spTree>
-    <p:extLst>
-      <p:ext uri="{BB962C8B-B14F-4D97-AF65-F5344CB8AC3E}">
-        <p14:creationId xmlns:p14="http://schemas.microsoft.com/office/powerpoint/2010/main" val="1017533656"/>
-      </p:ext>
-    </p:extLst>
-  </p:cSld>
-  <p:clrMapOvr>
-    <a:masterClrMapping/>
-  </p:clrMapOvr>
-  <mc:AlternateContent xmlns:mc="http://schemas.openxmlformats.org/markup-compatibility/2006" xmlns:p14="http://schemas.microsoft.com/office/powerpoint/2010/main">
-    <mc:Choice Requires="p14">
-      <p:transition spd="slow" p14:dur="2000">
-        <p:fade/>
-      </p:transition>
-    </mc:Choice>
-    <mc:Fallback xmlns="">
-      <p:transition spd="slow">
-        <p:fade/>
-      </p:transition>
-    </mc:Fallback>
-  </mc:AlternateContent>
-  <p:timing>
-    <p:tnLst>
-      <p:par>
-        <p:cTn id="1" dur="indefinite" restart="never" nodeType="tmRoot">
-          <p:childTnLst>
-            <p:seq concurrent="1" nextAc="seek">
-              <p:cTn id="2" dur="indefinite" nodeType="mainSeq">
-                <p:childTnLst>
-                  <p:par>
-                    <p:cTn id="3" fill="hold">
-                      <p:stCondLst>
-                        <p:cond delay="indefinite"/>
-                        <p:cond evt="onBegin" delay="0">
-                          <p:tn val="2"/>
-                        </p:cond>
-                      </p:stCondLst>
-                      <p:childTnLst>
-                        <p:par>
-                          <p:cTn id="4" fill="hold">
-                            <p:stCondLst>
-                              <p:cond delay="0"/>
-                            </p:stCondLst>
-                            <p:childTnLst>
-                              <p:par>
-                                <p:cTn id="5" presetID="10" presetClass="entr" presetSubtype="0" fill="hold" nodeType="afterEffect">
-                                  <p:stCondLst>
-                                    <p:cond delay="0"/>
-                                  </p:stCondLst>
-                                  <p:childTnLst>
-                                    <p:set>
-                                      <p:cBhvr>
-                                        <p:cTn id="6" dur="1" fill="hold">
-                                          <p:stCondLst>
-                                            <p:cond delay="0"/>
-                                          </p:stCondLst>
-                                        </p:cTn>
-                                        <p:tgtEl>
-                                          <p:spTgt spid="4"/>
-                                        </p:tgtEl>
-                                        <p:attrNameLst>
-                                          <p:attrName>style.visibility</p:attrName>
-                                        </p:attrNameLst>
-                                      </p:cBhvr>
-                                      <p:to>
-                                        <p:strVal val="visible"/>
-                                      </p:to>
-                                    </p:set>
-                                    <p:animEffect transition="in" filter="fade">
-                                      <p:cBhvr>
-                                        <p:cTn id="7" dur="500"/>
-                                        <p:tgtEl>
-                                          <p:spTgt spid="4"/>
-                                        </p:tgtEl>
-                                      </p:cBhvr>
-                                    </p:animEffect>
-                                  </p:childTnLst>
-                                </p:cTn>
-                              </p:par>
-                            </p:childTnLst>
-                          </p:cTn>
-                        </p:par>
-                      </p:childTnLst>
-                    </p:cTn>
-                  </p:par>
-                </p:childTnLst>
-              </p:cTn>
-              <p:prevCondLst>
-                <p:cond evt="onPrev" delay="0">
-                  <p:tgtEl>
-                    <p:sldTgt/>
-                  </p:tgtEl>
-                </p:cond>
-              </p:prevCondLst>
-              <p:nextCondLst>
-                <p:cond evt="onNext" delay="0">
-                  <p:tgtEl>
-                    <p:sldTgt/>
-                  </p:tgtEl>
-                </p:cond>
-              </p:nextCondLst>
-            </p:seq>
-          </p:childTnLst>
-        </p:cTn>
-      </p:par>
-    </p:tnLst>
-  </p:timing>
-</p:sld>
-</file>
-
-<file path=ppt/slides/slide18.xml><?xml version="1.0" encoding="utf-8"?>
+<file path=ppt/slides/slide15.xml><?xml version="1.0" encoding="utf-8"?>
 <p:sld xmlns:a="http://schemas.openxmlformats.org/drawingml/2006/main" xmlns:r="http://schemas.openxmlformats.org/officeDocument/2006/relationships" xmlns:p="http://schemas.openxmlformats.org/presentationml/2006/main">
   <p:cSld>
     <p:bg>
@@ -12999,7 +10643,7 @@
 </p:sld>
 </file>
 
-<file path=ppt/slides/slide19.xml><?xml version="1.0" encoding="utf-8"?>
+<file path=ppt/slides/slide16.xml><?xml version="1.0" encoding="utf-8"?>
 <p:sld xmlns:a="http://schemas.openxmlformats.org/drawingml/2006/main" xmlns:r="http://schemas.openxmlformats.org/officeDocument/2006/relationships" xmlns:p="http://schemas.openxmlformats.org/presentationml/2006/main">
   <p:cSld>
     <p:bg>
@@ -13251,549 +10895,7 @@
 </p:sld>
 </file>
 
-<file path=ppt/slides/slide2.xml><?xml version="1.0" encoding="utf-8"?>
-<p:sld xmlns:a="http://schemas.openxmlformats.org/drawingml/2006/main" xmlns:r="http://schemas.openxmlformats.org/officeDocument/2006/relationships" xmlns:p="http://schemas.openxmlformats.org/presentationml/2006/main">
-  <p:cSld>
-    <p:bg>
-      <p:bgPr>
-        <a:solidFill>
-          <a:srgbClr val="0F122D"/>
-        </a:solidFill>
-        <a:effectLst/>
-      </p:bgPr>
-    </p:bg>
-    <p:spTree>
-      <p:nvGrpSpPr>
-        <p:cNvPr id="1" name=""/>
-        <p:cNvGrpSpPr/>
-        <p:nvPr/>
-      </p:nvGrpSpPr>
-      <p:grpSpPr>
-        <a:xfrm>
-          <a:off x="0" y="0"/>
-          <a:ext cx="0" cy="0"/>
-          <a:chOff x="0" y="0"/>
-          <a:chExt cx="0" cy="0"/>
-        </a:xfrm>
-      </p:grpSpPr>
-      <p:sp>
-        <p:nvSpPr>
-          <p:cNvPr id="9999" name="Elipse 2">
-            <a:extLst>
-              <a:ext uri="{FF2B5EF4-FFF2-40B4-BE49-F238E27FC236}">
-                <a16:creationId xmlns:a16="http://schemas.microsoft.com/office/drawing/2014/main" id="{73E27086-79B5-6F79-3728-22245EE1FBD1}"/>
-              </a:ext>
-            </a:extLst>
-          </p:cNvPr>
-          <p:cNvSpPr/>
-          <p:nvPr/>
-        </p:nvSpPr>
-        <p:spPr>
-          <a:xfrm>
-            <a:off x="10160000" y="-1016000"/>
-            <a:ext cx="3302000" cy="3302000"/>
-          </a:xfrm>
-          <a:prstGeom prst="ellipse">
-            <a:avLst/>
-          </a:prstGeom>
-          <a:solidFill>
-            <a:srgbClr val="6473F5">
-              <a:alpha val="20000"/>
-            </a:srgbClr>
-          </a:solidFill>
-          <a:ln w="19050" cap="flat" cmpd="sng" algn="ctr">
-            <a:noFill/>
-            <a:prstDash val="solid"/>
-            <a:miter lim="800000"/>
-          </a:ln>
-          <a:effectLst/>
-          <a:extLst>
-            <a:ext uri="{91240B29-F687-4F45-9708-019B960494DF}">
-              <a14:hiddenLine xmlns:a14="http://schemas.microsoft.com/office/drawing/2010/main" w="19050" cap="flat" cmpd="sng" algn="ctr">
-                <a:solidFill>
-                  <a:schemeClr val="accent1">
-                    <a:shade val="15000"/>
-                  </a:schemeClr>
-                </a:solidFill>
-                <a:prstDash val="solid"/>
-                <a:miter lim="800000"/>
-              </a14:hiddenLine>
-            </a:ext>
-          </a:extLst>
-        </p:spPr>
-        <p:style>
-          <a:lnRef idx="2">
-            <a:schemeClr val="accent1">
-              <a:shade val="15000"/>
-            </a:schemeClr>
-          </a:lnRef>
-          <a:fillRef idx="1">
-            <a:schemeClr val="accent1"/>
-          </a:fillRef>
-          <a:effectRef idx="0">
-            <a:schemeClr val="accent1"/>
-          </a:effectRef>
-          <a:fontRef idx="minor">
-            <a:schemeClr val="lt1"/>
-          </a:fontRef>
-        </p:style>
-        <p:txBody>
-          <a:bodyPr rtlCol="0" anchor="ctr"/>
-          <a:lstStyle/>
-          <a:p>
-            <a:pPr algn="ctr"/>
-            <a:endParaRPr lang="es-CO"/>
-          </a:p>
-        </p:txBody>
-      </p:sp>
-      <p:sp>
-        <p:nvSpPr>
-          <p:cNvPr id="2" name="Text 0"/>
-          <p:cNvSpPr>
-            <a:spLocks noGrp="1"/>
-          </p:cNvSpPr>
-          <p:nvPr>
-            <p:ph type="title" idx="100"/>
-          </p:nvPr>
-        </p:nvSpPr>
-        <p:spPr>
-          <a:xfrm>
-            <a:off x="630936" y="320040"/>
-            <a:ext cx="10158984" cy="886968"/>
-          </a:xfrm>
-          <a:prstGeom prst="rect">
-            <a:avLst/>
-          </a:prstGeom>
-          <a:noFill/>
-          <a:ln/>
-        </p:spPr>
-        <p:txBody>
-          <a:bodyPr vert="horz" wrap="square" lIns="0" tIns="0" rIns="0" bIns="0" rtlCol="0" anchor="ctr">
-            <a:normAutofit/>
-          </a:bodyPr>
-          <a:lstStyle/>
-          <a:p>
-            <a:r>
-              <a:rPr lang="en-US" sz="3600" b="1" dirty="0">
-                <a:solidFill>
-                  <a:srgbClr val="FFFFFF"/>
-                </a:solidFill>
-                <a:latin typeface="Calibri"/>
-              </a:rPr>
-              <a:t>1. SOA: Definición</a:t>
-            </a:r>
-          </a:p>
-        </p:txBody>
-      </p:sp>
-      <p:sp>
-        <p:nvSpPr>
-          <p:cNvPr id="25" name="Slide Number Placeholder 0"/>
-          <p:cNvSpPr>
-            <a:spLocks noGrp="1"/>
-          </p:cNvSpPr>
-          <p:nvPr>
-            <p:ph type="sldNum" sz="quarter" idx="4294967295"/>
-          </p:nvPr>
-        </p:nvSpPr>
-        <p:spPr>
-          <a:xfrm>
-            <a:off x="11094720" y="6339840"/>
-            <a:ext cx="609600" cy="365760"/>
-          </a:xfrm>
-          <a:prstGeom prst="rect">
-            <a:avLst/>
-          </a:prstGeom>
-          <a:extLst>
-            <a:ext uri="{C572A759-6A51-4108-AA02-DFA0A04FC94B}">
-              <ma14:wrappingTextBoxFlag xmlns:ma14="http://schemas.microsoft.com/office/mac/drawingml/2011/main" xmlns="" val="0"/>
-            </a:ext>
-          </a:extLst>
-        </p:spPr>
-        <p:txBody>
-          <a:bodyPr/>
-          <a:lstStyle>
-            <a:lvl1pPr>
-              <a:defRPr sz="1333">
-                <a:solidFill>
-                  <a:schemeClr val="tx1"/>
-                </a:solidFill>
-              </a:defRPr>
-            </a:lvl1pPr>
-          </a:lstStyle>
-          <a:p>
-            <a:pPr algn="l"/>
-            <a:fld id="{F7021451-1387-4CA6-816F-3879F97B5CBC}" type="slidenum">
-              <a:rPr lang="en-US" b="0">
-                <a:solidFill>
-                  <a:srgbClr val="BEC5E6"/>
-                </a:solidFill>
-              </a:rPr>
-              <a:t>2</a:t>
-            </a:fld>
-            <a:endParaRPr lang="en-US"/>
-          </a:p>
-        </p:txBody>
-      </p:sp>
-      <p:sp>
-        <p:nvSpPr>
-          <p:cNvPr id="3" name="Text 1"/>
-          <p:cNvSpPr txBox="1"/>
-          <p:nvPr/>
-        </p:nvSpPr>
-        <p:spPr>
-          <a:xfrm>
-            <a:off x="731520" y="1584960"/>
-            <a:ext cx="5242560" cy="4511040"/>
-          </a:xfrm>
-          <a:prstGeom prst="rect">
-            <a:avLst/>
-          </a:prstGeom>
-          <a:noFill/>
-          <a:ln/>
-        </p:spPr>
-        <p:txBody>
-          <a:bodyPr wrap="square" lIns="0" tIns="0" rIns="0" bIns="0" rtlCol="0" anchor="t"/>
-          <a:lstStyle/>
-          <a:p>
-            <a:pPr>
-              <a:spcAft>
-                <a:spcPts val="1333"/>
-              </a:spcAft>
-            </a:pPr>
-            <a:r>
-              <a:rPr lang="en-US" sz="2000" b="1" dirty="0">
-                <a:solidFill>
-                  <a:srgbClr val="FFFFFF"/>
-                </a:solidFill>
-                <a:latin typeface="Calibri"/>
-              </a:rPr>
-              <a:t>Qué es: </a:t>
-            </a:r>
-            <a:r>
-              <a:rPr lang="en-US" sz="2000" dirty="0" err="1">
-                <a:solidFill>
-                  <a:srgbClr val="BEC5E6"/>
-                </a:solidFill>
-                <a:latin typeface="Calibri"/>
-              </a:rPr>
-              <a:t>estilo</a:t>
-            </a:r>
-            <a:r>
-              <a:rPr lang="en-US" sz="2000" dirty="0">
-                <a:solidFill>
-                  <a:srgbClr val="BEC5E6"/>
-                </a:solidFill>
-                <a:latin typeface="Calibri"/>
-              </a:rPr>
-              <a:t> de arquitectura que divide el software en servicios independientes. Cada uno hace una función de negocio y publica un contrato.</a:t>
-            </a:r>
-          </a:p>
-          <a:p>
-            <a:pPr>
-              <a:spcAft>
-                <a:spcPts val="1333"/>
-              </a:spcAft>
-            </a:pPr>
-            <a:r>
-              <a:rPr lang="en-US" sz="2000" b="1" dirty="0">
-                <a:solidFill>
-                  <a:srgbClr val="FFFFFF"/>
-                </a:solidFill>
-                <a:latin typeface="Calibri"/>
-              </a:rPr>
-              <a:t>Metáfora: </a:t>
-            </a:r>
-            <a:r>
-              <a:rPr lang="en-US" sz="2000" dirty="0">
-                <a:solidFill>
-                  <a:srgbClr val="BEC5E6"/>
-                </a:solidFill>
-                <a:latin typeface="Calibri"/>
-              </a:rPr>
-              <a:t>un centro comercial; cada local hace una cosa y, si uno cierra, los demás siguen abiertos.</a:t>
-            </a:r>
-          </a:p>
-          <a:p>
-            <a:pPr>
-              <a:spcAft>
-                <a:spcPts val="1333"/>
-              </a:spcAft>
-            </a:pPr>
-            <a:r>
-              <a:rPr lang="en-US" sz="2000" b="1" dirty="0">
-                <a:solidFill>
-                  <a:srgbClr val="FFFFFF"/>
-                </a:solidFill>
-                <a:latin typeface="Calibri"/>
-              </a:rPr>
-              <a:t>Sirve para: </a:t>
-            </a:r>
-            <a:r>
-              <a:rPr lang="en-US" sz="2000" dirty="0" err="1">
-                <a:solidFill>
-                  <a:srgbClr val="BEC5E6"/>
-                </a:solidFill>
-                <a:latin typeface="Calibri"/>
-              </a:rPr>
-              <a:t>integrar</a:t>
-            </a:r>
-            <a:r>
-              <a:rPr lang="en-US" sz="2000" dirty="0">
-                <a:solidFill>
-                  <a:srgbClr val="BEC5E6"/>
-                </a:solidFill>
-                <a:latin typeface="Calibri"/>
-              </a:rPr>
-              <a:t> sistemas viejos y nuevos, reutilizar lógica y cambiar una parte sin romper todo.</a:t>
-            </a:r>
-          </a:p>
-        </p:txBody>
-      </p:sp>
-      <p:sp>
-        <p:nvSpPr>
-          <p:cNvPr id="4" name="Separador"/>
-          <p:cNvSpPr/>
-          <p:nvPr/>
-        </p:nvSpPr>
-        <p:spPr>
-          <a:xfrm>
-            <a:off x="6278880" y="1463040"/>
-            <a:ext cx="0" cy="4632960"/>
-          </a:xfrm>
-          <a:prstGeom prst="line">
-            <a:avLst/>
-          </a:prstGeom>
-          <a:noFill/>
-          <a:ln w="12700">
-            <a:solidFill>
-              <a:srgbClr val="2B3270"/>
-            </a:solidFill>
-            <a:prstDash val="solid"/>
-          </a:ln>
-        </p:spPr>
-        <p:txBody>
-          <a:bodyPr/>
-          <a:lstStyle/>
-          <a:p>
-            <a:endParaRPr lang="es-419" sz="2400"/>
-          </a:p>
-        </p:txBody>
-      </p:sp>
-      <p:sp>
-        <p:nvSpPr>
-          <p:cNvPr id="5" name="Text 3"/>
-          <p:cNvSpPr txBox="1"/>
-          <p:nvPr/>
-        </p:nvSpPr>
-        <p:spPr>
-          <a:xfrm>
-            <a:off x="6583680" y="1402080"/>
-            <a:ext cx="4876800" cy="487680"/>
-          </a:xfrm>
-          <a:prstGeom prst="rect">
-            <a:avLst/>
-          </a:prstGeom>
-          <a:noFill/>
-          <a:ln/>
-        </p:spPr>
-        <p:txBody>
-          <a:bodyPr wrap="square" lIns="0" tIns="0" rIns="0" bIns="0" rtlCol="0" anchor="t"/>
-          <a:lstStyle/>
-          <a:p>
-            <a:r>
-              <a:rPr lang="en-US" sz="2667" b="1" dirty="0">
-                <a:solidFill>
-                  <a:srgbClr val="F4B942"/>
-                </a:solidFill>
-                <a:latin typeface="Calibri"/>
-              </a:rPr>
-              <a:t>Principios</a:t>
-            </a:r>
-            <a:endParaRPr lang="en-US" sz="2667" dirty="0"/>
-          </a:p>
-        </p:txBody>
-      </p:sp>
-      <p:sp>
-        <p:nvSpPr>
-          <p:cNvPr id="6" name="Text 4"/>
-          <p:cNvSpPr txBox="1"/>
-          <p:nvPr/>
-        </p:nvSpPr>
-        <p:spPr>
-          <a:xfrm>
-            <a:off x="6583680" y="2072640"/>
-            <a:ext cx="4876800" cy="4023360"/>
-          </a:xfrm>
-          <a:prstGeom prst="rect">
-            <a:avLst/>
-          </a:prstGeom>
-          <a:noFill/>
-          <a:ln/>
-        </p:spPr>
-        <p:txBody>
-          <a:bodyPr wrap="square" lIns="0" tIns="0" rIns="0" bIns="0" rtlCol="0" anchor="t"/>
-          <a:lstStyle/>
-          <a:p>
-            <a:pPr>
-              <a:spcAft>
-                <a:spcPts val="800"/>
-              </a:spcAft>
-            </a:pPr>
-            <a:r>
-              <a:rPr lang="en-US" sz="1733" b="1" dirty="0">
-                <a:solidFill>
-                  <a:srgbClr val="FFFFFF"/>
-                </a:solidFill>
-                <a:latin typeface="Calibri"/>
-              </a:rPr>
-              <a:t>Contrato estándar: </a:t>
-            </a:r>
-            <a:r>
-              <a:rPr lang="en-US" sz="1733" dirty="0">
-                <a:solidFill>
-                  <a:srgbClr val="BEC5E6"/>
-                </a:solidFill>
-                <a:latin typeface="Calibri"/>
-              </a:rPr>
-              <a:t>describe qué ofrece.</a:t>
-            </a:r>
-          </a:p>
-          <a:p>
-            <a:pPr>
-              <a:spcAft>
-                <a:spcPts val="800"/>
-              </a:spcAft>
-            </a:pPr>
-            <a:r>
-              <a:rPr lang="en-US" sz="1733" b="1" dirty="0">
-                <a:solidFill>
-                  <a:srgbClr val="FFFFFF"/>
-                </a:solidFill>
-                <a:latin typeface="Calibri"/>
-              </a:rPr>
-              <a:t>Bajo acoplamiento: </a:t>
-            </a:r>
-            <a:r>
-              <a:rPr lang="en-US" sz="1733" dirty="0">
-                <a:solidFill>
-                  <a:srgbClr val="BEC5E6"/>
-                </a:solidFill>
-                <a:latin typeface="Calibri"/>
-              </a:rPr>
-              <a:t>depende del contrato, no del código.</a:t>
-            </a:r>
-          </a:p>
-          <a:p>
-            <a:pPr>
-              <a:spcAft>
-                <a:spcPts val="800"/>
-              </a:spcAft>
-            </a:pPr>
-            <a:r>
-              <a:rPr lang="en-US" sz="1733" b="1" dirty="0">
-                <a:solidFill>
-                  <a:srgbClr val="FFFFFF"/>
-                </a:solidFill>
-                <a:latin typeface="Calibri"/>
-              </a:rPr>
-              <a:t>Reutilización: </a:t>
-            </a:r>
-            <a:r>
-              <a:rPr lang="en-US" sz="1733" dirty="0">
-                <a:solidFill>
-                  <a:srgbClr val="BEC5E6"/>
-                </a:solidFill>
-                <a:latin typeface="Calibri"/>
-              </a:rPr>
-              <a:t>varias apps usan el mismo servicio.</a:t>
-            </a:r>
-          </a:p>
-          <a:p>
-            <a:pPr>
-              <a:spcAft>
-                <a:spcPts val="800"/>
-              </a:spcAft>
-            </a:pPr>
-            <a:r>
-              <a:rPr lang="en-US" sz="1733" b="1" dirty="0">
-                <a:solidFill>
-                  <a:srgbClr val="FFFFFF"/>
-                </a:solidFill>
-                <a:latin typeface="Calibri"/>
-              </a:rPr>
-              <a:t>Autonomía: </a:t>
-            </a:r>
-            <a:r>
-              <a:rPr lang="en-US" sz="1733" dirty="0">
-                <a:solidFill>
-                  <a:srgbClr val="BEC5E6"/>
-                </a:solidFill>
-                <a:latin typeface="Calibri"/>
-              </a:rPr>
-              <a:t>cada servicio controla su lógica y datos.</a:t>
-            </a:r>
-          </a:p>
-          <a:p>
-            <a:pPr>
-              <a:spcAft>
-                <a:spcPts val="800"/>
-              </a:spcAft>
-            </a:pPr>
-            <a:r>
-              <a:rPr lang="en-US" sz="1733" b="1" dirty="0">
-                <a:solidFill>
-                  <a:srgbClr val="FFFFFF"/>
-                </a:solidFill>
-                <a:latin typeface="Calibri"/>
-              </a:rPr>
-              <a:t>Abstracción: </a:t>
-            </a:r>
-            <a:r>
-              <a:rPr lang="en-US" sz="1733" dirty="0">
-                <a:solidFill>
-                  <a:srgbClr val="BEC5E6"/>
-                </a:solidFill>
-                <a:latin typeface="Calibri"/>
-              </a:rPr>
-              <a:t>el consumidor no ve el interior.</a:t>
-            </a:r>
-          </a:p>
-          <a:p>
-            <a:pPr>
-              <a:spcAft>
-                <a:spcPts val="800"/>
-              </a:spcAft>
-            </a:pPr>
-            <a:r>
-              <a:rPr lang="en-US" sz="1733" b="1" dirty="0">
-                <a:solidFill>
-                  <a:srgbClr val="FFFFFF"/>
-                </a:solidFill>
-                <a:latin typeface="Calibri"/>
-              </a:rPr>
-              <a:t>Composición: </a:t>
-            </a:r>
-            <a:r>
-              <a:rPr lang="en-US" sz="1733" dirty="0">
-                <a:solidFill>
-                  <a:srgbClr val="BEC5E6"/>
-                </a:solidFill>
-                <a:latin typeface="Calibri"/>
-              </a:rPr>
-              <a:t>servicios simples forman procesos.</a:t>
-            </a:r>
-          </a:p>
-        </p:txBody>
-      </p:sp>
-    </p:spTree>
-  </p:cSld>
-  <p:clrMapOvr>
-    <a:masterClrMapping/>
-  </p:clrMapOvr>
-</p:sld>
-</file>
-
-<file path=ppt/slides/slide20.xml><?xml version="1.0" encoding="utf-8"?>
+<file path=ppt/slides/slide17.xml><?xml version="1.0" encoding="utf-8"?>
 <p:sld xmlns:a="http://schemas.openxmlformats.org/drawingml/2006/main" xmlns:r="http://schemas.openxmlformats.org/officeDocument/2006/relationships" xmlns:p="http://schemas.openxmlformats.org/presentationml/2006/main">
   <p:cSld>
     <p:bg>
@@ -14467,6 +11569,548 @@
 </p:sld>
 </file>
 
+<file path=ppt/slides/slide2.xml><?xml version="1.0" encoding="utf-8"?>
+<p:sld xmlns:a="http://schemas.openxmlformats.org/drawingml/2006/main" xmlns:r="http://schemas.openxmlformats.org/officeDocument/2006/relationships" xmlns:p="http://schemas.openxmlformats.org/presentationml/2006/main">
+  <p:cSld>
+    <p:bg>
+      <p:bgPr>
+        <a:solidFill>
+          <a:srgbClr val="0F122D"/>
+        </a:solidFill>
+        <a:effectLst/>
+      </p:bgPr>
+    </p:bg>
+    <p:spTree>
+      <p:nvGrpSpPr>
+        <p:cNvPr id="1" name=""/>
+        <p:cNvGrpSpPr/>
+        <p:nvPr/>
+      </p:nvGrpSpPr>
+      <p:grpSpPr>
+        <a:xfrm>
+          <a:off x="0" y="0"/>
+          <a:ext cx="0" cy="0"/>
+          <a:chOff x="0" y="0"/>
+          <a:chExt cx="0" cy="0"/>
+        </a:xfrm>
+      </p:grpSpPr>
+      <p:sp>
+        <p:nvSpPr>
+          <p:cNvPr id="9999" name="Elipse 2">
+            <a:extLst>
+              <a:ext uri="{FF2B5EF4-FFF2-40B4-BE49-F238E27FC236}">
+                <a16:creationId xmlns:a16="http://schemas.microsoft.com/office/drawing/2014/main" id="{73E27086-79B5-6F79-3728-22245EE1FBD1}"/>
+              </a:ext>
+            </a:extLst>
+          </p:cNvPr>
+          <p:cNvSpPr/>
+          <p:nvPr/>
+        </p:nvSpPr>
+        <p:spPr>
+          <a:xfrm>
+            <a:off x="10160000" y="-1016000"/>
+            <a:ext cx="3302000" cy="3302000"/>
+          </a:xfrm>
+          <a:prstGeom prst="ellipse">
+            <a:avLst/>
+          </a:prstGeom>
+          <a:solidFill>
+            <a:srgbClr val="6473F5">
+              <a:alpha val="20000"/>
+            </a:srgbClr>
+          </a:solidFill>
+          <a:ln w="19050" cap="flat" cmpd="sng" algn="ctr">
+            <a:noFill/>
+            <a:prstDash val="solid"/>
+            <a:miter lim="800000"/>
+          </a:ln>
+          <a:effectLst/>
+          <a:extLst>
+            <a:ext uri="{91240B29-F687-4F45-9708-019B960494DF}">
+              <a14:hiddenLine xmlns:a14="http://schemas.microsoft.com/office/drawing/2010/main" w="19050" cap="flat" cmpd="sng" algn="ctr">
+                <a:solidFill>
+                  <a:schemeClr val="accent1">
+                    <a:shade val="15000"/>
+                  </a:schemeClr>
+                </a:solidFill>
+                <a:prstDash val="solid"/>
+                <a:miter lim="800000"/>
+              </a14:hiddenLine>
+            </a:ext>
+          </a:extLst>
+        </p:spPr>
+        <p:style>
+          <a:lnRef idx="2">
+            <a:schemeClr val="accent1">
+              <a:shade val="15000"/>
+            </a:schemeClr>
+          </a:lnRef>
+          <a:fillRef idx="1">
+            <a:schemeClr val="accent1"/>
+          </a:fillRef>
+          <a:effectRef idx="0">
+            <a:schemeClr val="accent1"/>
+          </a:effectRef>
+          <a:fontRef idx="minor">
+            <a:schemeClr val="lt1"/>
+          </a:fontRef>
+        </p:style>
+        <p:txBody>
+          <a:bodyPr rtlCol="0" anchor="ctr"/>
+          <a:lstStyle/>
+          <a:p>
+            <a:pPr algn="ctr"/>
+            <a:endParaRPr lang="es-CO"/>
+          </a:p>
+        </p:txBody>
+      </p:sp>
+      <p:sp>
+        <p:nvSpPr>
+          <p:cNvPr id="2" name="Text 0"/>
+          <p:cNvSpPr>
+            <a:spLocks noGrp="1"/>
+          </p:cNvSpPr>
+          <p:nvPr>
+            <p:ph type="title" idx="100"/>
+          </p:nvPr>
+        </p:nvSpPr>
+        <p:spPr>
+          <a:xfrm>
+            <a:off x="630936" y="320040"/>
+            <a:ext cx="10158984" cy="886968"/>
+          </a:xfrm>
+          <a:prstGeom prst="rect">
+            <a:avLst/>
+          </a:prstGeom>
+          <a:noFill/>
+          <a:ln/>
+        </p:spPr>
+        <p:txBody>
+          <a:bodyPr vert="horz" wrap="square" lIns="0" tIns="0" rIns="0" bIns="0" rtlCol="0" anchor="ctr">
+            <a:normAutofit/>
+          </a:bodyPr>
+          <a:lstStyle/>
+          <a:p>
+            <a:r>
+              <a:rPr lang="en-US" sz="3600" b="1" dirty="0">
+                <a:solidFill>
+                  <a:srgbClr val="FFFFFF"/>
+                </a:solidFill>
+                <a:latin typeface="Calibri"/>
+              </a:rPr>
+              <a:t>1. SOA: Definición</a:t>
+            </a:r>
+          </a:p>
+        </p:txBody>
+      </p:sp>
+      <p:sp>
+        <p:nvSpPr>
+          <p:cNvPr id="25" name="Slide Number Placeholder 0"/>
+          <p:cNvSpPr>
+            <a:spLocks noGrp="1"/>
+          </p:cNvSpPr>
+          <p:nvPr>
+            <p:ph type="sldNum" sz="quarter" idx="4294967295"/>
+          </p:nvPr>
+        </p:nvSpPr>
+        <p:spPr>
+          <a:xfrm>
+            <a:off x="11094720" y="6339840"/>
+            <a:ext cx="609600" cy="365760"/>
+          </a:xfrm>
+          <a:prstGeom prst="rect">
+            <a:avLst/>
+          </a:prstGeom>
+          <a:extLst>
+            <a:ext uri="{C572A759-6A51-4108-AA02-DFA0A04FC94B}">
+              <ma14:wrappingTextBoxFlag xmlns="" xmlns:ma14="http://schemas.microsoft.com/office/mac/drawingml/2011/main" val="0"/>
+            </a:ext>
+          </a:extLst>
+        </p:spPr>
+        <p:txBody>
+          <a:bodyPr/>
+          <a:lstStyle>
+            <a:lvl1pPr>
+              <a:defRPr sz="1333">
+                <a:solidFill>
+                  <a:schemeClr val="tx1"/>
+                </a:solidFill>
+              </a:defRPr>
+            </a:lvl1pPr>
+          </a:lstStyle>
+          <a:p>
+            <a:pPr algn="l"/>
+            <a:fld id="{F7021451-1387-4CA6-816F-3879F97B5CBC}" type="slidenum">
+              <a:rPr lang="en-US" b="0">
+                <a:solidFill>
+                  <a:srgbClr val="BEC5E6"/>
+                </a:solidFill>
+              </a:rPr>
+              <a:t>2</a:t>
+            </a:fld>
+            <a:endParaRPr lang="en-US"/>
+          </a:p>
+        </p:txBody>
+      </p:sp>
+      <p:sp>
+        <p:nvSpPr>
+          <p:cNvPr id="3" name="Text 1"/>
+          <p:cNvSpPr txBox="1"/>
+          <p:nvPr/>
+        </p:nvSpPr>
+        <p:spPr>
+          <a:xfrm>
+            <a:off x="731520" y="1584960"/>
+            <a:ext cx="5242560" cy="4511040"/>
+          </a:xfrm>
+          <a:prstGeom prst="rect">
+            <a:avLst/>
+          </a:prstGeom>
+          <a:noFill/>
+          <a:ln/>
+        </p:spPr>
+        <p:txBody>
+          <a:bodyPr wrap="square" lIns="0" tIns="0" rIns="0" bIns="0" rtlCol="0" anchor="t"/>
+          <a:lstStyle/>
+          <a:p>
+            <a:pPr>
+              <a:spcAft>
+                <a:spcPts val="1333"/>
+              </a:spcAft>
+            </a:pPr>
+            <a:r>
+              <a:rPr lang="en-US" sz="2000" b="1" dirty="0">
+                <a:solidFill>
+                  <a:srgbClr val="FFFFFF"/>
+                </a:solidFill>
+                <a:latin typeface="Calibri"/>
+              </a:rPr>
+              <a:t>Qué es: </a:t>
+            </a:r>
+            <a:r>
+              <a:rPr lang="en-US" sz="2000" dirty="0" err="1">
+                <a:solidFill>
+                  <a:srgbClr val="BEC5E6"/>
+                </a:solidFill>
+                <a:latin typeface="Calibri"/>
+              </a:rPr>
+              <a:t>estilo</a:t>
+            </a:r>
+            <a:r>
+              <a:rPr lang="en-US" sz="2000" dirty="0">
+                <a:solidFill>
+                  <a:srgbClr val="BEC5E6"/>
+                </a:solidFill>
+                <a:latin typeface="Calibri"/>
+              </a:rPr>
+              <a:t> de arquitectura que divide el software en servicios independientes. Cada uno hace una función de negocio y publica un contrato.</a:t>
+            </a:r>
+          </a:p>
+          <a:p>
+            <a:pPr>
+              <a:spcAft>
+                <a:spcPts val="1333"/>
+              </a:spcAft>
+            </a:pPr>
+            <a:r>
+              <a:rPr lang="en-US" sz="2000" b="1" dirty="0">
+                <a:solidFill>
+                  <a:srgbClr val="FFFFFF"/>
+                </a:solidFill>
+                <a:latin typeface="Calibri"/>
+              </a:rPr>
+              <a:t>Metáfora: </a:t>
+            </a:r>
+            <a:r>
+              <a:rPr lang="en-US" sz="2000" dirty="0">
+                <a:solidFill>
+                  <a:srgbClr val="BEC5E6"/>
+                </a:solidFill>
+                <a:latin typeface="Calibri"/>
+              </a:rPr>
+              <a:t>un centro comercial; cada local hace una cosa y, si uno cierra, los demás siguen abiertos.</a:t>
+            </a:r>
+          </a:p>
+          <a:p>
+            <a:pPr>
+              <a:spcAft>
+                <a:spcPts val="1333"/>
+              </a:spcAft>
+            </a:pPr>
+            <a:r>
+              <a:rPr lang="en-US" sz="2000" b="1" dirty="0">
+                <a:solidFill>
+                  <a:srgbClr val="FFFFFF"/>
+                </a:solidFill>
+                <a:latin typeface="Calibri"/>
+              </a:rPr>
+              <a:t>Sirve para: </a:t>
+            </a:r>
+            <a:r>
+              <a:rPr lang="en-US" sz="2000" dirty="0" err="1">
+                <a:solidFill>
+                  <a:srgbClr val="BEC5E6"/>
+                </a:solidFill>
+                <a:latin typeface="Calibri"/>
+              </a:rPr>
+              <a:t>integrar</a:t>
+            </a:r>
+            <a:r>
+              <a:rPr lang="en-US" sz="2000" dirty="0">
+                <a:solidFill>
+                  <a:srgbClr val="BEC5E6"/>
+                </a:solidFill>
+                <a:latin typeface="Calibri"/>
+              </a:rPr>
+              <a:t> sistemas viejos y nuevos, reutilizar lógica y cambiar una parte sin romper todo.</a:t>
+            </a:r>
+          </a:p>
+        </p:txBody>
+      </p:sp>
+      <p:sp>
+        <p:nvSpPr>
+          <p:cNvPr id="4" name="Separador"/>
+          <p:cNvSpPr/>
+          <p:nvPr/>
+        </p:nvSpPr>
+        <p:spPr>
+          <a:xfrm>
+            <a:off x="6278880" y="1463040"/>
+            <a:ext cx="0" cy="4632960"/>
+          </a:xfrm>
+          <a:prstGeom prst="line">
+            <a:avLst/>
+          </a:prstGeom>
+          <a:noFill/>
+          <a:ln w="12700">
+            <a:solidFill>
+              <a:srgbClr val="2B3270"/>
+            </a:solidFill>
+            <a:prstDash val="solid"/>
+          </a:ln>
+        </p:spPr>
+        <p:txBody>
+          <a:bodyPr/>
+          <a:lstStyle/>
+          <a:p>
+            <a:endParaRPr lang="es-419" sz="2400"/>
+          </a:p>
+        </p:txBody>
+      </p:sp>
+      <p:sp>
+        <p:nvSpPr>
+          <p:cNvPr id="5" name="Text 3"/>
+          <p:cNvSpPr txBox="1"/>
+          <p:nvPr/>
+        </p:nvSpPr>
+        <p:spPr>
+          <a:xfrm>
+            <a:off x="6583680" y="1402080"/>
+            <a:ext cx="4876800" cy="487680"/>
+          </a:xfrm>
+          <a:prstGeom prst="rect">
+            <a:avLst/>
+          </a:prstGeom>
+          <a:noFill/>
+          <a:ln/>
+        </p:spPr>
+        <p:txBody>
+          <a:bodyPr wrap="square" lIns="0" tIns="0" rIns="0" bIns="0" rtlCol="0" anchor="t"/>
+          <a:lstStyle/>
+          <a:p>
+            <a:r>
+              <a:rPr lang="en-US" sz="2667" b="1" dirty="0">
+                <a:solidFill>
+                  <a:srgbClr val="F4B942"/>
+                </a:solidFill>
+                <a:latin typeface="Calibri"/>
+              </a:rPr>
+              <a:t>Principios</a:t>
+            </a:r>
+            <a:endParaRPr lang="en-US" sz="2667" dirty="0"/>
+          </a:p>
+        </p:txBody>
+      </p:sp>
+      <p:sp>
+        <p:nvSpPr>
+          <p:cNvPr id="6" name="Text 4"/>
+          <p:cNvSpPr txBox="1"/>
+          <p:nvPr/>
+        </p:nvSpPr>
+        <p:spPr>
+          <a:xfrm>
+            <a:off x="6583680" y="2072640"/>
+            <a:ext cx="4876800" cy="4023360"/>
+          </a:xfrm>
+          <a:prstGeom prst="rect">
+            <a:avLst/>
+          </a:prstGeom>
+          <a:noFill/>
+          <a:ln/>
+        </p:spPr>
+        <p:txBody>
+          <a:bodyPr wrap="square" lIns="0" tIns="0" rIns="0" bIns="0" rtlCol="0" anchor="t"/>
+          <a:lstStyle/>
+          <a:p>
+            <a:pPr>
+              <a:spcAft>
+                <a:spcPts val="800"/>
+              </a:spcAft>
+            </a:pPr>
+            <a:r>
+              <a:rPr lang="en-US" sz="1733" b="1" dirty="0">
+                <a:solidFill>
+                  <a:srgbClr val="FFFFFF"/>
+                </a:solidFill>
+                <a:latin typeface="Calibri"/>
+              </a:rPr>
+              <a:t>Contrato estándar: </a:t>
+            </a:r>
+            <a:r>
+              <a:rPr lang="en-US" sz="1733" dirty="0">
+                <a:solidFill>
+                  <a:srgbClr val="BEC5E6"/>
+                </a:solidFill>
+                <a:latin typeface="Calibri"/>
+              </a:rPr>
+              <a:t>describe qué ofrece.</a:t>
+            </a:r>
+          </a:p>
+          <a:p>
+            <a:pPr>
+              <a:spcAft>
+                <a:spcPts val="800"/>
+              </a:spcAft>
+            </a:pPr>
+            <a:r>
+              <a:rPr lang="en-US" sz="1733" b="1" dirty="0">
+                <a:solidFill>
+                  <a:srgbClr val="FFFFFF"/>
+                </a:solidFill>
+                <a:latin typeface="Calibri"/>
+              </a:rPr>
+              <a:t>Bajo acoplamiento: </a:t>
+            </a:r>
+            <a:r>
+              <a:rPr lang="en-US" sz="1733" dirty="0">
+                <a:solidFill>
+                  <a:srgbClr val="BEC5E6"/>
+                </a:solidFill>
+                <a:latin typeface="Calibri"/>
+              </a:rPr>
+              <a:t>depende del contrato, no del código.</a:t>
+            </a:r>
+          </a:p>
+          <a:p>
+            <a:pPr>
+              <a:spcAft>
+                <a:spcPts val="800"/>
+              </a:spcAft>
+            </a:pPr>
+            <a:r>
+              <a:rPr lang="en-US" sz="1733" b="1" dirty="0">
+                <a:solidFill>
+                  <a:srgbClr val="FFFFFF"/>
+                </a:solidFill>
+                <a:latin typeface="Calibri"/>
+              </a:rPr>
+              <a:t>Reutilización: </a:t>
+            </a:r>
+            <a:r>
+              <a:rPr lang="en-US" sz="1733" dirty="0">
+                <a:solidFill>
+                  <a:srgbClr val="BEC5E6"/>
+                </a:solidFill>
+                <a:latin typeface="Calibri"/>
+              </a:rPr>
+              <a:t>varias apps usan el mismo servicio.</a:t>
+            </a:r>
+          </a:p>
+          <a:p>
+            <a:pPr>
+              <a:spcAft>
+                <a:spcPts val="800"/>
+              </a:spcAft>
+            </a:pPr>
+            <a:r>
+              <a:rPr lang="en-US" sz="1733" b="1" dirty="0">
+                <a:solidFill>
+                  <a:srgbClr val="FFFFFF"/>
+                </a:solidFill>
+                <a:latin typeface="Calibri"/>
+              </a:rPr>
+              <a:t>Autonomía: </a:t>
+            </a:r>
+            <a:r>
+              <a:rPr lang="en-US" sz="1733" dirty="0">
+                <a:solidFill>
+                  <a:srgbClr val="BEC5E6"/>
+                </a:solidFill>
+                <a:latin typeface="Calibri"/>
+              </a:rPr>
+              <a:t>cada servicio controla su lógica y datos.</a:t>
+            </a:r>
+          </a:p>
+          <a:p>
+            <a:pPr>
+              <a:spcAft>
+                <a:spcPts val="800"/>
+              </a:spcAft>
+            </a:pPr>
+            <a:r>
+              <a:rPr lang="en-US" sz="1733" b="1" dirty="0">
+                <a:solidFill>
+                  <a:srgbClr val="FFFFFF"/>
+                </a:solidFill>
+                <a:latin typeface="Calibri"/>
+              </a:rPr>
+              <a:t>Abstracción: </a:t>
+            </a:r>
+            <a:r>
+              <a:rPr lang="en-US" sz="1733" dirty="0">
+                <a:solidFill>
+                  <a:srgbClr val="BEC5E6"/>
+                </a:solidFill>
+                <a:latin typeface="Calibri"/>
+              </a:rPr>
+              <a:t>el consumidor no ve el interior.</a:t>
+            </a:r>
+          </a:p>
+          <a:p>
+            <a:pPr>
+              <a:spcAft>
+                <a:spcPts val="800"/>
+              </a:spcAft>
+            </a:pPr>
+            <a:r>
+              <a:rPr lang="en-US" sz="1733" b="1" dirty="0">
+                <a:solidFill>
+                  <a:srgbClr val="FFFFFF"/>
+                </a:solidFill>
+                <a:latin typeface="Calibri"/>
+              </a:rPr>
+              <a:t>Composición: </a:t>
+            </a:r>
+            <a:r>
+              <a:rPr lang="en-US" sz="1733" dirty="0">
+                <a:solidFill>
+                  <a:srgbClr val="BEC5E6"/>
+                </a:solidFill>
+                <a:latin typeface="Calibri"/>
+              </a:rPr>
+              <a:t>servicios simples forman procesos.</a:t>
+            </a:r>
+          </a:p>
+        </p:txBody>
+      </p:sp>
+    </p:spTree>
+  </p:cSld>
+  <p:clrMapOvr>
+    <a:masterClrMapping/>
+  </p:clrMapOvr>
+</p:sld>
+</file>
+
 <file path=ppt/slides/slide3.xml><?xml version="1.0" encoding="utf-8"?>
 <p:sld xmlns:a="http://schemas.openxmlformats.org/drawingml/2006/main" xmlns:r="http://schemas.openxmlformats.org/officeDocument/2006/relationships" xmlns:p="http://schemas.openxmlformats.org/presentationml/2006/main">
   <p:cSld>
@@ -14621,7 +12265,7 @@
           </a:prstGeom>
           <a:extLst>
             <a:ext uri="{C572A759-6A51-4108-AA02-DFA0A04FC94B}">
-              <ma14:wrappingTextBoxFlag xmlns:ma14="http://schemas.microsoft.com/office/mac/drawingml/2011/main" xmlns="" val="0"/>
+              <ma14:wrappingTextBoxFlag xmlns="" xmlns:ma14="http://schemas.microsoft.com/office/mac/drawingml/2011/main" val="0"/>
             </a:ext>
           </a:extLst>
         </p:spPr>
@@ -15159,7 +12803,7 @@
           </a:prstGeom>
           <a:extLst>
             <a:ext uri="{C572A759-6A51-4108-AA02-DFA0A04FC94B}">
-              <ma14:wrappingTextBoxFlag xmlns:ma14="http://schemas.microsoft.com/office/mac/drawingml/2011/main" xmlns="" val="0"/>
+              <ma14:wrappingTextBoxFlag xmlns="" xmlns:ma14="http://schemas.microsoft.com/office/mac/drawingml/2011/main" val="0"/>
             </a:ext>
           </a:extLst>
         </p:spPr>
@@ -20622,1183 +18266,6 @@
           <p:cNvPr id="3" name="Elipse 2">
             <a:extLst>
               <a:ext uri="{FF2B5EF4-FFF2-40B4-BE49-F238E27FC236}">
-                <a16:creationId xmlns:a16="http://schemas.microsoft.com/office/drawing/2014/main" id="{0A5DACC3-ADC3-44C7-A0A5-B2465CD50076}"/>
-              </a:ext>
-            </a:extLst>
-          </p:cNvPr>
-          <p:cNvSpPr/>
-          <p:nvPr/>
-        </p:nvSpPr>
-        <p:spPr>
-          <a:xfrm>
-            <a:off x="10160000" y="-1016000"/>
-            <a:ext cx="3302000" cy="3302000"/>
-          </a:xfrm>
-          <a:prstGeom prst="ellipse">
-            <a:avLst/>
-          </a:prstGeom>
-          <a:solidFill>
-            <a:srgbClr val="6473F5">
-              <a:alpha val="20000"/>
-            </a:srgbClr>
-          </a:solidFill>
-          <a:ln w="19050" cap="flat" cmpd="sng" algn="ctr">
-            <a:noFill/>
-            <a:prstDash val="solid"/>
-            <a:miter lim="800000"/>
-          </a:ln>
-          <a:effectLst/>
-          <a:extLst>
-            <a:ext uri="{91240B29-F687-4F45-9708-019B960494DF}">
-              <a14:hiddenLine xmlns:a14="http://schemas.microsoft.com/office/drawing/2010/main" w="19050" cap="flat" cmpd="sng" algn="ctr">
-                <a:solidFill>
-                  <a:schemeClr val="accent1">
-                    <a:shade val="15000"/>
-                  </a:schemeClr>
-                </a:solidFill>
-                <a:prstDash val="solid"/>
-                <a:miter lim="800000"/>
-              </a14:hiddenLine>
-            </a:ext>
-          </a:extLst>
-        </p:spPr>
-        <p:style>
-          <a:lnRef idx="2">
-            <a:schemeClr val="accent1">
-              <a:shade val="15000"/>
-            </a:schemeClr>
-          </a:lnRef>
-          <a:fillRef idx="1">
-            <a:schemeClr val="accent1"/>
-          </a:fillRef>
-          <a:effectRef idx="0">
-            <a:schemeClr val="accent1"/>
-          </a:effectRef>
-          <a:fontRef idx="minor">
-            <a:schemeClr val="lt1"/>
-          </a:fontRef>
-        </p:style>
-        <p:txBody>
-          <a:bodyPr rtlCol="0" anchor="ctr"/>
-          <a:lstStyle/>
-          <a:p>
-            <a:pPr algn="ctr"/>
-            <a:endParaRPr lang="es-CO"/>
-          </a:p>
-        </p:txBody>
-      </p:sp>
-      <p:sp>
-        <p:nvSpPr>
-          <p:cNvPr id="2" name="Título 1">
-            <a:extLst>
-              <a:ext uri="{FF2B5EF4-FFF2-40B4-BE49-F238E27FC236}">
-                <a16:creationId xmlns:a16="http://schemas.microsoft.com/office/drawing/2014/main" id="{FE309FBE-B5C9-419B-9A38-E8A4478A16BA}"/>
-              </a:ext>
-            </a:extLst>
-          </p:cNvPr>
-          <p:cNvSpPr>
-            <a:spLocks noGrp="1"/>
-          </p:cNvSpPr>
-          <p:nvPr>
-            <p:ph type="title"/>
-          </p:nvPr>
-        </p:nvSpPr>
-        <p:spPr>
-          <a:xfrm>
-            <a:off x="635000" y="317500"/>
-            <a:ext cx="10160000" cy="889000"/>
-          </a:xfrm>
-        </p:spPr>
-        <p:txBody>
-          <a:bodyPr anchor="ctr">
-            <a:normAutofit/>
-          </a:bodyPr>
-          <a:lstStyle/>
-          <a:p>
-            <a:r>
-              <a:rPr lang="es-ES" sz="3600" b="1" dirty="0">
-                <a:solidFill>
-                  <a:srgbClr val="FFFFFF"/>
-                </a:solidFill>
-                <a:latin typeface="Calibri" panose="020F0502020204030204" pitchFamily="34" charset="0"/>
-              </a:rPr>
-              <a:t>5. Cómo encajan en una misma solución</a:t>
-            </a:r>
-            <a:endParaRPr lang="es-CO" sz="3600" b="1" dirty="0">
-              <a:solidFill>
-                <a:srgbClr val="FFFFFF"/>
-              </a:solidFill>
-              <a:latin typeface="Calibri" panose="020F0502020204030204" pitchFamily="34" charset="0"/>
-            </a:endParaRPr>
-          </a:p>
-        </p:txBody>
-      </p:sp>
-      <p:sp>
-        <p:nvSpPr>
-          <p:cNvPr id="4" name="Rectángulo: esquinas redondeadas 3">
-            <a:extLst>
-              <a:ext uri="{FF2B5EF4-FFF2-40B4-BE49-F238E27FC236}">
-                <a16:creationId xmlns:a16="http://schemas.microsoft.com/office/drawing/2014/main" id="{236F514A-4289-AF3A-B314-742C7F7361BC}"/>
-              </a:ext>
-            </a:extLst>
-          </p:cNvPr>
-          <p:cNvSpPr/>
-          <p:nvPr/>
-        </p:nvSpPr>
-        <p:spPr>
-          <a:xfrm>
-            <a:off x="635000" y="1651000"/>
-            <a:ext cx="3175000" cy="1397000"/>
-          </a:xfrm>
-          <a:prstGeom prst="roundRect">
-            <a:avLst>
-              <a:gd name="adj" fmla="val 15000"/>
-            </a:avLst>
-          </a:prstGeom>
-          <a:solidFill>
-            <a:srgbClr val="6473F5"/>
-          </a:solidFill>
-          <a:ln w="19050" cap="flat" cmpd="sng" algn="ctr">
-            <a:noFill/>
-            <a:prstDash val="solid"/>
-            <a:miter lim="800000"/>
-          </a:ln>
-          <a:effectLst/>
-          <a:extLst>
-            <a:ext uri="{91240B29-F687-4F45-9708-019B960494DF}">
-              <a14:hiddenLine xmlns:a14="http://schemas.microsoft.com/office/drawing/2010/main" w="19050" cap="flat" cmpd="sng" algn="ctr">
-                <a:solidFill>
-                  <a:schemeClr val="accent1">
-                    <a:shade val="15000"/>
-                  </a:schemeClr>
-                </a:solidFill>
-                <a:prstDash val="solid"/>
-                <a:miter lim="800000"/>
-              </a14:hiddenLine>
-            </a:ext>
-          </a:extLst>
-        </p:spPr>
-        <p:style>
-          <a:lnRef idx="2">
-            <a:schemeClr val="accent1">
-              <a:shade val="15000"/>
-            </a:schemeClr>
-          </a:lnRef>
-          <a:fillRef idx="1">
-            <a:schemeClr val="accent1"/>
-          </a:fillRef>
-          <a:effectRef idx="0">
-            <a:schemeClr val="accent1"/>
-          </a:effectRef>
-          <a:fontRef idx="minor">
-            <a:schemeClr val="lt1"/>
-          </a:fontRef>
-        </p:style>
-        <p:txBody>
-          <a:bodyPr rtlCol="0" anchor="ctr"/>
-          <a:lstStyle/>
-          <a:p>
-            <a:pPr algn="ctr"/>
-            <a:r>
-              <a:rPr lang="es-CO" sz="2600" b="1">
-                <a:solidFill>
-                  <a:srgbClr val="FFFFFF"/>
-                </a:solidFill>
-                <a:latin typeface="Calibri" panose="020F0502020204030204" pitchFamily="34" charset="0"/>
-              </a:rPr>
-              <a:t>React</a:t>
-            </a:r>
-          </a:p>
-          <a:p>
-            <a:pPr algn="ctr"/>
-            <a:r>
-              <a:rPr lang="es-CO" sz="1600">
-                <a:solidFill>
-                  <a:srgbClr val="FFFFFF"/>
-                </a:solidFill>
-                <a:latin typeface="Calibri" panose="020F0502020204030204" pitchFamily="34" charset="0"/>
-              </a:rPr>
-              <a:t>Cliente / interfaz</a:t>
-            </a:r>
-          </a:p>
-        </p:txBody>
-      </p:sp>
-      <p:cxnSp>
-        <p:nvCxnSpPr>
-          <p:cNvPr id="5" name="Conector recto de flecha 4">
-            <a:extLst>
-              <a:ext uri="{FF2B5EF4-FFF2-40B4-BE49-F238E27FC236}">
-                <a16:creationId xmlns:a16="http://schemas.microsoft.com/office/drawing/2014/main" id="{578C7B64-8366-7852-8AD3-EED8193A5DB2}"/>
-              </a:ext>
-            </a:extLst>
-          </p:cNvPr>
-          <p:cNvCxnSpPr/>
-          <p:nvPr/>
-        </p:nvCxnSpPr>
-        <p:spPr>
-          <a:xfrm>
-            <a:off x="3860800" y="2349500"/>
-            <a:ext cx="609600" cy="0"/>
-          </a:xfrm>
-          <a:prstGeom prst="straightConnector1">
-            <a:avLst/>
-          </a:prstGeom>
-          <a:ln w="44450">
-            <a:solidFill>
-              <a:srgbClr val="BEC5E6"/>
-            </a:solidFill>
-            <a:tailEnd type="triangle"/>
-          </a:ln>
-        </p:spPr>
-        <p:style>
-          <a:lnRef idx="2">
-            <a:schemeClr val="accent1"/>
-          </a:lnRef>
-          <a:fillRef idx="0">
-            <a:schemeClr val="accent1"/>
-          </a:fillRef>
-          <a:effectRef idx="1">
-            <a:schemeClr val="accent1"/>
-          </a:effectRef>
-          <a:fontRef idx="minor">
-            <a:schemeClr val="tx1"/>
-          </a:fontRef>
-        </p:style>
-      </p:cxnSp>
-      <p:sp>
-        <p:nvSpPr>
-          <p:cNvPr id="6" name="Rectángulo: esquinas redondeadas 5">
-            <a:extLst>
-              <a:ext uri="{FF2B5EF4-FFF2-40B4-BE49-F238E27FC236}">
-                <a16:creationId xmlns:a16="http://schemas.microsoft.com/office/drawing/2014/main" id="{4AB96D22-C8C8-4FE3-F583-95C73A7EC5D9}"/>
-              </a:ext>
-            </a:extLst>
-          </p:cNvPr>
-          <p:cNvSpPr/>
-          <p:nvPr/>
-        </p:nvSpPr>
-        <p:spPr>
-          <a:xfrm>
-            <a:off x="4508500" y="1651000"/>
-            <a:ext cx="3175000" cy="1397000"/>
-          </a:xfrm>
-          <a:prstGeom prst="roundRect">
-            <a:avLst>
-              <a:gd name="adj" fmla="val 15000"/>
-            </a:avLst>
-          </a:prstGeom>
-          <a:solidFill>
-            <a:srgbClr val="2EC4B6"/>
-          </a:solidFill>
-          <a:ln w="19050" cap="flat" cmpd="sng" algn="ctr">
-            <a:noFill/>
-            <a:prstDash val="solid"/>
-            <a:miter lim="800000"/>
-          </a:ln>
-          <a:effectLst/>
-          <a:extLst>
-            <a:ext uri="{91240B29-F687-4F45-9708-019B960494DF}">
-              <a14:hiddenLine xmlns:a14="http://schemas.microsoft.com/office/drawing/2010/main" w="19050" cap="flat" cmpd="sng" algn="ctr">
-                <a:solidFill>
-                  <a:schemeClr val="accent1">
-                    <a:shade val="15000"/>
-                  </a:schemeClr>
-                </a:solidFill>
-                <a:prstDash val="solid"/>
-                <a:miter lim="800000"/>
-              </a14:hiddenLine>
-            </a:ext>
-          </a:extLst>
-        </p:spPr>
-        <p:style>
-          <a:lnRef idx="2">
-            <a:schemeClr val="accent1">
-              <a:shade val="15000"/>
-            </a:schemeClr>
-          </a:lnRef>
-          <a:fillRef idx="1">
-            <a:schemeClr val="accent1"/>
-          </a:fillRef>
-          <a:effectRef idx="0">
-            <a:schemeClr val="accent1"/>
-          </a:effectRef>
-          <a:fontRef idx="minor">
-            <a:schemeClr val="lt1"/>
-          </a:fontRef>
-        </p:style>
-        <p:txBody>
-          <a:bodyPr rtlCol="0" anchor="ctr"/>
-          <a:lstStyle/>
-          <a:p>
-            <a:pPr algn="ctr"/>
-            <a:r>
-              <a:rPr lang="es-CO" sz="2600" b="1">
-                <a:solidFill>
-                  <a:srgbClr val="0F122D"/>
-                </a:solidFill>
-                <a:latin typeface="Calibri" panose="020F0502020204030204" pitchFamily="34" charset="0"/>
-              </a:rPr>
-              <a:t>Servicio SOA</a:t>
-            </a:r>
-          </a:p>
-          <a:p>
-            <a:pPr algn="ctr"/>
-            <a:r>
-              <a:rPr lang="es-CO" sz="1600">
-                <a:solidFill>
-                  <a:srgbClr val="0F122D"/>
-                </a:solidFill>
-                <a:latin typeface="Calibri" panose="020F0502020204030204" pitchFamily="34" charset="0"/>
-              </a:rPr>
-              <a:t>API REST</a:t>
-            </a:r>
-          </a:p>
-        </p:txBody>
-      </p:sp>
-      <p:cxnSp>
-        <p:nvCxnSpPr>
-          <p:cNvPr id="7" name="Conector recto de flecha 6">
-            <a:extLst>
-              <a:ext uri="{FF2B5EF4-FFF2-40B4-BE49-F238E27FC236}">
-                <a16:creationId xmlns:a16="http://schemas.microsoft.com/office/drawing/2014/main" id="{D171037A-7C8F-3489-9A02-F339B129E5BD}"/>
-              </a:ext>
-            </a:extLst>
-          </p:cNvPr>
-          <p:cNvCxnSpPr/>
-          <p:nvPr/>
-        </p:nvCxnSpPr>
-        <p:spPr>
-          <a:xfrm>
-            <a:off x="7734300" y="2349500"/>
-            <a:ext cx="609600" cy="0"/>
-          </a:xfrm>
-          <a:prstGeom prst="straightConnector1">
-            <a:avLst/>
-          </a:prstGeom>
-          <a:ln w="44450">
-            <a:solidFill>
-              <a:srgbClr val="BEC5E6"/>
-            </a:solidFill>
-            <a:tailEnd type="triangle"/>
-          </a:ln>
-        </p:spPr>
-        <p:style>
-          <a:lnRef idx="2">
-            <a:schemeClr val="accent1"/>
-          </a:lnRef>
-          <a:fillRef idx="0">
-            <a:schemeClr val="accent1"/>
-          </a:fillRef>
-          <a:effectRef idx="1">
-            <a:schemeClr val="accent1"/>
-          </a:effectRef>
-          <a:fontRef idx="minor">
-            <a:schemeClr val="tx1"/>
-          </a:fontRef>
-        </p:style>
-      </p:cxnSp>
-      <p:sp>
-        <p:nvSpPr>
-          <p:cNvPr id="8" name="Rectángulo: esquinas redondeadas 7">
-            <a:extLst>
-              <a:ext uri="{FF2B5EF4-FFF2-40B4-BE49-F238E27FC236}">
-                <a16:creationId xmlns:a16="http://schemas.microsoft.com/office/drawing/2014/main" id="{152B9E29-ABCF-15BA-2244-B5D65CBD1480}"/>
-              </a:ext>
-            </a:extLst>
-          </p:cNvPr>
-          <p:cNvSpPr/>
-          <p:nvPr/>
-        </p:nvSpPr>
-        <p:spPr>
-          <a:xfrm>
-            <a:off x="8382000" y="1651000"/>
-            <a:ext cx="3175000" cy="1397000"/>
-          </a:xfrm>
-          <a:prstGeom prst="roundRect">
-            <a:avLst>
-              <a:gd name="adj" fmla="val 15000"/>
-            </a:avLst>
-          </a:prstGeom>
-          <a:solidFill>
-            <a:srgbClr val="F4B942"/>
-          </a:solidFill>
-          <a:ln w="19050" cap="flat" cmpd="sng" algn="ctr">
-            <a:noFill/>
-            <a:prstDash val="solid"/>
-            <a:miter lim="800000"/>
-          </a:ln>
-          <a:effectLst/>
-          <a:extLst>
-            <a:ext uri="{91240B29-F687-4F45-9708-019B960494DF}">
-              <a14:hiddenLine xmlns:a14="http://schemas.microsoft.com/office/drawing/2010/main" w="19050" cap="flat" cmpd="sng" algn="ctr">
-                <a:solidFill>
-                  <a:schemeClr val="accent1">
-                    <a:shade val="15000"/>
-                  </a:schemeClr>
-                </a:solidFill>
-                <a:prstDash val="solid"/>
-                <a:miter lim="800000"/>
-              </a14:hiddenLine>
-            </a:ext>
-          </a:extLst>
-        </p:spPr>
-        <p:style>
-          <a:lnRef idx="2">
-            <a:schemeClr val="accent1">
-              <a:shade val="15000"/>
-            </a:schemeClr>
-          </a:lnRef>
-          <a:fillRef idx="1">
-            <a:schemeClr val="accent1"/>
-          </a:fillRef>
-          <a:effectRef idx="0">
-            <a:schemeClr val="accent1"/>
-          </a:effectRef>
-          <a:fontRef idx="minor">
-            <a:schemeClr val="lt1"/>
-          </a:fontRef>
-        </p:style>
-        <p:txBody>
-          <a:bodyPr rtlCol="0" anchor="ctr"/>
-          <a:lstStyle/>
-          <a:p>
-            <a:pPr algn="ctr"/>
-            <a:r>
-              <a:rPr lang="es-CO" sz="2600" b="1">
-                <a:solidFill>
-                  <a:srgbClr val="0F122D"/>
-                </a:solidFill>
-                <a:latin typeface="Calibri" panose="020F0502020204030204" pitchFamily="34" charset="0"/>
-              </a:rPr>
-              <a:t>MySQL</a:t>
-            </a:r>
-          </a:p>
-          <a:p>
-            <a:pPr algn="ctr"/>
-            <a:r>
-              <a:rPr lang="es-CO" sz="1600">
-                <a:solidFill>
-                  <a:srgbClr val="0F122D"/>
-                </a:solidFill>
-                <a:latin typeface="Calibri" panose="020F0502020204030204" pitchFamily="34" charset="0"/>
-              </a:rPr>
-              <a:t>Base de datos</a:t>
-            </a:r>
-          </a:p>
-        </p:txBody>
-      </p:sp>
-      <p:sp>
-        <p:nvSpPr>
-          <p:cNvPr id="9" name="CuadroTexto 8">
-            <a:extLst>
-              <a:ext uri="{FF2B5EF4-FFF2-40B4-BE49-F238E27FC236}">
-                <a16:creationId xmlns:a16="http://schemas.microsoft.com/office/drawing/2014/main" id="{84E5ED2E-A6AD-1C19-73A3-03C9C1829F3E}"/>
-              </a:ext>
-            </a:extLst>
-          </p:cNvPr>
-          <p:cNvSpPr txBox="1"/>
-          <p:nvPr/>
-        </p:nvSpPr>
-        <p:spPr>
-          <a:xfrm>
-            <a:off x="635000" y="3276600"/>
-            <a:ext cx="3175000" cy="1397000"/>
-          </a:xfrm>
-          <a:prstGeom prst="rect">
-            <a:avLst/>
-          </a:prstGeom>
-          <a:noFill/>
-        </p:spPr>
-        <p:txBody>
-          <a:bodyPr vert="horz" wrap="square" lIns="0" tIns="0" rIns="0" bIns="0" rtlCol="0">
-            <a:noAutofit/>
-          </a:bodyPr>
-          <a:lstStyle/>
-          <a:p>
-            <a:pPr>
-              <a:spcAft>
-                <a:spcPts val="800"/>
-              </a:spcAft>
-            </a:pPr>
-            <a:r>
-              <a:rPr lang="es-ES" sz="1600">
-                <a:solidFill>
-                  <a:srgbClr val="BEC5E6"/>
-                </a:solidFill>
-                <a:latin typeface="Calibri" panose="020F0502020204030204" pitchFamily="34" charset="0"/>
-              </a:rPr>
-              <a:t>Observer: los componentes se suscriben al estado y se actualizan solos.</a:t>
-            </a:r>
-            <a:endParaRPr lang="es-CO" sz="1600">
-              <a:solidFill>
-                <a:srgbClr val="BEC5E6"/>
-              </a:solidFill>
-              <a:latin typeface="Calibri" panose="020F0502020204030204" pitchFamily="34" charset="0"/>
-            </a:endParaRPr>
-          </a:p>
-        </p:txBody>
-      </p:sp>
-      <p:sp>
-        <p:nvSpPr>
-          <p:cNvPr id="10" name="CuadroTexto 9">
-            <a:extLst>
-              <a:ext uri="{FF2B5EF4-FFF2-40B4-BE49-F238E27FC236}">
-                <a16:creationId xmlns:a16="http://schemas.microsoft.com/office/drawing/2014/main" id="{8BEB5CF0-33C1-5D5C-5EBC-7F41CD370A65}"/>
-              </a:ext>
-            </a:extLst>
-          </p:cNvPr>
-          <p:cNvSpPr txBox="1"/>
-          <p:nvPr/>
-        </p:nvSpPr>
-        <p:spPr>
-          <a:xfrm>
-            <a:off x="4508500" y="3276600"/>
-            <a:ext cx="3175000" cy="1397000"/>
-          </a:xfrm>
-          <a:prstGeom prst="rect">
-            <a:avLst/>
-          </a:prstGeom>
-          <a:noFill/>
-        </p:spPr>
-        <p:txBody>
-          <a:bodyPr vert="horz" wrap="square" lIns="0" tIns="0" rIns="0" bIns="0" rtlCol="0">
-            <a:noAutofit/>
-          </a:bodyPr>
-          <a:lstStyle/>
-          <a:p>
-            <a:pPr>
-              <a:spcAft>
-                <a:spcPts val="800"/>
-              </a:spcAft>
-            </a:pPr>
-            <a:r>
-              <a:rPr lang="es-ES" sz="1600">
-                <a:solidFill>
-                  <a:srgbClr val="BEC5E6"/>
-                </a:solidFill>
-                <a:latin typeface="Calibri" panose="020F0502020204030204" pitchFamily="34" charset="0"/>
-              </a:rPr>
-              <a:t>Expone operaciones por contrato y hace de intermediario entre la interfaz y los datos.</a:t>
-            </a:r>
-            <a:endParaRPr lang="es-CO" sz="1600">
-              <a:solidFill>
-                <a:srgbClr val="BEC5E6"/>
-              </a:solidFill>
-              <a:latin typeface="Calibri" panose="020F0502020204030204" pitchFamily="34" charset="0"/>
-            </a:endParaRPr>
-          </a:p>
-        </p:txBody>
-      </p:sp>
-      <p:sp>
-        <p:nvSpPr>
-          <p:cNvPr id="11" name="CuadroTexto 10">
-            <a:extLst>
-              <a:ext uri="{FF2B5EF4-FFF2-40B4-BE49-F238E27FC236}">
-                <a16:creationId xmlns:a16="http://schemas.microsoft.com/office/drawing/2014/main" id="{A5D40A74-5E04-E55C-98A2-3C7BFCDF4045}"/>
-              </a:ext>
-            </a:extLst>
-          </p:cNvPr>
-          <p:cNvSpPr txBox="1"/>
-          <p:nvPr/>
-        </p:nvSpPr>
-        <p:spPr>
-          <a:xfrm>
-            <a:off x="8382000" y="3276600"/>
-            <a:ext cx="3175000" cy="1397000"/>
-          </a:xfrm>
-          <a:prstGeom prst="rect">
-            <a:avLst/>
-          </a:prstGeom>
-          <a:noFill/>
-        </p:spPr>
-        <p:txBody>
-          <a:bodyPr vert="horz" wrap="square" lIns="0" tIns="0" rIns="0" bIns="0" rtlCol="0">
-            <a:noAutofit/>
-          </a:bodyPr>
-          <a:lstStyle/>
-          <a:p>
-            <a:pPr>
-              <a:spcAft>
-                <a:spcPts val="800"/>
-              </a:spcAft>
-            </a:pPr>
-            <a:r>
-              <a:rPr lang="es-ES" sz="1600">
-                <a:solidFill>
-                  <a:srgbClr val="BEC5E6"/>
-                </a:solidFill>
-                <a:latin typeface="Calibri" panose="020F0502020204030204" pitchFamily="34" charset="0"/>
-              </a:rPr>
-              <a:t>Guarda la información; solo el servicio dueño de los datos accede a ella.</a:t>
-            </a:r>
-            <a:endParaRPr lang="es-CO" sz="1600">
-              <a:solidFill>
-                <a:srgbClr val="BEC5E6"/>
-              </a:solidFill>
-              <a:latin typeface="Calibri" panose="020F0502020204030204" pitchFamily="34" charset="0"/>
-            </a:endParaRPr>
-          </a:p>
-        </p:txBody>
-      </p:sp>
-      <p:sp>
-        <p:nvSpPr>
-          <p:cNvPr id="12" name="Rectángulo: esquinas redondeadas 11">
-            <a:extLst>
-              <a:ext uri="{FF2B5EF4-FFF2-40B4-BE49-F238E27FC236}">
-                <a16:creationId xmlns:a16="http://schemas.microsoft.com/office/drawing/2014/main" id="{8B0FFB1E-ABC2-DBC6-638E-D7F6672F2A99}"/>
-              </a:ext>
-            </a:extLst>
-          </p:cNvPr>
-          <p:cNvSpPr/>
-          <p:nvPr/>
-        </p:nvSpPr>
-        <p:spPr>
-          <a:xfrm>
-            <a:off x="635000" y="5016500"/>
-            <a:ext cx="10922000" cy="1206500"/>
-          </a:xfrm>
-          <a:prstGeom prst="roundRect">
-            <a:avLst>
-              <a:gd name="adj" fmla="val 15000"/>
-            </a:avLst>
-          </a:prstGeom>
-          <a:solidFill>
-            <a:srgbClr val="202658"/>
-          </a:solidFill>
-          <a:ln w="19050" cap="flat" cmpd="sng" algn="ctr">
-            <a:noFill/>
-            <a:prstDash val="solid"/>
-            <a:miter lim="800000"/>
-          </a:ln>
-          <a:effectLst/>
-          <a:extLst>
-            <a:ext uri="{91240B29-F687-4F45-9708-019B960494DF}">
-              <a14:hiddenLine xmlns:a14="http://schemas.microsoft.com/office/drawing/2010/main" w="19050" cap="flat" cmpd="sng" algn="ctr">
-                <a:solidFill>
-                  <a:schemeClr val="accent1">
-                    <a:shade val="15000"/>
-                  </a:schemeClr>
-                </a:solidFill>
-                <a:prstDash val="solid"/>
-                <a:miter lim="800000"/>
-              </a14:hiddenLine>
-            </a:ext>
-          </a:extLst>
-        </p:spPr>
-        <p:style>
-          <a:lnRef idx="2">
-            <a:schemeClr val="accent1">
-              <a:shade val="15000"/>
-            </a:schemeClr>
-          </a:lnRef>
-          <a:fillRef idx="1">
-            <a:schemeClr val="accent1"/>
-          </a:fillRef>
-          <a:effectRef idx="0">
-            <a:schemeClr val="accent1"/>
-          </a:effectRef>
-          <a:fontRef idx="minor">
-            <a:schemeClr val="lt1"/>
-          </a:fontRef>
-        </p:style>
-        <p:txBody>
-          <a:bodyPr rtlCol="0" anchor="ctr"/>
-          <a:lstStyle/>
-          <a:p>
-            <a:pPr algn="ctr"/>
-            <a:r>
-              <a:rPr lang="es-ES">
-                <a:solidFill>
-                  <a:srgbClr val="FFFFFF"/>
-                </a:solidFill>
-                <a:latin typeface="Calibri" panose="020F0502020204030204" pitchFamily="34" charset="0"/>
-              </a:rPr>
-              <a:t>Nube: aloja los servicios, los escala por separado y ofrece colas de mensajes (pub/sub) para notificar eventos entre ellos.</a:t>
-            </a:r>
-            <a:endParaRPr lang="es-CO">
-              <a:solidFill>
-                <a:srgbClr val="FFFFFF"/>
-              </a:solidFill>
-              <a:latin typeface="Calibri" panose="020F0502020204030204" pitchFamily="34" charset="0"/>
-            </a:endParaRPr>
-          </a:p>
-        </p:txBody>
-      </p:sp>
-    </p:spTree>
-    <p:extLst>
-      <p:ext uri="{BB962C8B-B14F-4D97-AF65-F5344CB8AC3E}">
-        <p14:creationId xmlns:p14="http://schemas.microsoft.com/office/powerpoint/2010/main" val="819787363"/>
-      </p:ext>
-    </p:extLst>
-  </p:cSld>
-  <p:clrMapOvr>
-    <a:masterClrMapping/>
-  </p:clrMapOvr>
-  <mc:AlternateContent xmlns:mc="http://schemas.openxmlformats.org/markup-compatibility/2006" xmlns:p14="http://schemas.microsoft.com/office/powerpoint/2010/main">
-    <mc:Choice Requires="p14">
-      <p:transition spd="slow" p14:dur="2000">
-        <p:fade/>
-      </p:transition>
-    </mc:Choice>
-    <mc:Fallback xmlns="">
-      <p:transition spd="slow">
-        <p:fade/>
-      </p:transition>
-    </mc:Fallback>
-  </mc:AlternateContent>
-  <p:timing>
-    <p:tnLst>
-      <p:par>
-        <p:cTn id="1" dur="indefinite" restart="never" nodeType="tmRoot">
-          <p:childTnLst>
-            <p:seq concurrent="1" nextAc="seek">
-              <p:cTn id="2" dur="indefinite" nodeType="mainSeq">
-                <p:childTnLst>
-                  <p:par>
-                    <p:cTn id="3" fill="hold">
-                      <p:stCondLst>
-                        <p:cond delay="indefinite"/>
-                        <p:cond evt="onBegin" delay="0">
-                          <p:tn val="2"/>
-                        </p:cond>
-                      </p:stCondLst>
-                      <p:childTnLst>
-                        <p:par>
-                          <p:cTn id="4" fill="hold">
-                            <p:stCondLst>
-                              <p:cond delay="0"/>
-                            </p:stCondLst>
-                            <p:childTnLst>
-                              <p:par>
-                                <p:cTn id="5" presetID="10" presetClass="entr" presetSubtype="0" fill="hold" grpId="0" nodeType="afterEffect">
-                                  <p:stCondLst>
-                                    <p:cond delay="0"/>
-                                  </p:stCondLst>
-                                  <p:childTnLst>
-                                    <p:set>
-                                      <p:cBhvr>
-                                        <p:cTn id="6" dur="1" fill="hold">
-                                          <p:stCondLst>
-                                            <p:cond delay="0"/>
-                                          </p:stCondLst>
-                                        </p:cTn>
-                                        <p:tgtEl>
-                                          <p:spTgt spid="4"/>
-                                        </p:tgtEl>
-                                        <p:attrNameLst>
-                                          <p:attrName>style.visibility</p:attrName>
-                                        </p:attrNameLst>
-                                      </p:cBhvr>
-                                      <p:to>
-                                        <p:strVal val="visible"/>
-                                      </p:to>
-                                    </p:set>
-                                    <p:animEffect transition="in" filter="fade">
-                                      <p:cBhvr>
-                                        <p:cTn id="7" dur="500"/>
-                                        <p:tgtEl>
-                                          <p:spTgt spid="4"/>
-                                        </p:tgtEl>
-                                      </p:cBhvr>
-                                    </p:animEffect>
-                                  </p:childTnLst>
-                                </p:cTn>
-                              </p:par>
-                              <p:par>
-                                <p:cTn id="8" presetID="10" presetClass="entr" presetSubtype="0" fill="hold" grpId="0" nodeType="withEffect">
-                                  <p:stCondLst>
-                                    <p:cond delay="0"/>
-                                  </p:stCondLst>
-                                  <p:childTnLst>
-                                    <p:set>
-                                      <p:cBhvr>
-                                        <p:cTn id="9" dur="1" fill="hold">
-                                          <p:stCondLst>
-                                            <p:cond delay="0"/>
-                                          </p:stCondLst>
-                                        </p:cTn>
-                                        <p:tgtEl>
-                                          <p:spTgt spid="9"/>
-                                        </p:tgtEl>
-                                        <p:attrNameLst>
-                                          <p:attrName>style.visibility</p:attrName>
-                                        </p:attrNameLst>
-                                      </p:cBhvr>
-                                      <p:to>
-                                        <p:strVal val="visible"/>
-                                      </p:to>
-                                    </p:set>
-                                    <p:animEffect transition="in" filter="fade">
-                                      <p:cBhvr>
-                                        <p:cTn id="10" dur="500"/>
-                                        <p:tgtEl>
-                                          <p:spTgt spid="9"/>
-                                        </p:tgtEl>
-                                      </p:cBhvr>
-                                    </p:animEffect>
-                                  </p:childTnLst>
-                                </p:cTn>
-                              </p:par>
-                            </p:childTnLst>
-                          </p:cTn>
-                        </p:par>
-                        <p:par>
-                          <p:cTn id="11" fill="hold">
-                            <p:stCondLst>
-                              <p:cond delay="500"/>
-                            </p:stCondLst>
-                            <p:childTnLst>
-                              <p:par>
-                                <p:cTn id="12" presetID="10" presetClass="entr" presetSubtype="0" fill="hold" nodeType="afterEffect">
-                                  <p:stCondLst>
-                                    <p:cond delay="0"/>
-                                  </p:stCondLst>
-                                  <p:childTnLst>
-                                    <p:set>
-                                      <p:cBhvr>
-                                        <p:cTn id="13" dur="1" fill="hold">
-                                          <p:stCondLst>
-                                            <p:cond delay="0"/>
-                                          </p:stCondLst>
-                                        </p:cTn>
-                                        <p:tgtEl>
-                                          <p:spTgt spid="5"/>
-                                        </p:tgtEl>
-                                        <p:attrNameLst>
-                                          <p:attrName>style.visibility</p:attrName>
-                                        </p:attrNameLst>
-                                      </p:cBhvr>
-                                      <p:to>
-                                        <p:strVal val="visible"/>
-                                      </p:to>
-                                    </p:set>
-                                    <p:animEffect transition="in" filter="fade">
-                                      <p:cBhvr>
-                                        <p:cTn id="14" dur="500"/>
-                                        <p:tgtEl>
-                                          <p:spTgt spid="5"/>
-                                        </p:tgtEl>
-                                      </p:cBhvr>
-                                    </p:animEffect>
-                                  </p:childTnLst>
-                                </p:cTn>
-                              </p:par>
-                            </p:childTnLst>
-                          </p:cTn>
-                        </p:par>
-                        <p:par>
-                          <p:cTn id="15" fill="hold">
-                            <p:stCondLst>
-                              <p:cond delay="1000"/>
-                            </p:stCondLst>
-                            <p:childTnLst>
-                              <p:par>
-                                <p:cTn id="16" presetID="10" presetClass="entr" presetSubtype="0" fill="hold" grpId="0" nodeType="afterEffect">
-                                  <p:stCondLst>
-                                    <p:cond delay="0"/>
-                                  </p:stCondLst>
-                                  <p:childTnLst>
-                                    <p:set>
-                                      <p:cBhvr>
-                                        <p:cTn id="17" dur="1" fill="hold">
-                                          <p:stCondLst>
-                                            <p:cond delay="0"/>
-                                          </p:stCondLst>
-                                        </p:cTn>
-                                        <p:tgtEl>
-                                          <p:spTgt spid="6"/>
-                                        </p:tgtEl>
-                                        <p:attrNameLst>
-                                          <p:attrName>style.visibility</p:attrName>
-                                        </p:attrNameLst>
-                                      </p:cBhvr>
-                                      <p:to>
-                                        <p:strVal val="visible"/>
-                                      </p:to>
-                                    </p:set>
-                                    <p:animEffect transition="in" filter="fade">
-                                      <p:cBhvr>
-                                        <p:cTn id="18" dur="500"/>
-                                        <p:tgtEl>
-                                          <p:spTgt spid="6"/>
-                                        </p:tgtEl>
-                                      </p:cBhvr>
-                                    </p:animEffect>
-                                  </p:childTnLst>
-                                </p:cTn>
-                              </p:par>
-                              <p:par>
-                                <p:cTn id="19" presetID="10" presetClass="entr" presetSubtype="0" fill="hold" grpId="0" nodeType="withEffect">
-                                  <p:stCondLst>
-                                    <p:cond delay="0"/>
-                                  </p:stCondLst>
-                                  <p:childTnLst>
-                                    <p:set>
-                                      <p:cBhvr>
-                                        <p:cTn id="20" dur="1" fill="hold">
-                                          <p:stCondLst>
-                                            <p:cond delay="0"/>
-                                          </p:stCondLst>
-                                        </p:cTn>
-                                        <p:tgtEl>
-                                          <p:spTgt spid="10"/>
-                                        </p:tgtEl>
-                                        <p:attrNameLst>
-                                          <p:attrName>style.visibility</p:attrName>
-                                        </p:attrNameLst>
-                                      </p:cBhvr>
-                                      <p:to>
-                                        <p:strVal val="visible"/>
-                                      </p:to>
-                                    </p:set>
-                                    <p:animEffect transition="in" filter="fade">
-                                      <p:cBhvr>
-                                        <p:cTn id="21" dur="500"/>
-                                        <p:tgtEl>
-                                          <p:spTgt spid="10"/>
-                                        </p:tgtEl>
-                                      </p:cBhvr>
-                                    </p:animEffect>
-                                  </p:childTnLst>
-                                </p:cTn>
-                              </p:par>
-                            </p:childTnLst>
-                          </p:cTn>
-                        </p:par>
-                        <p:par>
-                          <p:cTn id="22" fill="hold">
-                            <p:stCondLst>
-                              <p:cond delay="1500"/>
-                            </p:stCondLst>
-                            <p:childTnLst>
-                              <p:par>
-                                <p:cTn id="23" presetID="10" presetClass="entr" presetSubtype="0" fill="hold" nodeType="afterEffect">
-                                  <p:stCondLst>
-                                    <p:cond delay="0"/>
-                                  </p:stCondLst>
-                                  <p:childTnLst>
-                                    <p:set>
-                                      <p:cBhvr>
-                                        <p:cTn id="24" dur="1" fill="hold">
-                                          <p:stCondLst>
-                                            <p:cond delay="0"/>
-                                          </p:stCondLst>
-                                        </p:cTn>
-                                        <p:tgtEl>
-                                          <p:spTgt spid="7"/>
-                                        </p:tgtEl>
-                                        <p:attrNameLst>
-                                          <p:attrName>style.visibility</p:attrName>
-                                        </p:attrNameLst>
-                                      </p:cBhvr>
-                                      <p:to>
-                                        <p:strVal val="visible"/>
-                                      </p:to>
-                                    </p:set>
-                                    <p:animEffect transition="in" filter="fade">
-                                      <p:cBhvr>
-                                        <p:cTn id="25" dur="500"/>
-                                        <p:tgtEl>
-                                          <p:spTgt spid="7"/>
-                                        </p:tgtEl>
-                                      </p:cBhvr>
-                                    </p:animEffect>
-                                  </p:childTnLst>
-                                </p:cTn>
-                              </p:par>
-                            </p:childTnLst>
-                          </p:cTn>
-                        </p:par>
-                        <p:par>
-                          <p:cTn id="26" fill="hold">
-                            <p:stCondLst>
-                              <p:cond delay="2000"/>
-                            </p:stCondLst>
-                            <p:childTnLst>
-                              <p:par>
-                                <p:cTn id="27" presetID="10" presetClass="entr" presetSubtype="0" fill="hold" grpId="0" nodeType="afterEffect">
-                                  <p:stCondLst>
-                                    <p:cond delay="0"/>
-                                  </p:stCondLst>
-                                  <p:childTnLst>
-                                    <p:set>
-                                      <p:cBhvr>
-                                        <p:cTn id="28" dur="1" fill="hold">
-                                          <p:stCondLst>
-                                            <p:cond delay="0"/>
-                                          </p:stCondLst>
-                                        </p:cTn>
-                                        <p:tgtEl>
-                                          <p:spTgt spid="8"/>
-                                        </p:tgtEl>
-                                        <p:attrNameLst>
-                                          <p:attrName>style.visibility</p:attrName>
-                                        </p:attrNameLst>
-                                      </p:cBhvr>
-                                      <p:to>
-                                        <p:strVal val="visible"/>
-                                      </p:to>
-                                    </p:set>
-                                    <p:animEffect transition="in" filter="fade">
-                                      <p:cBhvr>
-                                        <p:cTn id="29" dur="500"/>
-                                        <p:tgtEl>
-                                          <p:spTgt spid="8"/>
-                                        </p:tgtEl>
-                                      </p:cBhvr>
-                                    </p:animEffect>
-                                  </p:childTnLst>
-                                </p:cTn>
-                              </p:par>
-                              <p:par>
-                                <p:cTn id="30" presetID="10" presetClass="entr" presetSubtype="0" fill="hold" grpId="0" nodeType="withEffect">
-                                  <p:stCondLst>
-                                    <p:cond delay="0"/>
-                                  </p:stCondLst>
-                                  <p:childTnLst>
-                                    <p:set>
-                                      <p:cBhvr>
-                                        <p:cTn id="31" dur="1" fill="hold">
-                                          <p:stCondLst>
-                                            <p:cond delay="0"/>
-                                          </p:stCondLst>
-                                        </p:cTn>
-                                        <p:tgtEl>
-                                          <p:spTgt spid="11"/>
-                                        </p:tgtEl>
-                                        <p:attrNameLst>
-                                          <p:attrName>style.visibility</p:attrName>
-                                        </p:attrNameLst>
-                                      </p:cBhvr>
-                                      <p:to>
-                                        <p:strVal val="visible"/>
-                                      </p:to>
-                                    </p:set>
-                                    <p:animEffect transition="in" filter="fade">
-                                      <p:cBhvr>
-                                        <p:cTn id="32" dur="500"/>
-                                        <p:tgtEl>
-                                          <p:spTgt spid="11"/>
-                                        </p:tgtEl>
-                                      </p:cBhvr>
-                                    </p:animEffect>
-                                  </p:childTnLst>
-                                </p:cTn>
-                              </p:par>
-                            </p:childTnLst>
-                          </p:cTn>
-                        </p:par>
-                        <p:par>
-                          <p:cTn id="33" fill="hold">
-                            <p:stCondLst>
-                              <p:cond delay="2500"/>
-                            </p:stCondLst>
-                            <p:childTnLst>
-                              <p:par>
-                                <p:cTn id="34" presetID="10" presetClass="entr" presetSubtype="0" fill="hold" grpId="0" nodeType="afterEffect">
-                                  <p:stCondLst>
-                                    <p:cond delay="0"/>
-                                  </p:stCondLst>
-                                  <p:childTnLst>
-                                    <p:set>
-                                      <p:cBhvr>
-                                        <p:cTn id="35" dur="1" fill="hold">
-                                          <p:stCondLst>
-                                            <p:cond delay="0"/>
-                                          </p:stCondLst>
-                                        </p:cTn>
-                                        <p:tgtEl>
-                                          <p:spTgt spid="12"/>
-                                        </p:tgtEl>
-                                        <p:attrNameLst>
-                                          <p:attrName>style.visibility</p:attrName>
-                                        </p:attrNameLst>
-                                      </p:cBhvr>
-                                      <p:to>
-                                        <p:strVal val="visible"/>
-                                      </p:to>
-                                    </p:set>
-                                    <p:animEffect transition="in" filter="fade">
-                                      <p:cBhvr>
-                                        <p:cTn id="36" dur="500"/>
-                                        <p:tgtEl>
-                                          <p:spTgt spid="12"/>
-                                        </p:tgtEl>
-                                      </p:cBhvr>
-                                    </p:animEffect>
-                                  </p:childTnLst>
-                                </p:cTn>
-                              </p:par>
-                            </p:childTnLst>
-                          </p:cTn>
-                        </p:par>
-                      </p:childTnLst>
-                    </p:cTn>
-                  </p:par>
-                </p:childTnLst>
-              </p:cTn>
-              <p:prevCondLst>
-                <p:cond evt="onPrev" delay="0">
-                  <p:tgtEl>
-                    <p:sldTgt/>
-                  </p:tgtEl>
-                </p:cond>
-              </p:prevCondLst>
-              <p:nextCondLst>
-                <p:cond evt="onNext" delay="0">
-                  <p:tgtEl>
-                    <p:sldTgt/>
-                  </p:tgtEl>
-                </p:cond>
-              </p:nextCondLst>
-            </p:seq>
-          </p:childTnLst>
-        </p:cTn>
-      </p:par>
-    </p:tnLst>
-    <p:bldLst>
-      <p:bldP spid="4" grpId="0" animBg="1"/>
-      <p:bldP spid="6" grpId="0" animBg="1"/>
-      <p:bldP spid="8" grpId="0" animBg="1"/>
-      <p:bldP spid="9" grpId="0"/>
-      <p:bldP spid="10" grpId="0"/>
-      <p:bldP spid="11" grpId="0"/>
-      <p:bldP spid="12" grpId="0" animBg="1"/>
-    </p:bldLst>
-  </p:timing>
-</p:sld>
-</file>
-
-<file path=ppt/slides/slide9.xml><?xml version="1.0" encoding="utf-8"?>
-<p:sld xmlns:a="http://schemas.openxmlformats.org/drawingml/2006/main" xmlns:r="http://schemas.openxmlformats.org/officeDocument/2006/relationships" xmlns:p="http://schemas.openxmlformats.org/presentationml/2006/main">
-  <p:cSld>
-    <p:bg>
-      <p:bgPr>
-        <a:solidFill>
-          <a:srgbClr val="0F122D"/>
-        </a:solidFill>
-        <a:effectLst/>
-      </p:bgPr>
-    </p:bg>
-    <p:spTree>
-      <p:nvGrpSpPr>
-        <p:cNvPr id="1" name=""/>
-        <p:cNvGrpSpPr/>
-        <p:nvPr/>
-      </p:nvGrpSpPr>
-      <p:grpSpPr>
-        <a:xfrm>
-          <a:off x="0" y="0"/>
-          <a:ext cx="0" cy="0"/>
-          <a:chOff x="0" y="0"/>
-          <a:chExt cx="0" cy="0"/>
-        </a:xfrm>
-      </p:grpSpPr>
-      <p:sp>
-        <p:nvSpPr>
-          <p:cNvPr id="3" name="Elipse 2">
-            <a:extLst>
-              <a:ext uri="{FF2B5EF4-FFF2-40B4-BE49-F238E27FC236}">
                 <a16:creationId xmlns:a16="http://schemas.microsoft.com/office/drawing/2014/main" id="{5FA4C54D-F8F7-667D-27BC-8658065CB91A}"/>
               </a:ext>
             </a:extLst>
@@ -22018,6 +18485,161 @@
       </p:transition>
     </mc:Fallback>
   </mc:AlternateContent>
+</p:sld>
+</file>
+
+<file path=ppt/slides/slide9.xml><?xml version="1.0" encoding="utf-8"?>
+<p:sld xmlns:a="http://schemas.openxmlformats.org/drawingml/2006/main" xmlns:r="http://schemas.openxmlformats.org/officeDocument/2006/relationships" xmlns:p="http://schemas.openxmlformats.org/presentationml/2006/main">
+  <p:cSld>
+    <p:bg>
+      <p:bgPr>
+        <a:solidFill>
+          <a:srgbClr val="0F122D"/>
+        </a:solidFill>
+        <a:effectLst/>
+      </p:bgPr>
+    </p:bg>
+    <p:spTree>
+      <p:nvGrpSpPr>
+        <p:cNvPr id="1" name="">
+          <a:extLst>
+            <a:ext uri="{FF2B5EF4-FFF2-40B4-BE49-F238E27FC236}">
+              <a16:creationId xmlns:a16="http://schemas.microsoft.com/office/drawing/2014/main" id="{7B0DC3A5-6E25-0CE9-42A0-C50E0565D03C}"/>
+            </a:ext>
+          </a:extLst>
+        </p:cNvPr>
+        <p:cNvGrpSpPr/>
+        <p:nvPr/>
+      </p:nvGrpSpPr>
+      <p:grpSpPr>
+        <a:xfrm>
+          <a:off x="0" y="0"/>
+          <a:ext cx="0" cy="0"/>
+          <a:chOff x="0" y="0"/>
+          <a:chExt cx="0" cy="0"/>
+        </a:xfrm>
+      </p:grpSpPr>
+      <p:sp>
+        <p:nvSpPr>
+          <p:cNvPr id="9999" name="Elipse 2">
+            <a:extLst>
+              <a:ext uri="{FF2B5EF4-FFF2-40B4-BE49-F238E27FC236}">
+                <a16:creationId xmlns:a16="http://schemas.microsoft.com/office/drawing/2014/main" id="{73E27086-79B5-6F79-3728-22245EE1FBD1}"/>
+              </a:ext>
+            </a:extLst>
+          </p:cNvPr>
+          <p:cNvSpPr/>
+          <p:nvPr/>
+        </p:nvSpPr>
+        <p:spPr>
+          <a:xfrm>
+            <a:off x="10160000" y="-1016000"/>
+            <a:ext cx="3302000" cy="3302000"/>
+          </a:xfrm>
+          <a:prstGeom prst="ellipse">
+            <a:avLst/>
+          </a:prstGeom>
+          <a:solidFill>
+            <a:srgbClr val="6473F5">
+              <a:alpha val="20000"/>
+            </a:srgbClr>
+          </a:solidFill>
+          <a:ln w="19050" cap="flat" cmpd="sng" algn="ctr">
+            <a:noFill/>
+            <a:prstDash val="solid"/>
+            <a:miter lim="800000"/>
+          </a:ln>
+          <a:effectLst/>
+          <a:extLst>
+            <a:ext uri="{91240B29-F687-4F45-9708-019B960494DF}">
+              <a14:hiddenLine xmlns:a14="http://schemas.microsoft.com/office/drawing/2010/main" w="19050" cap="flat" cmpd="sng" algn="ctr">
+                <a:solidFill>
+                  <a:schemeClr val="accent1">
+                    <a:shade val="15000"/>
+                  </a:schemeClr>
+                </a:solidFill>
+                <a:prstDash val="solid"/>
+                <a:miter lim="800000"/>
+              </a14:hiddenLine>
+            </a:ext>
+          </a:extLst>
+        </p:spPr>
+        <p:style>
+          <a:lnRef idx="2">
+            <a:schemeClr val="accent1">
+              <a:shade val="15000"/>
+            </a:schemeClr>
+          </a:lnRef>
+          <a:fillRef idx="1">
+            <a:schemeClr val="accent1"/>
+          </a:fillRef>
+          <a:effectRef idx="0">
+            <a:schemeClr val="accent1"/>
+          </a:effectRef>
+          <a:fontRef idx="minor">
+            <a:schemeClr val="lt1"/>
+          </a:fontRef>
+        </p:style>
+        <p:txBody>
+          <a:bodyPr rtlCol="0" anchor="ctr"/>
+          <a:lstStyle/>
+          <a:p>
+            <a:pPr algn="ctr"/>
+            <a:endParaRPr lang="es-CO"/>
+          </a:p>
+        </p:txBody>
+      </p:sp>
+      <p:sp>
+        <p:nvSpPr>
+          <p:cNvPr id="2" name="Text 0">
+            <a:extLst>
+              <a:ext uri="{FF2B5EF4-FFF2-40B4-BE49-F238E27FC236}">
+                <a16:creationId xmlns:a16="http://schemas.microsoft.com/office/drawing/2014/main" id="{762A2209-5066-A9B5-3E35-5ED7D290F26D}"/>
+              </a:ext>
+            </a:extLst>
+          </p:cNvPr>
+          <p:cNvSpPr>
+            <a:spLocks noGrp="1"/>
+          </p:cNvSpPr>
+          <p:nvPr>
+            <p:ph type="title" idx="100"/>
+          </p:nvPr>
+        </p:nvSpPr>
+        <p:spPr>
+          <a:prstGeom prst="rect">
+            <a:avLst/>
+          </a:prstGeom>
+          <a:noFill/>
+          <a:ln/>
+        </p:spPr>
+        <p:txBody>
+          <a:bodyPr vert="horz" wrap="square" lIns="0" tIns="0" rIns="0" bIns="0" rtlCol="0" anchor="ctr">
+            <a:normAutofit/>
+          </a:bodyPr>
+          <a:lstStyle/>
+          <a:p>
+            <a:r>
+              <a:rPr lang="en-US" b="1" dirty="0">
+                <a:solidFill>
+                  <a:srgbClr val="FFFFFF"/>
+                </a:solidFill>
+                <a:latin typeface="Calibri"/>
+              </a:rPr>
+              <a:t>Patrones Observer y Mediator</a:t>
+            </a:r>
+          </a:p>
+        </p:txBody>
+      </p:sp>
+    </p:spTree>
+    <p:extLst>
+      <p:ext uri="{BB962C8B-B14F-4D97-AF65-F5344CB8AC3E}">
+        <p14:creationId xmlns:p14="http://schemas.microsoft.com/office/powerpoint/2010/main" val="1518798913"/>
+      </p:ext>
+    </p:extLst>
+  </p:cSld>
+  <p:clrMapOvr>
+    <a:masterClrMapping/>
+  </p:clrMapOvr>
 </p:sld>
 </file>
 

--- a/presentación/Arquitectura SOA  y Patrones Observer, Mediator.pptx
+++ b/presentación/Arquitectura SOA  y Patrones Observer, Mediator.pptx
@@ -1985,7 +1985,7 @@
           </a:prstGeom>
           <a:extLst>
             <a:ext uri="{C572A759-6A51-4108-AA02-DFA0A04FC94B}">
-              <ma14:wrappingTextBoxFlag xmlns="" xmlns:ma14="http://schemas.microsoft.com/office/mac/drawingml/2011/main" val="0"/>
+              <ma14:wrappingTextBoxFlag xmlns:ma14="http://schemas.microsoft.com/office/mac/drawingml/2011/main" xmlns="" val="0"/>
             </a:ext>
           </a:extLst>
         </p:spPr>
@@ -5034,7 +5034,7 @@
           </a:prstGeom>
           <a:extLst>
             <a:ext uri="{C572A759-6A51-4108-AA02-DFA0A04FC94B}">
-              <ma14:wrappingTextBoxFlag xmlns="" xmlns:ma14="http://schemas.microsoft.com/office/mac/drawingml/2011/main" val="0"/>
+              <ma14:wrappingTextBoxFlag xmlns:ma14="http://schemas.microsoft.com/office/mac/drawingml/2011/main" xmlns="" val="0"/>
             </a:ext>
           </a:extLst>
         </p:spPr>
@@ -5571,7 +5571,7 @@
           </a:prstGeom>
           <a:extLst>
             <a:ext uri="{C572A759-6A51-4108-AA02-DFA0A04FC94B}">
-              <ma14:wrappingTextBoxFlag xmlns="" xmlns:ma14="http://schemas.microsoft.com/office/mac/drawingml/2011/main" val="0"/>
+              <ma14:wrappingTextBoxFlag xmlns:ma14="http://schemas.microsoft.com/office/mac/drawingml/2011/main" xmlns="" val="0"/>
             </a:ext>
           </a:extLst>
         </p:spPr>
@@ -5932,7 +5932,25 @@
                 </a:solidFill>
                 <a:latin typeface="Calibri"/>
               </a:rPr>
-              <a:t>el mediador decide a quién, en qué orden y con qué reglas</a:t>
+              <a:t>el </a:t>
+            </a:r>
+            <a:r>
+              <a:rPr lang="en-US" sz="1733" dirty="0" err="1">
+                <a:solidFill>
+                  <a:srgbClr val="BEC5E6"/>
+                </a:solidFill>
+                <a:latin typeface="Calibri"/>
+              </a:rPr>
+              <a:t>mediador</a:t>
+            </a:r>
+            <a:r>
+              <a:rPr lang="en-US" sz="1733" dirty="0">
+                <a:solidFill>
+                  <a:srgbClr val="BEC5E6"/>
+                </a:solidFill>
+                <a:latin typeface="Calibri"/>
+              </a:rPr>
+              <a:t> decide a quién, en qué orden y con qué reglas</a:t>
             </a:r>
           </a:p>
           <a:p>
@@ -6151,7 +6169,7 @@
           </a:prstGeom>
           <a:extLst>
             <a:ext uri="{C572A759-6A51-4108-AA02-DFA0A04FC94B}">
-              <ma14:wrappingTextBoxFlag xmlns="" xmlns:ma14="http://schemas.microsoft.com/office/mac/drawingml/2011/main" val="0"/>
+              <ma14:wrappingTextBoxFlag xmlns:ma14="http://schemas.microsoft.com/office/mac/drawingml/2011/main" xmlns="" val="0"/>
             </a:ext>
           </a:extLst>
         </p:spPr>
@@ -6322,7 +6340,9 @@
           <a:prstGeom prst="rect">
             <a:avLst/>
           </a:prstGeom>
-          <a:noFill/>
+          <a:solidFill>
+            <a:srgbClr val="202658"/>
+          </a:solidFill>
           <a:ln/>
         </p:spPr>
         <p:txBody>
@@ -6400,7 +6420,9 @@
           <a:prstGeom prst="rect">
             <a:avLst/>
           </a:prstGeom>
-          <a:noFill/>
+          <a:solidFill>
+            <a:srgbClr val="202658"/>
+          </a:solidFill>
           <a:ln/>
         </p:spPr>
         <p:txBody>
@@ -6465,7 +6487,9 @@
           <a:prstGeom prst="rect">
             <a:avLst/>
           </a:prstGeom>
-          <a:noFill/>
+          <a:solidFill>
+            <a:srgbClr val="202658"/>
+          </a:solidFill>
           <a:ln/>
         </p:spPr>
         <p:txBody>
@@ -6530,7 +6554,9 @@
           <a:prstGeom prst="rect">
             <a:avLst/>
           </a:prstGeom>
-          <a:noFill/>
+          <a:solidFill>
+            <a:srgbClr val="202658"/>
+          </a:solidFill>
           <a:ln/>
         </p:spPr>
         <p:txBody>
@@ -6688,7 +6714,9 @@
           <a:prstGeom prst="rect">
             <a:avLst/>
           </a:prstGeom>
-          <a:noFill/>
+          <a:solidFill>
+            <a:srgbClr val="202658"/>
+          </a:solidFill>
           <a:ln/>
         </p:spPr>
         <p:txBody>
@@ -6753,7 +6781,9 @@
           <a:prstGeom prst="rect">
             <a:avLst/>
           </a:prstGeom>
-          <a:noFill/>
+          <a:solidFill>
+            <a:srgbClr val="202658"/>
+          </a:solidFill>
           <a:ln/>
         </p:spPr>
         <p:txBody>
@@ -6818,7 +6848,9 @@
           <a:prstGeom prst="rect">
             <a:avLst/>
           </a:prstGeom>
-          <a:noFill/>
+          <a:solidFill>
+            <a:srgbClr val="202658"/>
+          </a:solidFill>
           <a:ln/>
         </p:spPr>
         <p:txBody>
@@ -6883,7 +6915,9 @@
           <a:prstGeom prst="rect">
             <a:avLst/>
           </a:prstGeom>
-          <a:noFill/>
+          <a:solidFill>
+            <a:srgbClr val="202658"/>
+          </a:solidFill>
           <a:ln/>
         </p:spPr>
         <p:txBody>
@@ -8044,6 +8078,146 @@
               </a:solidFill>
               <a:latin typeface="Calibri" panose="020F0502020204030204" pitchFamily="34" charset="0"/>
             </a:endParaRPr>
+          </a:p>
+        </p:txBody>
+      </p:sp>
+      <p:sp>
+        <p:nvSpPr>
+          <p:cNvPr id="17" name="Slide Number Placeholder 0">
+            <a:extLst>
+              <a:ext uri="{FF2B5EF4-FFF2-40B4-BE49-F238E27FC236}">
+                <a16:creationId xmlns:a16="http://schemas.microsoft.com/office/drawing/2014/main" id="{A29B4CA9-8089-F9E3-EB03-A4CF676FD100}"/>
+              </a:ext>
+            </a:extLst>
+          </p:cNvPr>
+          <p:cNvSpPr txBox="1">
+            <a:spLocks/>
+          </p:cNvSpPr>
+          <p:nvPr/>
+        </p:nvSpPr>
+        <p:spPr>
+          <a:xfrm>
+            <a:off x="11094720" y="6339840"/>
+            <a:ext cx="609600" cy="365760"/>
+          </a:xfrm>
+          <a:prstGeom prst="rect">
+            <a:avLst/>
+          </a:prstGeom>
+          <a:extLst>
+            <a:ext uri="{C572A759-6A51-4108-AA02-DFA0A04FC94B}">
+              <ma14:wrappingTextBoxFlag xmlns:ma14="http://schemas.microsoft.com/office/mac/drawingml/2011/main" xmlns="" val="0"/>
+            </a:ext>
+          </a:extLst>
+        </p:spPr>
+        <p:txBody>
+          <a:bodyPr vert="horz" lIns="91440" tIns="45720" rIns="91440" bIns="45720" rtlCol="0" anchor="ctr"/>
+          <a:lstStyle>
+            <a:defPPr>
+              <a:defRPr lang="es-CO"/>
+            </a:defPPr>
+            <a:lvl1pPr marL="0" algn="r" defTabSz="914400" rtl="0" eaLnBrk="1" latinLnBrk="0" hangingPunct="1">
+              <a:defRPr sz="1333" kern="1200">
+                <a:solidFill>
+                  <a:schemeClr val="tx1"/>
+                </a:solidFill>
+                <a:latin typeface="+mn-lt"/>
+                <a:ea typeface="+mn-ea"/>
+                <a:cs typeface="+mn-cs"/>
+              </a:defRPr>
+            </a:lvl1pPr>
+            <a:lvl2pPr marL="457200" algn="l" defTabSz="914400" rtl="0" eaLnBrk="1" latinLnBrk="0" hangingPunct="1">
+              <a:defRPr sz="1800" kern="1200">
+                <a:solidFill>
+                  <a:schemeClr val="tx1"/>
+                </a:solidFill>
+                <a:latin typeface="+mn-lt"/>
+                <a:ea typeface="+mn-ea"/>
+                <a:cs typeface="+mn-cs"/>
+              </a:defRPr>
+            </a:lvl2pPr>
+            <a:lvl3pPr marL="914400" algn="l" defTabSz="914400" rtl="0" eaLnBrk="1" latinLnBrk="0" hangingPunct="1">
+              <a:defRPr sz="1800" kern="1200">
+                <a:solidFill>
+                  <a:schemeClr val="tx1"/>
+                </a:solidFill>
+                <a:latin typeface="+mn-lt"/>
+                <a:ea typeface="+mn-ea"/>
+                <a:cs typeface="+mn-cs"/>
+              </a:defRPr>
+            </a:lvl3pPr>
+            <a:lvl4pPr marL="1371600" algn="l" defTabSz="914400" rtl="0" eaLnBrk="1" latinLnBrk="0" hangingPunct="1">
+              <a:defRPr sz="1800" kern="1200">
+                <a:solidFill>
+                  <a:schemeClr val="tx1"/>
+                </a:solidFill>
+                <a:latin typeface="+mn-lt"/>
+                <a:ea typeface="+mn-ea"/>
+                <a:cs typeface="+mn-cs"/>
+              </a:defRPr>
+            </a:lvl4pPr>
+            <a:lvl5pPr marL="1828800" algn="l" defTabSz="914400" rtl="0" eaLnBrk="1" latinLnBrk="0" hangingPunct="1">
+              <a:defRPr sz="1800" kern="1200">
+                <a:solidFill>
+                  <a:schemeClr val="tx1"/>
+                </a:solidFill>
+                <a:latin typeface="+mn-lt"/>
+                <a:ea typeface="+mn-ea"/>
+                <a:cs typeface="+mn-cs"/>
+              </a:defRPr>
+            </a:lvl5pPr>
+            <a:lvl6pPr marL="2286000" algn="l" defTabSz="914400" rtl="0" eaLnBrk="1" latinLnBrk="0" hangingPunct="1">
+              <a:defRPr sz="1800" kern="1200">
+                <a:solidFill>
+                  <a:schemeClr val="tx1"/>
+                </a:solidFill>
+                <a:latin typeface="+mn-lt"/>
+                <a:ea typeface="+mn-ea"/>
+                <a:cs typeface="+mn-cs"/>
+              </a:defRPr>
+            </a:lvl6pPr>
+            <a:lvl7pPr marL="2743200" algn="l" defTabSz="914400" rtl="0" eaLnBrk="1" latinLnBrk="0" hangingPunct="1">
+              <a:defRPr sz="1800" kern="1200">
+                <a:solidFill>
+                  <a:schemeClr val="tx1"/>
+                </a:solidFill>
+                <a:latin typeface="+mn-lt"/>
+                <a:ea typeface="+mn-ea"/>
+                <a:cs typeface="+mn-cs"/>
+              </a:defRPr>
+            </a:lvl7pPr>
+            <a:lvl8pPr marL="3200400" algn="l" defTabSz="914400" rtl="0" eaLnBrk="1" latinLnBrk="0" hangingPunct="1">
+              <a:defRPr sz="1800" kern="1200">
+                <a:solidFill>
+                  <a:schemeClr val="tx1"/>
+                </a:solidFill>
+                <a:latin typeface="+mn-lt"/>
+                <a:ea typeface="+mn-ea"/>
+                <a:cs typeface="+mn-cs"/>
+              </a:defRPr>
+            </a:lvl8pPr>
+            <a:lvl9pPr marL="3657600" algn="l" defTabSz="914400" rtl="0" eaLnBrk="1" latinLnBrk="0" hangingPunct="1">
+              <a:defRPr sz="1800" kern="1200">
+                <a:solidFill>
+                  <a:schemeClr val="tx1"/>
+                </a:solidFill>
+                <a:latin typeface="+mn-lt"/>
+                <a:ea typeface="+mn-ea"/>
+                <a:cs typeface="+mn-cs"/>
+              </a:defRPr>
+            </a:lvl9pPr>
+          </a:lstStyle>
+          <a:p>
+            <a:pPr algn="l"/>
+            <a:fld id="{F7021451-1387-4CA6-816F-3879F97B5CBC}" type="slidenum">
+              <a:rPr lang="en-US" smtClean="0">
+                <a:solidFill>
+                  <a:srgbClr val="BEC5E6"/>
+                </a:solidFill>
+              </a:rPr>
+              <a:pPr algn="l"/>
+              <a:t>13</a:t>
+            </a:fld>
+            <a:endParaRPr lang="en-US" dirty="0"/>
           </a:p>
         </p:txBody>
       </p:sp>
@@ -9703,6 +9877,146 @@
               </a:solidFill>
               <a:latin typeface="Calibri" panose="020F0502020204030204" pitchFamily="34" charset="0"/>
             </a:endParaRPr>
+          </a:p>
+        </p:txBody>
+      </p:sp>
+      <p:sp>
+        <p:nvSpPr>
+          <p:cNvPr id="19" name="Slide Number Placeholder 0">
+            <a:extLst>
+              <a:ext uri="{FF2B5EF4-FFF2-40B4-BE49-F238E27FC236}">
+                <a16:creationId xmlns:a16="http://schemas.microsoft.com/office/drawing/2014/main" id="{41AC84D1-05AA-0109-3291-20151F30CEC2}"/>
+              </a:ext>
+            </a:extLst>
+          </p:cNvPr>
+          <p:cNvSpPr txBox="1">
+            <a:spLocks/>
+          </p:cNvSpPr>
+          <p:nvPr/>
+        </p:nvSpPr>
+        <p:spPr>
+          <a:xfrm>
+            <a:off x="11094720" y="6339840"/>
+            <a:ext cx="609600" cy="365760"/>
+          </a:xfrm>
+          <a:prstGeom prst="rect">
+            <a:avLst/>
+          </a:prstGeom>
+          <a:extLst>
+            <a:ext uri="{C572A759-6A51-4108-AA02-DFA0A04FC94B}">
+              <ma14:wrappingTextBoxFlag xmlns:ma14="http://schemas.microsoft.com/office/mac/drawingml/2011/main" xmlns="" val="0"/>
+            </a:ext>
+          </a:extLst>
+        </p:spPr>
+        <p:txBody>
+          <a:bodyPr vert="horz" lIns="91440" tIns="45720" rIns="91440" bIns="45720" rtlCol="0" anchor="ctr"/>
+          <a:lstStyle>
+            <a:defPPr>
+              <a:defRPr lang="es-CO"/>
+            </a:defPPr>
+            <a:lvl1pPr marL="0" algn="r" defTabSz="914400" rtl="0" eaLnBrk="1" latinLnBrk="0" hangingPunct="1">
+              <a:defRPr sz="1333" kern="1200">
+                <a:solidFill>
+                  <a:schemeClr val="tx1"/>
+                </a:solidFill>
+                <a:latin typeface="+mn-lt"/>
+                <a:ea typeface="+mn-ea"/>
+                <a:cs typeface="+mn-cs"/>
+              </a:defRPr>
+            </a:lvl1pPr>
+            <a:lvl2pPr marL="457200" algn="l" defTabSz="914400" rtl="0" eaLnBrk="1" latinLnBrk="0" hangingPunct="1">
+              <a:defRPr sz="1800" kern="1200">
+                <a:solidFill>
+                  <a:schemeClr val="tx1"/>
+                </a:solidFill>
+                <a:latin typeface="+mn-lt"/>
+                <a:ea typeface="+mn-ea"/>
+                <a:cs typeface="+mn-cs"/>
+              </a:defRPr>
+            </a:lvl2pPr>
+            <a:lvl3pPr marL="914400" algn="l" defTabSz="914400" rtl="0" eaLnBrk="1" latinLnBrk="0" hangingPunct="1">
+              <a:defRPr sz="1800" kern="1200">
+                <a:solidFill>
+                  <a:schemeClr val="tx1"/>
+                </a:solidFill>
+                <a:latin typeface="+mn-lt"/>
+                <a:ea typeface="+mn-ea"/>
+                <a:cs typeface="+mn-cs"/>
+              </a:defRPr>
+            </a:lvl3pPr>
+            <a:lvl4pPr marL="1371600" algn="l" defTabSz="914400" rtl="0" eaLnBrk="1" latinLnBrk="0" hangingPunct="1">
+              <a:defRPr sz="1800" kern="1200">
+                <a:solidFill>
+                  <a:schemeClr val="tx1"/>
+                </a:solidFill>
+                <a:latin typeface="+mn-lt"/>
+                <a:ea typeface="+mn-ea"/>
+                <a:cs typeface="+mn-cs"/>
+              </a:defRPr>
+            </a:lvl4pPr>
+            <a:lvl5pPr marL="1828800" algn="l" defTabSz="914400" rtl="0" eaLnBrk="1" latinLnBrk="0" hangingPunct="1">
+              <a:defRPr sz="1800" kern="1200">
+                <a:solidFill>
+                  <a:schemeClr val="tx1"/>
+                </a:solidFill>
+                <a:latin typeface="+mn-lt"/>
+                <a:ea typeface="+mn-ea"/>
+                <a:cs typeface="+mn-cs"/>
+              </a:defRPr>
+            </a:lvl5pPr>
+            <a:lvl6pPr marL="2286000" algn="l" defTabSz="914400" rtl="0" eaLnBrk="1" latinLnBrk="0" hangingPunct="1">
+              <a:defRPr sz="1800" kern="1200">
+                <a:solidFill>
+                  <a:schemeClr val="tx1"/>
+                </a:solidFill>
+                <a:latin typeface="+mn-lt"/>
+                <a:ea typeface="+mn-ea"/>
+                <a:cs typeface="+mn-cs"/>
+              </a:defRPr>
+            </a:lvl6pPr>
+            <a:lvl7pPr marL="2743200" algn="l" defTabSz="914400" rtl="0" eaLnBrk="1" latinLnBrk="0" hangingPunct="1">
+              <a:defRPr sz="1800" kern="1200">
+                <a:solidFill>
+                  <a:schemeClr val="tx1"/>
+                </a:solidFill>
+                <a:latin typeface="+mn-lt"/>
+                <a:ea typeface="+mn-ea"/>
+                <a:cs typeface="+mn-cs"/>
+              </a:defRPr>
+            </a:lvl7pPr>
+            <a:lvl8pPr marL="3200400" algn="l" defTabSz="914400" rtl="0" eaLnBrk="1" latinLnBrk="0" hangingPunct="1">
+              <a:defRPr sz="1800" kern="1200">
+                <a:solidFill>
+                  <a:schemeClr val="tx1"/>
+                </a:solidFill>
+                <a:latin typeface="+mn-lt"/>
+                <a:ea typeface="+mn-ea"/>
+                <a:cs typeface="+mn-cs"/>
+              </a:defRPr>
+            </a:lvl8pPr>
+            <a:lvl9pPr marL="3657600" algn="l" defTabSz="914400" rtl="0" eaLnBrk="1" latinLnBrk="0" hangingPunct="1">
+              <a:defRPr sz="1800" kern="1200">
+                <a:solidFill>
+                  <a:schemeClr val="tx1"/>
+                </a:solidFill>
+                <a:latin typeface="+mn-lt"/>
+                <a:ea typeface="+mn-ea"/>
+                <a:cs typeface="+mn-cs"/>
+              </a:defRPr>
+            </a:lvl9pPr>
+          </a:lstStyle>
+          <a:p>
+            <a:pPr algn="l"/>
+            <a:fld id="{F7021451-1387-4CA6-816F-3879F97B5CBC}" type="slidenum">
+              <a:rPr lang="en-US" smtClean="0">
+                <a:solidFill>
+                  <a:srgbClr val="BEC5E6"/>
+                </a:solidFill>
+              </a:rPr>
+              <a:pPr algn="l"/>
+              <a:t>14</a:t>
+            </a:fld>
+            <a:endParaRPr lang="en-US" dirty="0"/>
           </a:p>
         </p:txBody>
       </p:sp>
@@ -10618,6 +10932,146 @@
           </a:prstGeom>
         </p:spPr>
       </p:pic>
+      <p:sp>
+        <p:nvSpPr>
+          <p:cNvPr id="4" name="Slide Number Placeholder 0">
+            <a:extLst>
+              <a:ext uri="{FF2B5EF4-FFF2-40B4-BE49-F238E27FC236}">
+                <a16:creationId xmlns:a16="http://schemas.microsoft.com/office/drawing/2014/main" id="{44E2FF4A-AF77-C02B-AFD3-8D5358119CE8}"/>
+              </a:ext>
+            </a:extLst>
+          </p:cNvPr>
+          <p:cNvSpPr txBox="1">
+            <a:spLocks/>
+          </p:cNvSpPr>
+          <p:nvPr/>
+        </p:nvSpPr>
+        <p:spPr>
+          <a:xfrm>
+            <a:off x="11094720" y="6339840"/>
+            <a:ext cx="609600" cy="365760"/>
+          </a:xfrm>
+          <a:prstGeom prst="rect">
+            <a:avLst/>
+          </a:prstGeom>
+          <a:extLst>
+            <a:ext uri="{C572A759-6A51-4108-AA02-DFA0A04FC94B}">
+              <ma14:wrappingTextBoxFlag xmlns:ma14="http://schemas.microsoft.com/office/mac/drawingml/2011/main" xmlns="" val="0"/>
+            </a:ext>
+          </a:extLst>
+        </p:spPr>
+        <p:txBody>
+          <a:bodyPr vert="horz" lIns="91440" tIns="45720" rIns="91440" bIns="45720" rtlCol="0" anchor="ctr"/>
+          <a:lstStyle>
+            <a:defPPr>
+              <a:defRPr lang="es-CO"/>
+            </a:defPPr>
+            <a:lvl1pPr marL="0" algn="r" defTabSz="914400" rtl="0" eaLnBrk="1" latinLnBrk="0" hangingPunct="1">
+              <a:defRPr sz="1333" kern="1200">
+                <a:solidFill>
+                  <a:schemeClr val="tx1"/>
+                </a:solidFill>
+                <a:latin typeface="+mn-lt"/>
+                <a:ea typeface="+mn-ea"/>
+                <a:cs typeface="+mn-cs"/>
+              </a:defRPr>
+            </a:lvl1pPr>
+            <a:lvl2pPr marL="457200" algn="l" defTabSz="914400" rtl="0" eaLnBrk="1" latinLnBrk="0" hangingPunct="1">
+              <a:defRPr sz="1800" kern="1200">
+                <a:solidFill>
+                  <a:schemeClr val="tx1"/>
+                </a:solidFill>
+                <a:latin typeface="+mn-lt"/>
+                <a:ea typeface="+mn-ea"/>
+                <a:cs typeface="+mn-cs"/>
+              </a:defRPr>
+            </a:lvl2pPr>
+            <a:lvl3pPr marL="914400" algn="l" defTabSz="914400" rtl="0" eaLnBrk="1" latinLnBrk="0" hangingPunct="1">
+              <a:defRPr sz="1800" kern="1200">
+                <a:solidFill>
+                  <a:schemeClr val="tx1"/>
+                </a:solidFill>
+                <a:latin typeface="+mn-lt"/>
+                <a:ea typeface="+mn-ea"/>
+                <a:cs typeface="+mn-cs"/>
+              </a:defRPr>
+            </a:lvl3pPr>
+            <a:lvl4pPr marL="1371600" algn="l" defTabSz="914400" rtl="0" eaLnBrk="1" latinLnBrk="0" hangingPunct="1">
+              <a:defRPr sz="1800" kern="1200">
+                <a:solidFill>
+                  <a:schemeClr val="tx1"/>
+                </a:solidFill>
+                <a:latin typeface="+mn-lt"/>
+                <a:ea typeface="+mn-ea"/>
+                <a:cs typeface="+mn-cs"/>
+              </a:defRPr>
+            </a:lvl4pPr>
+            <a:lvl5pPr marL="1828800" algn="l" defTabSz="914400" rtl="0" eaLnBrk="1" latinLnBrk="0" hangingPunct="1">
+              <a:defRPr sz="1800" kern="1200">
+                <a:solidFill>
+                  <a:schemeClr val="tx1"/>
+                </a:solidFill>
+                <a:latin typeface="+mn-lt"/>
+                <a:ea typeface="+mn-ea"/>
+                <a:cs typeface="+mn-cs"/>
+              </a:defRPr>
+            </a:lvl5pPr>
+            <a:lvl6pPr marL="2286000" algn="l" defTabSz="914400" rtl="0" eaLnBrk="1" latinLnBrk="0" hangingPunct="1">
+              <a:defRPr sz="1800" kern="1200">
+                <a:solidFill>
+                  <a:schemeClr val="tx1"/>
+                </a:solidFill>
+                <a:latin typeface="+mn-lt"/>
+                <a:ea typeface="+mn-ea"/>
+                <a:cs typeface="+mn-cs"/>
+              </a:defRPr>
+            </a:lvl6pPr>
+            <a:lvl7pPr marL="2743200" algn="l" defTabSz="914400" rtl="0" eaLnBrk="1" latinLnBrk="0" hangingPunct="1">
+              <a:defRPr sz="1800" kern="1200">
+                <a:solidFill>
+                  <a:schemeClr val="tx1"/>
+                </a:solidFill>
+                <a:latin typeface="+mn-lt"/>
+                <a:ea typeface="+mn-ea"/>
+                <a:cs typeface="+mn-cs"/>
+              </a:defRPr>
+            </a:lvl7pPr>
+            <a:lvl8pPr marL="3200400" algn="l" defTabSz="914400" rtl="0" eaLnBrk="1" latinLnBrk="0" hangingPunct="1">
+              <a:defRPr sz="1800" kern="1200">
+                <a:solidFill>
+                  <a:schemeClr val="tx1"/>
+                </a:solidFill>
+                <a:latin typeface="+mn-lt"/>
+                <a:ea typeface="+mn-ea"/>
+                <a:cs typeface="+mn-cs"/>
+              </a:defRPr>
+            </a:lvl8pPr>
+            <a:lvl9pPr marL="3657600" algn="l" defTabSz="914400" rtl="0" eaLnBrk="1" latinLnBrk="0" hangingPunct="1">
+              <a:defRPr sz="1800" kern="1200">
+                <a:solidFill>
+                  <a:schemeClr val="tx1"/>
+                </a:solidFill>
+                <a:latin typeface="+mn-lt"/>
+                <a:ea typeface="+mn-ea"/>
+                <a:cs typeface="+mn-cs"/>
+              </a:defRPr>
+            </a:lvl9pPr>
+          </a:lstStyle>
+          <a:p>
+            <a:pPr algn="l"/>
+            <a:fld id="{F7021451-1387-4CA6-816F-3879F97B5CBC}" type="slidenum">
+              <a:rPr lang="en-US" smtClean="0">
+                <a:solidFill>
+                  <a:srgbClr val="BEC5E6"/>
+                </a:solidFill>
+              </a:rPr>
+              <a:pPr algn="l"/>
+              <a:t>15</a:t>
+            </a:fld>
+            <a:endParaRPr lang="en-US" dirty="0"/>
+          </a:p>
+        </p:txBody>
+      </p:sp>
     </p:spTree>
     <p:extLst>
       <p:ext uri="{BB962C8B-B14F-4D97-AF65-F5344CB8AC3E}">
@@ -10628,18 +11082,6 @@
   <p:clrMapOvr>
     <a:masterClrMapping/>
   </p:clrMapOvr>
-  <mc:AlternateContent xmlns:mc="http://schemas.openxmlformats.org/markup-compatibility/2006" xmlns:p14="http://schemas.microsoft.com/office/powerpoint/2010/main">
-    <mc:Choice Requires="p14">
-      <p:transition spd="slow" p14:dur="2000">
-        <p:fade/>
-      </p:transition>
-    </mc:Choice>
-    <mc:Fallback xmlns="">
-      <p:transition spd="slow">
-        <p:fade/>
-      </p:transition>
-    </mc:Fallback>
-  </mc:AlternateContent>
 </p:sld>
 </file>
 
@@ -10870,6 +11312,146 @@
           </a:prstGeom>
         </p:spPr>
       </p:pic>
+      <p:sp>
+        <p:nvSpPr>
+          <p:cNvPr id="4" name="Slide Number Placeholder 0">
+            <a:extLst>
+              <a:ext uri="{FF2B5EF4-FFF2-40B4-BE49-F238E27FC236}">
+                <a16:creationId xmlns:a16="http://schemas.microsoft.com/office/drawing/2014/main" id="{BFEB0F68-9DE0-4916-056C-7CEAF9C282E6}"/>
+              </a:ext>
+            </a:extLst>
+          </p:cNvPr>
+          <p:cNvSpPr txBox="1">
+            <a:spLocks/>
+          </p:cNvSpPr>
+          <p:nvPr/>
+        </p:nvSpPr>
+        <p:spPr>
+          <a:xfrm>
+            <a:off x="11094720" y="6339840"/>
+            <a:ext cx="609600" cy="365760"/>
+          </a:xfrm>
+          <a:prstGeom prst="rect">
+            <a:avLst/>
+          </a:prstGeom>
+          <a:extLst>
+            <a:ext uri="{C572A759-6A51-4108-AA02-DFA0A04FC94B}">
+              <ma14:wrappingTextBoxFlag xmlns:ma14="http://schemas.microsoft.com/office/mac/drawingml/2011/main" xmlns="" val="0"/>
+            </a:ext>
+          </a:extLst>
+        </p:spPr>
+        <p:txBody>
+          <a:bodyPr vert="horz" lIns="91440" tIns="45720" rIns="91440" bIns="45720" rtlCol="0" anchor="ctr"/>
+          <a:lstStyle>
+            <a:defPPr>
+              <a:defRPr lang="es-CO"/>
+            </a:defPPr>
+            <a:lvl1pPr marL="0" algn="r" defTabSz="914400" rtl="0" eaLnBrk="1" latinLnBrk="0" hangingPunct="1">
+              <a:defRPr sz="1333" kern="1200">
+                <a:solidFill>
+                  <a:schemeClr val="tx1"/>
+                </a:solidFill>
+                <a:latin typeface="+mn-lt"/>
+                <a:ea typeface="+mn-ea"/>
+                <a:cs typeface="+mn-cs"/>
+              </a:defRPr>
+            </a:lvl1pPr>
+            <a:lvl2pPr marL="457200" algn="l" defTabSz="914400" rtl="0" eaLnBrk="1" latinLnBrk="0" hangingPunct="1">
+              <a:defRPr sz="1800" kern="1200">
+                <a:solidFill>
+                  <a:schemeClr val="tx1"/>
+                </a:solidFill>
+                <a:latin typeface="+mn-lt"/>
+                <a:ea typeface="+mn-ea"/>
+                <a:cs typeface="+mn-cs"/>
+              </a:defRPr>
+            </a:lvl2pPr>
+            <a:lvl3pPr marL="914400" algn="l" defTabSz="914400" rtl="0" eaLnBrk="1" latinLnBrk="0" hangingPunct="1">
+              <a:defRPr sz="1800" kern="1200">
+                <a:solidFill>
+                  <a:schemeClr val="tx1"/>
+                </a:solidFill>
+                <a:latin typeface="+mn-lt"/>
+                <a:ea typeface="+mn-ea"/>
+                <a:cs typeface="+mn-cs"/>
+              </a:defRPr>
+            </a:lvl3pPr>
+            <a:lvl4pPr marL="1371600" algn="l" defTabSz="914400" rtl="0" eaLnBrk="1" latinLnBrk="0" hangingPunct="1">
+              <a:defRPr sz="1800" kern="1200">
+                <a:solidFill>
+                  <a:schemeClr val="tx1"/>
+                </a:solidFill>
+                <a:latin typeface="+mn-lt"/>
+                <a:ea typeface="+mn-ea"/>
+                <a:cs typeface="+mn-cs"/>
+              </a:defRPr>
+            </a:lvl4pPr>
+            <a:lvl5pPr marL="1828800" algn="l" defTabSz="914400" rtl="0" eaLnBrk="1" latinLnBrk="0" hangingPunct="1">
+              <a:defRPr sz="1800" kern="1200">
+                <a:solidFill>
+                  <a:schemeClr val="tx1"/>
+                </a:solidFill>
+                <a:latin typeface="+mn-lt"/>
+                <a:ea typeface="+mn-ea"/>
+                <a:cs typeface="+mn-cs"/>
+              </a:defRPr>
+            </a:lvl5pPr>
+            <a:lvl6pPr marL="2286000" algn="l" defTabSz="914400" rtl="0" eaLnBrk="1" latinLnBrk="0" hangingPunct="1">
+              <a:defRPr sz="1800" kern="1200">
+                <a:solidFill>
+                  <a:schemeClr val="tx1"/>
+                </a:solidFill>
+                <a:latin typeface="+mn-lt"/>
+                <a:ea typeface="+mn-ea"/>
+                <a:cs typeface="+mn-cs"/>
+              </a:defRPr>
+            </a:lvl6pPr>
+            <a:lvl7pPr marL="2743200" algn="l" defTabSz="914400" rtl="0" eaLnBrk="1" latinLnBrk="0" hangingPunct="1">
+              <a:defRPr sz="1800" kern="1200">
+                <a:solidFill>
+                  <a:schemeClr val="tx1"/>
+                </a:solidFill>
+                <a:latin typeface="+mn-lt"/>
+                <a:ea typeface="+mn-ea"/>
+                <a:cs typeface="+mn-cs"/>
+              </a:defRPr>
+            </a:lvl7pPr>
+            <a:lvl8pPr marL="3200400" algn="l" defTabSz="914400" rtl="0" eaLnBrk="1" latinLnBrk="0" hangingPunct="1">
+              <a:defRPr sz="1800" kern="1200">
+                <a:solidFill>
+                  <a:schemeClr val="tx1"/>
+                </a:solidFill>
+                <a:latin typeface="+mn-lt"/>
+                <a:ea typeface="+mn-ea"/>
+                <a:cs typeface="+mn-cs"/>
+              </a:defRPr>
+            </a:lvl8pPr>
+            <a:lvl9pPr marL="3657600" algn="l" defTabSz="914400" rtl="0" eaLnBrk="1" latinLnBrk="0" hangingPunct="1">
+              <a:defRPr sz="1800" kern="1200">
+                <a:solidFill>
+                  <a:schemeClr val="tx1"/>
+                </a:solidFill>
+                <a:latin typeface="+mn-lt"/>
+                <a:ea typeface="+mn-ea"/>
+                <a:cs typeface="+mn-cs"/>
+              </a:defRPr>
+            </a:lvl9pPr>
+          </a:lstStyle>
+          <a:p>
+            <a:pPr algn="l"/>
+            <a:fld id="{F7021451-1387-4CA6-816F-3879F97B5CBC}" type="slidenum">
+              <a:rPr lang="en-US" smtClean="0">
+                <a:solidFill>
+                  <a:srgbClr val="BEC5E6"/>
+                </a:solidFill>
+              </a:rPr>
+              <a:pPr algn="l"/>
+              <a:t>16</a:t>
+            </a:fld>
+            <a:endParaRPr lang="en-US" dirty="0"/>
+          </a:p>
+        </p:txBody>
+      </p:sp>
     </p:spTree>
     <p:extLst>
       <p:ext uri="{BB962C8B-B14F-4D97-AF65-F5344CB8AC3E}">
@@ -11411,6 +11993,146 @@
           </a:p>
         </p:txBody>
       </p:sp>
+      <p:sp>
+        <p:nvSpPr>
+          <p:cNvPr id="6" name="Slide Number Placeholder 0">
+            <a:extLst>
+              <a:ext uri="{FF2B5EF4-FFF2-40B4-BE49-F238E27FC236}">
+                <a16:creationId xmlns:a16="http://schemas.microsoft.com/office/drawing/2014/main" id="{231A26C2-4BE6-BD5B-79A7-B3DC57256F3D}"/>
+              </a:ext>
+            </a:extLst>
+          </p:cNvPr>
+          <p:cNvSpPr txBox="1">
+            <a:spLocks/>
+          </p:cNvSpPr>
+          <p:nvPr/>
+        </p:nvSpPr>
+        <p:spPr>
+          <a:xfrm>
+            <a:off x="11094720" y="6339840"/>
+            <a:ext cx="609600" cy="365760"/>
+          </a:xfrm>
+          <a:prstGeom prst="rect">
+            <a:avLst/>
+          </a:prstGeom>
+          <a:extLst>
+            <a:ext uri="{C572A759-6A51-4108-AA02-DFA0A04FC94B}">
+              <ma14:wrappingTextBoxFlag xmlns:ma14="http://schemas.microsoft.com/office/mac/drawingml/2011/main" xmlns="" val="0"/>
+            </a:ext>
+          </a:extLst>
+        </p:spPr>
+        <p:txBody>
+          <a:bodyPr vert="horz" lIns="91440" tIns="45720" rIns="91440" bIns="45720" rtlCol="0" anchor="ctr"/>
+          <a:lstStyle>
+            <a:defPPr>
+              <a:defRPr lang="es-CO"/>
+            </a:defPPr>
+            <a:lvl1pPr marL="0" algn="r" defTabSz="914400" rtl="0" eaLnBrk="1" latinLnBrk="0" hangingPunct="1">
+              <a:defRPr sz="1333" kern="1200">
+                <a:solidFill>
+                  <a:schemeClr val="tx1"/>
+                </a:solidFill>
+                <a:latin typeface="+mn-lt"/>
+                <a:ea typeface="+mn-ea"/>
+                <a:cs typeface="+mn-cs"/>
+              </a:defRPr>
+            </a:lvl1pPr>
+            <a:lvl2pPr marL="457200" algn="l" defTabSz="914400" rtl="0" eaLnBrk="1" latinLnBrk="0" hangingPunct="1">
+              <a:defRPr sz="1800" kern="1200">
+                <a:solidFill>
+                  <a:schemeClr val="tx1"/>
+                </a:solidFill>
+                <a:latin typeface="+mn-lt"/>
+                <a:ea typeface="+mn-ea"/>
+                <a:cs typeface="+mn-cs"/>
+              </a:defRPr>
+            </a:lvl2pPr>
+            <a:lvl3pPr marL="914400" algn="l" defTabSz="914400" rtl="0" eaLnBrk="1" latinLnBrk="0" hangingPunct="1">
+              <a:defRPr sz="1800" kern="1200">
+                <a:solidFill>
+                  <a:schemeClr val="tx1"/>
+                </a:solidFill>
+                <a:latin typeface="+mn-lt"/>
+                <a:ea typeface="+mn-ea"/>
+                <a:cs typeface="+mn-cs"/>
+              </a:defRPr>
+            </a:lvl3pPr>
+            <a:lvl4pPr marL="1371600" algn="l" defTabSz="914400" rtl="0" eaLnBrk="1" latinLnBrk="0" hangingPunct="1">
+              <a:defRPr sz="1800" kern="1200">
+                <a:solidFill>
+                  <a:schemeClr val="tx1"/>
+                </a:solidFill>
+                <a:latin typeface="+mn-lt"/>
+                <a:ea typeface="+mn-ea"/>
+                <a:cs typeface="+mn-cs"/>
+              </a:defRPr>
+            </a:lvl4pPr>
+            <a:lvl5pPr marL="1828800" algn="l" defTabSz="914400" rtl="0" eaLnBrk="1" latinLnBrk="0" hangingPunct="1">
+              <a:defRPr sz="1800" kern="1200">
+                <a:solidFill>
+                  <a:schemeClr val="tx1"/>
+                </a:solidFill>
+                <a:latin typeface="+mn-lt"/>
+                <a:ea typeface="+mn-ea"/>
+                <a:cs typeface="+mn-cs"/>
+              </a:defRPr>
+            </a:lvl5pPr>
+            <a:lvl6pPr marL="2286000" algn="l" defTabSz="914400" rtl="0" eaLnBrk="1" latinLnBrk="0" hangingPunct="1">
+              <a:defRPr sz="1800" kern="1200">
+                <a:solidFill>
+                  <a:schemeClr val="tx1"/>
+                </a:solidFill>
+                <a:latin typeface="+mn-lt"/>
+                <a:ea typeface="+mn-ea"/>
+                <a:cs typeface="+mn-cs"/>
+              </a:defRPr>
+            </a:lvl6pPr>
+            <a:lvl7pPr marL="2743200" algn="l" defTabSz="914400" rtl="0" eaLnBrk="1" latinLnBrk="0" hangingPunct="1">
+              <a:defRPr sz="1800" kern="1200">
+                <a:solidFill>
+                  <a:schemeClr val="tx1"/>
+                </a:solidFill>
+                <a:latin typeface="+mn-lt"/>
+                <a:ea typeface="+mn-ea"/>
+                <a:cs typeface="+mn-cs"/>
+              </a:defRPr>
+            </a:lvl7pPr>
+            <a:lvl8pPr marL="3200400" algn="l" defTabSz="914400" rtl="0" eaLnBrk="1" latinLnBrk="0" hangingPunct="1">
+              <a:defRPr sz="1800" kern="1200">
+                <a:solidFill>
+                  <a:schemeClr val="tx1"/>
+                </a:solidFill>
+                <a:latin typeface="+mn-lt"/>
+                <a:ea typeface="+mn-ea"/>
+                <a:cs typeface="+mn-cs"/>
+              </a:defRPr>
+            </a:lvl8pPr>
+            <a:lvl9pPr marL="3657600" algn="l" defTabSz="914400" rtl="0" eaLnBrk="1" latinLnBrk="0" hangingPunct="1">
+              <a:defRPr sz="1800" kern="1200">
+                <a:solidFill>
+                  <a:schemeClr val="tx1"/>
+                </a:solidFill>
+                <a:latin typeface="+mn-lt"/>
+                <a:ea typeface="+mn-ea"/>
+                <a:cs typeface="+mn-cs"/>
+              </a:defRPr>
+            </a:lvl9pPr>
+          </a:lstStyle>
+          <a:p>
+            <a:pPr algn="l"/>
+            <a:fld id="{F7021451-1387-4CA6-816F-3879F97B5CBC}" type="slidenum">
+              <a:rPr lang="en-US" smtClean="0">
+                <a:solidFill>
+                  <a:srgbClr val="BEC5E6"/>
+                </a:solidFill>
+              </a:rPr>
+              <a:pPr algn="l"/>
+              <a:t>17</a:t>
+            </a:fld>
+            <a:endParaRPr lang="en-US" dirty="0"/>
+          </a:p>
+        </p:txBody>
+      </p:sp>
     </p:spTree>
     <p:extLst>
       <p:ext uri="{BB962C8B-B14F-4D97-AF65-F5344CB8AC3E}">
@@ -11723,7 +12445,7 @@
           </a:prstGeom>
           <a:extLst>
             <a:ext uri="{C572A759-6A51-4108-AA02-DFA0A04FC94B}">
-              <ma14:wrappingTextBoxFlag xmlns="" xmlns:ma14="http://schemas.microsoft.com/office/mac/drawingml/2011/main" val="0"/>
+              <ma14:wrappingTextBoxFlag xmlns:ma14="http://schemas.microsoft.com/office/mac/drawingml/2011/main" xmlns="" val="0"/>
             </a:ext>
           </a:extLst>
         </p:spPr>
@@ -11748,7 +12470,7 @@
               </a:rPr>
               <a:t>2</a:t>
             </a:fld>
-            <a:endParaRPr lang="en-US"/>
+            <a:endParaRPr lang="en-US" dirty="0"/>
           </a:p>
         </p:txBody>
       </p:sp>
@@ -12265,7 +12987,7 @@
           </a:prstGeom>
           <a:extLst>
             <a:ext uri="{C572A759-6A51-4108-AA02-DFA0A04FC94B}">
-              <ma14:wrappingTextBoxFlag xmlns="" xmlns:ma14="http://schemas.microsoft.com/office/mac/drawingml/2011/main" val="0"/>
+              <ma14:wrappingTextBoxFlag xmlns:ma14="http://schemas.microsoft.com/office/mac/drawingml/2011/main" xmlns="" val="0"/>
             </a:ext>
           </a:extLst>
         </p:spPr>
@@ -12803,7 +13525,7 @@
           </a:prstGeom>
           <a:extLst>
             <a:ext uri="{C572A759-6A51-4108-AA02-DFA0A04FC94B}">
-              <ma14:wrappingTextBoxFlag xmlns="" xmlns:ma14="http://schemas.microsoft.com/office/mac/drawingml/2011/main" val="0"/>
+              <ma14:wrappingTextBoxFlag xmlns:ma14="http://schemas.microsoft.com/office/mac/drawingml/2011/main" xmlns="" val="0"/>
             </a:ext>
           </a:extLst>
         </p:spPr>
@@ -12876,7 +13598,9 @@
           <a:prstGeom prst="rect">
             <a:avLst/>
           </a:prstGeom>
-          <a:noFill/>
+          <a:solidFill>
+            <a:srgbClr val="202658"/>
+          </a:solidFill>
           <a:ln/>
         </p:spPr>
         <p:txBody>
@@ -12941,7 +13665,9 @@
           <a:prstGeom prst="rect">
             <a:avLst/>
           </a:prstGeom>
-          <a:noFill/>
+          <a:solidFill>
+            <a:srgbClr val="202658"/>
+          </a:solidFill>
           <a:ln/>
         </p:spPr>
         <p:txBody>
@@ -13006,7 +13732,9 @@
           <a:prstGeom prst="rect">
             <a:avLst/>
           </a:prstGeom>
-          <a:noFill/>
+          <a:solidFill>
+            <a:srgbClr val="202658"/>
+          </a:solidFill>
           <a:ln/>
         </p:spPr>
         <p:txBody>
@@ -14635,6 +15363,146 @@
           </a:p>
         </p:txBody>
       </p:sp>
+      <p:sp>
+        <p:nvSpPr>
+          <p:cNvPr id="22" name="Slide Number Placeholder 0">
+            <a:extLst>
+              <a:ext uri="{FF2B5EF4-FFF2-40B4-BE49-F238E27FC236}">
+                <a16:creationId xmlns:a16="http://schemas.microsoft.com/office/drawing/2014/main" id="{CF19A215-D7AB-F9EE-A636-D754D1A63FF1}"/>
+              </a:ext>
+            </a:extLst>
+          </p:cNvPr>
+          <p:cNvSpPr txBox="1">
+            <a:spLocks/>
+          </p:cNvSpPr>
+          <p:nvPr/>
+        </p:nvSpPr>
+        <p:spPr>
+          <a:xfrm>
+            <a:off x="11094720" y="6339840"/>
+            <a:ext cx="609600" cy="365760"/>
+          </a:xfrm>
+          <a:prstGeom prst="rect">
+            <a:avLst/>
+          </a:prstGeom>
+          <a:extLst>
+            <a:ext uri="{C572A759-6A51-4108-AA02-DFA0A04FC94B}">
+              <ma14:wrappingTextBoxFlag xmlns:ma14="http://schemas.microsoft.com/office/mac/drawingml/2011/main" xmlns="" val="0"/>
+            </a:ext>
+          </a:extLst>
+        </p:spPr>
+        <p:txBody>
+          <a:bodyPr vert="horz" lIns="91440" tIns="45720" rIns="91440" bIns="45720" rtlCol="0" anchor="ctr"/>
+          <a:lstStyle>
+            <a:defPPr>
+              <a:defRPr lang="es-CO"/>
+            </a:defPPr>
+            <a:lvl1pPr marL="0" algn="r" defTabSz="914400" rtl="0" eaLnBrk="1" latinLnBrk="0" hangingPunct="1">
+              <a:defRPr sz="1333" kern="1200">
+                <a:solidFill>
+                  <a:schemeClr val="tx1"/>
+                </a:solidFill>
+                <a:latin typeface="+mn-lt"/>
+                <a:ea typeface="+mn-ea"/>
+                <a:cs typeface="+mn-cs"/>
+              </a:defRPr>
+            </a:lvl1pPr>
+            <a:lvl2pPr marL="457200" algn="l" defTabSz="914400" rtl="0" eaLnBrk="1" latinLnBrk="0" hangingPunct="1">
+              <a:defRPr sz="1800" kern="1200">
+                <a:solidFill>
+                  <a:schemeClr val="tx1"/>
+                </a:solidFill>
+                <a:latin typeface="+mn-lt"/>
+                <a:ea typeface="+mn-ea"/>
+                <a:cs typeface="+mn-cs"/>
+              </a:defRPr>
+            </a:lvl2pPr>
+            <a:lvl3pPr marL="914400" algn="l" defTabSz="914400" rtl="0" eaLnBrk="1" latinLnBrk="0" hangingPunct="1">
+              <a:defRPr sz="1800" kern="1200">
+                <a:solidFill>
+                  <a:schemeClr val="tx1"/>
+                </a:solidFill>
+                <a:latin typeface="+mn-lt"/>
+                <a:ea typeface="+mn-ea"/>
+                <a:cs typeface="+mn-cs"/>
+              </a:defRPr>
+            </a:lvl3pPr>
+            <a:lvl4pPr marL="1371600" algn="l" defTabSz="914400" rtl="0" eaLnBrk="1" latinLnBrk="0" hangingPunct="1">
+              <a:defRPr sz="1800" kern="1200">
+                <a:solidFill>
+                  <a:schemeClr val="tx1"/>
+                </a:solidFill>
+                <a:latin typeface="+mn-lt"/>
+                <a:ea typeface="+mn-ea"/>
+                <a:cs typeface="+mn-cs"/>
+              </a:defRPr>
+            </a:lvl4pPr>
+            <a:lvl5pPr marL="1828800" algn="l" defTabSz="914400" rtl="0" eaLnBrk="1" latinLnBrk="0" hangingPunct="1">
+              <a:defRPr sz="1800" kern="1200">
+                <a:solidFill>
+                  <a:schemeClr val="tx1"/>
+                </a:solidFill>
+                <a:latin typeface="+mn-lt"/>
+                <a:ea typeface="+mn-ea"/>
+                <a:cs typeface="+mn-cs"/>
+              </a:defRPr>
+            </a:lvl5pPr>
+            <a:lvl6pPr marL="2286000" algn="l" defTabSz="914400" rtl="0" eaLnBrk="1" latinLnBrk="0" hangingPunct="1">
+              <a:defRPr sz="1800" kern="1200">
+                <a:solidFill>
+                  <a:schemeClr val="tx1"/>
+                </a:solidFill>
+                <a:latin typeface="+mn-lt"/>
+                <a:ea typeface="+mn-ea"/>
+                <a:cs typeface="+mn-cs"/>
+              </a:defRPr>
+            </a:lvl6pPr>
+            <a:lvl7pPr marL="2743200" algn="l" defTabSz="914400" rtl="0" eaLnBrk="1" latinLnBrk="0" hangingPunct="1">
+              <a:defRPr sz="1800" kern="1200">
+                <a:solidFill>
+                  <a:schemeClr val="tx1"/>
+                </a:solidFill>
+                <a:latin typeface="+mn-lt"/>
+                <a:ea typeface="+mn-ea"/>
+                <a:cs typeface="+mn-cs"/>
+              </a:defRPr>
+            </a:lvl7pPr>
+            <a:lvl8pPr marL="3200400" algn="l" defTabSz="914400" rtl="0" eaLnBrk="1" latinLnBrk="0" hangingPunct="1">
+              <a:defRPr sz="1800" kern="1200">
+                <a:solidFill>
+                  <a:schemeClr val="tx1"/>
+                </a:solidFill>
+                <a:latin typeface="+mn-lt"/>
+                <a:ea typeface="+mn-ea"/>
+                <a:cs typeface="+mn-cs"/>
+              </a:defRPr>
+            </a:lvl8pPr>
+            <a:lvl9pPr marL="3657600" algn="l" defTabSz="914400" rtl="0" eaLnBrk="1" latinLnBrk="0" hangingPunct="1">
+              <a:defRPr sz="1800" kern="1200">
+                <a:solidFill>
+                  <a:schemeClr val="tx1"/>
+                </a:solidFill>
+                <a:latin typeface="+mn-lt"/>
+                <a:ea typeface="+mn-ea"/>
+                <a:cs typeface="+mn-cs"/>
+              </a:defRPr>
+            </a:lvl9pPr>
+          </a:lstStyle>
+          <a:p>
+            <a:pPr algn="l"/>
+            <a:fld id="{F7021451-1387-4CA6-816F-3879F97B5CBC}" type="slidenum">
+              <a:rPr lang="en-US" smtClean="0">
+                <a:solidFill>
+                  <a:srgbClr val="BEC5E6"/>
+                </a:solidFill>
+              </a:rPr>
+              <a:pPr algn="l"/>
+              <a:t>5</a:t>
+            </a:fld>
+            <a:endParaRPr lang="en-US" dirty="0"/>
+          </a:p>
+        </p:txBody>
+      </p:sp>
     </p:spTree>
   </p:cSld>
   <p:clrMapOvr>
@@ -15827,6 +16695,146 @@
               </a:solidFill>
               <a:latin typeface="Calibri" panose="020F0502020204030204" pitchFamily="34" charset="0"/>
             </a:endParaRPr>
+          </a:p>
+        </p:txBody>
+      </p:sp>
+      <p:sp>
+        <p:nvSpPr>
+          <p:cNvPr id="21" name="Slide Number Placeholder 0">
+            <a:extLst>
+              <a:ext uri="{FF2B5EF4-FFF2-40B4-BE49-F238E27FC236}">
+                <a16:creationId xmlns:a16="http://schemas.microsoft.com/office/drawing/2014/main" id="{D8A0553B-6B6B-3BCB-E235-396D8A62E129}"/>
+              </a:ext>
+            </a:extLst>
+          </p:cNvPr>
+          <p:cNvSpPr txBox="1">
+            <a:spLocks/>
+          </p:cNvSpPr>
+          <p:nvPr/>
+        </p:nvSpPr>
+        <p:spPr>
+          <a:xfrm>
+            <a:off x="11094720" y="6339840"/>
+            <a:ext cx="609600" cy="365760"/>
+          </a:xfrm>
+          <a:prstGeom prst="rect">
+            <a:avLst/>
+          </a:prstGeom>
+          <a:extLst>
+            <a:ext uri="{C572A759-6A51-4108-AA02-DFA0A04FC94B}">
+              <ma14:wrappingTextBoxFlag xmlns:ma14="http://schemas.microsoft.com/office/mac/drawingml/2011/main" xmlns="" val="0"/>
+            </a:ext>
+          </a:extLst>
+        </p:spPr>
+        <p:txBody>
+          <a:bodyPr vert="horz" lIns="91440" tIns="45720" rIns="91440" bIns="45720" rtlCol="0" anchor="ctr"/>
+          <a:lstStyle>
+            <a:defPPr>
+              <a:defRPr lang="es-CO"/>
+            </a:defPPr>
+            <a:lvl1pPr marL="0" algn="r" defTabSz="914400" rtl="0" eaLnBrk="1" latinLnBrk="0" hangingPunct="1">
+              <a:defRPr sz="1333" kern="1200">
+                <a:solidFill>
+                  <a:schemeClr val="tx1"/>
+                </a:solidFill>
+                <a:latin typeface="+mn-lt"/>
+                <a:ea typeface="+mn-ea"/>
+                <a:cs typeface="+mn-cs"/>
+              </a:defRPr>
+            </a:lvl1pPr>
+            <a:lvl2pPr marL="457200" algn="l" defTabSz="914400" rtl="0" eaLnBrk="1" latinLnBrk="0" hangingPunct="1">
+              <a:defRPr sz="1800" kern="1200">
+                <a:solidFill>
+                  <a:schemeClr val="tx1"/>
+                </a:solidFill>
+                <a:latin typeface="+mn-lt"/>
+                <a:ea typeface="+mn-ea"/>
+                <a:cs typeface="+mn-cs"/>
+              </a:defRPr>
+            </a:lvl2pPr>
+            <a:lvl3pPr marL="914400" algn="l" defTabSz="914400" rtl="0" eaLnBrk="1" latinLnBrk="0" hangingPunct="1">
+              <a:defRPr sz="1800" kern="1200">
+                <a:solidFill>
+                  <a:schemeClr val="tx1"/>
+                </a:solidFill>
+                <a:latin typeface="+mn-lt"/>
+                <a:ea typeface="+mn-ea"/>
+                <a:cs typeface="+mn-cs"/>
+              </a:defRPr>
+            </a:lvl3pPr>
+            <a:lvl4pPr marL="1371600" algn="l" defTabSz="914400" rtl="0" eaLnBrk="1" latinLnBrk="0" hangingPunct="1">
+              <a:defRPr sz="1800" kern="1200">
+                <a:solidFill>
+                  <a:schemeClr val="tx1"/>
+                </a:solidFill>
+                <a:latin typeface="+mn-lt"/>
+                <a:ea typeface="+mn-ea"/>
+                <a:cs typeface="+mn-cs"/>
+              </a:defRPr>
+            </a:lvl4pPr>
+            <a:lvl5pPr marL="1828800" algn="l" defTabSz="914400" rtl="0" eaLnBrk="1" latinLnBrk="0" hangingPunct="1">
+              <a:defRPr sz="1800" kern="1200">
+                <a:solidFill>
+                  <a:schemeClr val="tx1"/>
+                </a:solidFill>
+                <a:latin typeface="+mn-lt"/>
+                <a:ea typeface="+mn-ea"/>
+                <a:cs typeface="+mn-cs"/>
+              </a:defRPr>
+            </a:lvl5pPr>
+            <a:lvl6pPr marL="2286000" algn="l" defTabSz="914400" rtl="0" eaLnBrk="1" latinLnBrk="0" hangingPunct="1">
+              <a:defRPr sz="1800" kern="1200">
+                <a:solidFill>
+                  <a:schemeClr val="tx1"/>
+                </a:solidFill>
+                <a:latin typeface="+mn-lt"/>
+                <a:ea typeface="+mn-ea"/>
+                <a:cs typeface="+mn-cs"/>
+              </a:defRPr>
+            </a:lvl6pPr>
+            <a:lvl7pPr marL="2743200" algn="l" defTabSz="914400" rtl="0" eaLnBrk="1" latinLnBrk="0" hangingPunct="1">
+              <a:defRPr sz="1800" kern="1200">
+                <a:solidFill>
+                  <a:schemeClr val="tx1"/>
+                </a:solidFill>
+                <a:latin typeface="+mn-lt"/>
+                <a:ea typeface="+mn-ea"/>
+                <a:cs typeface="+mn-cs"/>
+              </a:defRPr>
+            </a:lvl7pPr>
+            <a:lvl8pPr marL="3200400" algn="l" defTabSz="914400" rtl="0" eaLnBrk="1" latinLnBrk="0" hangingPunct="1">
+              <a:defRPr sz="1800" kern="1200">
+                <a:solidFill>
+                  <a:schemeClr val="tx1"/>
+                </a:solidFill>
+                <a:latin typeface="+mn-lt"/>
+                <a:ea typeface="+mn-ea"/>
+                <a:cs typeface="+mn-cs"/>
+              </a:defRPr>
+            </a:lvl8pPr>
+            <a:lvl9pPr marL="3657600" algn="l" defTabSz="914400" rtl="0" eaLnBrk="1" latinLnBrk="0" hangingPunct="1">
+              <a:defRPr sz="1800" kern="1200">
+                <a:solidFill>
+                  <a:schemeClr val="tx1"/>
+                </a:solidFill>
+                <a:latin typeface="+mn-lt"/>
+                <a:ea typeface="+mn-ea"/>
+                <a:cs typeface="+mn-cs"/>
+              </a:defRPr>
+            </a:lvl9pPr>
+          </a:lstStyle>
+          <a:p>
+            <a:pPr algn="l"/>
+            <a:fld id="{F7021451-1387-4CA6-816F-3879F97B5CBC}" type="slidenum">
+              <a:rPr lang="en-US" smtClean="0">
+                <a:solidFill>
+                  <a:srgbClr val="BEC5E6"/>
+                </a:solidFill>
+              </a:rPr>
+              <a:pPr algn="l"/>
+              <a:t>6</a:t>
+            </a:fld>
+            <a:endParaRPr lang="en-US" dirty="0"/>
           </a:p>
         </p:txBody>
       </p:sp>
@@ -17600,6 +18608,146 @@
           </a:p>
         </p:txBody>
       </p:sp>
+      <p:sp>
+        <p:nvSpPr>
+          <p:cNvPr id="19" name="Slide Number Placeholder 0">
+            <a:extLst>
+              <a:ext uri="{FF2B5EF4-FFF2-40B4-BE49-F238E27FC236}">
+                <a16:creationId xmlns:a16="http://schemas.microsoft.com/office/drawing/2014/main" id="{7566D090-DF0B-5930-31CA-DFF70AA7B212}"/>
+              </a:ext>
+            </a:extLst>
+          </p:cNvPr>
+          <p:cNvSpPr txBox="1">
+            <a:spLocks/>
+          </p:cNvSpPr>
+          <p:nvPr/>
+        </p:nvSpPr>
+        <p:spPr>
+          <a:xfrm>
+            <a:off x="11094720" y="6339840"/>
+            <a:ext cx="609600" cy="365760"/>
+          </a:xfrm>
+          <a:prstGeom prst="rect">
+            <a:avLst/>
+          </a:prstGeom>
+          <a:extLst>
+            <a:ext uri="{C572A759-6A51-4108-AA02-DFA0A04FC94B}">
+              <ma14:wrappingTextBoxFlag xmlns:ma14="http://schemas.microsoft.com/office/mac/drawingml/2011/main" xmlns="" val="0"/>
+            </a:ext>
+          </a:extLst>
+        </p:spPr>
+        <p:txBody>
+          <a:bodyPr vert="horz" lIns="91440" tIns="45720" rIns="91440" bIns="45720" rtlCol="0" anchor="ctr"/>
+          <a:lstStyle>
+            <a:defPPr>
+              <a:defRPr lang="es-CO"/>
+            </a:defPPr>
+            <a:lvl1pPr marL="0" algn="r" defTabSz="914400" rtl="0" eaLnBrk="1" latinLnBrk="0" hangingPunct="1">
+              <a:defRPr sz="1333" kern="1200">
+                <a:solidFill>
+                  <a:schemeClr val="tx1"/>
+                </a:solidFill>
+                <a:latin typeface="+mn-lt"/>
+                <a:ea typeface="+mn-ea"/>
+                <a:cs typeface="+mn-cs"/>
+              </a:defRPr>
+            </a:lvl1pPr>
+            <a:lvl2pPr marL="457200" algn="l" defTabSz="914400" rtl="0" eaLnBrk="1" latinLnBrk="0" hangingPunct="1">
+              <a:defRPr sz="1800" kern="1200">
+                <a:solidFill>
+                  <a:schemeClr val="tx1"/>
+                </a:solidFill>
+                <a:latin typeface="+mn-lt"/>
+                <a:ea typeface="+mn-ea"/>
+                <a:cs typeface="+mn-cs"/>
+              </a:defRPr>
+            </a:lvl2pPr>
+            <a:lvl3pPr marL="914400" algn="l" defTabSz="914400" rtl="0" eaLnBrk="1" latinLnBrk="0" hangingPunct="1">
+              <a:defRPr sz="1800" kern="1200">
+                <a:solidFill>
+                  <a:schemeClr val="tx1"/>
+                </a:solidFill>
+                <a:latin typeface="+mn-lt"/>
+                <a:ea typeface="+mn-ea"/>
+                <a:cs typeface="+mn-cs"/>
+              </a:defRPr>
+            </a:lvl3pPr>
+            <a:lvl4pPr marL="1371600" algn="l" defTabSz="914400" rtl="0" eaLnBrk="1" latinLnBrk="0" hangingPunct="1">
+              <a:defRPr sz="1800" kern="1200">
+                <a:solidFill>
+                  <a:schemeClr val="tx1"/>
+                </a:solidFill>
+                <a:latin typeface="+mn-lt"/>
+                <a:ea typeface="+mn-ea"/>
+                <a:cs typeface="+mn-cs"/>
+              </a:defRPr>
+            </a:lvl4pPr>
+            <a:lvl5pPr marL="1828800" algn="l" defTabSz="914400" rtl="0" eaLnBrk="1" latinLnBrk="0" hangingPunct="1">
+              <a:defRPr sz="1800" kern="1200">
+                <a:solidFill>
+                  <a:schemeClr val="tx1"/>
+                </a:solidFill>
+                <a:latin typeface="+mn-lt"/>
+                <a:ea typeface="+mn-ea"/>
+                <a:cs typeface="+mn-cs"/>
+              </a:defRPr>
+            </a:lvl5pPr>
+            <a:lvl6pPr marL="2286000" algn="l" defTabSz="914400" rtl="0" eaLnBrk="1" latinLnBrk="0" hangingPunct="1">
+              <a:defRPr sz="1800" kern="1200">
+                <a:solidFill>
+                  <a:schemeClr val="tx1"/>
+                </a:solidFill>
+                <a:latin typeface="+mn-lt"/>
+                <a:ea typeface="+mn-ea"/>
+                <a:cs typeface="+mn-cs"/>
+              </a:defRPr>
+            </a:lvl6pPr>
+            <a:lvl7pPr marL="2743200" algn="l" defTabSz="914400" rtl="0" eaLnBrk="1" latinLnBrk="0" hangingPunct="1">
+              <a:defRPr sz="1800" kern="1200">
+                <a:solidFill>
+                  <a:schemeClr val="tx1"/>
+                </a:solidFill>
+                <a:latin typeface="+mn-lt"/>
+                <a:ea typeface="+mn-ea"/>
+                <a:cs typeface="+mn-cs"/>
+              </a:defRPr>
+            </a:lvl7pPr>
+            <a:lvl8pPr marL="3200400" algn="l" defTabSz="914400" rtl="0" eaLnBrk="1" latinLnBrk="0" hangingPunct="1">
+              <a:defRPr sz="1800" kern="1200">
+                <a:solidFill>
+                  <a:schemeClr val="tx1"/>
+                </a:solidFill>
+                <a:latin typeface="+mn-lt"/>
+                <a:ea typeface="+mn-ea"/>
+                <a:cs typeface="+mn-cs"/>
+              </a:defRPr>
+            </a:lvl8pPr>
+            <a:lvl9pPr marL="3657600" algn="l" defTabSz="914400" rtl="0" eaLnBrk="1" latinLnBrk="0" hangingPunct="1">
+              <a:defRPr sz="1800" kern="1200">
+                <a:solidFill>
+                  <a:schemeClr val="tx1"/>
+                </a:solidFill>
+                <a:latin typeface="+mn-lt"/>
+                <a:ea typeface="+mn-ea"/>
+                <a:cs typeface="+mn-cs"/>
+              </a:defRPr>
+            </a:lvl9pPr>
+          </a:lstStyle>
+          <a:p>
+            <a:pPr algn="l"/>
+            <a:fld id="{F7021451-1387-4CA6-816F-3879F97B5CBC}" type="slidenum">
+              <a:rPr lang="en-US" smtClean="0">
+                <a:solidFill>
+                  <a:srgbClr val="BEC5E6"/>
+                </a:solidFill>
+              </a:rPr>
+              <a:pPr algn="l"/>
+              <a:t>7</a:t>
+            </a:fld>
+            <a:endParaRPr lang="en-US" dirty="0"/>
+          </a:p>
+        </p:txBody>
+      </p:sp>
     </p:spTree>
     <p:extLst>
       <p:ext uri="{BB962C8B-B14F-4D97-AF65-F5344CB8AC3E}">
@@ -18463,6 +19611,146 @@
           </a:prstGeom>
         </p:spPr>
       </p:pic>
+      <p:sp>
+        <p:nvSpPr>
+          <p:cNvPr id="4" name="Slide Number Placeholder 0">
+            <a:extLst>
+              <a:ext uri="{FF2B5EF4-FFF2-40B4-BE49-F238E27FC236}">
+                <a16:creationId xmlns:a16="http://schemas.microsoft.com/office/drawing/2014/main" id="{A8AB2E6D-704E-6B64-D423-26F23DF79B06}"/>
+              </a:ext>
+            </a:extLst>
+          </p:cNvPr>
+          <p:cNvSpPr txBox="1">
+            <a:spLocks/>
+          </p:cNvSpPr>
+          <p:nvPr/>
+        </p:nvSpPr>
+        <p:spPr>
+          <a:xfrm>
+            <a:off x="11094720" y="6339840"/>
+            <a:ext cx="609600" cy="365760"/>
+          </a:xfrm>
+          <a:prstGeom prst="rect">
+            <a:avLst/>
+          </a:prstGeom>
+          <a:extLst>
+            <a:ext uri="{C572A759-6A51-4108-AA02-DFA0A04FC94B}">
+              <ma14:wrappingTextBoxFlag xmlns:ma14="http://schemas.microsoft.com/office/mac/drawingml/2011/main" xmlns="" val="0"/>
+            </a:ext>
+          </a:extLst>
+        </p:spPr>
+        <p:txBody>
+          <a:bodyPr vert="horz" lIns="91440" tIns="45720" rIns="91440" bIns="45720" rtlCol="0" anchor="ctr"/>
+          <a:lstStyle>
+            <a:defPPr>
+              <a:defRPr lang="es-CO"/>
+            </a:defPPr>
+            <a:lvl1pPr marL="0" algn="r" defTabSz="914400" rtl="0" eaLnBrk="1" latinLnBrk="0" hangingPunct="1">
+              <a:defRPr sz="1333" kern="1200">
+                <a:solidFill>
+                  <a:schemeClr val="tx1"/>
+                </a:solidFill>
+                <a:latin typeface="+mn-lt"/>
+                <a:ea typeface="+mn-ea"/>
+                <a:cs typeface="+mn-cs"/>
+              </a:defRPr>
+            </a:lvl1pPr>
+            <a:lvl2pPr marL="457200" algn="l" defTabSz="914400" rtl="0" eaLnBrk="1" latinLnBrk="0" hangingPunct="1">
+              <a:defRPr sz="1800" kern="1200">
+                <a:solidFill>
+                  <a:schemeClr val="tx1"/>
+                </a:solidFill>
+                <a:latin typeface="+mn-lt"/>
+                <a:ea typeface="+mn-ea"/>
+                <a:cs typeface="+mn-cs"/>
+              </a:defRPr>
+            </a:lvl2pPr>
+            <a:lvl3pPr marL="914400" algn="l" defTabSz="914400" rtl="0" eaLnBrk="1" latinLnBrk="0" hangingPunct="1">
+              <a:defRPr sz="1800" kern="1200">
+                <a:solidFill>
+                  <a:schemeClr val="tx1"/>
+                </a:solidFill>
+                <a:latin typeface="+mn-lt"/>
+                <a:ea typeface="+mn-ea"/>
+                <a:cs typeface="+mn-cs"/>
+              </a:defRPr>
+            </a:lvl3pPr>
+            <a:lvl4pPr marL="1371600" algn="l" defTabSz="914400" rtl="0" eaLnBrk="1" latinLnBrk="0" hangingPunct="1">
+              <a:defRPr sz="1800" kern="1200">
+                <a:solidFill>
+                  <a:schemeClr val="tx1"/>
+                </a:solidFill>
+                <a:latin typeface="+mn-lt"/>
+                <a:ea typeface="+mn-ea"/>
+                <a:cs typeface="+mn-cs"/>
+              </a:defRPr>
+            </a:lvl4pPr>
+            <a:lvl5pPr marL="1828800" algn="l" defTabSz="914400" rtl="0" eaLnBrk="1" latinLnBrk="0" hangingPunct="1">
+              <a:defRPr sz="1800" kern="1200">
+                <a:solidFill>
+                  <a:schemeClr val="tx1"/>
+                </a:solidFill>
+                <a:latin typeface="+mn-lt"/>
+                <a:ea typeface="+mn-ea"/>
+                <a:cs typeface="+mn-cs"/>
+              </a:defRPr>
+            </a:lvl5pPr>
+            <a:lvl6pPr marL="2286000" algn="l" defTabSz="914400" rtl="0" eaLnBrk="1" latinLnBrk="0" hangingPunct="1">
+              <a:defRPr sz="1800" kern="1200">
+                <a:solidFill>
+                  <a:schemeClr val="tx1"/>
+                </a:solidFill>
+                <a:latin typeface="+mn-lt"/>
+                <a:ea typeface="+mn-ea"/>
+                <a:cs typeface="+mn-cs"/>
+              </a:defRPr>
+            </a:lvl6pPr>
+            <a:lvl7pPr marL="2743200" algn="l" defTabSz="914400" rtl="0" eaLnBrk="1" latinLnBrk="0" hangingPunct="1">
+              <a:defRPr sz="1800" kern="1200">
+                <a:solidFill>
+                  <a:schemeClr val="tx1"/>
+                </a:solidFill>
+                <a:latin typeface="+mn-lt"/>
+                <a:ea typeface="+mn-ea"/>
+                <a:cs typeface="+mn-cs"/>
+              </a:defRPr>
+            </a:lvl7pPr>
+            <a:lvl8pPr marL="3200400" algn="l" defTabSz="914400" rtl="0" eaLnBrk="1" latinLnBrk="0" hangingPunct="1">
+              <a:defRPr sz="1800" kern="1200">
+                <a:solidFill>
+                  <a:schemeClr val="tx1"/>
+                </a:solidFill>
+                <a:latin typeface="+mn-lt"/>
+                <a:ea typeface="+mn-ea"/>
+                <a:cs typeface="+mn-cs"/>
+              </a:defRPr>
+            </a:lvl8pPr>
+            <a:lvl9pPr marL="3657600" algn="l" defTabSz="914400" rtl="0" eaLnBrk="1" latinLnBrk="0" hangingPunct="1">
+              <a:defRPr sz="1800" kern="1200">
+                <a:solidFill>
+                  <a:schemeClr val="tx1"/>
+                </a:solidFill>
+                <a:latin typeface="+mn-lt"/>
+                <a:ea typeface="+mn-ea"/>
+                <a:cs typeface="+mn-cs"/>
+              </a:defRPr>
+            </a:lvl9pPr>
+          </a:lstStyle>
+          <a:p>
+            <a:pPr algn="l"/>
+            <a:fld id="{F7021451-1387-4CA6-816F-3879F97B5CBC}" type="slidenum">
+              <a:rPr lang="en-US" smtClean="0">
+                <a:solidFill>
+                  <a:srgbClr val="BEC5E6"/>
+                </a:solidFill>
+              </a:rPr>
+              <a:pPr algn="l"/>
+              <a:t>8</a:t>
+            </a:fld>
+            <a:endParaRPr lang="en-US" dirty="0"/>
+          </a:p>
+        </p:txBody>
+      </p:sp>
     </p:spTree>
     <p:extLst>
       <p:ext uri="{BB962C8B-B14F-4D97-AF65-F5344CB8AC3E}">
